--- a/presentation/presentation.pptx
+++ b/presentation/presentation.pptx
@@ -2,10 +2,13 @@
 <file path=ppt/presentation.xml><?xml version="1.0" encoding="utf-8"?>
 <p:presentation xmlns:a="http://schemas.openxmlformats.org/drawingml/2006/main" xmlns:r="http://schemas.openxmlformats.org/officeDocument/2006/relationships" xmlns:p="http://schemas.openxmlformats.org/presentationml/2006/main" saveSubsetFonts="1">
   <p:sldMasterIdLst>
-    <p:sldMasterId id="2147483648" r:id="rId1"/>
+    <p:sldMasterId id="2147483672" r:id="rId1"/>
   </p:sldMasterIdLst>
   <p:sldIdLst>
     <p:sldId id="256" r:id="rId2"/>
+    <p:sldId id="257" r:id="rId3"/>
+    <p:sldId id="258" r:id="rId4"/>
+    <p:sldId id="259" r:id="rId5"/>
   </p:sldIdLst>
   <p:sldSz cx="12192000" cy="6858000"/>
   <p:notesSz cx="6858000" cy="9144000"/>
@@ -104,6 +107,11 @@
       </a:defRPr>
     </a:lvl9pPr>
   </p:defaultTextStyle>
+  <p:extLst>
+    <p:ext uri="{EFAFB233-063F-42B5-8137-9DF3F51BA10A}">
+      <p15:sldGuideLst xmlns:p15="http://schemas.microsoft.com/office/powerpoint/2012/main"/>
+    </p:ext>
+  </p:extLst>
 </p:presentation>
 </file>
 
@@ -129,7 +137,7 @@
           <p:cNvPr id="2" name="タイトル 1">
             <a:extLst>
               <a:ext uri="{FF2B5EF4-FFF2-40B4-BE49-F238E27FC236}">
-                <a16:creationId xmlns:a16="http://schemas.microsoft.com/office/drawing/2014/main" id="{11E406C5-12A0-61E3-AB4B-81C8795077ED}"/>
+                <a16:creationId xmlns:a16="http://schemas.microsoft.com/office/drawing/2014/main" id="{1DDAAD0C-A49D-1FE7-EAAB-E6FB64822744}"/>
               </a:ext>
             </a:extLst>
           </p:cNvPr>
@@ -166,7 +174,7 @@
           <p:cNvPr id="3" name="字幕 2">
             <a:extLst>
               <a:ext uri="{FF2B5EF4-FFF2-40B4-BE49-F238E27FC236}">
-                <a16:creationId xmlns:a16="http://schemas.microsoft.com/office/drawing/2014/main" id="{82349195-55B8-D4E1-B798-ABDF9096520D}"/>
+                <a16:creationId xmlns:a16="http://schemas.microsoft.com/office/drawing/2014/main" id="{0C1E901B-8BDA-B86B-F388-AE88EF60BE2A}"/>
               </a:ext>
             </a:extLst>
           </p:cNvPr>
@@ -236,7 +244,7 @@
           <p:cNvPr id="4" name="日付プレースホルダー 3">
             <a:extLst>
               <a:ext uri="{FF2B5EF4-FFF2-40B4-BE49-F238E27FC236}">
-                <a16:creationId xmlns:a16="http://schemas.microsoft.com/office/drawing/2014/main" id="{260A12EF-A33F-D17A-7C76-4F7211E0E1C3}"/>
+                <a16:creationId xmlns:a16="http://schemas.microsoft.com/office/drawing/2014/main" id="{9990B963-D41E-5763-F039-C36BAB1F3FC3}"/>
               </a:ext>
             </a:extLst>
           </p:cNvPr>
@@ -265,7 +273,7 @@
           <p:cNvPr id="5" name="フッター プレースホルダー 4">
             <a:extLst>
               <a:ext uri="{FF2B5EF4-FFF2-40B4-BE49-F238E27FC236}">
-                <a16:creationId xmlns:a16="http://schemas.microsoft.com/office/drawing/2014/main" id="{9C36BEEA-5923-2341-18BF-741E35789F51}"/>
+                <a16:creationId xmlns:a16="http://schemas.microsoft.com/office/drawing/2014/main" id="{D0AF2E01-EEB1-1353-0C33-1853E73156A7}"/>
               </a:ext>
             </a:extLst>
           </p:cNvPr>
@@ -290,7 +298,7 @@
           <p:cNvPr id="6" name="スライド番号プレースホルダー 5">
             <a:extLst>
               <a:ext uri="{FF2B5EF4-FFF2-40B4-BE49-F238E27FC236}">
-                <a16:creationId xmlns:a16="http://schemas.microsoft.com/office/drawing/2014/main" id="{D3695456-F24F-CC8F-054C-F1395BBFD54C}"/>
+                <a16:creationId xmlns:a16="http://schemas.microsoft.com/office/drawing/2014/main" id="{E07E9D7E-C78A-FA85-F5FE-B580ED117BB9}"/>
               </a:ext>
             </a:extLst>
           </p:cNvPr>
@@ -317,7 +325,7 @@
     </p:spTree>
     <p:extLst>
       <p:ext uri="{BB962C8B-B14F-4D97-AF65-F5344CB8AC3E}">
-        <p14:creationId xmlns:p14="http://schemas.microsoft.com/office/powerpoint/2010/main" val="286108263"/>
+        <p14:creationId xmlns:p14="http://schemas.microsoft.com/office/powerpoint/2010/main" val="1422963139"/>
       </p:ext>
     </p:extLst>
   </p:cSld>
@@ -349,7 +357,7 @@
           <p:cNvPr id="2" name="タイトル 1">
             <a:extLst>
               <a:ext uri="{FF2B5EF4-FFF2-40B4-BE49-F238E27FC236}">
-                <a16:creationId xmlns:a16="http://schemas.microsoft.com/office/drawing/2014/main" id="{AE707B89-F6B0-97E3-7B9E-E151E25A1282}"/>
+                <a16:creationId xmlns:a16="http://schemas.microsoft.com/office/drawing/2014/main" id="{434A1DA1-6E36-1C54-45A1-BE6C5728887C}"/>
               </a:ext>
             </a:extLst>
           </p:cNvPr>
@@ -377,7 +385,7 @@
           <p:cNvPr id="3" name="縦書きテキスト プレースホルダー 2">
             <a:extLst>
               <a:ext uri="{FF2B5EF4-FFF2-40B4-BE49-F238E27FC236}">
-                <a16:creationId xmlns:a16="http://schemas.microsoft.com/office/drawing/2014/main" id="{85DADEF1-2CC9-6AB1-1618-FDBDC54C5B9B}"/>
+                <a16:creationId xmlns:a16="http://schemas.microsoft.com/office/drawing/2014/main" id="{15A59C74-B0B2-00F5-EDE6-1A75514CA8E0}"/>
               </a:ext>
             </a:extLst>
           </p:cNvPr>
@@ -466,7 +474,7 @@
           <p:cNvPr id="4" name="日付プレースホルダー 3">
             <a:extLst>
               <a:ext uri="{FF2B5EF4-FFF2-40B4-BE49-F238E27FC236}">
-                <a16:creationId xmlns:a16="http://schemas.microsoft.com/office/drawing/2014/main" id="{5AA38991-1F27-B06E-1848-77C8DA5C4B5B}"/>
+                <a16:creationId xmlns:a16="http://schemas.microsoft.com/office/drawing/2014/main" id="{7B7D9E58-32A6-3058-7900-236D23311710}"/>
               </a:ext>
             </a:extLst>
           </p:cNvPr>
@@ -495,7 +503,7 @@
           <p:cNvPr id="5" name="フッター プレースホルダー 4">
             <a:extLst>
               <a:ext uri="{FF2B5EF4-FFF2-40B4-BE49-F238E27FC236}">
-                <a16:creationId xmlns:a16="http://schemas.microsoft.com/office/drawing/2014/main" id="{41BA8F57-374E-8959-ADA3-4DAFF47C1E9E}"/>
+                <a16:creationId xmlns:a16="http://schemas.microsoft.com/office/drawing/2014/main" id="{080E945E-FCB0-DA4A-B690-04158B81637D}"/>
               </a:ext>
             </a:extLst>
           </p:cNvPr>
@@ -520,7 +528,7 @@
           <p:cNvPr id="6" name="スライド番号プレースホルダー 5">
             <a:extLst>
               <a:ext uri="{FF2B5EF4-FFF2-40B4-BE49-F238E27FC236}">
-                <a16:creationId xmlns:a16="http://schemas.microsoft.com/office/drawing/2014/main" id="{A3F7B081-883F-D42B-F258-7401CDBFE4D1}"/>
+                <a16:creationId xmlns:a16="http://schemas.microsoft.com/office/drawing/2014/main" id="{8D89F78E-3482-31D4-B094-D71847E51DC0}"/>
               </a:ext>
             </a:extLst>
           </p:cNvPr>
@@ -547,7 +555,7 @@
     </p:spTree>
     <p:extLst>
       <p:ext uri="{BB962C8B-B14F-4D97-AF65-F5344CB8AC3E}">
-        <p14:creationId xmlns:p14="http://schemas.microsoft.com/office/powerpoint/2010/main" val="400620542"/>
+        <p14:creationId xmlns:p14="http://schemas.microsoft.com/office/powerpoint/2010/main" val="1649844071"/>
       </p:ext>
     </p:extLst>
   </p:cSld>
@@ -579,7 +587,7 @@
           <p:cNvPr id="2" name="縦書きタイトル 1">
             <a:extLst>
               <a:ext uri="{FF2B5EF4-FFF2-40B4-BE49-F238E27FC236}">
-                <a16:creationId xmlns:a16="http://schemas.microsoft.com/office/drawing/2014/main" id="{DF9105D6-A064-E7FC-BF97-E4852CC4106F}"/>
+                <a16:creationId xmlns:a16="http://schemas.microsoft.com/office/drawing/2014/main" id="{1842747D-DC02-0A8B-C588-A28D93C28BD9}"/>
               </a:ext>
             </a:extLst>
           </p:cNvPr>
@@ -612,7 +620,7 @@
           <p:cNvPr id="3" name="縦書きテキスト プレースホルダー 2">
             <a:extLst>
               <a:ext uri="{FF2B5EF4-FFF2-40B4-BE49-F238E27FC236}">
-                <a16:creationId xmlns:a16="http://schemas.microsoft.com/office/drawing/2014/main" id="{8C2EE3AD-DC50-9CAF-7DDF-07DB8A6AA701}"/>
+                <a16:creationId xmlns:a16="http://schemas.microsoft.com/office/drawing/2014/main" id="{6BF68CC5-35A9-C336-6F5D-70CD51157129}"/>
               </a:ext>
             </a:extLst>
           </p:cNvPr>
@@ -706,7 +714,7 @@
           <p:cNvPr id="4" name="日付プレースホルダー 3">
             <a:extLst>
               <a:ext uri="{FF2B5EF4-FFF2-40B4-BE49-F238E27FC236}">
-                <a16:creationId xmlns:a16="http://schemas.microsoft.com/office/drawing/2014/main" id="{C0912FE2-4530-E163-529A-234659BA83A1}"/>
+                <a16:creationId xmlns:a16="http://schemas.microsoft.com/office/drawing/2014/main" id="{00D3EE32-621E-64F3-0E7E-93C1650587C6}"/>
               </a:ext>
             </a:extLst>
           </p:cNvPr>
@@ -735,7 +743,7 @@
           <p:cNvPr id="5" name="フッター プレースホルダー 4">
             <a:extLst>
               <a:ext uri="{FF2B5EF4-FFF2-40B4-BE49-F238E27FC236}">
-                <a16:creationId xmlns:a16="http://schemas.microsoft.com/office/drawing/2014/main" id="{32909771-53EB-2C63-2190-FA1419261828}"/>
+                <a16:creationId xmlns:a16="http://schemas.microsoft.com/office/drawing/2014/main" id="{1774AC09-EE3E-6BE9-AE30-FC30F355D660}"/>
               </a:ext>
             </a:extLst>
           </p:cNvPr>
@@ -760,7 +768,7 @@
           <p:cNvPr id="6" name="スライド番号プレースホルダー 5">
             <a:extLst>
               <a:ext uri="{FF2B5EF4-FFF2-40B4-BE49-F238E27FC236}">
-                <a16:creationId xmlns:a16="http://schemas.microsoft.com/office/drawing/2014/main" id="{001E0B0B-C02B-2073-510B-1F726DD84E9D}"/>
+                <a16:creationId xmlns:a16="http://schemas.microsoft.com/office/drawing/2014/main" id="{7AA361E3-EA22-F4C7-A349-A6E87D309938}"/>
               </a:ext>
             </a:extLst>
           </p:cNvPr>
@@ -787,7 +795,7 @@
     </p:spTree>
     <p:extLst>
       <p:ext uri="{BB962C8B-B14F-4D97-AF65-F5344CB8AC3E}">
-        <p14:creationId xmlns:p14="http://schemas.microsoft.com/office/powerpoint/2010/main" val="1028230244"/>
+        <p14:creationId xmlns:p14="http://schemas.microsoft.com/office/powerpoint/2010/main" val="412610350"/>
       </p:ext>
     </p:extLst>
   </p:cSld>
@@ -819,7 +827,7 @@
           <p:cNvPr id="2" name="タイトル 1">
             <a:extLst>
               <a:ext uri="{FF2B5EF4-FFF2-40B4-BE49-F238E27FC236}">
-                <a16:creationId xmlns:a16="http://schemas.microsoft.com/office/drawing/2014/main" id="{4008AED4-C60E-AE5A-591F-EAE012F55690}"/>
+                <a16:creationId xmlns:a16="http://schemas.microsoft.com/office/drawing/2014/main" id="{E49BA539-AC2F-4AF6-3B23-900ED3A1791D}"/>
               </a:ext>
             </a:extLst>
           </p:cNvPr>
@@ -847,7 +855,7 @@
           <p:cNvPr id="3" name="コンテンツ プレースホルダー 2">
             <a:extLst>
               <a:ext uri="{FF2B5EF4-FFF2-40B4-BE49-F238E27FC236}">
-                <a16:creationId xmlns:a16="http://schemas.microsoft.com/office/drawing/2014/main" id="{BB555756-1CE6-70D5-8DA9-7DB56C2A7E8A}"/>
+                <a16:creationId xmlns:a16="http://schemas.microsoft.com/office/drawing/2014/main" id="{5ABB814C-91DB-1D20-063F-9E9D0928D2EE}"/>
               </a:ext>
             </a:extLst>
           </p:cNvPr>
@@ -936,7 +944,7 @@
           <p:cNvPr id="4" name="日付プレースホルダー 3">
             <a:extLst>
               <a:ext uri="{FF2B5EF4-FFF2-40B4-BE49-F238E27FC236}">
-                <a16:creationId xmlns:a16="http://schemas.microsoft.com/office/drawing/2014/main" id="{8E0A36C3-00EF-319E-1D60-F4F10A2FCFBA}"/>
+                <a16:creationId xmlns:a16="http://schemas.microsoft.com/office/drawing/2014/main" id="{796DAC9A-EE9B-F242-1224-0A4D19A5F7E2}"/>
               </a:ext>
             </a:extLst>
           </p:cNvPr>
@@ -965,7 +973,7 @@
           <p:cNvPr id="5" name="フッター プレースホルダー 4">
             <a:extLst>
               <a:ext uri="{FF2B5EF4-FFF2-40B4-BE49-F238E27FC236}">
-                <a16:creationId xmlns:a16="http://schemas.microsoft.com/office/drawing/2014/main" id="{A8E0CDDF-A0DF-1FDD-468E-8E9586D9B854}"/>
+                <a16:creationId xmlns:a16="http://schemas.microsoft.com/office/drawing/2014/main" id="{C9D4A916-A02F-3053-9425-4987064867C9}"/>
               </a:ext>
             </a:extLst>
           </p:cNvPr>
@@ -990,7 +998,7 @@
           <p:cNvPr id="6" name="スライド番号プレースホルダー 5">
             <a:extLst>
               <a:ext uri="{FF2B5EF4-FFF2-40B4-BE49-F238E27FC236}">
-                <a16:creationId xmlns:a16="http://schemas.microsoft.com/office/drawing/2014/main" id="{4E677BAF-AEF4-54E1-CDB6-CEBC528CD2D3}"/>
+                <a16:creationId xmlns:a16="http://schemas.microsoft.com/office/drawing/2014/main" id="{E8DE8183-5941-9F58-860D-B1CF68C19800}"/>
               </a:ext>
             </a:extLst>
           </p:cNvPr>
@@ -1017,7 +1025,7 @@
     </p:spTree>
     <p:extLst>
       <p:ext uri="{BB962C8B-B14F-4D97-AF65-F5344CB8AC3E}">
-        <p14:creationId xmlns:p14="http://schemas.microsoft.com/office/powerpoint/2010/main" val="1944438697"/>
+        <p14:creationId xmlns:p14="http://schemas.microsoft.com/office/powerpoint/2010/main" val="2239984244"/>
       </p:ext>
     </p:extLst>
   </p:cSld>
@@ -1049,7 +1057,7 @@
           <p:cNvPr id="2" name="タイトル 1">
             <a:extLst>
               <a:ext uri="{FF2B5EF4-FFF2-40B4-BE49-F238E27FC236}">
-                <a16:creationId xmlns:a16="http://schemas.microsoft.com/office/drawing/2014/main" id="{F24A54EA-1329-5597-8D84-23BDB8909F3C}"/>
+                <a16:creationId xmlns:a16="http://schemas.microsoft.com/office/drawing/2014/main" id="{85497BC5-9746-D343-29FB-8FE9F91E66CE}"/>
               </a:ext>
             </a:extLst>
           </p:cNvPr>
@@ -1086,7 +1094,7 @@
           <p:cNvPr id="3" name="テキスト プレースホルダー 2">
             <a:extLst>
               <a:ext uri="{FF2B5EF4-FFF2-40B4-BE49-F238E27FC236}">
-                <a16:creationId xmlns:a16="http://schemas.microsoft.com/office/drawing/2014/main" id="{AF249CC7-91E3-3D82-3B51-37D5C7C5CE21}"/>
+                <a16:creationId xmlns:a16="http://schemas.microsoft.com/office/drawing/2014/main" id="{AA73E76F-E143-CDFB-ACBC-D9FDBA9CD328}"/>
               </a:ext>
             </a:extLst>
           </p:cNvPr>
@@ -1211,7 +1219,7 @@
           <p:cNvPr id="4" name="日付プレースホルダー 3">
             <a:extLst>
               <a:ext uri="{FF2B5EF4-FFF2-40B4-BE49-F238E27FC236}">
-                <a16:creationId xmlns:a16="http://schemas.microsoft.com/office/drawing/2014/main" id="{B11F62EA-B8CC-7CEE-3143-F319CF7D0C9C}"/>
+                <a16:creationId xmlns:a16="http://schemas.microsoft.com/office/drawing/2014/main" id="{D40ACB4A-5146-98E4-6FCE-6BB981D486A5}"/>
               </a:ext>
             </a:extLst>
           </p:cNvPr>
@@ -1240,7 +1248,7 @@
           <p:cNvPr id="5" name="フッター プレースホルダー 4">
             <a:extLst>
               <a:ext uri="{FF2B5EF4-FFF2-40B4-BE49-F238E27FC236}">
-                <a16:creationId xmlns:a16="http://schemas.microsoft.com/office/drawing/2014/main" id="{FBEFB54F-ED79-7C45-8D9C-0AACF2DC88C3}"/>
+                <a16:creationId xmlns:a16="http://schemas.microsoft.com/office/drawing/2014/main" id="{26004531-E432-0158-2D7B-7CDB8085FAA9}"/>
               </a:ext>
             </a:extLst>
           </p:cNvPr>
@@ -1265,7 +1273,7 @@
           <p:cNvPr id="6" name="スライド番号プレースホルダー 5">
             <a:extLst>
               <a:ext uri="{FF2B5EF4-FFF2-40B4-BE49-F238E27FC236}">
-                <a16:creationId xmlns:a16="http://schemas.microsoft.com/office/drawing/2014/main" id="{A1674028-ADDF-EE98-6CED-A8E905B94D64}"/>
+                <a16:creationId xmlns:a16="http://schemas.microsoft.com/office/drawing/2014/main" id="{22617B4F-D0A0-4B07-B826-5514297278F4}"/>
               </a:ext>
             </a:extLst>
           </p:cNvPr>
@@ -1292,7 +1300,7 @@
     </p:spTree>
     <p:extLst>
       <p:ext uri="{BB962C8B-B14F-4D97-AF65-F5344CB8AC3E}">
-        <p14:creationId xmlns:p14="http://schemas.microsoft.com/office/powerpoint/2010/main" val="599053333"/>
+        <p14:creationId xmlns:p14="http://schemas.microsoft.com/office/powerpoint/2010/main" val="4067856969"/>
       </p:ext>
     </p:extLst>
   </p:cSld>
@@ -1324,7 +1332,7 @@
           <p:cNvPr id="2" name="タイトル 1">
             <a:extLst>
               <a:ext uri="{FF2B5EF4-FFF2-40B4-BE49-F238E27FC236}">
-                <a16:creationId xmlns:a16="http://schemas.microsoft.com/office/drawing/2014/main" id="{69D26B68-8C74-70D5-D4F4-B0BF1AFC22B8}"/>
+                <a16:creationId xmlns:a16="http://schemas.microsoft.com/office/drawing/2014/main" id="{E007D1B5-8DCF-E703-AF52-B7B98147D273}"/>
               </a:ext>
             </a:extLst>
           </p:cNvPr>
@@ -1352,7 +1360,7 @@
           <p:cNvPr id="3" name="コンテンツ プレースホルダー 2">
             <a:extLst>
               <a:ext uri="{FF2B5EF4-FFF2-40B4-BE49-F238E27FC236}">
-                <a16:creationId xmlns:a16="http://schemas.microsoft.com/office/drawing/2014/main" id="{F5BB4E81-AED7-8CBE-9023-76AE3603E886}"/>
+                <a16:creationId xmlns:a16="http://schemas.microsoft.com/office/drawing/2014/main" id="{51F7E3C7-140C-04FD-7E48-B7CEA73FE72C}"/>
               </a:ext>
             </a:extLst>
           </p:cNvPr>
@@ -1446,7 +1454,7 @@
           <p:cNvPr id="4" name="コンテンツ プレースホルダー 3">
             <a:extLst>
               <a:ext uri="{FF2B5EF4-FFF2-40B4-BE49-F238E27FC236}">
-                <a16:creationId xmlns:a16="http://schemas.microsoft.com/office/drawing/2014/main" id="{21C55DEF-581F-FCD8-771B-F4727CF7CBF8}"/>
+                <a16:creationId xmlns:a16="http://schemas.microsoft.com/office/drawing/2014/main" id="{77B8C59E-C117-0310-96ED-44259E2A9B8D}"/>
               </a:ext>
             </a:extLst>
           </p:cNvPr>
@@ -1540,7 +1548,7 @@
           <p:cNvPr id="5" name="日付プレースホルダー 4">
             <a:extLst>
               <a:ext uri="{FF2B5EF4-FFF2-40B4-BE49-F238E27FC236}">
-                <a16:creationId xmlns:a16="http://schemas.microsoft.com/office/drawing/2014/main" id="{55AAEA50-B3AA-D191-DFBE-CDD0919A2722}"/>
+                <a16:creationId xmlns:a16="http://schemas.microsoft.com/office/drawing/2014/main" id="{313AB5B8-5B1D-BA9C-7BCB-6D6E0D758652}"/>
               </a:ext>
             </a:extLst>
           </p:cNvPr>
@@ -1569,7 +1577,7 @@
           <p:cNvPr id="6" name="フッター プレースホルダー 5">
             <a:extLst>
               <a:ext uri="{FF2B5EF4-FFF2-40B4-BE49-F238E27FC236}">
-                <a16:creationId xmlns:a16="http://schemas.microsoft.com/office/drawing/2014/main" id="{22E24D86-2C60-0D5D-8C65-9E5B415D4896}"/>
+                <a16:creationId xmlns:a16="http://schemas.microsoft.com/office/drawing/2014/main" id="{2A0ADEDC-4A89-A2D6-19D0-2B3E2347449B}"/>
               </a:ext>
             </a:extLst>
           </p:cNvPr>
@@ -1594,7 +1602,7 @@
           <p:cNvPr id="7" name="スライド番号プレースホルダー 6">
             <a:extLst>
               <a:ext uri="{FF2B5EF4-FFF2-40B4-BE49-F238E27FC236}">
-                <a16:creationId xmlns:a16="http://schemas.microsoft.com/office/drawing/2014/main" id="{9195BD03-779A-1B7F-4470-01771ADFB82E}"/>
+                <a16:creationId xmlns:a16="http://schemas.microsoft.com/office/drawing/2014/main" id="{F2AE9F12-EA9D-6245-88F7-81775E1333DE}"/>
               </a:ext>
             </a:extLst>
           </p:cNvPr>
@@ -1621,7 +1629,7 @@
     </p:spTree>
     <p:extLst>
       <p:ext uri="{BB962C8B-B14F-4D97-AF65-F5344CB8AC3E}">
-        <p14:creationId xmlns:p14="http://schemas.microsoft.com/office/powerpoint/2010/main" val="1936538903"/>
+        <p14:creationId xmlns:p14="http://schemas.microsoft.com/office/powerpoint/2010/main" val="1435565429"/>
       </p:ext>
     </p:extLst>
   </p:cSld>
@@ -1653,7 +1661,7 @@
           <p:cNvPr id="2" name="タイトル 1">
             <a:extLst>
               <a:ext uri="{FF2B5EF4-FFF2-40B4-BE49-F238E27FC236}">
-                <a16:creationId xmlns:a16="http://schemas.microsoft.com/office/drawing/2014/main" id="{A7B53AAF-3CFB-FBB8-88AA-F331C7062B5C}"/>
+                <a16:creationId xmlns:a16="http://schemas.microsoft.com/office/drawing/2014/main" id="{9B2C2349-4FC0-17E5-7F2A-7FDB658CABFD}"/>
               </a:ext>
             </a:extLst>
           </p:cNvPr>
@@ -1686,7 +1694,7 @@
           <p:cNvPr id="3" name="テキスト プレースホルダー 2">
             <a:extLst>
               <a:ext uri="{FF2B5EF4-FFF2-40B4-BE49-F238E27FC236}">
-                <a16:creationId xmlns:a16="http://schemas.microsoft.com/office/drawing/2014/main" id="{08C67285-6A65-7ADC-F232-2CDB5BD95B42}"/>
+                <a16:creationId xmlns:a16="http://schemas.microsoft.com/office/drawing/2014/main" id="{DC14E95C-4F07-4983-276F-508EAF6504BB}"/>
               </a:ext>
             </a:extLst>
           </p:cNvPr>
@@ -1757,7 +1765,7 @@
           <p:cNvPr id="4" name="コンテンツ プレースホルダー 3">
             <a:extLst>
               <a:ext uri="{FF2B5EF4-FFF2-40B4-BE49-F238E27FC236}">
-                <a16:creationId xmlns:a16="http://schemas.microsoft.com/office/drawing/2014/main" id="{EF37AE01-EE54-747B-55FE-3427423F4D22}"/>
+                <a16:creationId xmlns:a16="http://schemas.microsoft.com/office/drawing/2014/main" id="{AD8F911A-48AF-924A-8AC8-684668454758}"/>
               </a:ext>
             </a:extLst>
           </p:cNvPr>
@@ -1851,7 +1859,7 @@
           <p:cNvPr id="5" name="テキスト プレースホルダー 4">
             <a:extLst>
               <a:ext uri="{FF2B5EF4-FFF2-40B4-BE49-F238E27FC236}">
-                <a16:creationId xmlns:a16="http://schemas.microsoft.com/office/drawing/2014/main" id="{86AF11A3-E65F-E7F0-663F-7D76AE44AA48}"/>
+                <a16:creationId xmlns:a16="http://schemas.microsoft.com/office/drawing/2014/main" id="{98EBA638-395B-5DCC-9DF4-E861B9DA3A31}"/>
               </a:ext>
             </a:extLst>
           </p:cNvPr>
@@ -1922,7 +1930,7 @@
           <p:cNvPr id="6" name="コンテンツ プレースホルダー 5">
             <a:extLst>
               <a:ext uri="{FF2B5EF4-FFF2-40B4-BE49-F238E27FC236}">
-                <a16:creationId xmlns:a16="http://schemas.microsoft.com/office/drawing/2014/main" id="{4C7342EC-A745-FCC9-ECA5-A74518FB546F}"/>
+                <a16:creationId xmlns:a16="http://schemas.microsoft.com/office/drawing/2014/main" id="{95F13BE0-3D1C-D85B-12B1-55692FCC79F4}"/>
               </a:ext>
             </a:extLst>
           </p:cNvPr>
@@ -2016,7 +2024,7 @@
           <p:cNvPr id="7" name="日付プレースホルダー 6">
             <a:extLst>
               <a:ext uri="{FF2B5EF4-FFF2-40B4-BE49-F238E27FC236}">
-                <a16:creationId xmlns:a16="http://schemas.microsoft.com/office/drawing/2014/main" id="{B9E3FCDA-8A4F-02AD-EFF0-3C7C2FF96C1D}"/>
+                <a16:creationId xmlns:a16="http://schemas.microsoft.com/office/drawing/2014/main" id="{8C5A12C6-6C04-F9D4-0787-ADEF0B5FC6DA}"/>
               </a:ext>
             </a:extLst>
           </p:cNvPr>
@@ -2045,7 +2053,7 @@
           <p:cNvPr id="8" name="フッター プレースホルダー 7">
             <a:extLst>
               <a:ext uri="{FF2B5EF4-FFF2-40B4-BE49-F238E27FC236}">
-                <a16:creationId xmlns:a16="http://schemas.microsoft.com/office/drawing/2014/main" id="{036C852A-5094-34E5-E90F-BF98D77E489D}"/>
+                <a16:creationId xmlns:a16="http://schemas.microsoft.com/office/drawing/2014/main" id="{0495E5A2-BBCA-C651-E1EA-1A64E25FEB79}"/>
               </a:ext>
             </a:extLst>
           </p:cNvPr>
@@ -2070,7 +2078,7 @@
           <p:cNvPr id="9" name="スライド番号プレースホルダー 8">
             <a:extLst>
               <a:ext uri="{FF2B5EF4-FFF2-40B4-BE49-F238E27FC236}">
-                <a16:creationId xmlns:a16="http://schemas.microsoft.com/office/drawing/2014/main" id="{189BD831-7C55-9032-A2DF-997F333318DA}"/>
+                <a16:creationId xmlns:a16="http://schemas.microsoft.com/office/drawing/2014/main" id="{4E5513F5-A095-FEF9-9A5C-897CCC1AC755}"/>
               </a:ext>
             </a:extLst>
           </p:cNvPr>
@@ -2097,7 +2105,7 @@
     </p:spTree>
     <p:extLst>
       <p:ext uri="{BB962C8B-B14F-4D97-AF65-F5344CB8AC3E}">
-        <p14:creationId xmlns:p14="http://schemas.microsoft.com/office/powerpoint/2010/main" val="3717653349"/>
+        <p14:creationId xmlns:p14="http://schemas.microsoft.com/office/powerpoint/2010/main" val="3984618760"/>
       </p:ext>
     </p:extLst>
   </p:cSld>
@@ -2129,7 +2137,7 @@
           <p:cNvPr id="2" name="タイトル 1">
             <a:extLst>
               <a:ext uri="{FF2B5EF4-FFF2-40B4-BE49-F238E27FC236}">
-                <a16:creationId xmlns:a16="http://schemas.microsoft.com/office/drawing/2014/main" id="{9C2FF860-99EF-C289-3A84-FB873D3C388C}"/>
+                <a16:creationId xmlns:a16="http://schemas.microsoft.com/office/drawing/2014/main" id="{56F97B5B-5E06-0A64-F87A-5EC805072380}"/>
               </a:ext>
             </a:extLst>
           </p:cNvPr>
@@ -2157,7 +2165,7 @@
           <p:cNvPr id="3" name="日付プレースホルダー 2">
             <a:extLst>
               <a:ext uri="{FF2B5EF4-FFF2-40B4-BE49-F238E27FC236}">
-                <a16:creationId xmlns:a16="http://schemas.microsoft.com/office/drawing/2014/main" id="{44461971-2151-F952-C8FC-175382F87A58}"/>
+                <a16:creationId xmlns:a16="http://schemas.microsoft.com/office/drawing/2014/main" id="{867A742C-4270-D6FF-1BC3-AEAA219D510D}"/>
               </a:ext>
             </a:extLst>
           </p:cNvPr>
@@ -2186,7 +2194,7 @@
           <p:cNvPr id="4" name="フッター プレースホルダー 3">
             <a:extLst>
               <a:ext uri="{FF2B5EF4-FFF2-40B4-BE49-F238E27FC236}">
-                <a16:creationId xmlns:a16="http://schemas.microsoft.com/office/drawing/2014/main" id="{C783C3D3-F2EB-220C-B900-4409AF9FEF97}"/>
+                <a16:creationId xmlns:a16="http://schemas.microsoft.com/office/drawing/2014/main" id="{6A4BE4E0-0F7A-9E44-D7A5-6EDA92E3CBE4}"/>
               </a:ext>
             </a:extLst>
           </p:cNvPr>
@@ -2211,7 +2219,7 @@
           <p:cNvPr id="5" name="スライド番号プレースホルダー 4">
             <a:extLst>
               <a:ext uri="{FF2B5EF4-FFF2-40B4-BE49-F238E27FC236}">
-                <a16:creationId xmlns:a16="http://schemas.microsoft.com/office/drawing/2014/main" id="{3C1B2FE9-A501-2205-8946-44BE40DFFDE9}"/>
+                <a16:creationId xmlns:a16="http://schemas.microsoft.com/office/drawing/2014/main" id="{F709ADD2-2424-7955-2BAD-25024DA04731}"/>
               </a:ext>
             </a:extLst>
           </p:cNvPr>
@@ -2238,7 +2246,7 @@
     </p:spTree>
     <p:extLst>
       <p:ext uri="{BB962C8B-B14F-4D97-AF65-F5344CB8AC3E}">
-        <p14:creationId xmlns:p14="http://schemas.microsoft.com/office/powerpoint/2010/main" val="1672001911"/>
+        <p14:creationId xmlns:p14="http://schemas.microsoft.com/office/powerpoint/2010/main" val="4241255633"/>
       </p:ext>
     </p:extLst>
   </p:cSld>
@@ -2270,7 +2278,7 @@
           <p:cNvPr id="2" name="日付プレースホルダー 1">
             <a:extLst>
               <a:ext uri="{FF2B5EF4-FFF2-40B4-BE49-F238E27FC236}">
-                <a16:creationId xmlns:a16="http://schemas.microsoft.com/office/drawing/2014/main" id="{3C6DC02B-A1F8-2FC2-FF99-3F9E4E00D890}"/>
+                <a16:creationId xmlns:a16="http://schemas.microsoft.com/office/drawing/2014/main" id="{40A5B46B-ABD5-25B9-8DED-F96FB249FBDC}"/>
               </a:ext>
             </a:extLst>
           </p:cNvPr>
@@ -2299,7 +2307,7 @@
           <p:cNvPr id="3" name="フッター プレースホルダー 2">
             <a:extLst>
               <a:ext uri="{FF2B5EF4-FFF2-40B4-BE49-F238E27FC236}">
-                <a16:creationId xmlns:a16="http://schemas.microsoft.com/office/drawing/2014/main" id="{13CDFFC3-6F6C-CC63-3F9E-E7601321E394}"/>
+                <a16:creationId xmlns:a16="http://schemas.microsoft.com/office/drawing/2014/main" id="{69823F4B-2E81-4127-F7CC-1EF1F75D458F}"/>
               </a:ext>
             </a:extLst>
           </p:cNvPr>
@@ -2324,7 +2332,7 @@
           <p:cNvPr id="4" name="スライド番号プレースホルダー 3">
             <a:extLst>
               <a:ext uri="{FF2B5EF4-FFF2-40B4-BE49-F238E27FC236}">
-                <a16:creationId xmlns:a16="http://schemas.microsoft.com/office/drawing/2014/main" id="{0EE295F8-B8CC-BA65-85B8-43716819D447}"/>
+                <a16:creationId xmlns:a16="http://schemas.microsoft.com/office/drawing/2014/main" id="{8D9451CD-DE22-2634-FF7E-6A5B54543493}"/>
               </a:ext>
             </a:extLst>
           </p:cNvPr>
@@ -2351,7 +2359,7 @@
     </p:spTree>
     <p:extLst>
       <p:ext uri="{BB962C8B-B14F-4D97-AF65-F5344CB8AC3E}">
-        <p14:creationId xmlns:p14="http://schemas.microsoft.com/office/powerpoint/2010/main" val="2351197814"/>
+        <p14:creationId xmlns:p14="http://schemas.microsoft.com/office/powerpoint/2010/main" val="530002465"/>
       </p:ext>
     </p:extLst>
   </p:cSld>
@@ -2383,7 +2391,7 @@
           <p:cNvPr id="2" name="タイトル 1">
             <a:extLst>
               <a:ext uri="{FF2B5EF4-FFF2-40B4-BE49-F238E27FC236}">
-                <a16:creationId xmlns:a16="http://schemas.microsoft.com/office/drawing/2014/main" id="{F914FD6B-B687-4DE0-E3D4-2919884DE50F}"/>
+                <a16:creationId xmlns:a16="http://schemas.microsoft.com/office/drawing/2014/main" id="{E4EA6F53-CB55-D6B1-0D8E-6E3975D1BCED}"/>
               </a:ext>
             </a:extLst>
           </p:cNvPr>
@@ -2420,7 +2428,7 @@
           <p:cNvPr id="3" name="コンテンツ プレースホルダー 2">
             <a:extLst>
               <a:ext uri="{FF2B5EF4-FFF2-40B4-BE49-F238E27FC236}">
-                <a16:creationId xmlns:a16="http://schemas.microsoft.com/office/drawing/2014/main" id="{21C9C170-AAFF-7EAB-6418-67C9C8108BC4}"/>
+                <a16:creationId xmlns:a16="http://schemas.microsoft.com/office/drawing/2014/main" id="{D148BE8A-0FCE-DF15-BAA3-5E791A705728}"/>
               </a:ext>
             </a:extLst>
           </p:cNvPr>
@@ -2542,7 +2550,7 @@
           <p:cNvPr id="4" name="テキスト プレースホルダー 3">
             <a:extLst>
               <a:ext uri="{FF2B5EF4-FFF2-40B4-BE49-F238E27FC236}">
-                <a16:creationId xmlns:a16="http://schemas.microsoft.com/office/drawing/2014/main" id="{79F6B35B-F257-B485-D3A1-BE1F7736DDCD}"/>
+                <a16:creationId xmlns:a16="http://schemas.microsoft.com/office/drawing/2014/main" id="{44970655-B62F-A566-BAD5-BD1583E03DA0}"/>
               </a:ext>
             </a:extLst>
           </p:cNvPr>
@@ -2613,7 +2621,7 @@
           <p:cNvPr id="5" name="日付プレースホルダー 4">
             <a:extLst>
               <a:ext uri="{FF2B5EF4-FFF2-40B4-BE49-F238E27FC236}">
-                <a16:creationId xmlns:a16="http://schemas.microsoft.com/office/drawing/2014/main" id="{CCE62A2D-C483-C050-8C57-C50BD6EDD826}"/>
+                <a16:creationId xmlns:a16="http://schemas.microsoft.com/office/drawing/2014/main" id="{EE3851B6-F9D9-4E08-A23C-75FE5F7FFD2F}"/>
               </a:ext>
             </a:extLst>
           </p:cNvPr>
@@ -2642,7 +2650,7 @@
           <p:cNvPr id="6" name="フッター プレースホルダー 5">
             <a:extLst>
               <a:ext uri="{FF2B5EF4-FFF2-40B4-BE49-F238E27FC236}">
-                <a16:creationId xmlns:a16="http://schemas.microsoft.com/office/drawing/2014/main" id="{564BAF52-103B-EEAF-0813-3DE389E98896}"/>
+                <a16:creationId xmlns:a16="http://schemas.microsoft.com/office/drawing/2014/main" id="{145918CE-6122-16AC-3881-4D3AF78764B6}"/>
               </a:ext>
             </a:extLst>
           </p:cNvPr>
@@ -2667,7 +2675,7 @@
           <p:cNvPr id="7" name="スライド番号プレースホルダー 6">
             <a:extLst>
               <a:ext uri="{FF2B5EF4-FFF2-40B4-BE49-F238E27FC236}">
-                <a16:creationId xmlns:a16="http://schemas.microsoft.com/office/drawing/2014/main" id="{2A15A72C-9B4D-C288-B786-14368D1D4E3B}"/>
+                <a16:creationId xmlns:a16="http://schemas.microsoft.com/office/drawing/2014/main" id="{CEB553C8-30A5-D0D4-AB88-EC56F843C318}"/>
               </a:ext>
             </a:extLst>
           </p:cNvPr>
@@ -2694,7 +2702,7 @@
     </p:spTree>
     <p:extLst>
       <p:ext uri="{BB962C8B-B14F-4D97-AF65-F5344CB8AC3E}">
-        <p14:creationId xmlns:p14="http://schemas.microsoft.com/office/powerpoint/2010/main" val="4259014421"/>
+        <p14:creationId xmlns:p14="http://schemas.microsoft.com/office/powerpoint/2010/main" val="2558748360"/>
       </p:ext>
     </p:extLst>
   </p:cSld>
@@ -2726,7 +2734,7 @@
           <p:cNvPr id="2" name="タイトル 1">
             <a:extLst>
               <a:ext uri="{FF2B5EF4-FFF2-40B4-BE49-F238E27FC236}">
-                <a16:creationId xmlns:a16="http://schemas.microsoft.com/office/drawing/2014/main" id="{DE22D9F6-545B-E4A3-591B-4E28C7AE2FAF}"/>
+                <a16:creationId xmlns:a16="http://schemas.microsoft.com/office/drawing/2014/main" id="{11D953DB-50D3-8317-9523-86624C77928D}"/>
               </a:ext>
             </a:extLst>
           </p:cNvPr>
@@ -2763,7 +2771,7 @@
           <p:cNvPr id="3" name="図プレースホルダー 2">
             <a:extLst>
               <a:ext uri="{FF2B5EF4-FFF2-40B4-BE49-F238E27FC236}">
-                <a16:creationId xmlns:a16="http://schemas.microsoft.com/office/drawing/2014/main" id="{369D6F80-6B81-6F1E-0412-11AA53028EE0}"/>
+                <a16:creationId xmlns:a16="http://schemas.microsoft.com/office/drawing/2014/main" id="{2E894D77-FA56-68A4-B197-BF56D1EBA87D}"/>
               </a:ext>
             </a:extLst>
           </p:cNvPr>
@@ -2830,7 +2838,7 @@
           <p:cNvPr id="4" name="テキスト プレースホルダー 3">
             <a:extLst>
               <a:ext uri="{FF2B5EF4-FFF2-40B4-BE49-F238E27FC236}">
-                <a16:creationId xmlns:a16="http://schemas.microsoft.com/office/drawing/2014/main" id="{C4567F9C-2BCC-838E-B8C8-6F88BE7CD4B4}"/>
+                <a16:creationId xmlns:a16="http://schemas.microsoft.com/office/drawing/2014/main" id="{6AC8E24F-BC14-87DA-DFB6-6D44A8DEC300}"/>
               </a:ext>
             </a:extLst>
           </p:cNvPr>
@@ -2901,7 +2909,7 @@
           <p:cNvPr id="5" name="日付プレースホルダー 4">
             <a:extLst>
               <a:ext uri="{FF2B5EF4-FFF2-40B4-BE49-F238E27FC236}">
-                <a16:creationId xmlns:a16="http://schemas.microsoft.com/office/drawing/2014/main" id="{7D0A686B-92EF-1666-52B9-7DEFFE283363}"/>
+                <a16:creationId xmlns:a16="http://schemas.microsoft.com/office/drawing/2014/main" id="{ADD7FC2D-F17C-89A6-1076-D7D96E1DC2EE}"/>
               </a:ext>
             </a:extLst>
           </p:cNvPr>
@@ -2930,7 +2938,7 @@
           <p:cNvPr id="6" name="フッター プレースホルダー 5">
             <a:extLst>
               <a:ext uri="{FF2B5EF4-FFF2-40B4-BE49-F238E27FC236}">
-                <a16:creationId xmlns:a16="http://schemas.microsoft.com/office/drawing/2014/main" id="{3860598E-9388-779B-A7DD-5E8BEB26638B}"/>
+                <a16:creationId xmlns:a16="http://schemas.microsoft.com/office/drawing/2014/main" id="{B6FBFEB0-21F7-6184-FA41-37F843D7ECE1}"/>
               </a:ext>
             </a:extLst>
           </p:cNvPr>
@@ -2955,7 +2963,7 @@
           <p:cNvPr id="7" name="スライド番号プレースホルダー 6">
             <a:extLst>
               <a:ext uri="{FF2B5EF4-FFF2-40B4-BE49-F238E27FC236}">
-                <a16:creationId xmlns:a16="http://schemas.microsoft.com/office/drawing/2014/main" id="{9C2C07A9-77E5-8136-BEFD-BC69582FEBEF}"/>
+                <a16:creationId xmlns:a16="http://schemas.microsoft.com/office/drawing/2014/main" id="{F8C261F7-9646-E98A-9E28-4FCFEE39FA43}"/>
               </a:ext>
             </a:extLst>
           </p:cNvPr>
@@ -2982,7 +2990,7 @@
     </p:spTree>
     <p:extLst>
       <p:ext uri="{BB962C8B-B14F-4D97-AF65-F5344CB8AC3E}">
-        <p14:creationId xmlns:p14="http://schemas.microsoft.com/office/powerpoint/2010/main" val="1689341664"/>
+        <p14:creationId xmlns:p14="http://schemas.microsoft.com/office/powerpoint/2010/main" val="3399073476"/>
       </p:ext>
     </p:extLst>
   </p:cSld>
@@ -3019,7 +3027,7 @@
           <p:cNvPr id="2" name="タイトル プレースホルダー 1">
             <a:extLst>
               <a:ext uri="{FF2B5EF4-FFF2-40B4-BE49-F238E27FC236}">
-                <a16:creationId xmlns:a16="http://schemas.microsoft.com/office/drawing/2014/main" id="{67274034-AA3A-EB07-FFC2-22DD76BA5F5C}"/>
+                <a16:creationId xmlns:a16="http://schemas.microsoft.com/office/drawing/2014/main" id="{BD65C921-273D-749D-0BEA-BD5478737421}"/>
               </a:ext>
             </a:extLst>
           </p:cNvPr>
@@ -3057,7 +3065,7 @@
           <p:cNvPr id="3" name="テキスト プレースホルダー 2">
             <a:extLst>
               <a:ext uri="{FF2B5EF4-FFF2-40B4-BE49-F238E27FC236}">
-                <a16:creationId xmlns:a16="http://schemas.microsoft.com/office/drawing/2014/main" id="{E8B07207-F360-EC0E-D194-3817DC7441A4}"/>
+                <a16:creationId xmlns:a16="http://schemas.microsoft.com/office/drawing/2014/main" id="{C374CF5C-F543-3B17-BEFE-A34348582FC0}"/>
               </a:ext>
             </a:extLst>
           </p:cNvPr>
@@ -3156,7 +3164,7 @@
           <p:cNvPr id="4" name="日付プレースホルダー 3">
             <a:extLst>
               <a:ext uri="{FF2B5EF4-FFF2-40B4-BE49-F238E27FC236}">
-                <a16:creationId xmlns:a16="http://schemas.microsoft.com/office/drawing/2014/main" id="{82FFAA35-344A-F0CD-05DC-6E3519197849}"/>
+                <a16:creationId xmlns:a16="http://schemas.microsoft.com/office/drawing/2014/main" id="{C5228132-C351-9DE7-A41A-CB9C80B84A63}"/>
               </a:ext>
             </a:extLst>
           </p:cNvPr>
@@ -3203,7 +3211,7 @@
           <p:cNvPr id="5" name="フッター プレースホルダー 4">
             <a:extLst>
               <a:ext uri="{FF2B5EF4-FFF2-40B4-BE49-F238E27FC236}">
-                <a16:creationId xmlns:a16="http://schemas.microsoft.com/office/drawing/2014/main" id="{F63A7300-89E5-7928-2C1E-8338A6D0176D}"/>
+                <a16:creationId xmlns:a16="http://schemas.microsoft.com/office/drawing/2014/main" id="{FC776616-CA5C-77AA-0D29-5A64EF666E87}"/>
               </a:ext>
             </a:extLst>
           </p:cNvPr>
@@ -3246,7 +3254,7 @@
           <p:cNvPr id="6" name="スライド番号プレースホルダー 5">
             <a:extLst>
               <a:ext uri="{FF2B5EF4-FFF2-40B4-BE49-F238E27FC236}">
-                <a16:creationId xmlns:a16="http://schemas.microsoft.com/office/drawing/2014/main" id="{868D9F10-AFE8-39CD-5C9F-0F0D84458772}"/>
+                <a16:creationId xmlns:a16="http://schemas.microsoft.com/office/drawing/2014/main" id="{B1B60705-690C-7EA5-B433-58786CE7B6D6}"/>
               </a:ext>
             </a:extLst>
           </p:cNvPr>
@@ -3291,23 +3299,23 @@
     </p:spTree>
     <p:extLst>
       <p:ext uri="{BB962C8B-B14F-4D97-AF65-F5344CB8AC3E}">
-        <p14:creationId xmlns:p14="http://schemas.microsoft.com/office/powerpoint/2010/main" val="1570182235"/>
+        <p14:creationId xmlns:p14="http://schemas.microsoft.com/office/powerpoint/2010/main" val="510279302"/>
       </p:ext>
     </p:extLst>
   </p:cSld>
   <p:clrMap bg1="lt1" tx1="dk1" bg2="lt2" tx2="dk2" accent1="accent1" accent2="accent2" accent3="accent3" accent4="accent4" accent5="accent5" accent6="accent6" hlink="hlink" folHlink="folHlink"/>
   <p:sldLayoutIdLst>
-    <p:sldLayoutId id="2147483649" r:id="rId1"/>
-    <p:sldLayoutId id="2147483650" r:id="rId2"/>
-    <p:sldLayoutId id="2147483651" r:id="rId3"/>
-    <p:sldLayoutId id="2147483652" r:id="rId4"/>
-    <p:sldLayoutId id="2147483653" r:id="rId5"/>
-    <p:sldLayoutId id="2147483654" r:id="rId6"/>
-    <p:sldLayoutId id="2147483655" r:id="rId7"/>
-    <p:sldLayoutId id="2147483656" r:id="rId8"/>
-    <p:sldLayoutId id="2147483657" r:id="rId9"/>
-    <p:sldLayoutId id="2147483658" r:id="rId10"/>
-    <p:sldLayoutId id="2147483659" r:id="rId11"/>
+    <p:sldLayoutId id="2147483673" r:id="rId1"/>
+    <p:sldLayoutId id="2147483674" r:id="rId2"/>
+    <p:sldLayoutId id="2147483675" r:id="rId3"/>
+    <p:sldLayoutId id="2147483676" r:id="rId4"/>
+    <p:sldLayoutId id="2147483677" r:id="rId5"/>
+    <p:sldLayoutId id="2147483678" r:id="rId6"/>
+    <p:sldLayoutId id="2147483679" r:id="rId7"/>
+    <p:sldLayoutId id="2147483680" r:id="rId8"/>
+    <p:sldLayoutId id="2147483681" r:id="rId9"/>
+    <p:sldLayoutId id="2147483682" r:id="rId10"/>
+    <p:sldLayoutId id="2147483683" r:id="rId11"/>
   </p:sldLayoutIdLst>
   <p:txStyles>
     <p:titleStyle>
@@ -3630,7 +3638,7 @@
           <a:bodyPr/>
           <a:lstStyle/>
           <a:p>
-            <a:endParaRPr kumimoji="1" lang="ja-JP" altLang="en-US"/>
+            <a:endParaRPr kumimoji="1" lang="ja-JP" altLang="en-US" dirty="0"/>
           </a:p>
         </p:txBody>
       </p:sp>
@@ -3655,7 +3663,10 @@
           <a:bodyPr/>
           <a:lstStyle/>
           <a:p>
-            <a:endParaRPr kumimoji="1" lang="ja-JP" altLang="en-US"/>
+            <a:r>
+              <a:rPr kumimoji="1" lang="en-US" altLang="ja-JP" dirty="0"/>
+              <a:t>Team-7</a:t>
+            </a:r>
           </a:p>
         </p:txBody>
       </p:sp>
@@ -3663,6 +3674,321 @@
     <p:extLst>
       <p:ext uri="{BB962C8B-B14F-4D97-AF65-F5344CB8AC3E}">
         <p14:creationId xmlns:p14="http://schemas.microsoft.com/office/powerpoint/2010/main" val="3907924838"/>
+      </p:ext>
+    </p:extLst>
+  </p:cSld>
+  <p:clrMapOvr>
+    <a:masterClrMapping/>
+  </p:clrMapOvr>
+</p:sld>
+</file>
+
+<file path=ppt/slides/slide2.xml><?xml version="1.0" encoding="utf-8"?>
+<p:sld xmlns:a="http://schemas.openxmlformats.org/drawingml/2006/main" xmlns:r="http://schemas.openxmlformats.org/officeDocument/2006/relationships" xmlns:p="http://schemas.openxmlformats.org/presentationml/2006/main">
+  <p:cSld>
+    <p:spTree>
+      <p:nvGrpSpPr>
+        <p:cNvPr id="1" name=""/>
+        <p:cNvGrpSpPr/>
+        <p:nvPr/>
+      </p:nvGrpSpPr>
+      <p:grpSpPr>
+        <a:xfrm>
+          <a:off x="0" y="0"/>
+          <a:ext cx="0" cy="0"/>
+          <a:chOff x="0" y="0"/>
+          <a:chExt cx="0" cy="0"/>
+        </a:xfrm>
+      </p:grpSpPr>
+      <p:sp>
+        <p:nvSpPr>
+          <p:cNvPr id="2" name="タイトル 1">
+            <a:extLst>
+              <a:ext uri="{FF2B5EF4-FFF2-40B4-BE49-F238E27FC236}">
+                <a16:creationId xmlns:a16="http://schemas.microsoft.com/office/drawing/2014/main" id="{426AC11B-C3B6-1FFE-814C-F80264A1D5B3}"/>
+              </a:ext>
+            </a:extLst>
+          </p:cNvPr>
+          <p:cNvSpPr>
+            <a:spLocks noGrp="1"/>
+          </p:cNvSpPr>
+          <p:nvPr>
+            <p:ph type="title"/>
+          </p:nvPr>
+        </p:nvSpPr>
+        <p:spPr/>
+        <p:txBody>
+          <a:bodyPr/>
+          <a:lstStyle/>
+          <a:p>
+            <a:r>
+              <a:rPr kumimoji="1" lang="ja-JP" altLang="en-US" dirty="0"/>
+              <a:t>脱出ゲームの作成</a:t>
+            </a:r>
+          </a:p>
+        </p:txBody>
+      </p:sp>
+      <p:sp>
+        <p:nvSpPr>
+          <p:cNvPr id="3" name="コンテンツ プレースホルダー 2">
+            <a:extLst>
+              <a:ext uri="{FF2B5EF4-FFF2-40B4-BE49-F238E27FC236}">
+                <a16:creationId xmlns:a16="http://schemas.microsoft.com/office/drawing/2014/main" id="{C50EC100-036E-54A2-6016-49514DA79915}"/>
+              </a:ext>
+            </a:extLst>
+          </p:cNvPr>
+          <p:cNvSpPr>
+            <a:spLocks noGrp="1"/>
+          </p:cNvSpPr>
+          <p:nvPr>
+            <p:ph idx="1"/>
+          </p:nvPr>
+        </p:nvSpPr>
+        <p:spPr/>
+        <p:txBody>
+          <a:bodyPr/>
+          <a:lstStyle/>
+          <a:p>
+            <a:r>
+              <a:rPr kumimoji="1" lang="ja-JP" altLang="en-US" dirty="0"/>
+              <a:t>舞台：学校</a:t>
+            </a:r>
+            <a:endParaRPr kumimoji="1" lang="en-US" altLang="ja-JP" dirty="0"/>
+          </a:p>
+          <a:p>
+            <a:r>
+              <a:rPr lang="ja-JP" altLang="en-US" dirty="0"/>
+              <a:t>ストーリー：</a:t>
+            </a:r>
+            <a:endParaRPr lang="en-US" altLang="ja-JP" dirty="0"/>
+          </a:p>
+          <a:p>
+            <a:pPr marL="0" indent="0">
+              <a:buNone/>
+            </a:pPr>
+            <a:r>
+              <a:rPr lang="ja-JP" altLang="ja-JP" dirty="0"/>
+              <a:t>放課後、忘れ物を取りに校舎へ戻った主人公。校舎に入った瞬間、突然すべての扉に鍵がかかる。校内放送から謎のメッセージが流れる——「校内に隠された4つの鍵を集めれば出口は開く。」プレイヤーは学校内を探索し、謎を解きながら脱出を目指す。</a:t>
+            </a:r>
+          </a:p>
+          <a:p>
+            <a:pPr marL="0" indent="0">
+              <a:buNone/>
+            </a:pPr>
+            <a:endParaRPr kumimoji="1" lang="en-US" altLang="ja-JP" dirty="0"/>
+          </a:p>
+          <a:p>
+            <a:r>
+              <a:rPr lang="ja-JP" altLang="en-US" dirty="0"/>
+              <a:t>あ</a:t>
+            </a:r>
+            <a:endParaRPr kumimoji="1" lang="ja-JP" altLang="en-US" dirty="0"/>
+          </a:p>
+        </p:txBody>
+      </p:sp>
+    </p:spTree>
+    <p:extLst>
+      <p:ext uri="{BB962C8B-B14F-4D97-AF65-F5344CB8AC3E}">
+        <p14:creationId xmlns:p14="http://schemas.microsoft.com/office/powerpoint/2010/main" val="249878063"/>
+      </p:ext>
+    </p:extLst>
+  </p:cSld>
+  <p:clrMapOvr>
+    <a:masterClrMapping/>
+  </p:clrMapOvr>
+</p:sld>
+</file>
+
+<file path=ppt/slides/slide3.xml><?xml version="1.0" encoding="utf-8"?>
+<p:sld xmlns:a="http://schemas.openxmlformats.org/drawingml/2006/main" xmlns:r="http://schemas.openxmlformats.org/officeDocument/2006/relationships" xmlns:p="http://schemas.openxmlformats.org/presentationml/2006/main">
+  <p:cSld>
+    <p:spTree>
+      <p:nvGrpSpPr>
+        <p:cNvPr id="1" name=""/>
+        <p:cNvGrpSpPr/>
+        <p:nvPr/>
+      </p:nvGrpSpPr>
+      <p:grpSpPr>
+        <a:xfrm>
+          <a:off x="0" y="0"/>
+          <a:ext cx="0" cy="0"/>
+          <a:chOff x="0" y="0"/>
+          <a:chExt cx="0" cy="0"/>
+        </a:xfrm>
+      </p:grpSpPr>
+      <p:sp>
+        <p:nvSpPr>
+          <p:cNvPr id="2" name="タイトル 1">
+            <a:extLst>
+              <a:ext uri="{FF2B5EF4-FFF2-40B4-BE49-F238E27FC236}">
+                <a16:creationId xmlns:a16="http://schemas.microsoft.com/office/drawing/2014/main" id="{C1B23293-D3CB-FF64-1C67-0B4F5E500672}"/>
+              </a:ext>
+            </a:extLst>
+          </p:cNvPr>
+          <p:cNvSpPr>
+            <a:spLocks noGrp="1"/>
+          </p:cNvSpPr>
+          <p:nvPr>
+            <p:ph type="title"/>
+          </p:nvPr>
+        </p:nvSpPr>
+        <p:spPr/>
+        <p:txBody>
+          <a:bodyPr/>
+          <a:lstStyle/>
+          <a:p>
+            <a:r>
+              <a:rPr kumimoji="1" lang="ja-JP" altLang="en-US" dirty="0"/>
+              <a:t>仕様</a:t>
+            </a:r>
+          </a:p>
+        </p:txBody>
+      </p:sp>
+      <p:sp>
+        <p:nvSpPr>
+          <p:cNvPr id="3" name="コンテンツ プレースホルダー 2">
+            <a:extLst>
+              <a:ext uri="{FF2B5EF4-FFF2-40B4-BE49-F238E27FC236}">
+                <a16:creationId xmlns:a16="http://schemas.microsoft.com/office/drawing/2014/main" id="{B2FCB8AA-187B-30AD-4A7D-3B69A75B19B5}"/>
+              </a:ext>
+            </a:extLst>
+          </p:cNvPr>
+          <p:cNvSpPr>
+            <a:spLocks noGrp="1"/>
+          </p:cNvSpPr>
+          <p:nvPr>
+            <p:ph idx="1"/>
+          </p:nvPr>
+        </p:nvSpPr>
+        <p:spPr/>
+        <p:txBody>
+          <a:bodyPr/>
+          <a:lstStyle/>
+          <a:p>
+            <a:r>
+              <a:rPr lang="ja-JP" altLang="ja-JP" dirty="0"/>
+              <a:t>- 4ステージ構成で、プレイヤーは1ステージずつ攻略していく</a:t>
+            </a:r>
+          </a:p>
+          <a:p>
+            <a:r>
+              <a:rPr lang="ja-JP" altLang="ja-JP" dirty="0"/>
+              <a:t>- 画面には1ステージのみを表示し、ステージをクリアすると「ステージクリア」の演出とともに、次のステージへ進む。</a:t>
+            </a:r>
+          </a:p>
+          <a:p>
+            <a:r>
+              <a:rPr lang="ja-JP" altLang="ja-JP" dirty="0"/>
+              <a:t>- ステージが進むごとに謎の難易度を上げる</a:t>
+            </a:r>
+          </a:p>
+          <a:p>
+            <a:r>
+              <a:rPr lang="ja-JP" altLang="ja-JP" dirty="0"/>
+              <a:t>- 最終ステージをクリアすると、全体クリア画面を表示する。</a:t>
+            </a:r>
+          </a:p>
+          <a:p>
+            <a:r>
+              <a:rPr lang="ja-JP" altLang="ja-JP" dirty="0"/>
+              <a:t>- 一度クリアしたステージには戻れない。</a:t>
+            </a:r>
+          </a:p>
+          <a:p>
+            <a:endParaRPr kumimoji="1" lang="ja-JP" altLang="en-US" dirty="0"/>
+          </a:p>
+        </p:txBody>
+      </p:sp>
+    </p:spTree>
+    <p:extLst>
+      <p:ext uri="{BB962C8B-B14F-4D97-AF65-F5344CB8AC3E}">
+        <p14:creationId xmlns:p14="http://schemas.microsoft.com/office/powerpoint/2010/main" val="2042450181"/>
+      </p:ext>
+    </p:extLst>
+  </p:cSld>
+  <p:clrMapOvr>
+    <a:masterClrMapping/>
+  </p:clrMapOvr>
+</p:sld>
+</file>
+
+<file path=ppt/slides/slide4.xml><?xml version="1.0" encoding="utf-8"?>
+<p:sld xmlns:a="http://schemas.openxmlformats.org/drawingml/2006/main" xmlns:r="http://schemas.openxmlformats.org/officeDocument/2006/relationships" xmlns:p="http://schemas.openxmlformats.org/presentationml/2006/main">
+  <p:cSld>
+    <p:spTree>
+      <p:nvGrpSpPr>
+        <p:cNvPr id="1" name=""/>
+        <p:cNvGrpSpPr/>
+        <p:nvPr/>
+      </p:nvGrpSpPr>
+      <p:grpSpPr>
+        <a:xfrm>
+          <a:off x="0" y="0"/>
+          <a:ext cx="0" cy="0"/>
+          <a:chOff x="0" y="0"/>
+          <a:chExt cx="0" cy="0"/>
+        </a:xfrm>
+      </p:grpSpPr>
+      <p:sp>
+        <p:nvSpPr>
+          <p:cNvPr id="2" name="タイトル 1">
+            <a:extLst>
+              <a:ext uri="{FF2B5EF4-FFF2-40B4-BE49-F238E27FC236}">
+                <a16:creationId xmlns:a16="http://schemas.microsoft.com/office/drawing/2014/main" id="{96A8405E-89E5-3BFC-8F50-BA1ED188A1D2}"/>
+              </a:ext>
+            </a:extLst>
+          </p:cNvPr>
+          <p:cNvSpPr>
+            <a:spLocks noGrp="1"/>
+          </p:cNvSpPr>
+          <p:nvPr>
+            <p:ph type="title"/>
+          </p:nvPr>
+        </p:nvSpPr>
+        <p:spPr/>
+        <p:txBody>
+          <a:bodyPr/>
+          <a:lstStyle/>
+          <a:p>
+            <a:r>
+              <a:rPr kumimoji="1" lang="ja-JP" altLang="en-US" dirty="0"/>
+              <a:t>ステージ構成</a:t>
+            </a:r>
+          </a:p>
+        </p:txBody>
+      </p:sp>
+      <p:sp>
+        <p:nvSpPr>
+          <p:cNvPr id="3" name="コンテンツ プレースホルダー 2">
+            <a:extLst>
+              <a:ext uri="{FF2B5EF4-FFF2-40B4-BE49-F238E27FC236}">
+                <a16:creationId xmlns:a16="http://schemas.microsoft.com/office/drawing/2014/main" id="{9C2C860E-B2C7-BD40-D4CD-2AC2A015F380}"/>
+              </a:ext>
+            </a:extLst>
+          </p:cNvPr>
+          <p:cNvSpPr>
+            <a:spLocks noGrp="1"/>
+          </p:cNvSpPr>
+          <p:nvPr>
+            <p:ph idx="1"/>
+          </p:nvPr>
+        </p:nvSpPr>
+        <p:spPr/>
+        <p:txBody>
+          <a:bodyPr/>
+          <a:lstStyle/>
+          <a:p>
+            <a:r>
+              <a:rPr kumimoji="1" lang="ja-JP" altLang="en-US"/>
+              <a:t>タイトル画面→廊下→図書室→理科室→非常口→ゲームクリア</a:t>
+            </a:r>
+          </a:p>
+        </p:txBody>
+      </p:sp>
+    </p:spTree>
+    <p:extLst>
+      <p:ext uri="{BB962C8B-B14F-4D97-AF65-F5344CB8AC3E}">
+        <p14:creationId xmlns:p14="http://schemas.microsoft.com/office/powerpoint/2010/main" val="523244289"/>
       </p:ext>
     </p:extLst>
   </p:cSld>

--- a/presentation/presentation.pptx
+++ b/presentation/presentation.pptx
@@ -2,22 +2,30 @@
 <file path=ppt/presentation.xml><?xml version="1.0" encoding="utf-8"?>
 <p:presentation xmlns:a="http://schemas.openxmlformats.org/drawingml/2006/main" xmlns:r="http://schemas.openxmlformats.org/officeDocument/2006/relationships" xmlns:p="http://schemas.openxmlformats.org/presentationml/2006/main" saveSubsetFonts="1">
   <p:sldMasterIdLst>
-    <p:sldMasterId id="2147483672" r:id="rId1"/>
+    <p:sldMasterId id="2147483701" r:id="rId1"/>
   </p:sldMasterIdLst>
+  <p:notesMasterIdLst>
+    <p:notesMasterId r:id="rId11"/>
+  </p:notesMasterIdLst>
   <p:sldIdLst>
     <p:sldId id="256" r:id="rId2"/>
     <p:sldId id="257" r:id="rId3"/>
-    <p:sldId id="258" r:id="rId4"/>
-    <p:sldId id="259" r:id="rId5"/>
+    <p:sldId id="261" r:id="rId4"/>
+    <p:sldId id="262" r:id="rId5"/>
+    <p:sldId id="259" r:id="rId6"/>
+    <p:sldId id="266" r:id="rId7"/>
+    <p:sldId id="263" r:id="rId8"/>
+    <p:sldId id="265" r:id="rId9"/>
+    <p:sldId id="264" r:id="rId10"/>
   </p:sldIdLst>
   <p:sldSz cx="12192000" cy="6858000"/>
   <p:notesSz cx="6858000" cy="9144000"/>
   <p:defaultTextStyle>
     <a:defPPr>
-      <a:defRPr lang="ja-JP"/>
+      <a:defRPr lang="en-US"/>
     </a:defPPr>
-    <a:lvl1pPr marL="0" algn="l" defTabSz="914400" rtl="0" eaLnBrk="1" latinLnBrk="0" hangingPunct="1">
-      <a:defRPr kumimoji="1" sz="1800" kern="1200">
+    <a:lvl1pPr marL="0" algn="l" defTabSz="457200" rtl="0" eaLnBrk="1" latinLnBrk="0" hangingPunct="1">
+      <a:defRPr sz="1800" kern="1200">
         <a:solidFill>
           <a:schemeClr val="tx1"/>
         </a:solidFill>
@@ -26,8 +34,8 @@
         <a:cs typeface="+mn-cs"/>
       </a:defRPr>
     </a:lvl1pPr>
-    <a:lvl2pPr marL="457200" algn="l" defTabSz="914400" rtl="0" eaLnBrk="1" latinLnBrk="0" hangingPunct="1">
-      <a:defRPr kumimoji="1" sz="1800" kern="1200">
+    <a:lvl2pPr marL="457200" algn="l" defTabSz="457200" rtl="0" eaLnBrk="1" latinLnBrk="0" hangingPunct="1">
+      <a:defRPr sz="1800" kern="1200">
         <a:solidFill>
           <a:schemeClr val="tx1"/>
         </a:solidFill>
@@ -36,8 +44,8 @@
         <a:cs typeface="+mn-cs"/>
       </a:defRPr>
     </a:lvl2pPr>
-    <a:lvl3pPr marL="914400" algn="l" defTabSz="914400" rtl="0" eaLnBrk="1" latinLnBrk="0" hangingPunct="1">
-      <a:defRPr kumimoji="1" sz="1800" kern="1200">
+    <a:lvl3pPr marL="914400" algn="l" defTabSz="457200" rtl="0" eaLnBrk="1" latinLnBrk="0" hangingPunct="1">
+      <a:defRPr sz="1800" kern="1200">
         <a:solidFill>
           <a:schemeClr val="tx1"/>
         </a:solidFill>
@@ -46,8 +54,8 @@
         <a:cs typeface="+mn-cs"/>
       </a:defRPr>
     </a:lvl3pPr>
-    <a:lvl4pPr marL="1371600" algn="l" defTabSz="914400" rtl="0" eaLnBrk="1" latinLnBrk="0" hangingPunct="1">
-      <a:defRPr kumimoji="1" sz="1800" kern="1200">
+    <a:lvl4pPr marL="1371600" algn="l" defTabSz="457200" rtl="0" eaLnBrk="1" latinLnBrk="0" hangingPunct="1">
+      <a:defRPr sz="1800" kern="1200">
         <a:solidFill>
           <a:schemeClr val="tx1"/>
         </a:solidFill>
@@ -56,8 +64,8 @@
         <a:cs typeface="+mn-cs"/>
       </a:defRPr>
     </a:lvl4pPr>
-    <a:lvl5pPr marL="1828800" algn="l" defTabSz="914400" rtl="0" eaLnBrk="1" latinLnBrk="0" hangingPunct="1">
-      <a:defRPr kumimoji="1" sz="1800" kern="1200">
+    <a:lvl5pPr marL="1828800" algn="l" defTabSz="457200" rtl="0" eaLnBrk="1" latinLnBrk="0" hangingPunct="1">
+      <a:defRPr sz="1800" kern="1200">
         <a:solidFill>
           <a:schemeClr val="tx1"/>
         </a:solidFill>
@@ -66,8 +74,8 @@
         <a:cs typeface="+mn-cs"/>
       </a:defRPr>
     </a:lvl5pPr>
-    <a:lvl6pPr marL="2286000" algn="l" defTabSz="914400" rtl="0" eaLnBrk="1" latinLnBrk="0" hangingPunct="1">
-      <a:defRPr kumimoji="1" sz="1800" kern="1200">
+    <a:lvl6pPr marL="2286000" algn="l" defTabSz="457200" rtl="0" eaLnBrk="1" latinLnBrk="0" hangingPunct="1">
+      <a:defRPr sz="1800" kern="1200">
         <a:solidFill>
           <a:schemeClr val="tx1"/>
         </a:solidFill>
@@ -76,8 +84,8 @@
         <a:cs typeface="+mn-cs"/>
       </a:defRPr>
     </a:lvl6pPr>
-    <a:lvl7pPr marL="2743200" algn="l" defTabSz="914400" rtl="0" eaLnBrk="1" latinLnBrk="0" hangingPunct="1">
-      <a:defRPr kumimoji="1" sz="1800" kern="1200">
+    <a:lvl7pPr marL="2743200" algn="l" defTabSz="457200" rtl="0" eaLnBrk="1" latinLnBrk="0" hangingPunct="1">
+      <a:defRPr sz="1800" kern="1200">
         <a:solidFill>
           <a:schemeClr val="tx1"/>
         </a:solidFill>
@@ -86,8 +94,8 @@
         <a:cs typeface="+mn-cs"/>
       </a:defRPr>
     </a:lvl7pPr>
-    <a:lvl8pPr marL="3200400" algn="l" defTabSz="914400" rtl="0" eaLnBrk="1" latinLnBrk="0" hangingPunct="1">
-      <a:defRPr kumimoji="1" sz="1800" kern="1200">
+    <a:lvl8pPr marL="3200400" algn="l" defTabSz="457200" rtl="0" eaLnBrk="1" latinLnBrk="0" hangingPunct="1">
+      <a:defRPr sz="1800" kern="1200">
         <a:solidFill>
           <a:schemeClr val="tx1"/>
         </a:solidFill>
@@ -96,8 +104,8 @@
         <a:cs typeface="+mn-cs"/>
       </a:defRPr>
     </a:lvl8pPr>
-    <a:lvl9pPr marL="3657600" algn="l" defTabSz="914400" rtl="0" eaLnBrk="1" latinLnBrk="0" hangingPunct="1">
-      <a:defRPr kumimoji="1" sz="1800" kern="1200">
+    <a:lvl9pPr marL="3657600" algn="l" defTabSz="457200" rtl="0" eaLnBrk="1" latinLnBrk="0" hangingPunct="1">
+      <a:defRPr sz="1800" kern="1200">
         <a:solidFill>
           <a:schemeClr val="tx1"/>
         </a:solidFill>
@@ -115,8 +123,476 @@
 </p:presentation>
 </file>
 
+<file path=ppt/notesMasters/notesMaster1.xml><?xml version="1.0" encoding="utf-8"?>
+<p:notesMaster xmlns:a="http://schemas.openxmlformats.org/drawingml/2006/main" xmlns:r="http://schemas.openxmlformats.org/officeDocument/2006/relationships" xmlns:p="http://schemas.openxmlformats.org/presentationml/2006/main">
+  <p:cSld>
+    <p:bg>
+      <p:bgRef idx="1001">
+        <a:schemeClr val="bg1"/>
+      </p:bgRef>
+    </p:bg>
+    <p:spTree>
+      <p:nvGrpSpPr>
+        <p:cNvPr id="1" name=""/>
+        <p:cNvGrpSpPr/>
+        <p:nvPr/>
+      </p:nvGrpSpPr>
+      <p:grpSpPr>
+        <a:xfrm>
+          <a:off x="0" y="0"/>
+          <a:ext cx="0" cy="0"/>
+          <a:chOff x="0" y="0"/>
+          <a:chExt cx="0" cy="0"/>
+        </a:xfrm>
+      </p:grpSpPr>
+      <p:sp>
+        <p:nvSpPr>
+          <p:cNvPr id="2" name="ヘッダー プレースホルダー 1"/>
+          <p:cNvSpPr>
+            <a:spLocks noGrp="1"/>
+          </p:cNvSpPr>
+          <p:nvPr>
+            <p:ph type="hdr" sz="quarter"/>
+          </p:nvPr>
+        </p:nvSpPr>
+        <p:spPr>
+          <a:xfrm>
+            <a:off x="0" y="0"/>
+            <a:ext cx="2971800" cy="458788"/>
+          </a:xfrm>
+          <a:prstGeom prst="rect">
+            <a:avLst/>
+          </a:prstGeom>
+        </p:spPr>
+        <p:txBody>
+          <a:bodyPr vert="horz" lIns="91440" tIns="45720" rIns="91440" bIns="45720" rtlCol="0"/>
+          <a:lstStyle>
+            <a:lvl1pPr algn="l">
+              <a:defRPr sz="1200"/>
+            </a:lvl1pPr>
+          </a:lstStyle>
+          <a:p>
+            <a:endParaRPr kumimoji="1" lang="ja-JP" altLang="en-US"/>
+          </a:p>
+        </p:txBody>
+      </p:sp>
+      <p:sp>
+        <p:nvSpPr>
+          <p:cNvPr id="3" name="日付プレースホルダー 2"/>
+          <p:cNvSpPr>
+            <a:spLocks noGrp="1"/>
+          </p:cNvSpPr>
+          <p:nvPr>
+            <p:ph type="dt" idx="1"/>
+          </p:nvPr>
+        </p:nvSpPr>
+        <p:spPr>
+          <a:xfrm>
+            <a:off x="3884613" y="0"/>
+            <a:ext cx="2971800" cy="458788"/>
+          </a:xfrm>
+          <a:prstGeom prst="rect">
+            <a:avLst/>
+          </a:prstGeom>
+        </p:spPr>
+        <p:txBody>
+          <a:bodyPr vert="horz" lIns="91440" tIns="45720" rIns="91440" bIns="45720" rtlCol="0"/>
+          <a:lstStyle>
+            <a:lvl1pPr algn="r">
+              <a:defRPr sz="1200"/>
+            </a:lvl1pPr>
+          </a:lstStyle>
+          <a:p>
+            <a:fld id="{AD542C85-82DD-4FED-8412-385712308239}" type="datetimeFigureOut">
+              <a:rPr kumimoji="1" lang="ja-JP" altLang="en-US" smtClean="0"/>
+              <a:t>2026/7/27</a:t>
+            </a:fld>
+            <a:endParaRPr kumimoji="1" lang="ja-JP" altLang="en-US"/>
+          </a:p>
+        </p:txBody>
+      </p:sp>
+      <p:sp>
+        <p:nvSpPr>
+          <p:cNvPr id="4" name="スライド イメージ プレースホルダー 3"/>
+          <p:cNvSpPr>
+            <a:spLocks noGrp="1" noRot="1" noChangeAspect="1"/>
+          </p:cNvSpPr>
+          <p:nvPr>
+            <p:ph type="sldImg" idx="2"/>
+          </p:nvPr>
+        </p:nvSpPr>
+        <p:spPr>
+          <a:xfrm>
+            <a:off x="685800" y="1143000"/>
+            <a:ext cx="5486400" cy="3086100"/>
+          </a:xfrm>
+          <a:prstGeom prst="rect">
+            <a:avLst/>
+          </a:prstGeom>
+          <a:noFill/>
+          <a:ln w="12700">
+            <a:solidFill>
+              <a:prstClr val="black"/>
+            </a:solidFill>
+          </a:ln>
+        </p:spPr>
+        <p:txBody>
+          <a:bodyPr vert="horz" lIns="91440" tIns="45720" rIns="91440" bIns="45720" rtlCol="0" anchor="ctr"/>
+          <a:lstStyle/>
+          <a:p>
+            <a:endParaRPr lang="ja-JP" altLang="en-US"/>
+          </a:p>
+        </p:txBody>
+      </p:sp>
+      <p:sp>
+        <p:nvSpPr>
+          <p:cNvPr id="5" name="ノート プレースホルダー 4"/>
+          <p:cNvSpPr>
+            <a:spLocks noGrp="1"/>
+          </p:cNvSpPr>
+          <p:nvPr>
+            <p:ph type="body" sz="quarter" idx="3"/>
+          </p:nvPr>
+        </p:nvSpPr>
+        <p:spPr>
+          <a:xfrm>
+            <a:off x="685800" y="4400550"/>
+            <a:ext cx="5486400" cy="3600450"/>
+          </a:xfrm>
+          <a:prstGeom prst="rect">
+            <a:avLst/>
+          </a:prstGeom>
+        </p:spPr>
+        <p:txBody>
+          <a:bodyPr vert="horz" lIns="91440" tIns="45720" rIns="91440" bIns="45720" rtlCol="0"/>
+          <a:lstStyle/>
+          <a:p>
+            <a:pPr lvl="0"/>
+            <a:r>
+              <a:rPr kumimoji="1" lang="ja-JP" altLang="en-US"/>
+              <a:t>マスター テキストの書式設定</a:t>
+            </a:r>
+          </a:p>
+          <a:p>
+            <a:pPr lvl="1"/>
+            <a:r>
+              <a:rPr kumimoji="1" lang="ja-JP" altLang="en-US"/>
+              <a:t>第 </a:t>
+            </a:r>
+            <a:r>
+              <a:rPr kumimoji="1" lang="en-US" altLang="ja-JP"/>
+              <a:t>2 </a:t>
+            </a:r>
+            <a:r>
+              <a:rPr kumimoji="1" lang="ja-JP" altLang="en-US"/>
+              <a:t>レベル</a:t>
+            </a:r>
+          </a:p>
+          <a:p>
+            <a:pPr lvl="2"/>
+            <a:r>
+              <a:rPr kumimoji="1" lang="ja-JP" altLang="en-US"/>
+              <a:t>第 </a:t>
+            </a:r>
+            <a:r>
+              <a:rPr kumimoji="1" lang="en-US" altLang="ja-JP"/>
+              <a:t>3 </a:t>
+            </a:r>
+            <a:r>
+              <a:rPr kumimoji="1" lang="ja-JP" altLang="en-US"/>
+              <a:t>レベル</a:t>
+            </a:r>
+          </a:p>
+          <a:p>
+            <a:pPr lvl="3"/>
+            <a:r>
+              <a:rPr kumimoji="1" lang="ja-JP" altLang="en-US"/>
+              <a:t>第 </a:t>
+            </a:r>
+            <a:r>
+              <a:rPr kumimoji="1" lang="en-US" altLang="ja-JP"/>
+              <a:t>4 </a:t>
+            </a:r>
+            <a:r>
+              <a:rPr kumimoji="1" lang="ja-JP" altLang="en-US"/>
+              <a:t>レベル</a:t>
+            </a:r>
+          </a:p>
+          <a:p>
+            <a:pPr lvl="4"/>
+            <a:r>
+              <a:rPr kumimoji="1" lang="ja-JP" altLang="en-US"/>
+              <a:t>第 </a:t>
+            </a:r>
+            <a:r>
+              <a:rPr kumimoji="1" lang="en-US" altLang="ja-JP"/>
+              <a:t>5 </a:t>
+            </a:r>
+            <a:r>
+              <a:rPr kumimoji="1" lang="ja-JP" altLang="en-US"/>
+              <a:t>レベル</a:t>
+            </a:r>
+          </a:p>
+        </p:txBody>
+      </p:sp>
+      <p:sp>
+        <p:nvSpPr>
+          <p:cNvPr id="6" name="フッター プレースホルダー 5"/>
+          <p:cNvSpPr>
+            <a:spLocks noGrp="1"/>
+          </p:cNvSpPr>
+          <p:nvPr>
+            <p:ph type="ftr" sz="quarter" idx="4"/>
+          </p:nvPr>
+        </p:nvSpPr>
+        <p:spPr>
+          <a:xfrm>
+            <a:off x="0" y="8685213"/>
+            <a:ext cx="2971800" cy="458787"/>
+          </a:xfrm>
+          <a:prstGeom prst="rect">
+            <a:avLst/>
+          </a:prstGeom>
+        </p:spPr>
+        <p:txBody>
+          <a:bodyPr vert="horz" lIns="91440" tIns="45720" rIns="91440" bIns="45720" rtlCol="0" anchor="b"/>
+          <a:lstStyle>
+            <a:lvl1pPr algn="l">
+              <a:defRPr sz="1200"/>
+            </a:lvl1pPr>
+          </a:lstStyle>
+          <a:p>
+            <a:endParaRPr kumimoji="1" lang="ja-JP" altLang="en-US"/>
+          </a:p>
+        </p:txBody>
+      </p:sp>
+      <p:sp>
+        <p:nvSpPr>
+          <p:cNvPr id="7" name="スライド番号プレースホルダー 6"/>
+          <p:cNvSpPr>
+            <a:spLocks noGrp="1"/>
+          </p:cNvSpPr>
+          <p:nvPr>
+            <p:ph type="sldNum" sz="quarter" idx="5"/>
+          </p:nvPr>
+        </p:nvSpPr>
+        <p:spPr>
+          <a:xfrm>
+            <a:off x="3884613" y="8685213"/>
+            <a:ext cx="2971800" cy="458787"/>
+          </a:xfrm>
+          <a:prstGeom prst="rect">
+            <a:avLst/>
+          </a:prstGeom>
+        </p:spPr>
+        <p:txBody>
+          <a:bodyPr vert="horz" lIns="91440" tIns="45720" rIns="91440" bIns="45720" rtlCol="0" anchor="b"/>
+          <a:lstStyle>
+            <a:lvl1pPr algn="r">
+              <a:defRPr sz="1200"/>
+            </a:lvl1pPr>
+          </a:lstStyle>
+          <a:p>
+            <a:fld id="{6F8E4C60-5A42-4E15-8635-A2555BD9D563}" type="slidenum">
+              <a:rPr kumimoji="1" lang="ja-JP" altLang="en-US" smtClean="0"/>
+              <a:t>‹#›</a:t>
+            </a:fld>
+            <a:endParaRPr kumimoji="1" lang="ja-JP" altLang="en-US"/>
+          </a:p>
+        </p:txBody>
+      </p:sp>
+    </p:spTree>
+    <p:extLst>
+      <p:ext uri="{BB962C8B-B14F-4D97-AF65-F5344CB8AC3E}">
+        <p14:creationId xmlns:p14="http://schemas.microsoft.com/office/powerpoint/2010/main" val="1640773004"/>
+      </p:ext>
+    </p:extLst>
+  </p:cSld>
+  <p:clrMap bg1="lt1" tx1="dk1" bg2="lt2" tx2="dk2" accent1="accent1" accent2="accent2" accent3="accent3" accent4="accent4" accent5="accent5" accent6="accent6" hlink="hlink" folHlink="folHlink"/>
+  <p:notesStyle>
+    <a:lvl1pPr marL="0" algn="l" defTabSz="914400" rtl="0" eaLnBrk="1" latinLnBrk="0" hangingPunct="1">
+      <a:defRPr kumimoji="1" sz="1200" kern="1200">
+        <a:solidFill>
+          <a:schemeClr val="tx1"/>
+        </a:solidFill>
+        <a:latin typeface="+mn-lt"/>
+        <a:ea typeface="+mn-ea"/>
+        <a:cs typeface="+mn-cs"/>
+      </a:defRPr>
+    </a:lvl1pPr>
+    <a:lvl2pPr marL="457200" algn="l" defTabSz="914400" rtl="0" eaLnBrk="1" latinLnBrk="0" hangingPunct="1">
+      <a:defRPr kumimoji="1" sz="1200" kern="1200">
+        <a:solidFill>
+          <a:schemeClr val="tx1"/>
+        </a:solidFill>
+        <a:latin typeface="+mn-lt"/>
+        <a:ea typeface="+mn-ea"/>
+        <a:cs typeface="+mn-cs"/>
+      </a:defRPr>
+    </a:lvl2pPr>
+    <a:lvl3pPr marL="914400" algn="l" defTabSz="914400" rtl="0" eaLnBrk="1" latinLnBrk="0" hangingPunct="1">
+      <a:defRPr kumimoji="1" sz="1200" kern="1200">
+        <a:solidFill>
+          <a:schemeClr val="tx1"/>
+        </a:solidFill>
+        <a:latin typeface="+mn-lt"/>
+        <a:ea typeface="+mn-ea"/>
+        <a:cs typeface="+mn-cs"/>
+      </a:defRPr>
+    </a:lvl3pPr>
+    <a:lvl4pPr marL="1371600" algn="l" defTabSz="914400" rtl="0" eaLnBrk="1" latinLnBrk="0" hangingPunct="1">
+      <a:defRPr kumimoji="1" sz="1200" kern="1200">
+        <a:solidFill>
+          <a:schemeClr val="tx1"/>
+        </a:solidFill>
+        <a:latin typeface="+mn-lt"/>
+        <a:ea typeface="+mn-ea"/>
+        <a:cs typeface="+mn-cs"/>
+      </a:defRPr>
+    </a:lvl4pPr>
+    <a:lvl5pPr marL="1828800" algn="l" defTabSz="914400" rtl="0" eaLnBrk="1" latinLnBrk="0" hangingPunct="1">
+      <a:defRPr kumimoji="1" sz="1200" kern="1200">
+        <a:solidFill>
+          <a:schemeClr val="tx1"/>
+        </a:solidFill>
+        <a:latin typeface="+mn-lt"/>
+        <a:ea typeface="+mn-ea"/>
+        <a:cs typeface="+mn-cs"/>
+      </a:defRPr>
+    </a:lvl5pPr>
+    <a:lvl6pPr marL="2286000" algn="l" defTabSz="914400" rtl="0" eaLnBrk="1" latinLnBrk="0" hangingPunct="1">
+      <a:defRPr kumimoji="1" sz="1200" kern="1200">
+        <a:solidFill>
+          <a:schemeClr val="tx1"/>
+        </a:solidFill>
+        <a:latin typeface="+mn-lt"/>
+        <a:ea typeface="+mn-ea"/>
+        <a:cs typeface="+mn-cs"/>
+      </a:defRPr>
+    </a:lvl6pPr>
+    <a:lvl7pPr marL="2743200" algn="l" defTabSz="914400" rtl="0" eaLnBrk="1" latinLnBrk="0" hangingPunct="1">
+      <a:defRPr kumimoji="1" sz="1200" kern="1200">
+        <a:solidFill>
+          <a:schemeClr val="tx1"/>
+        </a:solidFill>
+        <a:latin typeface="+mn-lt"/>
+        <a:ea typeface="+mn-ea"/>
+        <a:cs typeface="+mn-cs"/>
+      </a:defRPr>
+    </a:lvl7pPr>
+    <a:lvl8pPr marL="3200400" algn="l" defTabSz="914400" rtl="0" eaLnBrk="1" latinLnBrk="0" hangingPunct="1">
+      <a:defRPr kumimoji="1" sz="1200" kern="1200">
+        <a:solidFill>
+          <a:schemeClr val="tx1"/>
+        </a:solidFill>
+        <a:latin typeface="+mn-lt"/>
+        <a:ea typeface="+mn-ea"/>
+        <a:cs typeface="+mn-cs"/>
+      </a:defRPr>
+    </a:lvl8pPr>
+    <a:lvl9pPr marL="3657600" algn="l" defTabSz="914400" rtl="0" eaLnBrk="1" latinLnBrk="0" hangingPunct="1">
+      <a:defRPr kumimoji="1" sz="1200" kern="1200">
+        <a:solidFill>
+          <a:schemeClr val="tx1"/>
+        </a:solidFill>
+        <a:latin typeface="+mn-lt"/>
+        <a:ea typeface="+mn-ea"/>
+        <a:cs typeface="+mn-cs"/>
+      </a:defRPr>
+    </a:lvl9pPr>
+  </p:notesStyle>
+</p:notesMaster>
+</file>
+
+<file path=ppt/notesSlides/notesSlide1.xml><?xml version="1.0" encoding="utf-8"?>
+<p:notes xmlns:a="http://schemas.openxmlformats.org/drawingml/2006/main" xmlns:r="http://schemas.openxmlformats.org/officeDocument/2006/relationships" xmlns:p="http://schemas.openxmlformats.org/presentationml/2006/main">
+  <p:cSld>
+    <p:spTree>
+      <p:nvGrpSpPr>
+        <p:cNvPr id="1" name=""/>
+        <p:cNvGrpSpPr/>
+        <p:nvPr/>
+      </p:nvGrpSpPr>
+      <p:grpSpPr>
+        <a:xfrm>
+          <a:off x="0" y="0"/>
+          <a:ext cx="0" cy="0"/>
+          <a:chOff x="0" y="0"/>
+          <a:chExt cx="0" cy="0"/>
+        </a:xfrm>
+      </p:grpSpPr>
+      <p:sp>
+        <p:nvSpPr>
+          <p:cNvPr id="2" name="スライド イメージ プレースホルダー 1"/>
+          <p:cNvSpPr>
+            <a:spLocks noGrp="1" noRot="1" noChangeAspect="1"/>
+          </p:cNvSpPr>
+          <p:nvPr>
+            <p:ph type="sldImg"/>
+          </p:nvPr>
+        </p:nvSpPr>
+        <p:spPr/>
+      </p:sp>
+      <p:sp>
+        <p:nvSpPr>
+          <p:cNvPr id="3" name="ノート プレースホルダー 2"/>
+          <p:cNvSpPr>
+            <a:spLocks noGrp="1"/>
+          </p:cNvSpPr>
+          <p:nvPr>
+            <p:ph type="body" idx="1"/>
+          </p:nvPr>
+        </p:nvSpPr>
+        <p:spPr/>
+        <p:txBody>
+          <a:bodyPr/>
+          <a:lstStyle/>
+          <a:p>
+            <a:r>
+              <a:rPr kumimoji="1" lang="ja-JP" altLang="en-US" dirty="0"/>
+              <a:t>今回、私たちは脱出ゲームを作成しました。</a:t>
+            </a:r>
+          </a:p>
+        </p:txBody>
+      </p:sp>
+      <p:sp>
+        <p:nvSpPr>
+          <p:cNvPr id="4" name="スライド番号プレースホルダー 3"/>
+          <p:cNvSpPr>
+            <a:spLocks noGrp="1"/>
+          </p:cNvSpPr>
+          <p:nvPr>
+            <p:ph type="sldNum" sz="quarter" idx="5"/>
+          </p:nvPr>
+        </p:nvSpPr>
+        <p:spPr/>
+        <p:txBody>
+          <a:bodyPr/>
+          <a:lstStyle/>
+          <a:p>
+            <a:fld id="{6F8E4C60-5A42-4E15-8635-A2555BD9D563}" type="slidenum">
+              <a:rPr kumimoji="1" lang="ja-JP" altLang="en-US" smtClean="0"/>
+              <a:t>1</a:t>
+            </a:fld>
+            <a:endParaRPr kumimoji="1" lang="ja-JP" altLang="en-US"/>
+          </a:p>
+        </p:txBody>
+      </p:sp>
+    </p:spTree>
+    <p:extLst>
+      <p:ext uri="{BB962C8B-B14F-4D97-AF65-F5344CB8AC3E}">
+        <p14:creationId xmlns:p14="http://schemas.microsoft.com/office/powerpoint/2010/main" val="558516987"/>
+      </p:ext>
+    </p:extLst>
+  </p:cSld>
+  <p:clrMapOvr>
+    <a:masterClrMapping/>
+  </p:clrMapOvr>
+</p:notes>
+</file>
+
 <file path=ppt/slideLayouts/slideLayout1.xml><?xml version="1.0" encoding="utf-8"?>
-<p:sldLayout xmlns:a="http://schemas.openxmlformats.org/drawingml/2006/main" xmlns:r="http://schemas.openxmlformats.org/officeDocument/2006/relationships" xmlns:p="http://schemas.openxmlformats.org/presentationml/2006/main" type="title" preserve="1">
+<p:sldLayout xmlns:a="http://schemas.openxmlformats.org/drawingml/2006/main" xmlns:r="http://schemas.openxmlformats.org/officeDocument/2006/relationships" xmlns:p="http://schemas.openxmlformats.org/presentationml/2006/main" showMasterSp="0" type="title" preserve="1">
   <p:cSld name="タイトル スライド">
     <p:spTree>
       <p:nvGrpSpPr>
@@ -134,13 +610,83 @@
       </p:grpSpPr>
       <p:sp>
         <p:nvSpPr>
-          <p:cNvPr id="2" name="タイトル 1">
-            <a:extLst>
-              <a:ext uri="{FF2B5EF4-FFF2-40B4-BE49-F238E27FC236}">
-                <a16:creationId xmlns:a16="http://schemas.microsoft.com/office/drawing/2014/main" id="{1DDAAD0C-A49D-1FE7-EAAB-E6FB64822744}"/>
-              </a:ext>
-            </a:extLst>
-          </p:cNvPr>
+          <p:cNvPr id="7" name="Rectangle 6"/>
+          <p:cNvSpPr/>
+          <p:nvPr/>
+        </p:nvSpPr>
+        <p:spPr>
+          <a:xfrm>
+            <a:off x="3175" y="6400800"/>
+            <a:ext cx="12188825" cy="457200"/>
+          </a:xfrm>
+          <a:prstGeom prst="rect">
+            <a:avLst/>
+          </a:prstGeom>
+          <a:solidFill>
+            <a:schemeClr val="accent2"/>
+          </a:solidFill>
+          <a:ln>
+            <a:noFill/>
+          </a:ln>
+        </p:spPr>
+        <p:style>
+          <a:lnRef idx="2">
+            <a:schemeClr val="accent1">
+              <a:shade val="50000"/>
+            </a:schemeClr>
+          </a:lnRef>
+          <a:fillRef idx="1">
+            <a:schemeClr val="accent1"/>
+          </a:fillRef>
+          <a:effectRef idx="0">
+            <a:schemeClr val="accent1"/>
+          </a:effectRef>
+          <a:fontRef idx="minor">
+            <a:schemeClr val="lt1"/>
+          </a:fontRef>
+        </p:style>
+      </p:sp>
+      <p:sp>
+        <p:nvSpPr>
+          <p:cNvPr id="8" name="Rectangle 7"/>
+          <p:cNvSpPr/>
+          <p:nvPr/>
+        </p:nvSpPr>
+        <p:spPr>
+          <a:xfrm>
+            <a:off x="15" y="6334316"/>
+            <a:ext cx="12188825" cy="64008"/>
+          </a:xfrm>
+          <a:prstGeom prst="rect">
+            <a:avLst/>
+          </a:prstGeom>
+          <a:solidFill>
+            <a:schemeClr val="accent1"/>
+          </a:solidFill>
+          <a:ln>
+            <a:noFill/>
+          </a:ln>
+        </p:spPr>
+        <p:style>
+          <a:lnRef idx="2">
+            <a:schemeClr val="accent1">
+              <a:shade val="50000"/>
+            </a:schemeClr>
+          </a:lnRef>
+          <a:fillRef idx="1">
+            <a:schemeClr val="accent1"/>
+          </a:fillRef>
+          <a:effectRef idx="0">
+            <a:schemeClr val="accent1"/>
+          </a:effectRef>
+          <a:fontRef idx="minor">
+            <a:schemeClr val="lt1"/>
+          </a:fontRef>
+        </p:style>
+      </p:sp>
+      <p:sp>
+        <p:nvSpPr>
+          <p:cNvPr id="2" name="Title 1"/>
           <p:cNvSpPr>
             <a:spLocks noGrp="1"/>
           </p:cNvSpPr>
@@ -150,34 +696,41 @@
         </p:nvSpPr>
         <p:spPr>
           <a:xfrm>
-            <a:off x="1524000" y="1122363"/>
-            <a:ext cx="9144000" cy="2387600"/>
-          </a:xfrm>
-        </p:spPr>
-        <p:txBody>
-          <a:bodyPr anchor="b"/>
+            <a:off x="1097280" y="758952"/>
+            <a:ext cx="10058400" cy="3566160"/>
+          </a:xfrm>
+        </p:spPr>
+        <p:txBody>
+          <a:bodyPr anchor="b">
+            <a:normAutofit/>
+          </a:bodyPr>
           <a:lstStyle>
-            <a:lvl1pPr algn="ctr">
-              <a:defRPr sz="6000"/>
+            <a:lvl1pPr algn="l">
+              <a:lnSpc>
+                <a:spcPct val="85000"/>
+              </a:lnSpc>
+              <a:defRPr sz="8000" spc="-50" baseline="0">
+                <a:solidFill>
+                  <a:schemeClr val="tx1">
+                    <a:lumMod val="85000"/>
+                    <a:lumOff val="15000"/>
+                  </a:schemeClr>
+                </a:solidFill>
+              </a:defRPr>
             </a:lvl1pPr>
           </a:lstStyle>
           <a:p>
             <a:r>
-              <a:rPr kumimoji="1" lang="ja-JP" altLang="en-US"/>
+              <a:rPr lang="ja-JP" altLang="en-US"/>
               <a:t>マスター タイトルの書式設定</a:t>
             </a:r>
-          </a:p>
-        </p:txBody>
-      </p:sp>
-      <p:sp>
-        <p:nvSpPr>
-          <p:cNvPr id="3" name="字幕 2">
-            <a:extLst>
-              <a:ext uri="{FF2B5EF4-FFF2-40B4-BE49-F238E27FC236}">
-                <a16:creationId xmlns:a16="http://schemas.microsoft.com/office/drawing/2014/main" id="{0C1E901B-8BDA-B86B-F388-AE88EF60BE2A}"/>
-              </a:ext>
-            </a:extLst>
-          </p:cNvPr>
+            <a:endParaRPr lang="en-US" dirty="0"/>
+          </a:p>
+        </p:txBody>
+      </p:sp>
+      <p:sp>
+        <p:nvSpPr>
+          <p:cNvPr id="3" name="Subtitle 2"/>
           <p:cNvSpPr>
             <a:spLocks noGrp="1"/>
           </p:cNvSpPr>
@@ -187,67 +740,69 @@
         </p:nvSpPr>
         <p:spPr>
           <a:xfrm>
-            <a:off x="1524000" y="3602038"/>
-            <a:ext cx="9144000" cy="1655762"/>
-          </a:xfrm>
-        </p:spPr>
-        <p:txBody>
-          <a:bodyPr/>
+            <a:off x="1100051" y="4455620"/>
+            <a:ext cx="10058400" cy="1143000"/>
+          </a:xfrm>
+        </p:spPr>
+        <p:txBody>
+          <a:bodyPr lIns="91440" rIns="91440">
+            <a:normAutofit/>
+          </a:bodyPr>
           <a:lstStyle>
-            <a:lvl1pPr marL="0" indent="0" algn="ctr">
+            <a:lvl1pPr marL="0" indent="0" algn="l">
               <a:buNone/>
-              <a:defRPr sz="2400"/>
+              <a:defRPr sz="2400" cap="all" spc="200" baseline="0">
+                <a:solidFill>
+                  <a:schemeClr val="tx2"/>
+                </a:solidFill>
+                <a:latin typeface="+mj-lt"/>
+              </a:defRPr>
             </a:lvl1pPr>
             <a:lvl2pPr marL="457200" indent="0" algn="ctr">
               <a:buNone/>
-              <a:defRPr sz="2000"/>
+              <a:defRPr sz="2400"/>
             </a:lvl2pPr>
             <a:lvl3pPr marL="914400" indent="0" algn="ctr">
               <a:buNone/>
-              <a:defRPr sz="1800"/>
+              <a:defRPr sz="2400"/>
             </a:lvl3pPr>
             <a:lvl4pPr marL="1371600" indent="0" algn="ctr">
               <a:buNone/>
-              <a:defRPr sz="1600"/>
+              <a:defRPr sz="2000"/>
             </a:lvl4pPr>
             <a:lvl5pPr marL="1828800" indent="0" algn="ctr">
               <a:buNone/>
-              <a:defRPr sz="1600"/>
+              <a:defRPr sz="2000"/>
             </a:lvl5pPr>
             <a:lvl6pPr marL="2286000" indent="0" algn="ctr">
               <a:buNone/>
-              <a:defRPr sz="1600"/>
+              <a:defRPr sz="2000"/>
             </a:lvl6pPr>
             <a:lvl7pPr marL="2743200" indent="0" algn="ctr">
               <a:buNone/>
-              <a:defRPr sz="1600"/>
+              <a:defRPr sz="2000"/>
             </a:lvl7pPr>
             <a:lvl8pPr marL="3200400" indent="0" algn="ctr">
               <a:buNone/>
-              <a:defRPr sz="1600"/>
+              <a:defRPr sz="2000"/>
             </a:lvl8pPr>
             <a:lvl9pPr marL="3657600" indent="0" algn="ctr">
               <a:buNone/>
-              <a:defRPr sz="1600"/>
+              <a:defRPr sz="2000"/>
             </a:lvl9pPr>
           </a:lstStyle>
           <a:p>
             <a:r>
-              <a:rPr kumimoji="1" lang="ja-JP" altLang="en-US"/>
+              <a:rPr lang="ja-JP" altLang="en-US"/>
               <a:t>マスター サブタイトルの書式設定</a:t>
             </a:r>
-          </a:p>
-        </p:txBody>
-      </p:sp>
-      <p:sp>
-        <p:nvSpPr>
-          <p:cNvPr id="4" name="日付プレースホルダー 3">
-            <a:extLst>
-              <a:ext uri="{FF2B5EF4-FFF2-40B4-BE49-F238E27FC236}">
-                <a16:creationId xmlns:a16="http://schemas.microsoft.com/office/drawing/2014/main" id="{9990B963-D41E-5763-F039-C36BAB1F3FC3}"/>
-              </a:ext>
-            </a:extLst>
-          </p:cNvPr>
+            <a:endParaRPr lang="en-US" dirty="0"/>
+          </a:p>
+        </p:txBody>
+      </p:sp>
+      <p:sp>
+        <p:nvSpPr>
+          <p:cNvPr id="4" name="Date Placeholder 3"/>
           <p:cNvSpPr>
             <a:spLocks noGrp="1"/>
           </p:cNvSpPr>
@@ -262,7 +817,7 @@
           <a:p>
             <a:fld id="{18CA95F4-0FB2-4DCC-8987-71DF119592E9}" type="datetimeFigureOut">
               <a:rPr kumimoji="1" lang="ja-JP" altLang="en-US" smtClean="0"/>
-              <a:t>2026/7/22</a:t>
+              <a:t>2026/7/27</a:t>
             </a:fld>
             <a:endParaRPr kumimoji="1" lang="ja-JP" altLang="en-US"/>
           </a:p>
@@ -270,13 +825,7 @@
       </p:sp>
       <p:sp>
         <p:nvSpPr>
-          <p:cNvPr id="5" name="フッター プレースホルダー 4">
-            <a:extLst>
-              <a:ext uri="{FF2B5EF4-FFF2-40B4-BE49-F238E27FC236}">
-                <a16:creationId xmlns:a16="http://schemas.microsoft.com/office/drawing/2014/main" id="{D0AF2E01-EEB1-1353-0C33-1853E73156A7}"/>
-              </a:ext>
-            </a:extLst>
-          </p:cNvPr>
+          <p:cNvPr id="5" name="Footer Placeholder 4"/>
           <p:cNvSpPr>
             <a:spLocks noGrp="1"/>
           </p:cNvSpPr>
@@ -295,13 +844,7 @@
       </p:sp>
       <p:sp>
         <p:nvSpPr>
-          <p:cNvPr id="6" name="スライド番号プレースホルダー 5">
-            <a:extLst>
-              <a:ext uri="{FF2B5EF4-FFF2-40B4-BE49-F238E27FC236}">
-                <a16:creationId xmlns:a16="http://schemas.microsoft.com/office/drawing/2014/main" id="{E07E9D7E-C78A-FA85-F5FE-B580ED117BB9}"/>
-              </a:ext>
-            </a:extLst>
-          </p:cNvPr>
+          <p:cNvPr id="6" name="Slide Number Placeholder 5"/>
           <p:cNvSpPr>
             <a:spLocks noGrp="1"/>
           </p:cNvSpPr>
@@ -322,10 +865,48 @@
           </a:p>
         </p:txBody>
       </p:sp>
+      <p:cxnSp>
+        <p:nvCxnSpPr>
+          <p:cNvPr id="9" name="Straight Connector 8"/>
+          <p:cNvCxnSpPr/>
+          <p:nvPr/>
+        </p:nvCxnSpPr>
+        <p:spPr>
+          <a:xfrm>
+            <a:off x="1207658" y="4343400"/>
+            <a:ext cx="9875520" cy="0"/>
+          </a:xfrm>
+          <a:prstGeom prst="line">
+            <a:avLst/>
+          </a:prstGeom>
+          <a:ln w="6350">
+            <a:solidFill>
+              <a:schemeClr val="tx1">
+                <a:lumMod val="50000"/>
+                <a:lumOff val="50000"/>
+              </a:schemeClr>
+            </a:solidFill>
+          </a:ln>
+        </p:spPr>
+        <p:style>
+          <a:lnRef idx="1">
+            <a:schemeClr val="accent1"/>
+          </a:lnRef>
+          <a:fillRef idx="0">
+            <a:schemeClr val="accent1"/>
+          </a:fillRef>
+          <a:effectRef idx="0">
+            <a:schemeClr val="accent1"/>
+          </a:effectRef>
+          <a:fontRef idx="minor">
+            <a:schemeClr val="tx1"/>
+          </a:fontRef>
+        </p:style>
+      </p:cxnSp>
     </p:spTree>
     <p:extLst>
       <p:ext uri="{BB962C8B-B14F-4D97-AF65-F5344CB8AC3E}">
-        <p14:creationId xmlns:p14="http://schemas.microsoft.com/office/powerpoint/2010/main" val="1422963139"/>
+        <p14:creationId xmlns:p14="http://schemas.microsoft.com/office/powerpoint/2010/main" val="1487166300"/>
       </p:ext>
     </p:extLst>
   </p:cSld>
@@ -354,13 +935,7 @@
       </p:grpSpPr>
       <p:sp>
         <p:nvSpPr>
-          <p:cNvPr id="2" name="タイトル 1">
-            <a:extLst>
-              <a:ext uri="{FF2B5EF4-FFF2-40B4-BE49-F238E27FC236}">
-                <a16:creationId xmlns:a16="http://schemas.microsoft.com/office/drawing/2014/main" id="{434A1DA1-6E36-1C54-45A1-BE6C5728887C}"/>
-              </a:ext>
-            </a:extLst>
-          </p:cNvPr>
+          <p:cNvPr id="2" name="Title 1"/>
           <p:cNvSpPr>
             <a:spLocks noGrp="1"/>
           </p:cNvSpPr>
@@ -374,21 +949,16 @@
           <a:lstStyle/>
           <a:p>
             <a:r>
-              <a:rPr kumimoji="1" lang="ja-JP" altLang="en-US"/>
+              <a:rPr lang="ja-JP" altLang="en-US"/>
               <a:t>マスター タイトルの書式設定</a:t>
             </a:r>
-          </a:p>
-        </p:txBody>
-      </p:sp>
-      <p:sp>
-        <p:nvSpPr>
-          <p:cNvPr id="3" name="縦書きテキスト プレースホルダー 2">
-            <a:extLst>
-              <a:ext uri="{FF2B5EF4-FFF2-40B4-BE49-F238E27FC236}">
-                <a16:creationId xmlns:a16="http://schemas.microsoft.com/office/drawing/2014/main" id="{15A59C74-B0B2-00F5-EDE6-1A75514CA8E0}"/>
-              </a:ext>
-            </a:extLst>
-          </p:cNvPr>
+            <a:endParaRPr lang="en-US" dirty="0"/>
+          </a:p>
+        </p:txBody>
+      </p:sp>
+      <p:sp>
+        <p:nvSpPr>
+          <p:cNvPr id="3" name="Vertical Text Placeholder 2"/>
           <p:cNvSpPr>
             <a:spLocks noGrp="1"/>
           </p:cNvSpPr>
@@ -398,86 +968,81 @@
         </p:nvSpPr>
         <p:spPr/>
         <p:txBody>
-          <a:bodyPr vert="eaVert"/>
+          <a:bodyPr vert="eaVert" lIns="45720" tIns="0" rIns="45720" bIns="0"/>
           <a:lstStyle/>
           <a:p>
             <a:pPr lvl="0"/>
             <a:r>
-              <a:rPr kumimoji="1" lang="ja-JP" altLang="en-US"/>
+              <a:rPr lang="ja-JP" altLang="en-US"/>
               <a:t>マスター テキストの書式設定</a:t>
             </a:r>
           </a:p>
           <a:p>
             <a:pPr lvl="1"/>
             <a:r>
-              <a:rPr kumimoji="1" lang="ja-JP" altLang="en-US"/>
+              <a:rPr lang="ja-JP" altLang="en-US"/>
               <a:t>第 </a:t>
             </a:r>
             <a:r>
-              <a:rPr kumimoji="1" lang="en-US" altLang="ja-JP"/>
+              <a:rPr lang="en-US" altLang="ja-JP"/>
               <a:t>2 </a:t>
             </a:r>
             <a:r>
-              <a:rPr kumimoji="1" lang="ja-JP" altLang="en-US"/>
+              <a:rPr lang="ja-JP" altLang="en-US"/>
               <a:t>レベル</a:t>
             </a:r>
           </a:p>
           <a:p>
             <a:pPr lvl="2"/>
             <a:r>
-              <a:rPr kumimoji="1" lang="ja-JP" altLang="en-US"/>
+              <a:rPr lang="ja-JP" altLang="en-US"/>
               <a:t>第 </a:t>
             </a:r>
             <a:r>
-              <a:rPr kumimoji="1" lang="en-US" altLang="ja-JP"/>
+              <a:rPr lang="en-US" altLang="ja-JP"/>
               <a:t>3 </a:t>
             </a:r>
             <a:r>
-              <a:rPr kumimoji="1" lang="ja-JP" altLang="en-US"/>
+              <a:rPr lang="ja-JP" altLang="en-US"/>
               <a:t>レベル</a:t>
             </a:r>
           </a:p>
           <a:p>
             <a:pPr lvl="3"/>
             <a:r>
-              <a:rPr kumimoji="1" lang="ja-JP" altLang="en-US"/>
+              <a:rPr lang="ja-JP" altLang="en-US"/>
               <a:t>第 </a:t>
             </a:r>
             <a:r>
-              <a:rPr kumimoji="1" lang="en-US" altLang="ja-JP"/>
+              <a:rPr lang="en-US" altLang="ja-JP"/>
               <a:t>4 </a:t>
             </a:r>
             <a:r>
-              <a:rPr kumimoji="1" lang="ja-JP" altLang="en-US"/>
+              <a:rPr lang="ja-JP" altLang="en-US"/>
               <a:t>レベル</a:t>
             </a:r>
           </a:p>
           <a:p>
             <a:pPr lvl="4"/>
             <a:r>
-              <a:rPr kumimoji="1" lang="ja-JP" altLang="en-US"/>
+              <a:rPr lang="ja-JP" altLang="en-US"/>
               <a:t>第 </a:t>
             </a:r>
             <a:r>
-              <a:rPr kumimoji="1" lang="en-US" altLang="ja-JP"/>
+              <a:rPr lang="en-US" altLang="ja-JP"/>
               <a:t>5 </a:t>
             </a:r>
             <a:r>
-              <a:rPr kumimoji="1" lang="ja-JP" altLang="en-US"/>
+              <a:rPr lang="ja-JP" altLang="en-US"/>
               <a:t>レベル</a:t>
             </a:r>
-          </a:p>
-        </p:txBody>
-      </p:sp>
-      <p:sp>
-        <p:nvSpPr>
-          <p:cNvPr id="4" name="日付プレースホルダー 3">
-            <a:extLst>
-              <a:ext uri="{FF2B5EF4-FFF2-40B4-BE49-F238E27FC236}">
-                <a16:creationId xmlns:a16="http://schemas.microsoft.com/office/drawing/2014/main" id="{7B7D9E58-32A6-3058-7900-236D23311710}"/>
-              </a:ext>
-            </a:extLst>
-          </p:cNvPr>
+            <a:endParaRPr lang="en-US" dirty="0"/>
+          </a:p>
+        </p:txBody>
+      </p:sp>
+      <p:sp>
+        <p:nvSpPr>
+          <p:cNvPr id="4" name="Date Placeholder 3"/>
           <p:cNvSpPr>
             <a:spLocks noGrp="1"/>
           </p:cNvSpPr>
@@ -492,7 +1057,7 @@
           <a:p>
             <a:fld id="{18CA95F4-0FB2-4DCC-8987-71DF119592E9}" type="datetimeFigureOut">
               <a:rPr kumimoji="1" lang="ja-JP" altLang="en-US" smtClean="0"/>
-              <a:t>2026/7/22</a:t>
+              <a:t>2026/7/27</a:t>
             </a:fld>
             <a:endParaRPr kumimoji="1" lang="ja-JP" altLang="en-US"/>
           </a:p>
@@ -500,13 +1065,7 @@
       </p:sp>
       <p:sp>
         <p:nvSpPr>
-          <p:cNvPr id="5" name="フッター プレースホルダー 4">
-            <a:extLst>
-              <a:ext uri="{FF2B5EF4-FFF2-40B4-BE49-F238E27FC236}">
-                <a16:creationId xmlns:a16="http://schemas.microsoft.com/office/drawing/2014/main" id="{080E945E-FCB0-DA4A-B690-04158B81637D}"/>
-              </a:ext>
-            </a:extLst>
-          </p:cNvPr>
+          <p:cNvPr id="5" name="Footer Placeholder 4"/>
           <p:cNvSpPr>
             <a:spLocks noGrp="1"/>
           </p:cNvSpPr>
@@ -525,13 +1084,7 @@
       </p:sp>
       <p:sp>
         <p:nvSpPr>
-          <p:cNvPr id="6" name="スライド番号プレースホルダー 5">
-            <a:extLst>
-              <a:ext uri="{FF2B5EF4-FFF2-40B4-BE49-F238E27FC236}">
-                <a16:creationId xmlns:a16="http://schemas.microsoft.com/office/drawing/2014/main" id="{8D89F78E-3482-31D4-B094-D71847E51DC0}"/>
-              </a:ext>
-            </a:extLst>
-          </p:cNvPr>
+          <p:cNvPr id="6" name="Slide Number Placeholder 5"/>
           <p:cNvSpPr>
             <a:spLocks noGrp="1"/>
           </p:cNvSpPr>
@@ -555,7 +1108,7 @@
     </p:spTree>
     <p:extLst>
       <p:ext uri="{BB962C8B-B14F-4D97-AF65-F5344CB8AC3E}">
-        <p14:creationId xmlns:p14="http://schemas.microsoft.com/office/powerpoint/2010/main" val="1649844071"/>
+        <p14:creationId xmlns:p14="http://schemas.microsoft.com/office/powerpoint/2010/main" val="298723745"/>
       </p:ext>
     </p:extLst>
   </p:cSld>
@@ -566,7 +1119,7 @@
 </file>
 
 <file path=ppt/slideLayouts/slideLayout11.xml><?xml version="1.0" encoding="utf-8"?>
-<p:sldLayout xmlns:a="http://schemas.openxmlformats.org/drawingml/2006/main" xmlns:r="http://schemas.openxmlformats.org/officeDocument/2006/relationships" xmlns:p="http://schemas.openxmlformats.org/presentationml/2006/main" type="vertTitleAndTx" preserve="1">
+<p:sldLayout xmlns:a="http://schemas.openxmlformats.org/drawingml/2006/main" xmlns:r="http://schemas.openxmlformats.org/officeDocument/2006/relationships" xmlns:p="http://schemas.openxmlformats.org/presentationml/2006/main" showMasterSp="0" type="vertTitleAndTx" preserve="1">
   <p:cSld name="縦書きタイトルと&#10;縦書きテキスト">
     <p:spTree>
       <p:nvGrpSpPr>
@@ -584,13 +1137,83 @@
       </p:grpSpPr>
       <p:sp>
         <p:nvSpPr>
-          <p:cNvPr id="2" name="縦書きタイトル 1">
-            <a:extLst>
-              <a:ext uri="{FF2B5EF4-FFF2-40B4-BE49-F238E27FC236}">
-                <a16:creationId xmlns:a16="http://schemas.microsoft.com/office/drawing/2014/main" id="{1842747D-DC02-0A8B-C588-A28D93C28BD9}"/>
-              </a:ext>
-            </a:extLst>
-          </p:cNvPr>
+          <p:cNvPr id="7" name="Rectangle 6"/>
+          <p:cNvSpPr/>
+          <p:nvPr/>
+        </p:nvSpPr>
+        <p:spPr>
+          <a:xfrm>
+            <a:off x="3175" y="6400800"/>
+            <a:ext cx="12188825" cy="457200"/>
+          </a:xfrm>
+          <a:prstGeom prst="rect">
+            <a:avLst/>
+          </a:prstGeom>
+          <a:solidFill>
+            <a:schemeClr val="accent2"/>
+          </a:solidFill>
+          <a:ln>
+            <a:noFill/>
+          </a:ln>
+        </p:spPr>
+        <p:style>
+          <a:lnRef idx="2">
+            <a:schemeClr val="accent1">
+              <a:shade val="50000"/>
+            </a:schemeClr>
+          </a:lnRef>
+          <a:fillRef idx="1">
+            <a:schemeClr val="accent1"/>
+          </a:fillRef>
+          <a:effectRef idx="0">
+            <a:schemeClr val="accent1"/>
+          </a:effectRef>
+          <a:fontRef idx="minor">
+            <a:schemeClr val="lt1"/>
+          </a:fontRef>
+        </p:style>
+      </p:sp>
+      <p:sp>
+        <p:nvSpPr>
+          <p:cNvPr id="8" name="Rectangle 7"/>
+          <p:cNvSpPr/>
+          <p:nvPr/>
+        </p:nvSpPr>
+        <p:spPr>
+          <a:xfrm>
+            <a:off x="15" y="6334316"/>
+            <a:ext cx="12188825" cy="64008"/>
+          </a:xfrm>
+          <a:prstGeom prst="rect">
+            <a:avLst/>
+          </a:prstGeom>
+          <a:solidFill>
+            <a:schemeClr val="accent1"/>
+          </a:solidFill>
+          <a:ln>
+            <a:noFill/>
+          </a:ln>
+        </p:spPr>
+        <p:style>
+          <a:lnRef idx="2">
+            <a:schemeClr val="accent1">
+              <a:shade val="50000"/>
+            </a:schemeClr>
+          </a:lnRef>
+          <a:fillRef idx="1">
+            <a:schemeClr val="accent1"/>
+          </a:fillRef>
+          <a:effectRef idx="0">
+            <a:schemeClr val="accent1"/>
+          </a:effectRef>
+          <a:fontRef idx="minor">
+            <a:schemeClr val="lt1"/>
+          </a:fontRef>
+        </p:style>
+      </p:sp>
+      <p:sp>
+        <p:nvSpPr>
+          <p:cNvPr id="2" name="Vertical Title 1"/>
           <p:cNvSpPr>
             <a:spLocks noGrp="1"/>
           </p:cNvSpPr>
@@ -600,8 +1223,8 @@
         </p:nvSpPr>
         <p:spPr>
           <a:xfrm>
-            <a:off x="8724900" y="365125"/>
-            <a:ext cx="2628900" cy="5811838"/>
+            <a:off x="8724900" y="414778"/>
+            <a:ext cx="2628900" cy="5757421"/>
           </a:xfrm>
         </p:spPr>
         <p:txBody>
@@ -609,21 +1232,16 @@
           <a:lstStyle/>
           <a:p>
             <a:r>
-              <a:rPr kumimoji="1" lang="ja-JP" altLang="en-US"/>
+              <a:rPr lang="ja-JP" altLang="en-US"/>
               <a:t>マスター タイトルの書式設定</a:t>
             </a:r>
-          </a:p>
-        </p:txBody>
-      </p:sp>
-      <p:sp>
-        <p:nvSpPr>
-          <p:cNvPr id="3" name="縦書きテキスト プレースホルダー 2">
-            <a:extLst>
-              <a:ext uri="{FF2B5EF4-FFF2-40B4-BE49-F238E27FC236}">
-                <a16:creationId xmlns:a16="http://schemas.microsoft.com/office/drawing/2014/main" id="{6BF68CC5-35A9-C336-6F5D-70CD51157129}"/>
-              </a:ext>
-            </a:extLst>
-          </p:cNvPr>
+            <a:endParaRPr lang="en-US" dirty="0"/>
+          </a:p>
+        </p:txBody>
+      </p:sp>
+      <p:sp>
+        <p:nvSpPr>
+          <p:cNvPr id="3" name="Vertical Text Placeholder 2"/>
           <p:cNvSpPr>
             <a:spLocks noGrp="1"/>
           </p:cNvSpPr>
@@ -633,91 +1251,86 @@
         </p:nvSpPr>
         <p:spPr>
           <a:xfrm>
-            <a:off x="838200" y="365125"/>
-            <a:ext cx="7734300" cy="5811838"/>
-          </a:xfrm>
-        </p:spPr>
-        <p:txBody>
-          <a:bodyPr vert="eaVert"/>
+            <a:off x="838200" y="414778"/>
+            <a:ext cx="7734300" cy="5757422"/>
+          </a:xfrm>
+        </p:spPr>
+        <p:txBody>
+          <a:bodyPr vert="eaVert" lIns="45720" tIns="0" rIns="45720" bIns="0"/>
           <a:lstStyle/>
           <a:p>
             <a:pPr lvl="0"/>
             <a:r>
-              <a:rPr kumimoji="1" lang="ja-JP" altLang="en-US"/>
+              <a:rPr lang="ja-JP" altLang="en-US"/>
               <a:t>マスター テキストの書式設定</a:t>
             </a:r>
           </a:p>
           <a:p>
             <a:pPr lvl="1"/>
             <a:r>
-              <a:rPr kumimoji="1" lang="ja-JP" altLang="en-US"/>
+              <a:rPr lang="ja-JP" altLang="en-US"/>
               <a:t>第 </a:t>
             </a:r>
             <a:r>
-              <a:rPr kumimoji="1" lang="en-US" altLang="ja-JP"/>
+              <a:rPr lang="en-US" altLang="ja-JP"/>
               <a:t>2 </a:t>
             </a:r>
             <a:r>
-              <a:rPr kumimoji="1" lang="ja-JP" altLang="en-US"/>
+              <a:rPr lang="ja-JP" altLang="en-US"/>
               <a:t>レベル</a:t>
             </a:r>
           </a:p>
           <a:p>
             <a:pPr lvl="2"/>
             <a:r>
-              <a:rPr kumimoji="1" lang="ja-JP" altLang="en-US"/>
+              <a:rPr lang="ja-JP" altLang="en-US"/>
               <a:t>第 </a:t>
             </a:r>
             <a:r>
-              <a:rPr kumimoji="1" lang="en-US" altLang="ja-JP"/>
+              <a:rPr lang="en-US" altLang="ja-JP"/>
               <a:t>3 </a:t>
             </a:r>
             <a:r>
-              <a:rPr kumimoji="1" lang="ja-JP" altLang="en-US"/>
+              <a:rPr lang="ja-JP" altLang="en-US"/>
               <a:t>レベル</a:t>
             </a:r>
           </a:p>
           <a:p>
             <a:pPr lvl="3"/>
             <a:r>
-              <a:rPr kumimoji="1" lang="ja-JP" altLang="en-US"/>
+              <a:rPr lang="ja-JP" altLang="en-US"/>
               <a:t>第 </a:t>
             </a:r>
             <a:r>
-              <a:rPr kumimoji="1" lang="en-US" altLang="ja-JP"/>
+              <a:rPr lang="en-US" altLang="ja-JP"/>
               <a:t>4 </a:t>
             </a:r>
             <a:r>
-              <a:rPr kumimoji="1" lang="ja-JP" altLang="en-US"/>
+              <a:rPr lang="ja-JP" altLang="en-US"/>
               <a:t>レベル</a:t>
             </a:r>
           </a:p>
           <a:p>
             <a:pPr lvl="4"/>
             <a:r>
-              <a:rPr kumimoji="1" lang="ja-JP" altLang="en-US"/>
+              <a:rPr lang="ja-JP" altLang="en-US"/>
               <a:t>第 </a:t>
             </a:r>
             <a:r>
-              <a:rPr kumimoji="1" lang="en-US" altLang="ja-JP"/>
+              <a:rPr lang="en-US" altLang="ja-JP"/>
               <a:t>5 </a:t>
             </a:r>
             <a:r>
-              <a:rPr kumimoji="1" lang="ja-JP" altLang="en-US"/>
+              <a:rPr lang="ja-JP" altLang="en-US"/>
               <a:t>レベル</a:t>
             </a:r>
-          </a:p>
-        </p:txBody>
-      </p:sp>
-      <p:sp>
-        <p:nvSpPr>
-          <p:cNvPr id="4" name="日付プレースホルダー 3">
-            <a:extLst>
-              <a:ext uri="{FF2B5EF4-FFF2-40B4-BE49-F238E27FC236}">
-                <a16:creationId xmlns:a16="http://schemas.microsoft.com/office/drawing/2014/main" id="{00D3EE32-621E-64F3-0E7E-93C1650587C6}"/>
-              </a:ext>
-            </a:extLst>
-          </p:cNvPr>
+            <a:endParaRPr lang="en-US" dirty="0"/>
+          </a:p>
+        </p:txBody>
+      </p:sp>
+      <p:sp>
+        <p:nvSpPr>
+          <p:cNvPr id="4" name="Date Placeholder 3"/>
           <p:cNvSpPr>
             <a:spLocks noGrp="1"/>
           </p:cNvSpPr>
@@ -732,7 +1345,7 @@
           <a:p>
             <a:fld id="{18CA95F4-0FB2-4DCC-8987-71DF119592E9}" type="datetimeFigureOut">
               <a:rPr kumimoji="1" lang="ja-JP" altLang="en-US" smtClean="0"/>
-              <a:t>2026/7/22</a:t>
+              <a:t>2026/7/27</a:t>
             </a:fld>
             <a:endParaRPr kumimoji="1" lang="ja-JP" altLang="en-US"/>
           </a:p>
@@ -740,13 +1353,7 @@
       </p:sp>
       <p:sp>
         <p:nvSpPr>
-          <p:cNvPr id="5" name="フッター プレースホルダー 4">
-            <a:extLst>
-              <a:ext uri="{FF2B5EF4-FFF2-40B4-BE49-F238E27FC236}">
-                <a16:creationId xmlns:a16="http://schemas.microsoft.com/office/drawing/2014/main" id="{1774AC09-EE3E-6BE9-AE30-FC30F355D660}"/>
-              </a:ext>
-            </a:extLst>
-          </p:cNvPr>
+          <p:cNvPr id="5" name="Footer Placeholder 4"/>
           <p:cNvSpPr>
             <a:spLocks noGrp="1"/>
           </p:cNvSpPr>
@@ -765,13 +1372,7 @@
       </p:sp>
       <p:sp>
         <p:nvSpPr>
-          <p:cNvPr id="6" name="スライド番号プレースホルダー 5">
-            <a:extLst>
-              <a:ext uri="{FF2B5EF4-FFF2-40B4-BE49-F238E27FC236}">
-                <a16:creationId xmlns:a16="http://schemas.microsoft.com/office/drawing/2014/main" id="{7AA361E3-EA22-F4C7-A349-A6E87D309938}"/>
-              </a:ext>
-            </a:extLst>
-          </p:cNvPr>
+          <p:cNvPr id="6" name="Slide Number Placeholder 5"/>
           <p:cNvSpPr>
             <a:spLocks noGrp="1"/>
           </p:cNvSpPr>
@@ -795,7 +1396,7 @@
     </p:spTree>
     <p:extLst>
       <p:ext uri="{BB962C8B-B14F-4D97-AF65-F5344CB8AC3E}">
-        <p14:creationId xmlns:p14="http://schemas.microsoft.com/office/powerpoint/2010/main" val="412610350"/>
+        <p14:creationId xmlns:p14="http://schemas.microsoft.com/office/powerpoint/2010/main" val="3198564809"/>
       </p:ext>
     </p:extLst>
   </p:cSld>
@@ -824,13 +1425,7 @@
       </p:grpSpPr>
       <p:sp>
         <p:nvSpPr>
-          <p:cNvPr id="2" name="タイトル 1">
-            <a:extLst>
-              <a:ext uri="{FF2B5EF4-FFF2-40B4-BE49-F238E27FC236}">
-                <a16:creationId xmlns:a16="http://schemas.microsoft.com/office/drawing/2014/main" id="{E49BA539-AC2F-4AF6-3B23-900ED3A1791D}"/>
-              </a:ext>
-            </a:extLst>
-          </p:cNvPr>
+          <p:cNvPr id="2" name="Title 1"/>
           <p:cNvSpPr>
             <a:spLocks noGrp="1"/>
           </p:cNvSpPr>
@@ -841,24 +1436,23 @@
         <p:spPr/>
         <p:txBody>
           <a:bodyPr/>
-          <a:lstStyle/>
-          <a:p>
-            <a:r>
-              <a:rPr kumimoji="1" lang="ja-JP" altLang="en-US"/>
+          <a:lstStyle>
+            <a:lvl1pPr marL="0">
+              <a:defRPr/>
+            </a:lvl1pPr>
+          </a:lstStyle>
+          <a:p>
+            <a:r>
+              <a:rPr lang="ja-JP" altLang="en-US"/>
               <a:t>マスター タイトルの書式設定</a:t>
             </a:r>
-          </a:p>
-        </p:txBody>
-      </p:sp>
-      <p:sp>
-        <p:nvSpPr>
-          <p:cNvPr id="3" name="コンテンツ プレースホルダー 2">
-            <a:extLst>
-              <a:ext uri="{FF2B5EF4-FFF2-40B4-BE49-F238E27FC236}">
-                <a16:creationId xmlns:a16="http://schemas.microsoft.com/office/drawing/2014/main" id="{5ABB814C-91DB-1D20-063F-9E9D0928D2EE}"/>
-              </a:ext>
-            </a:extLst>
-          </p:cNvPr>
+            <a:endParaRPr lang="en-US" dirty="0"/>
+          </a:p>
+        </p:txBody>
+      </p:sp>
+      <p:sp>
+        <p:nvSpPr>
+          <p:cNvPr id="3" name="Content Placeholder 2"/>
           <p:cNvSpPr>
             <a:spLocks noGrp="1"/>
           </p:cNvSpPr>
@@ -873,81 +1467,76 @@
           <a:p>
             <a:pPr lvl="0"/>
             <a:r>
-              <a:rPr kumimoji="1" lang="ja-JP" altLang="en-US"/>
+              <a:rPr lang="ja-JP" altLang="en-US"/>
               <a:t>マスター テキストの書式設定</a:t>
             </a:r>
           </a:p>
           <a:p>
             <a:pPr lvl="1"/>
             <a:r>
-              <a:rPr kumimoji="1" lang="ja-JP" altLang="en-US"/>
+              <a:rPr lang="ja-JP" altLang="en-US"/>
               <a:t>第 </a:t>
             </a:r>
             <a:r>
-              <a:rPr kumimoji="1" lang="en-US" altLang="ja-JP"/>
+              <a:rPr lang="en-US" altLang="ja-JP"/>
               <a:t>2 </a:t>
             </a:r>
             <a:r>
-              <a:rPr kumimoji="1" lang="ja-JP" altLang="en-US"/>
+              <a:rPr lang="ja-JP" altLang="en-US"/>
               <a:t>レベル</a:t>
             </a:r>
           </a:p>
           <a:p>
             <a:pPr lvl="2"/>
             <a:r>
-              <a:rPr kumimoji="1" lang="ja-JP" altLang="en-US"/>
+              <a:rPr lang="ja-JP" altLang="en-US"/>
               <a:t>第 </a:t>
             </a:r>
             <a:r>
-              <a:rPr kumimoji="1" lang="en-US" altLang="ja-JP"/>
+              <a:rPr lang="en-US" altLang="ja-JP"/>
               <a:t>3 </a:t>
             </a:r>
             <a:r>
-              <a:rPr kumimoji="1" lang="ja-JP" altLang="en-US"/>
+              <a:rPr lang="ja-JP" altLang="en-US"/>
               <a:t>レベル</a:t>
             </a:r>
           </a:p>
           <a:p>
             <a:pPr lvl="3"/>
             <a:r>
-              <a:rPr kumimoji="1" lang="ja-JP" altLang="en-US"/>
+              <a:rPr lang="ja-JP" altLang="en-US"/>
               <a:t>第 </a:t>
             </a:r>
             <a:r>
-              <a:rPr kumimoji="1" lang="en-US" altLang="ja-JP"/>
+              <a:rPr lang="en-US" altLang="ja-JP"/>
               <a:t>4 </a:t>
             </a:r>
             <a:r>
-              <a:rPr kumimoji="1" lang="ja-JP" altLang="en-US"/>
+              <a:rPr lang="ja-JP" altLang="en-US"/>
               <a:t>レベル</a:t>
             </a:r>
           </a:p>
           <a:p>
             <a:pPr lvl="4"/>
             <a:r>
-              <a:rPr kumimoji="1" lang="ja-JP" altLang="en-US"/>
+              <a:rPr lang="ja-JP" altLang="en-US"/>
               <a:t>第 </a:t>
             </a:r>
             <a:r>
-              <a:rPr kumimoji="1" lang="en-US" altLang="ja-JP"/>
+              <a:rPr lang="en-US" altLang="ja-JP"/>
               <a:t>5 </a:t>
             </a:r>
             <a:r>
-              <a:rPr kumimoji="1" lang="ja-JP" altLang="en-US"/>
+              <a:rPr lang="ja-JP" altLang="en-US"/>
               <a:t>レベル</a:t>
             </a:r>
-          </a:p>
-        </p:txBody>
-      </p:sp>
-      <p:sp>
-        <p:nvSpPr>
-          <p:cNvPr id="4" name="日付プレースホルダー 3">
-            <a:extLst>
-              <a:ext uri="{FF2B5EF4-FFF2-40B4-BE49-F238E27FC236}">
-                <a16:creationId xmlns:a16="http://schemas.microsoft.com/office/drawing/2014/main" id="{796DAC9A-EE9B-F242-1224-0A4D19A5F7E2}"/>
-              </a:ext>
-            </a:extLst>
-          </p:cNvPr>
+            <a:endParaRPr lang="en-US" dirty="0"/>
+          </a:p>
+        </p:txBody>
+      </p:sp>
+      <p:sp>
+        <p:nvSpPr>
+          <p:cNvPr id="4" name="Date Placeholder 3"/>
           <p:cNvSpPr>
             <a:spLocks noGrp="1"/>
           </p:cNvSpPr>
@@ -962,7 +1551,7 @@
           <a:p>
             <a:fld id="{18CA95F4-0FB2-4DCC-8987-71DF119592E9}" type="datetimeFigureOut">
               <a:rPr kumimoji="1" lang="ja-JP" altLang="en-US" smtClean="0"/>
-              <a:t>2026/7/22</a:t>
+              <a:t>2026/7/27</a:t>
             </a:fld>
             <a:endParaRPr kumimoji="1" lang="ja-JP" altLang="en-US"/>
           </a:p>
@@ -970,13 +1559,7 @@
       </p:sp>
       <p:sp>
         <p:nvSpPr>
-          <p:cNvPr id="5" name="フッター プレースホルダー 4">
-            <a:extLst>
-              <a:ext uri="{FF2B5EF4-FFF2-40B4-BE49-F238E27FC236}">
-                <a16:creationId xmlns:a16="http://schemas.microsoft.com/office/drawing/2014/main" id="{C9D4A916-A02F-3053-9425-4987064867C9}"/>
-              </a:ext>
-            </a:extLst>
-          </p:cNvPr>
+          <p:cNvPr id="5" name="Footer Placeholder 4"/>
           <p:cNvSpPr>
             <a:spLocks noGrp="1"/>
           </p:cNvSpPr>
@@ -995,13 +1578,7 @@
       </p:sp>
       <p:sp>
         <p:nvSpPr>
-          <p:cNvPr id="6" name="スライド番号プレースホルダー 5">
-            <a:extLst>
-              <a:ext uri="{FF2B5EF4-FFF2-40B4-BE49-F238E27FC236}">
-                <a16:creationId xmlns:a16="http://schemas.microsoft.com/office/drawing/2014/main" id="{E8DE8183-5941-9F58-860D-B1CF68C19800}"/>
-              </a:ext>
-            </a:extLst>
-          </p:cNvPr>
+          <p:cNvPr id="6" name="Slide Number Placeholder 5"/>
           <p:cNvSpPr>
             <a:spLocks noGrp="1"/>
           </p:cNvSpPr>
@@ -1025,7 +1602,7 @@
     </p:spTree>
     <p:extLst>
       <p:ext uri="{BB962C8B-B14F-4D97-AF65-F5344CB8AC3E}">
-        <p14:creationId xmlns:p14="http://schemas.microsoft.com/office/powerpoint/2010/main" val="2239984244"/>
+        <p14:creationId xmlns:p14="http://schemas.microsoft.com/office/powerpoint/2010/main" val="2573280165"/>
       </p:ext>
     </p:extLst>
   </p:cSld>
@@ -1036,8 +1613,16 @@
 </file>
 
 <file path=ppt/slideLayouts/slideLayout3.xml><?xml version="1.0" encoding="utf-8"?>
-<p:sldLayout xmlns:a="http://schemas.openxmlformats.org/drawingml/2006/main" xmlns:r="http://schemas.openxmlformats.org/officeDocument/2006/relationships" xmlns:p="http://schemas.openxmlformats.org/presentationml/2006/main" type="secHead" preserve="1">
+<p:sldLayout xmlns:a="http://schemas.openxmlformats.org/drawingml/2006/main" xmlns:r="http://schemas.openxmlformats.org/officeDocument/2006/relationships" xmlns:p="http://schemas.openxmlformats.org/presentationml/2006/main" showMasterSp="0" type="secHead" preserve="1">
   <p:cSld name="セクション見出し">
+    <p:bg>
+      <p:bgPr>
+        <a:solidFill>
+          <a:schemeClr val="bg1"/>
+        </a:solidFill>
+        <a:effectLst/>
+      </p:bgPr>
+    </p:bg>
     <p:spTree>
       <p:nvGrpSpPr>
         <p:cNvPr id="1" name=""/>
@@ -1054,13 +1639,83 @@
       </p:grpSpPr>
       <p:sp>
         <p:nvSpPr>
-          <p:cNvPr id="2" name="タイトル 1">
-            <a:extLst>
-              <a:ext uri="{FF2B5EF4-FFF2-40B4-BE49-F238E27FC236}">
-                <a16:creationId xmlns:a16="http://schemas.microsoft.com/office/drawing/2014/main" id="{85497BC5-9746-D343-29FB-8FE9F91E66CE}"/>
-              </a:ext>
-            </a:extLst>
-          </p:cNvPr>
+          <p:cNvPr id="7" name="Rectangle 6"/>
+          <p:cNvSpPr/>
+          <p:nvPr/>
+        </p:nvSpPr>
+        <p:spPr>
+          <a:xfrm>
+            <a:off x="3175" y="6400800"/>
+            <a:ext cx="12188825" cy="457200"/>
+          </a:xfrm>
+          <a:prstGeom prst="rect">
+            <a:avLst/>
+          </a:prstGeom>
+          <a:solidFill>
+            <a:schemeClr val="accent2"/>
+          </a:solidFill>
+          <a:ln>
+            <a:noFill/>
+          </a:ln>
+        </p:spPr>
+        <p:style>
+          <a:lnRef idx="2">
+            <a:schemeClr val="accent1">
+              <a:shade val="50000"/>
+            </a:schemeClr>
+          </a:lnRef>
+          <a:fillRef idx="1">
+            <a:schemeClr val="accent1"/>
+          </a:fillRef>
+          <a:effectRef idx="0">
+            <a:schemeClr val="accent1"/>
+          </a:effectRef>
+          <a:fontRef idx="minor">
+            <a:schemeClr val="lt1"/>
+          </a:fontRef>
+        </p:style>
+      </p:sp>
+      <p:sp>
+        <p:nvSpPr>
+          <p:cNvPr id="8" name="Rectangle 7"/>
+          <p:cNvSpPr/>
+          <p:nvPr/>
+        </p:nvSpPr>
+        <p:spPr>
+          <a:xfrm>
+            <a:off x="15" y="6334316"/>
+            <a:ext cx="12188825" cy="64008"/>
+          </a:xfrm>
+          <a:prstGeom prst="rect">
+            <a:avLst/>
+          </a:prstGeom>
+          <a:solidFill>
+            <a:schemeClr val="accent1"/>
+          </a:solidFill>
+          <a:ln>
+            <a:noFill/>
+          </a:ln>
+        </p:spPr>
+        <p:style>
+          <a:lnRef idx="2">
+            <a:schemeClr val="accent1">
+              <a:shade val="50000"/>
+            </a:schemeClr>
+          </a:lnRef>
+          <a:fillRef idx="1">
+            <a:schemeClr val="accent1"/>
+          </a:fillRef>
+          <a:effectRef idx="0">
+            <a:schemeClr val="accent1"/>
+          </a:effectRef>
+          <a:fontRef idx="minor">
+            <a:schemeClr val="lt1"/>
+          </a:fontRef>
+        </p:style>
+      </p:sp>
+      <p:sp>
+        <p:nvSpPr>
+          <p:cNvPr id="2" name="Title 1"/>
           <p:cNvSpPr>
             <a:spLocks noGrp="1"/>
           </p:cNvSpPr>
@@ -1070,136 +1725,144 @@
         </p:nvSpPr>
         <p:spPr>
           <a:xfrm>
-            <a:off x="831850" y="1709738"/>
-            <a:ext cx="10515600" cy="2852737"/>
-          </a:xfrm>
-        </p:spPr>
-        <p:txBody>
-          <a:bodyPr anchor="b"/>
+            <a:off x="1097280" y="758952"/>
+            <a:ext cx="10058400" cy="3566160"/>
+          </a:xfrm>
+        </p:spPr>
+        <p:txBody>
+          <a:bodyPr anchor="b" anchorCtr="0">
+            <a:normAutofit/>
+          </a:bodyPr>
           <a:lstStyle>
             <a:lvl1pPr>
-              <a:defRPr sz="6000"/>
-            </a:lvl1pPr>
-          </a:lstStyle>
-          <a:p>
-            <a:r>
-              <a:rPr kumimoji="1" lang="ja-JP" altLang="en-US"/>
-              <a:t>マスター タイトルの書式設定</a:t>
-            </a:r>
-          </a:p>
-        </p:txBody>
-      </p:sp>
-      <p:sp>
-        <p:nvSpPr>
-          <p:cNvPr id="3" name="テキスト プレースホルダー 2">
-            <a:extLst>
-              <a:ext uri="{FF2B5EF4-FFF2-40B4-BE49-F238E27FC236}">
-                <a16:creationId xmlns:a16="http://schemas.microsoft.com/office/drawing/2014/main" id="{AA73E76F-E143-CDFB-ACBC-D9FDBA9CD328}"/>
-              </a:ext>
-            </a:extLst>
-          </p:cNvPr>
-          <p:cNvSpPr>
-            <a:spLocks noGrp="1"/>
-          </p:cNvSpPr>
-          <p:nvPr>
-            <p:ph type="body" idx="1"/>
-          </p:nvPr>
-        </p:nvSpPr>
-        <p:spPr>
-          <a:xfrm>
-            <a:off x="831850" y="4589463"/>
-            <a:ext cx="10515600" cy="1500187"/>
-          </a:xfrm>
-        </p:spPr>
-        <p:txBody>
-          <a:bodyPr/>
-          <a:lstStyle>
-            <a:lvl1pPr marL="0" indent="0">
-              <a:buNone/>
-              <a:defRPr sz="2400">
+              <a:lnSpc>
+                <a:spcPct val="85000"/>
+              </a:lnSpc>
+              <a:defRPr sz="8000" b="0">
                 <a:solidFill>
                   <a:schemeClr val="tx1">
-                    <a:tint val="82000"/>
+                    <a:lumMod val="85000"/>
+                    <a:lumOff val="15000"/>
                   </a:schemeClr>
                 </a:solidFill>
               </a:defRPr>
             </a:lvl1pPr>
+          </a:lstStyle>
+          <a:p>
+            <a:r>
+              <a:rPr lang="ja-JP" altLang="en-US"/>
+              <a:t>マスター タイトルの書式設定</a:t>
+            </a:r>
+            <a:endParaRPr lang="en-US" dirty="0"/>
+          </a:p>
+        </p:txBody>
+      </p:sp>
+      <p:sp>
+        <p:nvSpPr>
+          <p:cNvPr id="3" name="Text Placeholder 2"/>
+          <p:cNvSpPr>
+            <a:spLocks noGrp="1"/>
+          </p:cNvSpPr>
+          <p:nvPr>
+            <p:ph type="body" idx="1"/>
+          </p:nvPr>
+        </p:nvSpPr>
+        <p:spPr>
+          <a:xfrm>
+            <a:off x="1097280" y="4453128"/>
+            <a:ext cx="10058400" cy="1143000"/>
+          </a:xfrm>
+        </p:spPr>
+        <p:txBody>
+          <a:bodyPr lIns="91440" rIns="91440" anchor="t" anchorCtr="0">
+            <a:normAutofit/>
+          </a:bodyPr>
+          <a:lstStyle>
+            <a:lvl1pPr marL="0" indent="0">
+              <a:buNone/>
+              <a:defRPr sz="2400" cap="all" spc="200" baseline="0">
+                <a:solidFill>
+                  <a:schemeClr val="tx2"/>
+                </a:solidFill>
+                <a:latin typeface="+mj-lt"/>
+              </a:defRPr>
+            </a:lvl1pPr>
             <a:lvl2pPr marL="457200" indent="0">
               <a:buNone/>
-              <a:defRPr sz="2000">
+              <a:defRPr sz="1800">
                 <a:solidFill>
                   <a:schemeClr val="tx1">
-                    <a:tint val="82000"/>
+                    <a:tint val="75000"/>
                   </a:schemeClr>
                 </a:solidFill>
               </a:defRPr>
             </a:lvl2pPr>
             <a:lvl3pPr marL="914400" indent="0">
               <a:buNone/>
-              <a:defRPr sz="1800">
+              <a:defRPr sz="1600">
                 <a:solidFill>
                   <a:schemeClr val="tx1">
-                    <a:tint val="82000"/>
+                    <a:tint val="75000"/>
                   </a:schemeClr>
                 </a:solidFill>
               </a:defRPr>
             </a:lvl3pPr>
             <a:lvl4pPr marL="1371600" indent="0">
               <a:buNone/>
-              <a:defRPr sz="1600">
+              <a:defRPr sz="1400">
                 <a:solidFill>
                   <a:schemeClr val="tx1">
-                    <a:tint val="82000"/>
+                    <a:tint val="75000"/>
                   </a:schemeClr>
                 </a:solidFill>
               </a:defRPr>
             </a:lvl4pPr>
             <a:lvl5pPr marL="1828800" indent="0">
               <a:buNone/>
-              <a:defRPr sz="1600">
+              <a:defRPr sz="1400">
                 <a:solidFill>
                   <a:schemeClr val="tx1">
-                    <a:tint val="82000"/>
+                    <a:tint val="75000"/>
                   </a:schemeClr>
                 </a:solidFill>
               </a:defRPr>
             </a:lvl5pPr>
             <a:lvl6pPr marL="2286000" indent="0">
               <a:buNone/>
-              <a:defRPr sz="1600">
+              <a:defRPr sz="1400">
                 <a:solidFill>
                   <a:schemeClr val="tx1">
-                    <a:tint val="82000"/>
+                    <a:tint val="75000"/>
                   </a:schemeClr>
                 </a:solidFill>
               </a:defRPr>
             </a:lvl6pPr>
             <a:lvl7pPr marL="2743200" indent="0">
               <a:buNone/>
-              <a:defRPr sz="1600">
+              <a:defRPr sz="1400">
                 <a:solidFill>
                   <a:schemeClr val="tx1">
-                    <a:tint val="82000"/>
+                    <a:tint val="75000"/>
                   </a:schemeClr>
                 </a:solidFill>
               </a:defRPr>
             </a:lvl7pPr>
             <a:lvl8pPr marL="3200400" indent="0">
               <a:buNone/>
-              <a:defRPr sz="1600">
+              <a:defRPr sz="1400">
                 <a:solidFill>
                   <a:schemeClr val="tx1">
-                    <a:tint val="82000"/>
+                    <a:tint val="75000"/>
                   </a:schemeClr>
                 </a:solidFill>
               </a:defRPr>
             </a:lvl8pPr>
             <a:lvl9pPr marL="3657600" indent="0">
               <a:buNone/>
-              <a:defRPr sz="1600">
+              <a:defRPr sz="1400">
                 <a:solidFill>
                   <a:schemeClr val="tx1">
-                    <a:tint val="82000"/>
+                    <a:tint val="75000"/>
                   </a:schemeClr>
                 </a:solidFill>
               </a:defRPr>
@@ -1208,7 +1871,7 @@
           <a:p>
             <a:pPr lvl="0"/>
             <a:r>
-              <a:rPr kumimoji="1" lang="ja-JP" altLang="en-US"/>
+              <a:rPr lang="ja-JP" altLang="en-US"/>
               <a:t>マスター テキストの書式設定</a:t>
             </a:r>
           </a:p>
@@ -1216,13 +1879,7 @@
       </p:sp>
       <p:sp>
         <p:nvSpPr>
-          <p:cNvPr id="4" name="日付プレースホルダー 3">
-            <a:extLst>
-              <a:ext uri="{FF2B5EF4-FFF2-40B4-BE49-F238E27FC236}">
-                <a16:creationId xmlns:a16="http://schemas.microsoft.com/office/drawing/2014/main" id="{D40ACB4A-5146-98E4-6FCE-6BB981D486A5}"/>
-              </a:ext>
-            </a:extLst>
-          </p:cNvPr>
+          <p:cNvPr id="4" name="Date Placeholder 3"/>
           <p:cNvSpPr>
             <a:spLocks noGrp="1"/>
           </p:cNvSpPr>
@@ -1237,7 +1894,7 @@
           <a:p>
             <a:fld id="{18CA95F4-0FB2-4DCC-8987-71DF119592E9}" type="datetimeFigureOut">
               <a:rPr kumimoji="1" lang="ja-JP" altLang="en-US" smtClean="0"/>
-              <a:t>2026/7/22</a:t>
+              <a:t>2026/7/27</a:t>
             </a:fld>
             <a:endParaRPr kumimoji="1" lang="ja-JP" altLang="en-US"/>
           </a:p>
@@ -1245,13 +1902,7 @@
       </p:sp>
       <p:sp>
         <p:nvSpPr>
-          <p:cNvPr id="5" name="フッター プレースホルダー 4">
-            <a:extLst>
-              <a:ext uri="{FF2B5EF4-FFF2-40B4-BE49-F238E27FC236}">
-                <a16:creationId xmlns:a16="http://schemas.microsoft.com/office/drawing/2014/main" id="{26004531-E432-0158-2D7B-7CDB8085FAA9}"/>
-              </a:ext>
-            </a:extLst>
-          </p:cNvPr>
+          <p:cNvPr id="5" name="Footer Placeholder 4"/>
           <p:cNvSpPr>
             <a:spLocks noGrp="1"/>
           </p:cNvSpPr>
@@ -1270,13 +1921,7 @@
       </p:sp>
       <p:sp>
         <p:nvSpPr>
-          <p:cNvPr id="6" name="スライド番号プレースホルダー 5">
-            <a:extLst>
-              <a:ext uri="{FF2B5EF4-FFF2-40B4-BE49-F238E27FC236}">
-                <a16:creationId xmlns:a16="http://schemas.microsoft.com/office/drawing/2014/main" id="{22617B4F-D0A0-4B07-B826-5514297278F4}"/>
-              </a:ext>
-            </a:extLst>
-          </p:cNvPr>
+          <p:cNvPr id="6" name="Slide Number Placeholder 5"/>
           <p:cNvSpPr>
             <a:spLocks noGrp="1"/>
           </p:cNvSpPr>
@@ -1297,10 +1942,48 @@
           </a:p>
         </p:txBody>
       </p:sp>
+      <p:cxnSp>
+        <p:nvCxnSpPr>
+          <p:cNvPr id="9" name="Straight Connector 8"/>
+          <p:cNvCxnSpPr/>
+          <p:nvPr/>
+        </p:nvCxnSpPr>
+        <p:spPr>
+          <a:xfrm>
+            <a:off x="1207658" y="4343400"/>
+            <a:ext cx="9875520" cy="0"/>
+          </a:xfrm>
+          <a:prstGeom prst="line">
+            <a:avLst/>
+          </a:prstGeom>
+          <a:ln w="6350">
+            <a:solidFill>
+              <a:schemeClr val="tx1">
+                <a:lumMod val="50000"/>
+                <a:lumOff val="50000"/>
+              </a:schemeClr>
+            </a:solidFill>
+          </a:ln>
+        </p:spPr>
+        <p:style>
+          <a:lnRef idx="1">
+            <a:schemeClr val="accent1"/>
+          </a:lnRef>
+          <a:fillRef idx="0">
+            <a:schemeClr val="accent1"/>
+          </a:fillRef>
+          <a:effectRef idx="0">
+            <a:schemeClr val="accent1"/>
+          </a:effectRef>
+          <a:fontRef idx="minor">
+            <a:schemeClr val="tx1"/>
+          </a:fontRef>
+        </p:style>
+      </p:cxnSp>
     </p:spTree>
     <p:extLst>
       <p:ext uri="{BB962C8B-B14F-4D97-AF65-F5344CB8AC3E}">
-        <p14:creationId xmlns:p14="http://schemas.microsoft.com/office/powerpoint/2010/main" val="4067856969"/>
+        <p14:creationId xmlns:p14="http://schemas.microsoft.com/office/powerpoint/2010/main" val="419979570"/>
       </p:ext>
     </p:extLst>
   </p:cSld>
@@ -1329,13 +2012,7 @@
       </p:grpSpPr>
       <p:sp>
         <p:nvSpPr>
-          <p:cNvPr id="2" name="タイトル 1">
-            <a:extLst>
-              <a:ext uri="{FF2B5EF4-FFF2-40B4-BE49-F238E27FC236}">
-                <a16:creationId xmlns:a16="http://schemas.microsoft.com/office/drawing/2014/main" id="{E007D1B5-8DCF-E703-AF52-B7B98147D273}"/>
-              </a:ext>
-            </a:extLst>
-          </p:cNvPr>
+          <p:cNvPr id="8" name="Title 7"/>
           <p:cNvSpPr>
             <a:spLocks noGrp="1"/>
           </p:cNvSpPr>
@@ -1343,27 +2020,27 @@
             <p:ph type="title"/>
           </p:nvPr>
         </p:nvSpPr>
-        <p:spPr/>
+        <p:spPr>
+          <a:xfrm>
+            <a:off x="1097280" y="286603"/>
+            <a:ext cx="10058400" cy="1450757"/>
+          </a:xfrm>
+        </p:spPr>
         <p:txBody>
           <a:bodyPr/>
           <a:lstStyle/>
           <a:p>
             <a:r>
-              <a:rPr kumimoji="1" lang="ja-JP" altLang="en-US"/>
+              <a:rPr lang="ja-JP" altLang="en-US"/>
               <a:t>マスター タイトルの書式設定</a:t>
             </a:r>
-          </a:p>
-        </p:txBody>
-      </p:sp>
-      <p:sp>
-        <p:nvSpPr>
-          <p:cNvPr id="3" name="コンテンツ プレースホルダー 2">
-            <a:extLst>
-              <a:ext uri="{FF2B5EF4-FFF2-40B4-BE49-F238E27FC236}">
-                <a16:creationId xmlns:a16="http://schemas.microsoft.com/office/drawing/2014/main" id="{51F7E3C7-140C-04FD-7E48-B7CEA73FE72C}"/>
-              </a:ext>
-            </a:extLst>
-          </p:cNvPr>
+            <a:endParaRPr lang="en-US" dirty="0"/>
+          </a:p>
+        </p:txBody>
+      </p:sp>
+      <p:sp>
+        <p:nvSpPr>
+          <p:cNvPr id="3" name="Content Placeholder 2"/>
           <p:cNvSpPr>
             <a:spLocks noGrp="1"/>
           </p:cNvSpPr>
@@ -1373,8 +2050,8 @@
         </p:nvSpPr>
         <p:spPr>
           <a:xfrm>
-            <a:off x="838200" y="1825625"/>
-            <a:ext cx="5181600" cy="4351338"/>
+            <a:off x="1097279" y="1845734"/>
+            <a:ext cx="4937760" cy="4023360"/>
           </a:xfrm>
         </p:spPr>
         <p:txBody>
@@ -1383,81 +2060,76 @@
           <a:p>
             <a:pPr lvl="0"/>
             <a:r>
-              <a:rPr kumimoji="1" lang="ja-JP" altLang="en-US"/>
+              <a:rPr lang="ja-JP" altLang="en-US"/>
               <a:t>マスター テキストの書式設定</a:t>
             </a:r>
           </a:p>
           <a:p>
             <a:pPr lvl="1"/>
             <a:r>
-              <a:rPr kumimoji="1" lang="ja-JP" altLang="en-US"/>
+              <a:rPr lang="ja-JP" altLang="en-US"/>
               <a:t>第 </a:t>
             </a:r>
             <a:r>
-              <a:rPr kumimoji="1" lang="en-US" altLang="ja-JP"/>
+              <a:rPr lang="en-US" altLang="ja-JP"/>
               <a:t>2 </a:t>
             </a:r>
             <a:r>
-              <a:rPr kumimoji="1" lang="ja-JP" altLang="en-US"/>
+              <a:rPr lang="ja-JP" altLang="en-US"/>
               <a:t>レベル</a:t>
             </a:r>
           </a:p>
           <a:p>
             <a:pPr lvl="2"/>
             <a:r>
-              <a:rPr kumimoji="1" lang="ja-JP" altLang="en-US"/>
+              <a:rPr lang="ja-JP" altLang="en-US"/>
               <a:t>第 </a:t>
             </a:r>
             <a:r>
-              <a:rPr kumimoji="1" lang="en-US" altLang="ja-JP"/>
+              <a:rPr lang="en-US" altLang="ja-JP"/>
               <a:t>3 </a:t>
             </a:r>
             <a:r>
-              <a:rPr kumimoji="1" lang="ja-JP" altLang="en-US"/>
+              <a:rPr lang="ja-JP" altLang="en-US"/>
               <a:t>レベル</a:t>
             </a:r>
           </a:p>
           <a:p>
             <a:pPr lvl="3"/>
             <a:r>
-              <a:rPr kumimoji="1" lang="ja-JP" altLang="en-US"/>
+              <a:rPr lang="ja-JP" altLang="en-US"/>
               <a:t>第 </a:t>
             </a:r>
             <a:r>
-              <a:rPr kumimoji="1" lang="en-US" altLang="ja-JP"/>
+              <a:rPr lang="en-US" altLang="ja-JP"/>
               <a:t>4 </a:t>
             </a:r>
             <a:r>
-              <a:rPr kumimoji="1" lang="ja-JP" altLang="en-US"/>
+              <a:rPr lang="ja-JP" altLang="en-US"/>
               <a:t>レベル</a:t>
             </a:r>
           </a:p>
           <a:p>
             <a:pPr lvl="4"/>
             <a:r>
-              <a:rPr kumimoji="1" lang="ja-JP" altLang="en-US"/>
+              <a:rPr lang="ja-JP" altLang="en-US"/>
               <a:t>第 </a:t>
             </a:r>
             <a:r>
-              <a:rPr kumimoji="1" lang="en-US" altLang="ja-JP"/>
+              <a:rPr lang="en-US" altLang="ja-JP"/>
               <a:t>5 </a:t>
             </a:r>
             <a:r>
-              <a:rPr kumimoji="1" lang="ja-JP" altLang="en-US"/>
+              <a:rPr lang="ja-JP" altLang="en-US"/>
               <a:t>レベル</a:t>
             </a:r>
-          </a:p>
-        </p:txBody>
-      </p:sp>
-      <p:sp>
-        <p:nvSpPr>
-          <p:cNvPr id="4" name="コンテンツ プレースホルダー 3">
-            <a:extLst>
-              <a:ext uri="{FF2B5EF4-FFF2-40B4-BE49-F238E27FC236}">
-                <a16:creationId xmlns:a16="http://schemas.microsoft.com/office/drawing/2014/main" id="{77B8C59E-C117-0310-96ED-44259E2A9B8D}"/>
-              </a:ext>
-            </a:extLst>
-          </p:cNvPr>
+            <a:endParaRPr lang="en-US" dirty="0"/>
+          </a:p>
+        </p:txBody>
+      </p:sp>
+      <p:sp>
+        <p:nvSpPr>
+          <p:cNvPr id="4" name="Content Placeholder 3"/>
           <p:cNvSpPr>
             <a:spLocks noGrp="1"/>
           </p:cNvSpPr>
@@ -1467,8 +2139,8 @@
         </p:nvSpPr>
         <p:spPr>
           <a:xfrm>
-            <a:off x="6172200" y="1825625"/>
-            <a:ext cx="5181600" cy="4351338"/>
+            <a:off x="6217920" y="1845735"/>
+            <a:ext cx="4937760" cy="4023360"/>
           </a:xfrm>
         </p:spPr>
         <p:txBody>
@@ -1477,81 +2149,76 @@
           <a:p>
             <a:pPr lvl="0"/>
             <a:r>
-              <a:rPr kumimoji="1" lang="ja-JP" altLang="en-US"/>
+              <a:rPr lang="ja-JP" altLang="en-US"/>
               <a:t>マスター テキストの書式設定</a:t>
             </a:r>
           </a:p>
           <a:p>
             <a:pPr lvl="1"/>
             <a:r>
-              <a:rPr kumimoji="1" lang="ja-JP" altLang="en-US"/>
+              <a:rPr lang="ja-JP" altLang="en-US"/>
               <a:t>第 </a:t>
             </a:r>
             <a:r>
-              <a:rPr kumimoji="1" lang="en-US" altLang="ja-JP"/>
+              <a:rPr lang="en-US" altLang="ja-JP"/>
               <a:t>2 </a:t>
             </a:r>
             <a:r>
-              <a:rPr kumimoji="1" lang="ja-JP" altLang="en-US"/>
+              <a:rPr lang="ja-JP" altLang="en-US"/>
               <a:t>レベル</a:t>
             </a:r>
           </a:p>
           <a:p>
             <a:pPr lvl="2"/>
             <a:r>
-              <a:rPr kumimoji="1" lang="ja-JP" altLang="en-US"/>
+              <a:rPr lang="ja-JP" altLang="en-US"/>
               <a:t>第 </a:t>
             </a:r>
             <a:r>
-              <a:rPr kumimoji="1" lang="en-US" altLang="ja-JP"/>
+              <a:rPr lang="en-US" altLang="ja-JP"/>
               <a:t>3 </a:t>
             </a:r>
             <a:r>
-              <a:rPr kumimoji="1" lang="ja-JP" altLang="en-US"/>
+              <a:rPr lang="ja-JP" altLang="en-US"/>
               <a:t>レベル</a:t>
             </a:r>
           </a:p>
           <a:p>
             <a:pPr lvl="3"/>
             <a:r>
-              <a:rPr kumimoji="1" lang="ja-JP" altLang="en-US"/>
+              <a:rPr lang="ja-JP" altLang="en-US"/>
               <a:t>第 </a:t>
             </a:r>
             <a:r>
-              <a:rPr kumimoji="1" lang="en-US" altLang="ja-JP"/>
+              <a:rPr lang="en-US" altLang="ja-JP"/>
               <a:t>4 </a:t>
             </a:r>
             <a:r>
-              <a:rPr kumimoji="1" lang="ja-JP" altLang="en-US"/>
+              <a:rPr lang="ja-JP" altLang="en-US"/>
               <a:t>レベル</a:t>
             </a:r>
           </a:p>
           <a:p>
             <a:pPr lvl="4"/>
             <a:r>
-              <a:rPr kumimoji="1" lang="ja-JP" altLang="en-US"/>
+              <a:rPr lang="ja-JP" altLang="en-US"/>
               <a:t>第 </a:t>
             </a:r>
             <a:r>
-              <a:rPr kumimoji="1" lang="en-US" altLang="ja-JP"/>
+              <a:rPr lang="en-US" altLang="ja-JP"/>
               <a:t>5 </a:t>
             </a:r>
             <a:r>
-              <a:rPr kumimoji="1" lang="ja-JP" altLang="en-US"/>
+              <a:rPr lang="ja-JP" altLang="en-US"/>
               <a:t>レベル</a:t>
             </a:r>
-          </a:p>
-        </p:txBody>
-      </p:sp>
-      <p:sp>
-        <p:nvSpPr>
-          <p:cNvPr id="5" name="日付プレースホルダー 4">
-            <a:extLst>
-              <a:ext uri="{FF2B5EF4-FFF2-40B4-BE49-F238E27FC236}">
-                <a16:creationId xmlns:a16="http://schemas.microsoft.com/office/drawing/2014/main" id="{313AB5B8-5B1D-BA9C-7BCB-6D6E0D758652}"/>
-              </a:ext>
-            </a:extLst>
-          </p:cNvPr>
+            <a:endParaRPr lang="en-US" dirty="0"/>
+          </a:p>
+        </p:txBody>
+      </p:sp>
+      <p:sp>
+        <p:nvSpPr>
+          <p:cNvPr id="5" name="Date Placeholder 4"/>
           <p:cNvSpPr>
             <a:spLocks noGrp="1"/>
           </p:cNvSpPr>
@@ -1566,7 +2233,7 @@
           <a:p>
             <a:fld id="{18CA95F4-0FB2-4DCC-8987-71DF119592E9}" type="datetimeFigureOut">
               <a:rPr kumimoji="1" lang="ja-JP" altLang="en-US" smtClean="0"/>
-              <a:t>2026/7/22</a:t>
+              <a:t>2026/7/27</a:t>
             </a:fld>
             <a:endParaRPr kumimoji="1" lang="ja-JP" altLang="en-US"/>
           </a:p>
@@ -1574,13 +2241,7 @@
       </p:sp>
       <p:sp>
         <p:nvSpPr>
-          <p:cNvPr id="6" name="フッター プレースホルダー 5">
-            <a:extLst>
-              <a:ext uri="{FF2B5EF4-FFF2-40B4-BE49-F238E27FC236}">
-                <a16:creationId xmlns:a16="http://schemas.microsoft.com/office/drawing/2014/main" id="{2A0ADEDC-4A89-A2D6-19D0-2B3E2347449B}"/>
-              </a:ext>
-            </a:extLst>
-          </p:cNvPr>
+          <p:cNvPr id="6" name="Footer Placeholder 5"/>
           <p:cNvSpPr>
             <a:spLocks noGrp="1"/>
           </p:cNvSpPr>
@@ -1599,13 +2260,7 @@
       </p:sp>
       <p:sp>
         <p:nvSpPr>
-          <p:cNvPr id="7" name="スライド番号プレースホルダー 6">
-            <a:extLst>
-              <a:ext uri="{FF2B5EF4-FFF2-40B4-BE49-F238E27FC236}">
-                <a16:creationId xmlns:a16="http://schemas.microsoft.com/office/drawing/2014/main" id="{F2AE9F12-EA9D-6245-88F7-81775E1333DE}"/>
-              </a:ext>
-            </a:extLst>
-          </p:cNvPr>
+          <p:cNvPr id="7" name="Slide Number Placeholder 6"/>
           <p:cNvSpPr>
             <a:spLocks noGrp="1"/>
           </p:cNvSpPr>
@@ -1629,7 +2284,7 @@
     </p:spTree>
     <p:extLst>
       <p:ext uri="{BB962C8B-B14F-4D97-AF65-F5344CB8AC3E}">
-        <p14:creationId xmlns:p14="http://schemas.microsoft.com/office/powerpoint/2010/main" val="1435565429"/>
+        <p14:creationId xmlns:p14="http://schemas.microsoft.com/office/powerpoint/2010/main" val="145737940"/>
       </p:ext>
     </p:extLst>
   </p:cSld>
@@ -1658,13 +2313,7 @@
       </p:grpSpPr>
       <p:sp>
         <p:nvSpPr>
-          <p:cNvPr id="2" name="タイトル 1">
-            <a:extLst>
-              <a:ext uri="{FF2B5EF4-FFF2-40B4-BE49-F238E27FC236}">
-                <a16:creationId xmlns:a16="http://schemas.microsoft.com/office/drawing/2014/main" id="{9B2C2349-4FC0-17E5-7F2A-7FDB658CABFD}"/>
-              </a:ext>
-            </a:extLst>
-          </p:cNvPr>
+          <p:cNvPr id="10" name="Title 9"/>
           <p:cNvSpPr>
             <a:spLocks noGrp="1"/>
           </p:cNvSpPr>
@@ -1674,8 +2323,8 @@
         </p:nvSpPr>
         <p:spPr>
           <a:xfrm>
-            <a:off x="839788" y="365125"/>
-            <a:ext cx="10515600" cy="1325563"/>
+            <a:off x="1097280" y="286603"/>
+            <a:ext cx="10058400" cy="1450757"/>
           </a:xfrm>
         </p:spPr>
         <p:txBody>
@@ -1683,21 +2332,16 @@
           <a:lstStyle/>
           <a:p>
             <a:r>
-              <a:rPr kumimoji="1" lang="ja-JP" altLang="en-US"/>
+              <a:rPr lang="ja-JP" altLang="en-US"/>
               <a:t>マスター タイトルの書式設定</a:t>
             </a:r>
-          </a:p>
-        </p:txBody>
-      </p:sp>
-      <p:sp>
-        <p:nvSpPr>
-          <p:cNvPr id="3" name="テキスト プレースホルダー 2">
-            <a:extLst>
-              <a:ext uri="{FF2B5EF4-FFF2-40B4-BE49-F238E27FC236}">
-                <a16:creationId xmlns:a16="http://schemas.microsoft.com/office/drawing/2014/main" id="{DC14E95C-4F07-4983-276F-508EAF6504BB}"/>
-              </a:ext>
-            </a:extLst>
-          </p:cNvPr>
+            <a:endParaRPr lang="en-US" dirty="0"/>
+          </a:p>
+        </p:txBody>
+      </p:sp>
+      <p:sp>
+        <p:nvSpPr>
+          <p:cNvPr id="3" name="Text Placeholder 2"/>
           <p:cNvSpPr>
             <a:spLocks noGrp="1"/>
           </p:cNvSpPr>
@@ -1707,16 +2351,22 @@
         </p:nvSpPr>
         <p:spPr>
           <a:xfrm>
-            <a:off x="839788" y="1681163"/>
-            <a:ext cx="5157787" cy="823912"/>
-          </a:xfrm>
-        </p:spPr>
-        <p:txBody>
-          <a:bodyPr anchor="b"/>
+            <a:off x="1097280" y="1846052"/>
+            <a:ext cx="4937760" cy="736282"/>
+          </a:xfrm>
+        </p:spPr>
+        <p:txBody>
+          <a:bodyPr lIns="91440" rIns="91440" anchor="ctr">
+            <a:normAutofit/>
+          </a:bodyPr>
           <a:lstStyle>
             <a:lvl1pPr marL="0" indent="0">
               <a:buNone/>
-              <a:defRPr sz="2400" b="1"/>
+              <a:defRPr sz="2000" b="0" cap="all" baseline="0">
+                <a:solidFill>
+                  <a:schemeClr val="tx2"/>
+                </a:solidFill>
+              </a:defRPr>
             </a:lvl1pPr>
             <a:lvl2pPr marL="457200" indent="0">
               <a:buNone/>
@@ -1754,7 +2404,7 @@
           <a:p>
             <a:pPr lvl="0"/>
             <a:r>
-              <a:rPr kumimoji="1" lang="ja-JP" altLang="en-US"/>
+              <a:rPr lang="ja-JP" altLang="en-US"/>
               <a:t>マスター テキストの書式設定</a:t>
             </a:r>
           </a:p>
@@ -1762,13 +2412,7 @@
       </p:sp>
       <p:sp>
         <p:nvSpPr>
-          <p:cNvPr id="4" name="コンテンツ プレースホルダー 3">
-            <a:extLst>
-              <a:ext uri="{FF2B5EF4-FFF2-40B4-BE49-F238E27FC236}">
-                <a16:creationId xmlns:a16="http://schemas.microsoft.com/office/drawing/2014/main" id="{AD8F911A-48AF-924A-8AC8-684668454758}"/>
-              </a:ext>
-            </a:extLst>
-          </p:cNvPr>
+          <p:cNvPr id="4" name="Content Placeholder 3"/>
           <p:cNvSpPr>
             <a:spLocks noGrp="1"/>
           </p:cNvSpPr>
@@ -1778,8 +2422,8 @@
         </p:nvSpPr>
         <p:spPr>
           <a:xfrm>
-            <a:off x="839788" y="2505075"/>
-            <a:ext cx="5157787" cy="3684588"/>
+            <a:off x="1097280" y="2582334"/>
+            <a:ext cx="4937760" cy="3378200"/>
           </a:xfrm>
         </p:spPr>
         <p:txBody>
@@ -1788,81 +2432,76 @@
           <a:p>
             <a:pPr lvl="0"/>
             <a:r>
-              <a:rPr kumimoji="1" lang="ja-JP" altLang="en-US"/>
+              <a:rPr lang="ja-JP" altLang="en-US"/>
               <a:t>マスター テキストの書式設定</a:t>
             </a:r>
           </a:p>
           <a:p>
             <a:pPr lvl="1"/>
             <a:r>
-              <a:rPr kumimoji="1" lang="ja-JP" altLang="en-US"/>
+              <a:rPr lang="ja-JP" altLang="en-US"/>
               <a:t>第 </a:t>
             </a:r>
             <a:r>
-              <a:rPr kumimoji="1" lang="en-US" altLang="ja-JP"/>
+              <a:rPr lang="en-US" altLang="ja-JP"/>
               <a:t>2 </a:t>
             </a:r>
             <a:r>
-              <a:rPr kumimoji="1" lang="ja-JP" altLang="en-US"/>
+              <a:rPr lang="ja-JP" altLang="en-US"/>
               <a:t>レベル</a:t>
             </a:r>
           </a:p>
           <a:p>
             <a:pPr lvl="2"/>
             <a:r>
-              <a:rPr kumimoji="1" lang="ja-JP" altLang="en-US"/>
+              <a:rPr lang="ja-JP" altLang="en-US"/>
               <a:t>第 </a:t>
             </a:r>
             <a:r>
-              <a:rPr kumimoji="1" lang="en-US" altLang="ja-JP"/>
+              <a:rPr lang="en-US" altLang="ja-JP"/>
               <a:t>3 </a:t>
             </a:r>
             <a:r>
-              <a:rPr kumimoji="1" lang="ja-JP" altLang="en-US"/>
+              <a:rPr lang="ja-JP" altLang="en-US"/>
               <a:t>レベル</a:t>
             </a:r>
           </a:p>
           <a:p>
             <a:pPr lvl="3"/>
             <a:r>
-              <a:rPr kumimoji="1" lang="ja-JP" altLang="en-US"/>
+              <a:rPr lang="ja-JP" altLang="en-US"/>
               <a:t>第 </a:t>
             </a:r>
             <a:r>
-              <a:rPr kumimoji="1" lang="en-US" altLang="ja-JP"/>
+              <a:rPr lang="en-US" altLang="ja-JP"/>
               <a:t>4 </a:t>
             </a:r>
             <a:r>
-              <a:rPr kumimoji="1" lang="ja-JP" altLang="en-US"/>
+              <a:rPr lang="ja-JP" altLang="en-US"/>
               <a:t>レベル</a:t>
             </a:r>
           </a:p>
           <a:p>
             <a:pPr lvl="4"/>
             <a:r>
-              <a:rPr kumimoji="1" lang="ja-JP" altLang="en-US"/>
+              <a:rPr lang="ja-JP" altLang="en-US"/>
               <a:t>第 </a:t>
             </a:r>
             <a:r>
-              <a:rPr kumimoji="1" lang="en-US" altLang="ja-JP"/>
+              <a:rPr lang="en-US" altLang="ja-JP"/>
               <a:t>5 </a:t>
             </a:r>
             <a:r>
-              <a:rPr kumimoji="1" lang="ja-JP" altLang="en-US"/>
+              <a:rPr lang="ja-JP" altLang="en-US"/>
               <a:t>レベル</a:t>
             </a:r>
-          </a:p>
-        </p:txBody>
-      </p:sp>
-      <p:sp>
-        <p:nvSpPr>
-          <p:cNvPr id="5" name="テキスト プレースホルダー 4">
-            <a:extLst>
-              <a:ext uri="{FF2B5EF4-FFF2-40B4-BE49-F238E27FC236}">
-                <a16:creationId xmlns:a16="http://schemas.microsoft.com/office/drawing/2014/main" id="{98EBA638-395B-5DCC-9DF4-E861B9DA3A31}"/>
-              </a:ext>
-            </a:extLst>
-          </p:cNvPr>
+            <a:endParaRPr lang="en-US" dirty="0"/>
+          </a:p>
+        </p:txBody>
+      </p:sp>
+      <p:sp>
+        <p:nvSpPr>
+          <p:cNvPr id="5" name="Text Placeholder 4"/>
           <p:cNvSpPr>
             <a:spLocks noGrp="1"/>
           </p:cNvSpPr>
@@ -1872,16 +2511,22 @@
         </p:nvSpPr>
         <p:spPr>
           <a:xfrm>
-            <a:off x="6172200" y="1681163"/>
-            <a:ext cx="5183188" cy="823912"/>
-          </a:xfrm>
-        </p:spPr>
-        <p:txBody>
-          <a:bodyPr anchor="b"/>
+            <a:off x="6217920" y="1846052"/>
+            <a:ext cx="4937760" cy="736282"/>
+          </a:xfrm>
+        </p:spPr>
+        <p:txBody>
+          <a:bodyPr lIns="91440" rIns="91440" anchor="ctr">
+            <a:normAutofit/>
+          </a:bodyPr>
           <a:lstStyle>
             <a:lvl1pPr marL="0" indent="0">
               <a:buNone/>
-              <a:defRPr sz="2400" b="1"/>
+              <a:defRPr sz="2000" b="0" cap="all" baseline="0">
+                <a:solidFill>
+                  <a:schemeClr val="tx2"/>
+                </a:solidFill>
+              </a:defRPr>
             </a:lvl1pPr>
             <a:lvl2pPr marL="457200" indent="0">
               <a:buNone/>
@@ -1919,7 +2564,7 @@
           <a:p>
             <a:pPr lvl="0"/>
             <a:r>
-              <a:rPr kumimoji="1" lang="ja-JP" altLang="en-US"/>
+              <a:rPr lang="ja-JP" altLang="en-US"/>
               <a:t>マスター テキストの書式設定</a:t>
             </a:r>
           </a:p>
@@ -1927,13 +2572,7 @@
       </p:sp>
       <p:sp>
         <p:nvSpPr>
-          <p:cNvPr id="6" name="コンテンツ プレースホルダー 5">
-            <a:extLst>
-              <a:ext uri="{FF2B5EF4-FFF2-40B4-BE49-F238E27FC236}">
-                <a16:creationId xmlns:a16="http://schemas.microsoft.com/office/drawing/2014/main" id="{95F13BE0-3D1C-D85B-12B1-55692FCC79F4}"/>
-              </a:ext>
-            </a:extLst>
-          </p:cNvPr>
+          <p:cNvPr id="6" name="Content Placeholder 5"/>
           <p:cNvSpPr>
             <a:spLocks noGrp="1"/>
           </p:cNvSpPr>
@@ -1943,8 +2582,8 @@
         </p:nvSpPr>
         <p:spPr>
           <a:xfrm>
-            <a:off x="6172200" y="2505075"/>
-            <a:ext cx="5183188" cy="3684588"/>
+            <a:off x="6217920" y="2582334"/>
+            <a:ext cx="4937760" cy="3378200"/>
           </a:xfrm>
         </p:spPr>
         <p:txBody>
@@ -1953,81 +2592,76 @@
           <a:p>
             <a:pPr lvl="0"/>
             <a:r>
-              <a:rPr kumimoji="1" lang="ja-JP" altLang="en-US"/>
+              <a:rPr lang="ja-JP" altLang="en-US"/>
               <a:t>マスター テキストの書式設定</a:t>
             </a:r>
           </a:p>
           <a:p>
             <a:pPr lvl="1"/>
             <a:r>
-              <a:rPr kumimoji="1" lang="ja-JP" altLang="en-US"/>
+              <a:rPr lang="ja-JP" altLang="en-US"/>
               <a:t>第 </a:t>
             </a:r>
             <a:r>
-              <a:rPr kumimoji="1" lang="en-US" altLang="ja-JP"/>
+              <a:rPr lang="en-US" altLang="ja-JP"/>
               <a:t>2 </a:t>
             </a:r>
             <a:r>
-              <a:rPr kumimoji="1" lang="ja-JP" altLang="en-US"/>
+              <a:rPr lang="ja-JP" altLang="en-US"/>
               <a:t>レベル</a:t>
             </a:r>
           </a:p>
           <a:p>
             <a:pPr lvl="2"/>
             <a:r>
-              <a:rPr kumimoji="1" lang="ja-JP" altLang="en-US"/>
+              <a:rPr lang="ja-JP" altLang="en-US"/>
               <a:t>第 </a:t>
             </a:r>
             <a:r>
-              <a:rPr kumimoji="1" lang="en-US" altLang="ja-JP"/>
+              <a:rPr lang="en-US" altLang="ja-JP"/>
               <a:t>3 </a:t>
             </a:r>
             <a:r>
-              <a:rPr kumimoji="1" lang="ja-JP" altLang="en-US"/>
+              <a:rPr lang="ja-JP" altLang="en-US"/>
               <a:t>レベル</a:t>
             </a:r>
           </a:p>
           <a:p>
             <a:pPr lvl="3"/>
             <a:r>
-              <a:rPr kumimoji="1" lang="ja-JP" altLang="en-US"/>
+              <a:rPr lang="ja-JP" altLang="en-US"/>
               <a:t>第 </a:t>
             </a:r>
             <a:r>
-              <a:rPr kumimoji="1" lang="en-US" altLang="ja-JP"/>
+              <a:rPr lang="en-US" altLang="ja-JP"/>
               <a:t>4 </a:t>
             </a:r>
             <a:r>
-              <a:rPr kumimoji="1" lang="ja-JP" altLang="en-US"/>
+              <a:rPr lang="ja-JP" altLang="en-US"/>
               <a:t>レベル</a:t>
             </a:r>
           </a:p>
           <a:p>
             <a:pPr lvl="4"/>
             <a:r>
-              <a:rPr kumimoji="1" lang="ja-JP" altLang="en-US"/>
+              <a:rPr lang="ja-JP" altLang="en-US"/>
               <a:t>第 </a:t>
             </a:r>
             <a:r>
-              <a:rPr kumimoji="1" lang="en-US" altLang="ja-JP"/>
+              <a:rPr lang="en-US" altLang="ja-JP"/>
               <a:t>5 </a:t>
             </a:r>
             <a:r>
-              <a:rPr kumimoji="1" lang="ja-JP" altLang="en-US"/>
+              <a:rPr lang="ja-JP" altLang="en-US"/>
               <a:t>レベル</a:t>
             </a:r>
-          </a:p>
-        </p:txBody>
-      </p:sp>
-      <p:sp>
-        <p:nvSpPr>
-          <p:cNvPr id="7" name="日付プレースホルダー 6">
-            <a:extLst>
-              <a:ext uri="{FF2B5EF4-FFF2-40B4-BE49-F238E27FC236}">
-                <a16:creationId xmlns:a16="http://schemas.microsoft.com/office/drawing/2014/main" id="{8C5A12C6-6C04-F9D4-0787-ADEF0B5FC6DA}"/>
-              </a:ext>
-            </a:extLst>
-          </p:cNvPr>
+            <a:endParaRPr lang="en-US" dirty="0"/>
+          </a:p>
+        </p:txBody>
+      </p:sp>
+      <p:sp>
+        <p:nvSpPr>
+          <p:cNvPr id="7" name="Date Placeholder 6"/>
           <p:cNvSpPr>
             <a:spLocks noGrp="1"/>
           </p:cNvSpPr>
@@ -2042,7 +2676,7 @@
           <a:p>
             <a:fld id="{18CA95F4-0FB2-4DCC-8987-71DF119592E9}" type="datetimeFigureOut">
               <a:rPr kumimoji="1" lang="ja-JP" altLang="en-US" smtClean="0"/>
-              <a:t>2026/7/22</a:t>
+              <a:t>2026/7/27</a:t>
             </a:fld>
             <a:endParaRPr kumimoji="1" lang="ja-JP" altLang="en-US"/>
           </a:p>
@@ -2050,13 +2684,7 @@
       </p:sp>
       <p:sp>
         <p:nvSpPr>
-          <p:cNvPr id="8" name="フッター プレースホルダー 7">
-            <a:extLst>
-              <a:ext uri="{FF2B5EF4-FFF2-40B4-BE49-F238E27FC236}">
-                <a16:creationId xmlns:a16="http://schemas.microsoft.com/office/drawing/2014/main" id="{0495E5A2-BBCA-C651-E1EA-1A64E25FEB79}"/>
-              </a:ext>
-            </a:extLst>
-          </p:cNvPr>
+          <p:cNvPr id="8" name="Footer Placeholder 7"/>
           <p:cNvSpPr>
             <a:spLocks noGrp="1"/>
           </p:cNvSpPr>
@@ -2075,13 +2703,7 @@
       </p:sp>
       <p:sp>
         <p:nvSpPr>
-          <p:cNvPr id="9" name="スライド番号プレースホルダー 8">
-            <a:extLst>
-              <a:ext uri="{FF2B5EF4-FFF2-40B4-BE49-F238E27FC236}">
-                <a16:creationId xmlns:a16="http://schemas.microsoft.com/office/drawing/2014/main" id="{4E5513F5-A095-FEF9-9A5C-897CCC1AC755}"/>
-              </a:ext>
-            </a:extLst>
-          </p:cNvPr>
+          <p:cNvPr id="9" name="Slide Number Placeholder 8"/>
           <p:cNvSpPr>
             <a:spLocks noGrp="1"/>
           </p:cNvSpPr>
@@ -2105,7 +2727,7 @@
     </p:spTree>
     <p:extLst>
       <p:ext uri="{BB962C8B-B14F-4D97-AF65-F5344CB8AC3E}">
-        <p14:creationId xmlns:p14="http://schemas.microsoft.com/office/powerpoint/2010/main" val="3984618760"/>
+        <p14:creationId xmlns:p14="http://schemas.microsoft.com/office/powerpoint/2010/main" val="2694215021"/>
       </p:ext>
     </p:extLst>
   </p:cSld>
@@ -2134,13 +2756,7 @@
       </p:grpSpPr>
       <p:sp>
         <p:nvSpPr>
-          <p:cNvPr id="2" name="タイトル 1">
-            <a:extLst>
-              <a:ext uri="{FF2B5EF4-FFF2-40B4-BE49-F238E27FC236}">
-                <a16:creationId xmlns:a16="http://schemas.microsoft.com/office/drawing/2014/main" id="{56F97B5B-5E06-0A64-F87A-5EC805072380}"/>
-              </a:ext>
-            </a:extLst>
-          </p:cNvPr>
+          <p:cNvPr id="2" name="Title 1"/>
           <p:cNvSpPr>
             <a:spLocks noGrp="1"/>
           </p:cNvSpPr>
@@ -2154,21 +2770,16 @@
           <a:lstStyle/>
           <a:p>
             <a:r>
-              <a:rPr kumimoji="1" lang="ja-JP" altLang="en-US"/>
+              <a:rPr lang="ja-JP" altLang="en-US"/>
               <a:t>マスター タイトルの書式設定</a:t>
             </a:r>
-          </a:p>
-        </p:txBody>
-      </p:sp>
-      <p:sp>
-        <p:nvSpPr>
-          <p:cNvPr id="3" name="日付プレースホルダー 2">
-            <a:extLst>
-              <a:ext uri="{FF2B5EF4-FFF2-40B4-BE49-F238E27FC236}">
-                <a16:creationId xmlns:a16="http://schemas.microsoft.com/office/drawing/2014/main" id="{867A742C-4270-D6FF-1BC3-AEAA219D510D}"/>
-              </a:ext>
-            </a:extLst>
-          </p:cNvPr>
+            <a:endParaRPr lang="en-US" dirty="0"/>
+          </a:p>
+        </p:txBody>
+      </p:sp>
+      <p:sp>
+        <p:nvSpPr>
+          <p:cNvPr id="3" name="Date Placeholder 2"/>
           <p:cNvSpPr>
             <a:spLocks noGrp="1"/>
           </p:cNvSpPr>
@@ -2183,7 +2794,7 @@
           <a:p>
             <a:fld id="{18CA95F4-0FB2-4DCC-8987-71DF119592E9}" type="datetimeFigureOut">
               <a:rPr kumimoji="1" lang="ja-JP" altLang="en-US" smtClean="0"/>
-              <a:t>2026/7/22</a:t>
+              <a:t>2026/7/27</a:t>
             </a:fld>
             <a:endParaRPr kumimoji="1" lang="ja-JP" altLang="en-US"/>
           </a:p>
@@ -2191,13 +2802,7 @@
       </p:sp>
       <p:sp>
         <p:nvSpPr>
-          <p:cNvPr id="4" name="フッター プレースホルダー 3">
-            <a:extLst>
-              <a:ext uri="{FF2B5EF4-FFF2-40B4-BE49-F238E27FC236}">
-                <a16:creationId xmlns:a16="http://schemas.microsoft.com/office/drawing/2014/main" id="{6A4BE4E0-0F7A-9E44-D7A5-6EDA92E3CBE4}"/>
-              </a:ext>
-            </a:extLst>
-          </p:cNvPr>
+          <p:cNvPr id="4" name="Footer Placeholder 3"/>
           <p:cNvSpPr>
             <a:spLocks noGrp="1"/>
           </p:cNvSpPr>
@@ -2216,13 +2821,7 @@
       </p:sp>
       <p:sp>
         <p:nvSpPr>
-          <p:cNvPr id="5" name="スライド番号プレースホルダー 4">
-            <a:extLst>
-              <a:ext uri="{FF2B5EF4-FFF2-40B4-BE49-F238E27FC236}">
-                <a16:creationId xmlns:a16="http://schemas.microsoft.com/office/drawing/2014/main" id="{F709ADD2-2424-7955-2BAD-25024DA04731}"/>
-              </a:ext>
-            </a:extLst>
-          </p:cNvPr>
+          <p:cNvPr id="5" name="Slide Number Placeholder 4"/>
           <p:cNvSpPr>
             <a:spLocks noGrp="1"/>
           </p:cNvSpPr>
@@ -2246,7 +2845,7 @@
     </p:spTree>
     <p:extLst>
       <p:ext uri="{BB962C8B-B14F-4D97-AF65-F5344CB8AC3E}">
-        <p14:creationId xmlns:p14="http://schemas.microsoft.com/office/powerpoint/2010/main" val="4241255633"/>
+        <p14:creationId xmlns:p14="http://schemas.microsoft.com/office/powerpoint/2010/main" val="3134975337"/>
       </p:ext>
     </p:extLst>
   </p:cSld>
@@ -2257,7 +2856,7 @@
 </file>
 
 <file path=ppt/slideLayouts/slideLayout7.xml><?xml version="1.0" encoding="utf-8"?>
-<p:sldLayout xmlns:a="http://schemas.openxmlformats.org/drawingml/2006/main" xmlns:r="http://schemas.openxmlformats.org/officeDocument/2006/relationships" xmlns:p="http://schemas.openxmlformats.org/presentationml/2006/main" type="blank" preserve="1">
+<p:sldLayout xmlns:a="http://schemas.openxmlformats.org/drawingml/2006/main" xmlns:r="http://schemas.openxmlformats.org/officeDocument/2006/relationships" xmlns:p="http://schemas.openxmlformats.org/presentationml/2006/main" showMasterSp="0" type="blank" preserve="1">
   <p:cSld name="白紙">
     <p:spTree>
       <p:nvGrpSpPr>
@@ -2275,13 +2874,83 @@
       </p:grpSpPr>
       <p:sp>
         <p:nvSpPr>
-          <p:cNvPr id="2" name="日付プレースホルダー 1">
-            <a:extLst>
-              <a:ext uri="{FF2B5EF4-FFF2-40B4-BE49-F238E27FC236}">
-                <a16:creationId xmlns:a16="http://schemas.microsoft.com/office/drawing/2014/main" id="{40A5B46B-ABD5-25B9-8DED-F96FB249FBDC}"/>
-              </a:ext>
-            </a:extLst>
-          </p:cNvPr>
+          <p:cNvPr id="5" name="Rectangle 4"/>
+          <p:cNvSpPr/>
+          <p:nvPr/>
+        </p:nvSpPr>
+        <p:spPr>
+          <a:xfrm>
+            <a:off x="3175" y="6400800"/>
+            <a:ext cx="12188825" cy="457200"/>
+          </a:xfrm>
+          <a:prstGeom prst="rect">
+            <a:avLst/>
+          </a:prstGeom>
+          <a:solidFill>
+            <a:schemeClr val="accent2"/>
+          </a:solidFill>
+          <a:ln>
+            <a:noFill/>
+          </a:ln>
+        </p:spPr>
+        <p:style>
+          <a:lnRef idx="2">
+            <a:schemeClr val="accent1">
+              <a:shade val="50000"/>
+            </a:schemeClr>
+          </a:lnRef>
+          <a:fillRef idx="1">
+            <a:schemeClr val="accent1"/>
+          </a:fillRef>
+          <a:effectRef idx="0">
+            <a:schemeClr val="accent1"/>
+          </a:effectRef>
+          <a:fontRef idx="minor">
+            <a:schemeClr val="lt1"/>
+          </a:fontRef>
+        </p:style>
+      </p:sp>
+      <p:sp>
+        <p:nvSpPr>
+          <p:cNvPr id="6" name="Rectangle 5"/>
+          <p:cNvSpPr/>
+          <p:nvPr/>
+        </p:nvSpPr>
+        <p:spPr>
+          <a:xfrm>
+            <a:off x="15" y="6334316"/>
+            <a:ext cx="12188825" cy="64008"/>
+          </a:xfrm>
+          <a:prstGeom prst="rect">
+            <a:avLst/>
+          </a:prstGeom>
+          <a:solidFill>
+            <a:schemeClr val="accent1"/>
+          </a:solidFill>
+          <a:ln>
+            <a:noFill/>
+          </a:ln>
+        </p:spPr>
+        <p:style>
+          <a:lnRef idx="2">
+            <a:schemeClr val="accent1">
+              <a:shade val="50000"/>
+            </a:schemeClr>
+          </a:lnRef>
+          <a:fillRef idx="1">
+            <a:schemeClr val="accent1"/>
+          </a:fillRef>
+          <a:effectRef idx="0">
+            <a:schemeClr val="accent1"/>
+          </a:effectRef>
+          <a:fontRef idx="minor">
+            <a:schemeClr val="lt1"/>
+          </a:fontRef>
+        </p:style>
+      </p:sp>
+      <p:sp>
+        <p:nvSpPr>
+          <p:cNvPr id="7" name="Date Placeholder 6"/>
           <p:cNvSpPr>
             <a:spLocks noGrp="1"/>
           </p:cNvSpPr>
@@ -2296,7 +2965,7 @@
           <a:p>
             <a:fld id="{18CA95F4-0FB2-4DCC-8987-71DF119592E9}" type="datetimeFigureOut">
               <a:rPr kumimoji="1" lang="ja-JP" altLang="en-US" smtClean="0"/>
-              <a:t>2026/7/22</a:t>
+              <a:t>2026/7/27</a:t>
             </a:fld>
             <a:endParaRPr kumimoji="1" lang="ja-JP" altLang="en-US"/>
           </a:p>
@@ -2304,13 +2973,7 @@
       </p:sp>
       <p:sp>
         <p:nvSpPr>
-          <p:cNvPr id="3" name="フッター プレースホルダー 2">
-            <a:extLst>
-              <a:ext uri="{FF2B5EF4-FFF2-40B4-BE49-F238E27FC236}">
-                <a16:creationId xmlns:a16="http://schemas.microsoft.com/office/drawing/2014/main" id="{69823F4B-2E81-4127-F7CC-1EF1F75D458F}"/>
-              </a:ext>
-            </a:extLst>
-          </p:cNvPr>
+          <p:cNvPr id="8" name="Footer Placeholder 7"/>
           <p:cNvSpPr>
             <a:spLocks noGrp="1"/>
           </p:cNvSpPr>
@@ -2321,7 +2984,15 @@
         <p:spPr/>
         <p:txBody>
           <a:bodyPr/>
-          <a:lstStyle/>
+          <a:lstStyle>
+            <a:lvl1pPr>
+              <a:defRPr>
+                <a:solidFill>
+                  <a:srgbClr val="FFFFFF"/>
+                </a:solidFill>
+              </a:defRPr>
+            </a:lvl1pPr>
+          </a:lstStyle>
           <a:p>
             <a:endParaRPr kumimoji="1" lang="ja-JP" altLang="en-US"/>
           </a:p>
@@ -2329,13 +3000,7 @@
       </p:sp>
       <p:sp>
         <p:nvSpPr>
-          <p:cNvPr id="4" name="スライド番号プレースホルダー 3">
-            <a:extLst>
-              <a:ext uri="{FF2B5EF4-FFF2-40B4-BE49-F238E27FC236}">
-                <a16:creationId xmlns:a16="http://schemas.microsoft.com/office/drawing/2014/main" id="{8D9451CD-DE22-2634-FF7E-6A5B54543493}"/>
-              </a:ext>
-            </a:extLst>
-          </p:cNvPr>
+          <p:cNvPr id="9" name="Slide Number Placeholder 8"/>
           <p:cNvSpPr>
             <a:spLocks noGrp="1"/>
           </p:cNvSpPr>
@@ -2359,7 +3024,7 @@
     </p:spTree>
     <p:extLst>
       <p:ext uri="{BB962C8B-B14F-4D97-AF65-F5344CB8AC3E}">
-        <p14:creationId xmlns:p14="http://schemas.microsoft.com/office/powerpoint/2010/main" val="530002465"/>
+        <p14:creationId xmlns:p14="http://schemas.microsoft.com/office/powerpoint/2010/main" val="633627666"/>
       </p:ext>
     </p:extLst>
   </p:cSld>
@@ -2370,7 +3035,7 @@
 </file>
 
 <file path=ppt/slideLayouts/slideLayout8.xml><?xml version="1.0" encoding="utf-8"?>
-<p:sldLayout xmlns:a="http://schemas.openxmlformats.org/drawingml/2006/main" xmlns:r="http://schemas.openxmlformats.org/officeDocument/2006/relationships" xmlns:p="http://schemas.openxmlformats.org/presentationml/2006/main" type="objTx" preserve="1">
+<p:sldLayout xmlns:a="http://schemas.openxmlformats.org/drawingml/2006/main" xmlns:r="http://schemas.openxmlformats.org/officeDocument/2006/relationships" xmlns:p="http://schemas.openxmlformats.org/presentationml/2006/main" showMasterSp="0" type="objTx" preserve="1">
   <p:cSld name="タイトル付きのコンテンツ">
     <p:spTree>
       <p:nvGrpSpPr>
@@ -2388,13 +3053,83 @@
       </p:grpSpPr>
       <p:sp>
         <p:nvSpPr>
-          <p:cNvPr id="2" name="タイトル 1">
-            <a:extLst>
-              <a:ext uri="{FF2B5EF4-FFF2-40B4-BE49-F238E27FC236}">
-                <a16:creationId xmlns:a16="http://schemas.microsoft.com/office/drawing/2014/main" id="{E4EA6F53-CB55-D6B1-0D8E-6E3975D1BCED}"/>
-              </a:ext>
-            </a:extLst>
-          </p:cNvPr>
+          <p:cNvPr id="8" name="Rectangle 7"/>
+          <p:cNvSpPr/>
+          <p:nvPr/>
+        </p:nvSpPr>
+        <p:spPr>
+          <a:xfrm>
+            <a:off x="16" y="0"/>
+            <a:ext cx="4050791" cy="6858000"/>
+          </a:xfrm>
+          <a:prstGeom prst="rect">
+            <a:avLst/>
+          </a:prstGeom>
+          <a:solidFill>
+            <a:schemeClr val="accent2"/>
+          </a:solidFill>
+          <a:ln>
+            <a:noFill/>
+          </a:ln>
+        </p:spPr>
+        <p:style>
+          <a:lnRef idx="2">
+            <a:schemeClr val="accent1">
+              <a:shade val="50000"/>
+            </a:schemeClr>
+          </a:lnRef>
+          <a:fillRef idx="1">
+            <a:schemeClr val="accent1"/>
+          </a:fillRef>
+          <a:effectRef idx="0">
+            <a:schemeClr val="accent1"/>
+          </a:effectRef>
+          <a:fontRef idx="minor">
+            <a:schemeClr val="lt1"/>
+          </a:fontRef>
+        </p:style>
+      </p:sp>
+      <p:sp>
+        <p:nvSpPr>
+          <p:cNvPr id="9" name="Rectangle 8"/>
+          <p:cNvSpPr/>
+          <p:nvPr/>
+        </p:nvSpPr>
+        <p:spPr>
+          <a:xfrm>
+            <a:off x="4040071" y="0"/>
+            <a:ext cx="64008" cy="6858000"/>
+          </a:xfrm>
+          <a:prstGeom prst="rect">
+            <a:avLst/>
+          </a:prstGeom>
+          <a:solidFill>
+            <a:schemeClr val="accent1"/>
+          </a:solidFill>
+          <a:ln>
+            <a:noFill/>
+          </a:ln>
+        </p:spPr>
+        <p:style>
+          <a:lnRef idx="2">
+            <a:schemeClr val="accent1">
+              <a:shade val="50000"/>
+            </a:schemeClr>
+          </a:lnRef>
+          <a:fillRef idx="1">
+            <a:schemeClr val="accent1"/>
+          </a:fillRef>
+          <a:effectRef idx="0">
+            <a:schemeClr val="accent1"/>
+          </a:effectRef>
+          <a:fontRef idx="minor">
+            <a:schemeClr val="lt1"/>
+          </a:fontRef>
+        </p:style>
+      </p:sp>
+      <p:sp>
+        <p:nvSpPr>
+          <p:cNvPr id="2" name="Title 1"/>
           <p:cNvSpPr>
             <a:spLocks noGrp="1"/>
           </p:cNvSpPr>
@@ -2404,34 +3139,35 @@
         </p:nvSpPr>
         <p:spPr>
           <a:xfrm>
-            <a:off x="839788" y="457200"/>
-            <a:ext cx="3932237" cy="1600200"/>
-          </a:xfrm>
-        </p:spPr>
-        <p:txBody>
-          <a:bodyPr anchor="b"/>
+            <a:off x="457200" y="594359"/>
+            <a:ext cx="3200400" cy="2286000"/>
+          </a:xfrm>
+        </p:spPr>
+        <p:txBody>
+          <a:bodyPr anchor="b">
+            <a:normAutofit/>
+          </a:bodyPr>
           <a:lstStyle>
             <a:lvl1pPr>
-              <a:defRPr sz="3200"/>
+              <a:defRPr sz="3600" b="0">
+                <a:solidFill>
+                  <a:srgbClr val="FFFFFF"/>
+                </a:solidFill>
+              </a:defRPr>
             </a:lvl1pPr>
           </a:lstStyle>
           <a:p>
             <a:r>
-              <a:rPr kumimoji="1" lang="ja-JP" altLang="en-US"/>
+              <a:rPr lang="ja-JP" altLang="en-US"/>
               <a:t>マスター タイトルの書式設定</a:t>
             </a:r>
-          </a:p>
-        </p:txBody>
-      </p:sp>
-      <p:sp>
-        <p:nvSpPr>
-          <p:cNvPr id="3" name="コンテンツ プレースホルダー 2">
-            <a:extLst>
-              <a:ext uri="{FF2B5EF4-FFF2-40B4-BE49-F238E27FC236}">
-                <a16:creationId xmlns:a16="http://schemas.microsoft.com/office/drawing/2014/main" id="{D148BE8A-0FCE-DF15-BAA3-5E791A705728}"/>
-              </a:ext>
-            </a:extLst>
-          </p:cNvPr>
+            <a:endParaRPr lang="en-US" dirty="0"/>
+          </a:p>
+        </p:txBody>
+      </p:sp>
+      <p:sp>
+        <p:nvSpPr>
+          <p:cNvPr id="3" name="Content Placeholder 2"/>
           <p:cNvSpPr>
             <a:spLocks noGrp="1"/>
           </p:cNvSpPr>
@@ -2441,255 +3177,240 @@
         </p:nvSpPr>
         <p:spPr>
           <a:xfrm>
-            <a:off x="5183188" y="987425"/>
-            <a:ext cx="6172200" cy="4873625"/>
-          </a:xfrm>
-        </p:spPr>
+            <a:off x="4800600" y="731520"/>
+            <a:ext cx="6492240" cy="5257800"/>
+          </a:xfrm>
+        </p:spPr>
+        <p:txBody>
+          <a:bodyPr/>
+          <a:lstStyle/>
+          <a:p>
+            <a:pPr lvl="0"/>
+            <a:r>
+              <a:rPr lang="ja-JP" altLang="en-US"/>
+              <a:t>マスター テキストの書式設定</a:t>
+            </a:r>
+          </a:p>
+          <a:p>
+            <a:pPr lvl="1"/>
+            <a:r>
+              <a:rPr lang="ja-JP" altLang="en-US"/>
+              <a:t>第 </a:t>
+            </a:r>
+            <a:r>
+              <a:rPr lang="en-US" altLang="ja-JP"/>
+              <a:t>2 </a:t>
+            </a:r>
+            <a:r>
+              <a:rPr lang="ja-JP" altLang="en-US"/>
+              <a:t>レベル</a:t>
+            </a:r>
+          </a:p>
+          <a:p>
+            <a:pPr lvl="2"/>
+            <a:r>
+              <a:rPr lang="ja-JP" altLang="en-US"/>
+              <a:t>第 </a:t>
+            </a:r>
+            <a:r>
+              <a:rPr lang="en-US" altLang="ja-JP"/>
+              <a:t>3 </a:t>
+            </a:r>
+            <a:r>
+              <a:rPr lang="ja-JP" altLang="en-US"/>
+              <a:t>レベル</a:t>
+            </a:r>
+          </a:p>
+          <a:p>
+            <a:pPr lvl="3"/>
+            <a:r>
+              <a:rPr lang="ja-JP" altLang="en-US"/>
+              <a:t>第 </a:t>
+            </a:r>
+            <a:r>
+              <a:rPr lang="en-US" altLang="ja-JP"/>
+              <a:t>4 </a:t>
+            </a:r>
+            <a:r>
+              <a:rPr lang="ja-JP" altLang="en-US"/>
+              <a:t>レベル</a:t>
+            </a:r>
+          </a:p>
+          <a:p>
+            <a:pPr lvl="4"/>
+            <a:r>
+              <a:rPr lang="ja-JP" altLang="en-US"/>
+              <a:t>第 </a:t>
+            </a:r>
+            <a:r>
+              <a:rPr lang="en-US" altLang="ja-JP"/>
+              <a:t>5 </a:t>
+            </a:r>
+            <a:r>
+              <a:rPr lang="ja-JP" altLang="en-US"/>
+              <a:t>レベル</a:t>
+            </a:r>
+            <a:endParaRPr lang="en-US" dirty="0"/>
+          </a:p>
+        </p:txBody>
+      </p:sp>
+      <p:sp>
+        <p:nvSpPr>
+          <p:cNvPr id="4" name="Text Placeholder 3"/>
+          <p:cNvSpPr>
+            <a:spLocks noGrp="1"/>
+          </p:cNvSpPr>
+          <p:nvPr>
+            <p:ph type="body" sz="half" idx="2"/>
+          </p:nvPr>
+        </p:nvSpPr>
+        <p:spPr>
+          <a:xfrm>
+            <a:off x="457200" y="2926080"/>
+            <a:ext cx="3200400" cy="3379124"/>
+          </a:xfrm>
+        </p:spPr>
+        <p:txBody>
+          <a:bodyPr lIns="91440" rIns="91440">
+            <a:normAutofit/>
+          </a:bodyPr>
+          <a:lstStyle>
+            <a:lvl1pPr marL="0" indent="0">
+              <a:buNone/>
+              <a:defRPr sz="1500">
+                <a:solidFill>
+                  <a:srgbClr val="FFFFFF"/>
+                </a:solidFill>
+              </a:defRPr>
+            </a:lvl1pPr>
+            <a:lvl2pPr marL="457200" indent="0">
+              <a:buNone/>
+              <a:defRPr sz="1200"/>
+            </a:lvl2pPr>
+            <a:lvl3pPr marL="914400" indent="0">
+              <a:buNone/>
+              <a:defRPr sz="1000"/>
+            </a:lvl3pPr>
+            <a:lvl4pPr marL="1371600" indent="0">
+              <a:buNone/>
+              <a:defRPr sz="900"/>
+            </a:lvl4pPr>
+            <a:lvl5pPr marL="1828800" indent="0">
+              <a:buNone/>
+              <a:defRPr sz="900"/>
+            </a:lvl5pPr>
+            <a:lvl6pPr marL="2286000" indent="0">
+              <a:buNone/>
+              <a:defRPr sz="900"/>
+            </a:lvl6pPr>
+            <a:lvl7pPr marL="2743200" indent="0">
+              <a:buNone/>
+              <a:defRPr sz="900"/>
+            </a:lvl7pPr>
+            <a:lvl8pPr marL="3200400" indent="0">
+              <a:buNone/>
+              <a:defRPr sz="900"/>
+            </a:lvl8pPr>
+            <a:lvl9pPr marL="3657600" indent="0">
+              <a:buNone/>
+              <a:defRPr sz="900"/>
+            </a:lvl9pPr>
+          </a:lstStyle>
+          <a:p>
+            <a:pPr lvl="0"/>
+            <a:r>
+              <a:rPr lang="ja-JP" altLang="en-US"/>
+              <a:t>マスター テキストの書式設定</a:t>
+            </a:r>
+          </a:p>
+        </p:txBody>
+      </p:sp>
+      <p:sp>
+        <p:nvSpPr>
+          <p:cNvPr id="5" name="Date Placeholder 4"/>
+          <p:cNvSpPr>
+            <a:spLocks noGrp="1"/>
+          </p:cNvSpPr>
+          <p:nvPr>
+            <p:ph type="dt" sz="half" idx="10"/>
+          </p:nvPr>
+        </p:nvSpPr>
+        <p:spPr>
+          <a:xfrm>
+            <a:off x="465512" y="6459785"/>
+            <a:ext cx="2618510" cy="365125"/>
+          </a:xfrm>
+        </p:spPr>
+        <p:txBody>
+          <a:bodyPr/>
+          <a:lstStyle>
+            <a:lvl1pPr algn="l">
+              <a:defRPr/>
+            </a:lvl1pPr>
+          </a:lstStyle>
+          <a:p>
+            <a:fld id="{18CA95F4-0FB2-4DCC-8987-71DF119592E9}" type="datetimeFigureOut">
+              <a:rPr kumimoji="1" lang="ja-JP" altLang="en-US" smtClean="0"/>
+              <a:t>2026/7/27</a:t>
+            </a:fld>
+            <a:endParaRPr kumimoji="1" lang="ja-JP" altLang="en-US"/>
+          </a:p>
+        </p:txBody>
+      </p:sp>
+      <p:sp>
+        <p:nvSpPr>
+          <p:cNvPr id="6" name="Footer Placeholder 5"/>
+          <p:cNvSpPr>
+            <a:spLocks noGrp="1"/>
+          </p:cNvSpPr>
+          <p:nvPr>
+            <p:ph type="ftr" sz="quarter" idx="11"/>
+          </p:nvPr>
+        </p:nvSpPr>
+        <p:spPr>
+          <a:xfrm>
+            <a:off x="4800600" y="6459785"/>
+            <a:ext cx="4648200" cy="365125"/>
+          </a:xfrm>
+        </p:spPr>
+        <p:txBody>
+          <a:bodyPr/>
+          <a:lstStyle>
+            <a:lvl1pPr algn="l">
+              <a:defRPr>
+                <a:solidFill>
+                  <a:schemeClr val="tx2"/>
+                </a:solidFill>
+              </a:defRPr>
+            </a:lvl1pPr>
+          </a:lstStyle>
+          <a:p>
+            <a:endParaRPr kumimoji="1" lang="ja-JP" altLang="en-US"/>
+          </a:p>
+        </p:txBody>
+      </p:sp>
+      <p:sp>
+        <p:nvSpPr>
+          <p:cNvPr id="7" name="Slide Number Placeholder 6"/>
+          <p:cNvSpPr>
+            <a:spLocks noGrp="1"/>
+          </p:cNvSpPr>
+          <p:nvPr>
+            <p:ph type="sldNum" sz="quarter" idx="12"/>
+          </p:nvPr>
+        </p:nvSpPr>
+        <p:spPr/>
         <p:txBody>
           <a:bodyPr/>
           <a:lstStyle>
             <a:lvl1pPr>
-              <a:defRPr sz="3200"/>
+              <a:defRPr>
+                <a:solidFill>
+                  <a:schemeClr val="tx2"/>
+                </a:solidFill>
+              </a:defRPr>
             </a:lvl1pPr>
-            <a:lvl2pPr>
-              <a:defRPr sz="2800"/>
-            </a:lvl2pPr>
-            <a:lvl3pPr>
-              <a:defRPr sz="2400"/>
-            </a:lvl3pPr>
-            <a:lvl4pPr>
-              <a:defRPr sz="2000"/>
-            </a:lvl4pPr>
-            <a:lvl5pPr>
-              <a:defRPr sz="2000"/>
-            </a:lvl5pPr>
-            <a:lvl6pPr>
-              <a:defRPr sz="2000"/>
-            </a:lvl6pPr>
-            <a:lvl7pPr>
-              <a:defRPr sz="2000"/>
-            </a:lvl7pPr>
-            <a:lvl8pPr>
-              <a:defRPr sz="2000"/>
-            </a:lvl8pPr>
-            <a:lvl9pPr>
-              <a:defRPr sz="2000"/>
-            </a:lvl9pPr>
           </a:lstStyle>
-          <a:p>
-            <a:pPr lvl="0"/>
-            <a:r>
-              <a:rPr kumimoji="1" lang="ja-JP" altLang="en-US"/>
-              <a:t>マスター テキストの書式設定</a:t>
-            </a:r>
-          </a:p>
-          <a:p>
-            <a:pPr lvl="1"/>
-            <a:r>
-              <a:rPr kumimoji="1" lang="ja-JP" altLang="en-US"/>
-              <a:t>第 </a:t>
-            </a:r>
-            <a:r>
-              <a:rPr kumimoji="1" lang="en-US" altLang="ja-JP"/>
-              <a:t>2 </a:t>
-            </a:r>
-            <a:r>
-              <a:rPr kumimoji="1" lang="ja-JP" altLang="en-US"/>
-              <a:t>レベル</a:t>
-            </a:r>
-          </a:p>
-          <a:p>
-            <a:pPr lvl="2"/>
-            <a:r>
-              <a:rPr kumimoji="1" lang="ja-JP" altLang="en-US"/>
-              <a:t>第 </a:t>
-            </a:r>
-            <a:r>
-              <a:rPr kumimoji="1" lang="en-US" altLang="ja-JP"/>
-              <a:t>3 </a:t>
-            </a:r>
-            <a:r>
-              <a:rPr kumimoji="1" lang="ja-JP" altLang="en-US"/>
-              <a:t>レベル</a:t>
-            </a:r>
-          </a:p>
-          <a:p>
-            <a:pPr lvl="3"/>
-            <a:r>
-              <a:rPr kumimoji="1" lang="ja-JP" altLang="en-US"/>
-              <a:t>第 </a:t>
-            </a:r>
-            <a:r>
-              <a:rPr kumimoji="1" lang="en-US" altLang="ja-JP"/>
-              <a:t>4 </a:t>
-            </a:r>
-            <a:r>
-              <a:rPr kumimoji="1" lang="ja-JP" altLang="en-US"/>
-              <a:t>レベル</a:t>
-            </a:r>
-          </a:p>
-          <a:p>
-            <a:pPr lvl="4"/>
-            <a:r>
-              <a:rPr kumimoji="1" lang="ja-JP" altLang="en-US"/>
-              <a:t>第 </a:t>
-            </a:r>
-            <a:r>
-              <a:rPr kumimoji="1" lang="en-US" altLang="ja-JP"/>
-              <a:t>5 </a:t>
-            </a:r>
-            <a:r>
-              <a:rPr kumimoji="1" lang="ja-JP" altLang="en-US"/>
-              <a:t>レベル</a:t>
-            </a:r>
-          </a:p>
-        </p:txBody>
-      </p:sp>
-      <p:sp>
-        <p:nvSpPr>
-          <p:cNvPr id="4" name="テキスト プレースホルダー 3">
-            <a:extLst>
-              <a:ext uri="{FF2B5EF4-FFF2-40B4-BE49-F238E27FC236}">
-                <a16:creationId xmlns:a16="http://schemas.microsoft.com/office/drawing/2014/main" id="{44970655-B62F-A566-BAD5-BD1583E03DA0}"/>
-              </a:ext>
-            </a:extLst>
-          </p:cNvPr>
-          <p:cNvSpPr>
-            <a:spLocks noGrp="1"/>
-          </p:cNvSpPr>
-          <p:nvPr>
-            <p:ph type="body" sz="half" idx="2"/>
-          </p:nvPr>
-        </p:nvSpPr>
-        <p:spPr>
-          <a:xfrm>
-            <a:off x="839788" y="2057400"/>
-            <a:ext cx="3932237" cy="3811588"/>
-          </a:xfrm>
-        </p:spPr>
-        <p:txBody>
-          <a:bodyPr/>
-          <a:lstStyle>
-            <a:lvl1pPr marL="0" indent="0">
-              <a:buNone/>
-              <a:defRPr sz="1600"/>
-            </a:lvl1pPr>
-            <a:lvl2pPr marL="457200" indent="0">
-              <a:buNone/>
-              <a:defRPr sz="1400"/>
-            </a:lvl2pPr>
-            <a:lvl3pPr marL="914400" indent="0">
-              <a:buNone/>
-              <a:defRPr sz="1200"/>
-            </a:lvl3pPr>
-            <a:lvl4pPr marL="1371600" indent="0">
-              <a:buNone/>
-              <a:defRPr sz="1000"/>
-            </a:lvl4pPr>
-            <a:lvl5pPr marL="1828800" indent="0">
-              <a:buNone/>
-              <a:defRPr sz="1000"/>
-            </a:lvl5pPr>
-            <a:lvl6pPr marL="2286000" indent="0">
-              <a:buNone/>
-              <a:defRPr sz="1000"/>
-            </a:lvl6pPr>
-            <a:lvl7pPr marL="2743200" indent="0">
-              <a:buNone/>
-              <a:defRPr sz="1000"/>
-            </a:lvl7pPr>
-            <a:lvl8pPr marL="3200400" indent="0">
-              <a:buNone/>
-              <a:defRPr sz="1000"/>
-            </a:lvl8pPr>
-            <a:lvl9pPr marL="3657600" indent="0">
-              <a:buNone/>
-              <a:defRPr sz="1000"/>
-            </a:lvl9pPr>
-          </a:lstStyle>
-          <a:p>
-            <a:pPr lvl="0"/>
-            <a:r>
-              <a:rPr kumimoji="1" lang="ja-JP" altLang="en-US"/>
-              <a:t>マスター テキストの書式設定</a:t>
-            </a:r>
-          </a:p>
-        </p:txBody>
-      </p:sp>
-      <p:sp>
-        <p:nvSpPr>
-          <p:cNvPr id="5" name="日付プレースホルダー 4">
-            <a:extLst>
-              <a:ext uri="{FF2B5EF4-FFF2-40B4-BE49-F238E27FC236}">
-                <a16:creationId xmlns:a16="http://schemas.microsoft.com/office/drawing/2014/main" id="{EE3851B6-F9D9-4E08-A23C-75FE5F7FFD2F}"/>
-              </a:ext>
-            </a:extLst>
-          </p:cNvPr>
-          <p:cNvSpPr>
-            <a:spLocks noGrp="1"/>
-          </p:cNvSpPr>
-          <p:nvPr>
-            <p:ph type="dt" sz="half" idx="10"/>
-          </p:nvPr>
-        </p:nvSpPr>
-        <p:spPr/>
-        <p:txBody>
-          <a:bodyPr/>
-          <a:lstStyle/>
-          <a:p>
-            <a:fld id="{18CA95F4-0FB2-4DCC-8987-71DF119592E9}" type="datetimeFigureOut">
-              <a:rPr kumimoji="1" lang="ja-JP" altLang="en-US" smtClean="0"/>
-              <a:t>2026/7/22</a:t>
-            </a:fld>
-            <a:endParaRPr kumimoji="1" lang="ja-JP" altLang="en-US"/>
-          </a:p>
-        </p:txBody>
-      </p:sp>
-      <p:sp>
-        <p:nvSpPr>
-          <p:cNvPr id="6" name="フッター プレースホルダー 5">
-            <a:extLst>
-              <a:ext uri="{FF2B5EF4-FFF2-40B4-BE49-F238E27FC236}">
-                <a16:creationId xmlns:a16="http://schemas.microsoft.com/office/drawing/2014/main" id="{145918CE-6122-16AC-3881-4D3AF78764B6}"/>
-              </a:ext>
-            </a:extLst>
-          </p:cNvPr>
-          <p:cNvSpPr>
-            <a:spLocks noGrp="1"/>
-          </p:cNvSpPr>
-          <p:nvPr>
-            <p:ph type="ftr" sz="quarter" idx="11"/>
-          </p:nvPr>
-        </p:nvSpPr>
-        <p:spPr/>
-        <p:txBody>
-          <a:bodyPr/>
-          <a:lstStyle/>
-          <a:p>
-            <a:endParaRPr kumimoji="1" lang="ja-JP" altLang="en-US"/>
-          </a:p>
-        </p:txBody>
-      </p:sp>
-      <p:sp>
-        <p:nvSpPr>
-          <p:cNvPr id="7" name="スライド番号プレースホルダー 6">
-            <a:extLst>
-              <a:ext uri="{FF2B5EF4-FFF2-40B4-BE49-F238E27FC236}">
-                <a16:creationId xmlns:a16="http://schemas.microsoft.com/office/drawing/2014/main" id="{CEB553C8-30A5-D0D4-AB88-EC56F843C318}"/>
-              </a:ext>
-            </a:extLst>
-          </p:cNvPr>
-          <p:cNvSpPr>
-            <a:spLocks noGrp="1"/>
-          </p:cNvSpPr>
-          <p:nvPr>
-            <p:ph type="sldNum" sz="quarter" idx="12"/>
-          </p:nvPr>
-        </p:nvSpPr>
-        <p:spPr/>
-        <p:txBody>
-          <a:bodyPr/>
-          <a:lstStyle/>
           <a:p>
             <a:fld id="{1CA49D66-ABA8-4488-81EF-C2B39F5F9CEA}" type="slidenum">
               <a:rPr kumimoji="1" lang="ja-JP" altLang="en-US" smtClean="0"/>
@@ -2702,7 +3423,7 @@
     </p:spTree>
     <p:extLst>
       <p:ext uri="{BB962C8B-B14F-4D97-AF65-F5344CB8AC3E}">
-        <p14:creationId xmlns:p14="http://schemas.microsoft.com/office/powerpoint/2010/main" val="2558748360"/>
+        <p14:creationId xmlns:p14="http://schemas.microsoft.com/office/powerpoint/2010/main" val="3533963877"/>
       </p:ext>
     </p:extLst>
   </p:cSld>
@@ -2713,7 +3434,7 @@
 </file>
 
 <file path=ppt/slideLayouts/slideLayout9.xml><?xml version="1.0" encoding="utf-8"?>
-<p:sldLayout xmlns:a="http://schemas.openxmlformats.org/drawingml/2006/main" xmlns:r="http://schemas.openxmlformats.org/officeDocument/2006/relationships" xmlns:p="http://schemas.openxmlformats.org/presentationml/2006/main" type="picTx" preserve="1">
+<p:sldLayout xmlns:a="http://schemas.openxmlformats.org/drawingml/2006/main" xmlns:r="http://schemas.openxmlformats.org/officeDocument/2006/relationships" xmlns:p="http://schemas.openxmlformats.org/presentationml/2006/main" showMasterSp="0" type="picTx" preserve="1">
   <p:cSld name="タイトル付きの図">
     <p:spTree>
       <p:nvGrpSpPr>
@@ -2731,13 +3452,83 @@
       </p:grpSpPr>
       <p:sp>
         <p:nvSpPr>
-          <p:cNvPr id="2" name="タイトル 1">
-            <a:extLst>
-              <a:ext uri="{FF2B5EF4-FFF2-40B4-BE49-F238E27FC236}">
-                <a16:creationId xmlns:a16="http://schemas.microsoft.com/office/drawing/2014/main" id="{11D953DB-50D3-8317-9523-86624C77928D}"/>
-              </a:ext>
-            </a:extLst>
-          </p:cNvPr>
+          <p:cNvPr id="8" name="Rectangle 7"/>
+          <p:cNvSpPr/>
+          <p:nvPr/>
+        </p:nvSpPr>
+        <p:spPr>
+          <a:xfrm>
+            <a:off x="0" y="4953000"/>
+            <a:ext cx="12188825" cy="1905000"/>
+          </a:xfrm>
+          <a:prstGeom prst="rect">
+            <a:avLst/>
+          </a:prstGeom>
+          <a:solidFill>
+            <a:schemeClr val="accent2"/>
+          </a:solidFill>
+          <a:ln>
+            <a:noFill/>
+          </a:ln>
+        </p:spPr>
+        <p:style>
+          <a:lnRef idx="2">
+            <a:schemeClr val="accent1">
+              <a:shade val="50000"/>
+            </a:schemeClr>
+          </a:lnRef>
+          <a:fillRef idx="1">
+            <a:schemeClr val="accent1"/>
+          </a:fillRef>
+          <a:effectRef idx="0">
+            <a:schemeClr val="accent1"/>
+          </a:effectRef>
+          <a:fontRef idx="minor">
+            <a:schemeClr val="lt1"/>
+          </a:fontRef>
+        </p:style>
+      </p:sp>
+      <p:sp>
+        <p:nvSpPr>
+          <p:cNvPr id="9" name="Rectangle 8"/>
+          <p:cNvSpPr/>
+          <p:nvPr/>
+        </p:nvSpPr>
+        <p:spPr>
+          <a:xfrm>
+            <a:off x="15" y="4915076"/>
+            <a:ext cx="12188825" cy="64008"/>
+          </a:xfrm>
+          <a:prstGeom prst="rect">
+            <a:avLst/>
+          </a:prstGeom>
+          <a:solidFill>
+            <a:schemeClr val="accent1"/>
+          </a:solidFill>
+          <a:ln>
+            <a:noFill/>
+          </a:ln>
+        </p:spPr>
+        <p:style>
+          <a:lnRef idx="2">
+            <a:schemeClr val="accent1">
+              <a:shade val="50000"/>
+            </a:schemeClr>
+          </a:lnRef>
+          <a:fillRef idx="1">
+            <a:schemeClr val="accent1"/>
+          </a:fillRef>
+          <a:effectRef idx="0">
+            <a:schemeClr val="accent1"/>
+          </a:effectRef>
+          <a:fontRef idx="minor">
+            <a:schemeClr val="lt1"/>
+          </a:fontRef>
+        </p:style>
+      </p:sp>
+      <p:sp>
+        <p:nvSpPr>
+          <p:cNvPr id="2" name="Title 1"/>
           <p:cNvSpPr>
             <a:spLocks noGrp="1"/>
           </p:cNvSpPr>
@@ -2747,36 +3538,37 @@
         </p:nvSpPr>
         <p:spPr>
           <a:xfrm>
-            <a:off x="839788" y="457200"/>
-            <a:ext cx="3932237" cy="1600200"/>
-          </a:xfrm>
-        </p:spPr>
-        <p:txBody>
-          <a:bodyPr anchor="b"/>
+            <a:off x="1097280" y="5074920"/>
+            <a:ext cx="10113264" cy="822960"/>
+          </a:xfrm>
+        </p:spPr>
+        <p:txBody>
+          <a:bodyPr lIns="91440" tIns="0" rIns="91440" bIns="0" anchor="b">
+            <a:noAutofit/>
+          </a:bodyPr>
           <a:lstStyle>
             <a:lvl1pPr>
-              <a:defRPr sz="3200"/>
+              <a:defRPr sz="3600" b="0">
+                <a:solidFill>
+                  <a:srgbClr val="FFFFFF"/>
+                </a:solidFill>
+              </a:defRPr>
             </a:lvl1pPr>
           </a:lstStyle>
           <a:p>
             <a:r>
-              <a:rPr kumimoji="1" lang="ja-JP" altLang="en-US"/>
+              <a:rPr lang="ja-JP" altLang="en-US"/>
               <a:t>マスター タイトルの書式設定</a:t>
             </a:r>
-          </a:p>
-        </p:txBody>
-      </p:sp>
-      <p:sp>
-        <p:nvSpPr>
-          <p:cNvPr id="3" name="図プレースホルダー 2">
-            <a:extLst>
-              <a:ext uri="{FF2B5EF4-FFF2-40B4-BE49-F238E27FC236}">
-                <a16:creationId xmlns:a16="http://schemas.microsoft.com/office/drawing/2014/main" id="{2E894D77-FA56-68A4-B197-BF56D1EBA87D}"/>
-              </a:ext>
-            </a:extLst>
-          </p:cNvPr>
-          <p:cNvSpPr>
-            <a:spLocks noGrp="1"/>
+            <a:endParaRPr lang="en-US" dirty="0"/>
+          </a:p>
+        </p:txBody>
+      </p:sp>
+      <p:sp>
+        <p:nvSpPr>
+          <p:cNvPr id="3" name="Picture Placeholder 2"/>
+          <p:cNvSpPr>
+            <a:spLocks noGrp="1" noChangeAspect="1"/>
           </p:cNvSpPr>
           <p:nvPr>
             <p:ph type="pic" idx="1"/>
@@ -2784,16 +3576,26 @@
         </p:nvSpPr>
         <p:spPr>
           <a:xfrm>
-            <a:off x="5183188" y="987425"/>
-            <a:ext cx="6172200" cy="4873625"/>
-          </a:xfrm>
-        </p:spPr>
-        <p:txBody>
-          <a:bodyPr/>
+            <a:off x="15" y="0"/>
+            <a:ext cx="12191985" cy="4915076"/>
+          </a:xfrm>
+          <a:blipFill>
+            <a:blip r:embed="rId2"/>
+            <a:stretch>
+              <a:fillRect/>
+            </a:stretch>
+          </a:blipFill>
+        </p:spPr>
+        <p:txBody>
+          <a:bodyPr lIns="457200" tIns="457200" anchor="t"/>
           <a:lstStyle>
             <a:lvl1pPr marL="0" indent="0">
               <a:buNone/>
-              <a:defRPr sz="3200"/>
+              <a:defRPr sz="3200">
+                <a:solidFill>
+                  <a:schemeClr val="bg1"/>
+                </a:solidFill>
+              </a:defRPr>
             </a:lvl1pPr>
             <a:lvl2pPr marL="457200" indent="0">
               <a:buNone/>
@@ -2829,19 +3631,17 @@
             </a:lvl9pPr>
           </a:lstStyle>
           <a:p>
-            <a:endParaRPr kumimoji="1" lang="ja-JP" altLang="en-US"/>
-          </a:p>
-        </p:txBody>
-      </p:sp>
-      <p:sp>
-        <p:nvSpPr>
-          <p:cNvPr id="4" name="テキスト プレースホルダー 3">
-            <a:extLst>
-              <a:ext uri="{FF2B5EF4-FFF2-40B4-BE49-F238E27FC236}">
-                <a16:creationId xmlns:a16="http://schemas.microsoft.com/office/drawing/2014/main" id="{6AC8E24F-BC14-87DA-DFB6-6D44A8DEC300}"/>
-              </a:ext>
-            </a:extLst>
-          </p:cNvPr>
+            <a:r>
+              <a:rPr lang="ja-JP" altLang="en-US"/>
+              <a:t>アイコンをクリックして図を追加</a:t>
+            </a:r>
+            <a:endParaRPr lang="en-US" dirty="0"/>
+          </a:p>
+        </p:txBody>
+      </p:sp>
+      <p:sp>
+        <p:nvSpPr>
+          <p:cNvPr id="4" name="Text Placeholder 3"/>
           <p:cNvSpPr>
             <a:spLocks noGrp="1"/>
           </p:cNvSpPr>
@@ -2851,54 +3651,66 @@
         </p:nvSpPr>
         <p:spPr>
           <a:xfrm>
-            <a:off x="839788" y="2057400"/>
-            <a:ext cx="3932237" cy="3811588"/>
-          </a:xfrm>
-        </p:spPr>
-        <p:txBody>
-          <a:bodyPr/>
+            <a:off x="1097280" y="5907023"/>
+            <a:ext cx="10113264" cy="594360"/>
+          </a:xfrm>
+        </p:spPr>
+        <p:txBody>
+          <a:bodyPr lIns="91440" tIns="0" rIns="91440" bIns="0">
+            <a:normAutofit/>
+          </a:bodyPr>
           <a:lstStyle>
             <a:lvl1pPr marL="0" indent="0">
+              <a:spcBef>
+                <a:spcPts val="0"/>
+              </a:spcBef>
+              <a:spcAft>
+                <a:spcPts val="600"/>
+              </a:spcAft>
               <a:buNone/>
-              <a:defRPr sz="1600"/>
+              <a:defRPr sz="1500">
+                <a:solidFill>
+                  <a:srgbClr val="FFFFFF"/>
+                </a:solidFill>
+              </a:defRPr>
             </a:lvl1pPr>
             <a:lvl2pPr marL="457200" indent="0">
               <a:buNone/>
-              <a:defRPr sz="1400"/>
+              <a:defRPr sz="1200"/>
             </a:lvl2pPr>
             <a:lvl3pPr marL="914400" indent="0">
               <a:buNone/>
-              <a:defRPr sz="1200"/>
+              <a:defRPr sz="1000"/>
             </a:lvl3pPr>
             <a:lvl4pPr marL="1371600" indent="0">
               <a:buNone/>
-              <a:defRPr sz="1000"/>
+              <a:defRPr sz="900"/>
             </a:lvl4pPr>
             <a:lvl5pPr marL="1828800" indent="0">
               <a:buNone/>
-              <a:defRPr sz="1000"/>
+              <a:defRPr sz="900"/>
             </a:lvl5pPr>
             <a:lvl6pPr marL="2286000" indent="0">
               <a:buNone/>
-              <a:defRPr sz="1000"/>
+              <a:defRPr sz="900"/>
             </a:lvl6pPr>
             <a:lvl7pPr marL="2743200" indent="0">
               <a:buNone/>
-              <a:defRPr sz="1000"/>
+              <a:defRPr sz="900"/>
             </a:lvl7pPr>
             <a:lvl8pPr marL="3200400" indent="0">
               <a:buNone/>
-              <a:defRPr sz="1000"/>
+              <a:defRPr sz="900"/>
             </a:lvl8pPr>
             <a:lvl9pPr marL="3657600" indent="0">
               <a:buNone/>
-              <a:defRPr sz="1000"/>
+              <a:defRPr sz="900"/>
             </a:lvl9pPr>
           </a:lstStyle>
           <a:p>
             <a:pPr lvl="0"/>
             <a:r>
-              <a:rPr kumimoji="1" lang="ja-JP" altLang="en-US"/>
+              <a:rPr lang="ja-JP" altLang="en-US"/>
               <a:t>マスター テキストの書式設定</a:t>
             </a:r>
           </a:p>
@@ -2906,13 +3718,7 @@
       </p:sp>
       <p:sp>
         <p:nvSpPr>
-          <p:cNvPr id="5" name="日付プレースホルダー 4">
-            <a:extLst>
-              <a:ext uri="{FF2B5EF4-FFF2-40B4-BE49-F238E27FC236}">
-                <a16:creationId xmlns:a16="http://schemas.microsoft.com/office/drawing/2014/main" id="{ADD7FC2D-F17C-89A6-1076-D7D96E1DC2EE}"/>
-              </a:ext>
-            </a:extLst>
-          </p:cNvPr>
+          <p:cNvPr id="5" name="Date Placeholder 4"/>
           <p:cNvSpPr>
             <a:spLocks noGrp="1"/>
           </p:cNvSpPr>
@@ -2927,7 +3733,7 @@
           <a:p>
             <a:fld id="{18CA95F4-0FB2-4DCC-8987-71DF119592E9}" type="datetimeFigureOut">
               <a:rPr kumimoji="1" lang="ja-JP" altLang="en-US" smtClean="0"/>
-              <a:t>2026/7/22</a:t>
+              <a:t>2026/7/27</a:t>
             </a:fld>
             <a:endParaRPr kumimoji="1" lang="ja-JP" altLang="en-US"/>
           </a:p>
@@ -2935,13 +3741,7 @@
       </p:sp>
       <p:sp>
         <p:nvSpPr>
-          <p:cNvPr id="6" name="フッター プレースホルダー 5">
-            <a:extLst>
-              <a:ext uri="{FF2B5EF4-FFF2-40B4-BE49-F238E27FC236}">
-                <a16:creationId xmlns:a16="http://schemas.microsoft.com/office/drawing/2014/main" id="{B6FBFEB0-21F7-6184-FA41-37F843D7ECE1}"/>
-              </a:ext>
-            </a:extLst>
-          </p:cNvPr>
+          <p:cNvPr id="6" name="Footer Placeholder 5"/>
           <p:cNvSpPr>
             <a:spLocks noGrp="1"/>
           </p:cNvSpPr>
@@ -2960,13 +3760,7 @@
       </p:sp>
       <p:sp>
         <p:nvSpPr>
-          <p:cNvPr id="7" name="スライド番号プレースホルダー 6">
-            <a:extLst>
-              <a:ext uri="{FF2B5EF4-FFF2-40B4-BE49-F238E27FC236}">
-                <a16:creationId xmlns:a16="http://schemas.microsoft.com/office/drawing/2014/main" id="{F8C261F7-9646-E98A-9E28-4FCFEE39FA43}"/>
-              </a:ext>
-            </a:extLst>
-          </p:cNvPr>
+          <p:cNvPr id="7" name="Slide Number Placeholder 6"/>
           <p:cNvSpPr>
             <a:spLocks noGrp="1"/>
           </p:cNvSpPr>
@@ -2990,7 +3784,7 @@
     </p:spTree>
     <p:extLst>
       <p:ext uri="{BB962C8B-B14F-4D97-AF65-F5344CB8AC3E}">
-        <p14:creationId xmlns:p14="http://schemas.microsoft.com/office/powerpoint/2010/main" val="3399073476"/>
+        <p14:creationId xmlns:p14="http://schemas.microsoft.com/office/powerpoint/2010/main" val="2222322139"/>
       </p:ext>
     </p:extLst>
   </p:cSld>
@@ -3024,175 +3818,233 @@
       </p:grpSpPr>
       <p:sp>
         <p:nvSpPr>
-          <p:cNvPr id="2" name="タイトル プレースホルダー 1">
-            <a:extLst>
-              <a:ext uri="{FF2B5EF4-FFF2-40B4-BE49-F238E27FC236}">
-                <a16:creationId xmlns:a16="http://schemas.microsoft.com/office/drawing/2014/main" id="{BD65C921-273D-749D-0BEA-BD5478737421}"/>
-              </a:ext>
-            </a:extLst>
-          </p:cNvPr>
-          <p:cNvSpPr>
-            <a:spLocks noGrp="1"/>
-          </p:cNvSpPr>
-          <p:nvPr>
-            <p:ph type="title"/>
-          </p:nvPr>
-        </p:nvSpPr>
-        <p:spPr>
-          <a:xfrm>
-            <a:off x="838200" y="365125"/>
-            <a:ext cx="10515600" cy="1325563"/>
+          <p:cNvPr id="7" name="Rectangle 6"/>
+          <p:cNvSpPr/>
+          <p:nvPr/>
+        </p:nvSpPr>
+        <p:spPr>
+          <a:xfrm>
+            <a:off x="1" y="6400800"/>
+            <a:ext cx="12192000" cy="457200"/>
           </a:xfrm>
           <a:prstGeom prst="rect">
             <a:avLst/>
           </a:prstGeom>
-        </p:spPr>
-        <p:txBody>
-          <a:bodyPr vert="horz" lIns="91440" tIns="45720" rIns="91440" bIns="45720" rtlCol="0" anchor="ctr">
-            <a:normAutofit/>
-          </a:bodyPr>
-          <a:lstStyle/>
-          <a:p>
-            <a:r>
-              <a:rPr kumimoji="1" lang="ja-JP" altLang="en-US"/>
-              <a:t>マスター タイトルの書式設定</a:t>
-            </a:r>
-          </a:p>
-        </p:txBody>
-      </p:sp>
-      <p:sp>
-        <p:nvSpPr>
-          <p:cNvPr id="3" name="テキスト プレースホルダー 2">
-            <a:extLst>
-              <a:ext uri="{FF2B5EF4-FFF2-40B4-BE49-F238E27FC236}">
-                <a16:creationId xmlns:a16="http://schemas.microsoft.com/office/drawing/2014/main" id="{C374CF5C-F543-3B17-BEFE-A34348582FC0}"/>
-              </a:ext>
-            </a:extLst>
-          </p:cNvPr>
-          <p:cNvSpPr>
-            <a:spLocks noGrp="1"/>
-          </p:cNvSpPr>
-          <p:nvPr>
-            <p:ph type="body" idx="1"/>
-          </p:nvPr>
-        </p:nvSpPr>
-        <p:spPr>
-          <a:xfrm>
-            <a:off x="838200" y="1825625"/>
-            <a:ext cx="10515600" cy="4351338"/>
+          <a:solidFill>
+            <a:schemeClr val="accent2"/>
+          </a:solidFill>
+          <a:ln>
+            <a:noFill/>
+          </a:ln>
+        </p:spPr>
+        <p:style>
+          <a:lnRef idx="2">
+            <a:schemeClr val="accent1">
+              <a:shade val="50000"/>
+            </a:schemeClr>
+          </a:lnRef>
+          <a:fillRef idx="1">
+            <a:schemeClr val="accent1"/>
+          </a:fillRef>
+          <a:effectRef idx="0">
+            <a:schemeClr val="accent1"/>
+          </a:effectRef>
+          <a:fontRef idx="minor">
+            <a:schemeClr val="lt1"/>
+          </a:fontRef>
+        </p:style>
+      </p:sp>
+      <p:sp>
+        <p:nvSpPr>
+          <p:cNvPr id="9" name="Rectangle 8"/>
+          <p:cNvSpPr/>
+          <p:nvPr/>
+        </p:nvSpPr>
+        <p:spPr>
+          <a:xfrm>
+            <a:off x="0" y="6334316"/>
+            <a:ext cx="12192001" cy="65998"/>
           </a:xfrm>
           <a:prstGeom prst="rect">
             <a:avLst/>
           </a:prstGeom>
-        </p:spPr>
-        <p:txBody>
-          <a:bodyPr vert="horz" lIns="91440" tIns="45720" rIns="91440" bIns="45720" rtlCol="0">
-            <a:normAutofit/>
-          </a:bodyPr>
-          <a:lstStyle/>
-          <a:p>
-            <a:pPr lvl="0"/>
-            <a:r>
-              <a:rPr kumimoji="1" lang="ja-JP" altLang="en-US"/>
-              <a:t>マスター テキストの書式設定</a:t>
-            </a:r>
-          </a:p>
-          <a:p>
-            <a:pPr lvl="1"/>
-            <a:r>
-              <a:rPr kumimoji="1" lang="ja-JP" altLang="en-US"/>
-              <a:t>第 </a:t>
-            </a:r>
-            <a:r>
-              <a:rPr kumimoji="1" lang="en-US" altLang="ja-JP"/>
-              <a:t>2 </a:t>
-            </a:r>
-            <a:r>
-              <a:rPr kumimoji="1" lang="ja-JP" altLang="en-US"/>
-              <a:t>レベル</a:t>
-            </a:r>
-          </a:p>
-          <a:p>
-            <a:pPr lvl="2"/>
-            <a:r>
-              <a:rPr kumimoji="1" lang="ja-JP" altLang="en-US"/>
-              <a:t>第 </a:t>
-            </a:r>
-            <a:r>
-              <a:rPr kumimoji="1" lang="en-US" altLang="ja-JP"/>
-              <a:t>3 </a:t>
-            </a:r>
-            <a:r>
-              <a:rPr kumimoji="1" lang="ja-JP" altLang="en-US"/>
-              <a:t>レベル</a:t>
-            </a:r>
-          </a:p>
-          <a:p>
-            <a:pPr lvl="3"/>
-            <a:r>
-              <a:rPr kumimoji="1" lang="ja-JP" altLang="en-US"/>
-              <a:t>第 </a:t>
-            </a:r>
-            <a:r>
-              <a:rPr kumimoji="1" lang="en-US" altLang="ja-JP"/>
-              <a:t>4 </a:t>
-            </a:r>
-            <a:r>
-              <a:rPr kumimoji="1" lang="ja-JP" altLang="en-US"/>
-              <a:t>レベル</a:t>
-            </a:r>
-          </a:p>
-          <a:p>
-            <a:pPr lvl="4"/>
-            <a:r>
-              <a:rPr kumimoji="1" lang="ja-JP" altLang="en-US"/>
-              <a:t>第 </a:t>
-            </a:r>
-            <a:r>
-              <a:rPr kumimoji="1" lang="en-US" altLang="ja-JP"/>
-              <a:t>5 </a:t>
-            </a:r>
-            <a:r>
-              <a:rPr kumimoji="1" lang="ja-JP" altLang="en-US"/>
-              <a:t>レベル</a:t>
-            </a:r>
-          </a:p>
-        </p:txBody>
-      </p:sp>
-      <p:sp>
-        <p:nvSpPr>
-          <p:cNvPr id="4" name="日付プレースホルダー 3">
-            <a:extLst>
-              <a:ext uri="{FF2B5EF4-FFF2-40B4-BE49-F238E27FC236}">
-                <a16:creationId xmlns:a16="http://schemas.microsoft.com/office/drawing/2014/main" id="{C5228132-C351-9DE7-A41A-CB9C80B84A63}"/>
-              </a:ext>
-            </a:extLst>
-          </p:cNvPr>
-          <p:cNvSpPr>
-            <a:spLocks noGrp="1"/>
-          </p:cNvSpPr>
-          <p:nvPr>
-            <p:ph type="dt" sz="half" idx="2"/>
-          </p:nvPr>
-        </p:nvSpPr>
-        <p:spPr>
-          <a:xfrm>
-            <a:off x="838200" y="6356350"/>
-            <a:ext cx="2743200" cy="365125"/>
+          <a:solidFill>
+            <a:schemeClr val="accent1"/>
+          </a:solidFill>
+          <a:ln>
+            <a:noFill/>
+          </a:ln>
+        </p:spPr>
+        <p:style>
+          <a:lnRef idx="2">
+            <a:schemeClr val="accent1">
+              <a:shade val="50000"/>
+            </a:schemeClr>
+          </a:lnRef>
+          <a:fillRef idx="1">
+            <a:schemeClr val="accent1"/>
+          </a:fillRef>
+          <a:effectRef idx="0">
+            <a:schemeClr val="accent1"/>
+          </a:effectRef>
+          <a:fontRef idx="minor">
+            <a:schemeClr val="lt1"/>
+          </a:fontRef>
+        </p:style>
+      </p:sp>
+      <p:sp>
+        <p:nvSpPr>
+          <p:cNvPr id="2" name="Title Placeholder 1"/>
+          <p:cNvSpPr>
+            <a:spLocks noGrp="1"/>
+          </p:cNvSpPr>
+          <p:nvPr>
+            <p:ph type="title"/>
+          </p:nvPr>
+        </p:nvSpPr>
+        <p:spPr>
+          <a:xfrm>
+            <a:off x="1097280" y="286603"/>
+            <a:ext cx="10058400" cy="1450757"/>
           </a:xfrm>
           <a:prstGeom prst="rect">
             <a:avLst/>
           </a:prstGeom>
         </p:spPr>
         <p:txBody>
+          <a:bodyPr vert="horz" lIns="91440" tIns="45720" rIns="91440" bIns="45720" rtlCol="0" anchor="b">
+            <a:normAutofit/>
+          </a:bodyPr>
+          <a:lstStyle/>
+          <a:p>
+            <a:r>
+              <a:rPr lang="ja-JP" altLang="en-US"/>
+              <a:t>マスター タイトルの書式設定</a:t>
+            </a:r>
+            <a:endParaRPr lang="en-US" dirty="0"/>
+          </a:p>
+        </p:txBody>
+      </p:sp>
+      <p:sp>
+        <p:nvSpPr>
+          <p:cNvPr id="3" name="Text Placeholder 2"/>
+          <p:cNvSpPr>
+            <a:spLocks noGrp="1"/>
+          </p:cNvSpPr>
+          <p:nvPr>
+            <p:ph type="body" idx="1"/>
+          </p:nvPr>
+        </p:nvSpPr>
+        <p:spPr>
+          <a:xfrm>
+            <a:off x="1097280" y="1845734"/>
+            <a:ext cx="10058400" cy="4023360"/>
+          </a:xfrm>
+          <a:prstGeom prst="rect">
+            <a:avLst/>
+          </a:prstGeom>
+        </p:spPr>
+        <p:txBody>
+          <a:bodyPr vert="horz" lIns="0" tIns="45720" rIns="0" bIns="45720" rtlCol="0">
+            <a:normAutofit/>
+          </a:bodyPr>
+          <a:lstStyle/>
+          <a:p>
+            <a:pPr lvl="0"/>
+            <a:r>
+              <a:rPr lang="ja-JP" altLang="en-US"/>
+              <a:t>マスター テキストの書式設定</a:t>
+            </a:r>
+          </a:p>
+          <a:p>
+            <a:pPr lvl="1"/>
+            <a:r>
+              <a:rPr lang="ja-JP" altLang="en-US"/>
+              <a:t>第 </a:t>
+            </a:r>
+            <a:r>
+              <a:rPr lang="en-US" altLang="ja-JP"/>
+              <a:t>2 </a:t>
+            </a:r>
+            <a:r>
+              <a:rPr lang="ja-JP" altLang="en-US"/>
+              <a:t>レベル</a:t>
+            </a:r>
+          </a:p>
+          <a:p>
+            <a:pPr lvl="2"/>
+            <a:r>
+              <a:rPr lang="ja-JP" altLang="en-US"/>
+              <a:t>第 </a:t>
+            </a:r>
+            <a:r>
+              <a:rPr lang="en-US" altLang="ja-JP"/>
+              <a:t>3 </a:t>
+            </a:r>
+            <a:r>
+              <a:rPr lang="ja-JP" altLang="en-US"/>
+              <a:t>レベル</a:t>
+            </a:r>
+          </a:p>
+          <a:p>
+            <a:pPr lvl="3"/>
+            <a:r>
+              <a:rPr lang="ja-JP" altLang="en-US"/>
+              <a:t>第 </a:t>
+            </a:r>
+            <a:r>
+              <a:rPr lang="en-US" altLang="ja-JP"/>
+              <a:t>4 </a:t>
+            </a:r>
+            <a:r>
+              <a:rPr lang="ja-JP" altLang="en-US"/>
+              <a:t>レベル</a:t>
+            </a:r>
+          </a:p>
+          <a:p>
+            <a:pPr lvl="4"/>
+            <a:r>
+              <a:rPr lang="ja-JP" altLang="en-US"/>
+              <a:t>第 </a:t>
+            </a:r>
+            <a:r>
+              <a:rPr lang="en-US" altLang="ja-JP"/>
+              <a:t>5 </a:t>
+            </a:r>
+            <a:r>
+              <a:rPr lang="ja-JP" altLang="en-US"/>
+              <a:t>レベル</a:t>
+            </a:r>
+            <a:endParaRPr lang="en-US" dirty="0"/>
+          </a:p>
+        </p:txBody>
+      </p:sp>
+      <p:sp>
+        <p:nvSpPr>
+          <p:cNvPr id="4" name="Date Placeholder 3"/>
+          <p:cNvSpPr>
+            <a:spLocks noGrp="1"/>
+          </p:cNvSpPr>
+          <p:nvPr>
+            <p:ph type="dt" sz="half" idx="2"/>
+          </p:nvPr>
+        </p:nvSpPr>
+        <p:spPr>
+          <a:xfrm>
+            <a:off x="1097280" y="6459785"/>
+            <a:ext cx="2472271" cy="365125"/>
+          </a:xfrm>
+          <a:prstGeom prst="rect">
+            <a:avLst/>
+          </a:prstGeom>
+        </p:spPr>
+        <p:txBody>
           <a:bodyPr vert="horz" lIns="91440" tIns="45720" rIns="91440" bIns="45720" rtlCol="0" anchor="ctr"/>
           <a:lstStyle>
             <a:lvl1pPr algn="l">
-              <a:defRPr sz="1200">
+              <a:defRPr sz="900">
                 <a:solidFill>
-                  <a:schemeClr val="tx1">
-                    <a:tint val="82000"/>
-                  </a:schemeClr>
+                  <a:srgbClr val="FFFFFF"/>
                 </a:solidFill>
               </a:defRPr>
             </a:lvl1pPr>
@@ -3200,7 +4052,7 @@
           <a:p>
             <a:fld id="{18CA95F4-0FB2-4DCC-8987-71DF119592E9}" type="datetimeFigureOut">
               <a:rPr kumimoji="1" lang="ja-JP" altLang="en-US" smtClean="0"/>
-              <a:t>2026/7/22</a:t>
+              <a:t>2026/7/27</a:t>
             </a:fld>
             <a:endParaRPr kumimoji="1" lang="ja-JP" altLang="en-US"/>
           </a:p>
@@ -3208,13 +4060,7 @@
       </p:sp>
       <p:sp>
         <p:nvSpPr>
-          <p:cNvPr id="5" name="フッター プレースホルダー 4">
-            <a:extLst>
-              <a:ext uri="{FF2B5EF4-FFF2-40B4-BE49-F238E27FC236}">
-                <a16:creationId xmlns:a16="http://schemas.microsoft.com/office/drawing/2014/main" id="{FC776616-CA5C-77AA-0D29-5A64EF666E87}"/>
-              </a:ext>
-            </a:extLst>
-          </p:cNvPr>
+          <p:cNvPr id="5" name="Footer Placeholder 4"/>
           <p:cNvSpPr>
             <a:spLocks noGrp="1"/>
           </p:cNvSpPr>
@@ -3224,8 +4070,8 @@
         </p:nvSpPr>
         <p:spPr>
           <a:xfrm>
-            <a:off x="4038600" y="6356350"/>
-            <a:ext cx="4114800" cy="365125"/>
+            <a:off x="3686185" y="6459785"/>
+            <a:ext cx="4822804" cy="365125"/>
           </a:xfrm>
           <a:prstGeom prst="rect">
             <a:avLst/>
@@ -3235,11 +4081,9 @@
           <a:bodyPr vert="horz" lIns="91440" tIns="45720" rIns="91440" bIns="45720" rtlCol="0" anchor="ctr"/>
           <a:lstStyle>
             <a:lvl1pPr algn="ctr">
-              <a:defRPr sz="1200">
+              <a:defRPr sz="900" cap="all" baseline="0">
                 <a:solidFill>
-                  <a:schemeClr val="tx1">
-                    <a:tint val="82000"/>
-                  </a:schemeClr>
+                  <a:srgbClr val="FFFFFF"/>
                 </a:solidFill>
               </a:defRPr>
             </a:lvl1pPr>
@@ -3251,13 +4095,7 @@
       </p:sp>
       <p:sp>
         <p:nvSpPr>
-          <p:cNvPr id="6" name="スライド番号プレースホルダー 5">
-            <a:extLst>
-              <a:ext uri="{FF2B5EF4-FFF2-40B4-BE49-F238E27FC236}">
-                <a16:creationId xmlns:a16="http://schemas.microsoft.com/office/drawing/2014/main" id="{B1B60705-690C-7EA5-B433-58786CE7B6D6}"/>
-              </a:ext>
-            </a:extLst>
-          </p:cNvPr>
+          <p:cNvPr id="6" name="Slide Number Placeholder 5"/>
           <p:cNvSpPr>
             <a:spLocks noGrp="1"/>
           </p:cNvSpPr>
@@ -3267,8 +4105,8 @@
         </p:nvSpPr>
         <p:spPr>
           <a:xfrm>
-            <a:off x="8610600" y="6356350"/>
-            <a:ext cx="2743200" cy="365125"/>
+            <a:off x="9900458" y="6459785"/>
+            <a:ext cx="1312025" cy="365125"/>
           </a:xfrm>
           <a:prstGeom prst="rect">
             <a:avLst/>
@@ -3278,11 +4116,9 @@
           <a:bodyPr vert="horz" lIns="91440" tIns="45720" rIns="91440" bIns="45720" rtlCol="0" anchor="ctr"/>
           <a:lstStyle>
             <a:lvl1pPr algn="r">
-              <a:defRPr sz="1200">
+              <a:defRPr sz="1050">
                 <a:solidFill>
-                  <a:schemeClr val="tx1">
-                    <a:tint val="82000"/>
-                  </a:schemeClr>
+                  <a:srgbClr val="FFFFFF"/>
                 </a:solidFill>
               </a:defRPr>
             </a:lvl1pPr>
@@ -3296,40 +4132,81 @@
           </a:p>
         </p:txBody>
       </p:sp>
+      <p:cxnSp>
+        <p:nvCxnSpPr>
+          <p:cNvPr id="10" name="Straight Connector 9"/>
+          <p:cNvCxnSpPr/>
+          <p:nvPr/>
+        </p:nvCxnSpPr>
+        <p:spPr>
+          <a:xfrm>
+            <a:off x="1193532" y="1737845"/>
+            <a:ext cx="9966960" cy="0"/>
+          </a:xfrm>
+          <a:prstGeom prst="line">
+            <a:avLst/>
+          </a:prstGeom>
+          <a:ln w="6350">
+            <a:solidFill>
+              <a:schemeClr val="tx1">
+                <a:lumMod val="50000"/>
+                <a:lumOff val="50000"/>
+              </a:schemeClr>
+            </a:solidFill>
+          </a:ln>
+        </p:spPr>
+        <p:style>
+          <a:lnRef idx="1">
+            <a:schemeClr val="accent1"/>
+          </a:lnRef>
+          <a:fillRef idx="0">
+            <a:schemeClr val="accent1"/>
+          </a:fillRef>
+          <a:effectRef idx="0">
+            <a:schemeClr val="accent1"/>
+          </a:effectRef>
+          <a:fontRef idx="minor">
+            <a:schemeClr val="tx1"/>
+          </a:fontRef>
+        </p:style>
+      </p:cxnSp>
     </p:spTree>
     <p:extLst>
       <p:ext uri="{BB962C8B-B14F-4D97-AF65-F5344CB8AC3E}">
-        <p14:creationId xmlns:p14="http://schemas.microsoft.com/office/powerpoint/2010/main" val="510279302"/>
+        <p14:creationId xmlns:p14="http://schemas.microsoft.com/office/powerpoint/2010/main" val="1409229558"/>
       </p:ext>
     </p:extLst>
   </p:cSld>
   <p:clrMap bg1="lt1" tx1="dk1" bg2="lt2" tx2="dk2" accent1="accent1" accent2="accent2" accent3="accent3" accent4="accent4" accent5="accent5" accent6="accent6" hlink="hlink" folHlink="folHlink"/>
   <p:sldLayoutIdLst>
-    <p:sldLayoutId id="2147483673" r:id="rId1"/>
-    <p:sldLayoutId id="2147483674" r:id="rId2"/>
-    <p:sldLayoutId id="2147483675" r:id="rId3"/>
-    <p:sldLayoutId id="2147483676" r:id="rId4"/>
-    <p:sldLayoutId id="2147483677" r:id="rId5"/>
-    <p:sldLayoutId id="2147483678" r:id="rId6"/>
-    <p:sldLayoutId id="2147483679" r:id="rId7"/>
-    <p:sldLayoutId id="2147483680" r:id="rId8"/>
-    <p:sldLayoutId id="2147483681" r:id="rId9"/>
-    <p:sldLayoutId id="2147483682" r:id="rId10"/>
-    <p:sldLayoutId id="2147483683" r:id="rId11"/>
+    <p:sldLayoutId id="2147483702" r:id="rId1"/>
+    <p:sldLayoutId id="2147483703" r:id="rId2"/>
+    <p:sldLayoutId id="2147483704" r:id="rId3"/>
+    <p:sldLayoutId id="2147483705" r:id="rId4"/>
+    <p:sldLayoutId id="2147483706" r:id="rId5"/>
+    <p:sldLayoutId id="2147483707" r:id="rId6"/>
+    <p:sldLayoutId id="2147483708" r:id="rId7"/>
+    <p:sldLayoutId id="2147483709" r:id="rId8"/>
+    <p:sldLayoutId id="2147483710" r:id="rId9"/>
+    <p:sldLayoutId id="2147483711" r:id="rId10"/>
+    <p:sldLayoutId id="2147483712" r:id="rId11"/>
   </p:sldLayoutIdLst>
   <p:txStyles>
     <p:titleStyle>
       <a:lvl1pPr algn="l" defTabSz="914400" rtl="0" eaLnBrk="1" latinLnBrk="0" hangingPunct="1">
         <a:lnSpc>
-          <a:spcPct val="90000"/>
+          <a:spcPct val="85000"/>
         </a:lnSpc>
         <a:spcBef>
           <a:spcPct val="0"/>
         </a:spcBef>
         <a:buNone/>
-        <a:defRPr kumimoji="1" sz="4400" kern="1200">
+        <a:defRPr kumimoji="1" sz="4800" kern="1200" spc="-50" baseline="0">
           <a:solidFill>
-            <a:schemeClr val="tx1"/>
+            <a:schemeClr val="tx1">
+              <a:lumMod val="75000"/>
+              <a:lumOff val="25000"/>
+            </a:schemeClr>
           </a:solidFill>
           <a:latin typeface="+mj-lt"/>
           <a:ea typeface="+mj-ea"/>
@@ -3338,162 +4215,244 @@
       </a:lvl1pPr>
     </p:titleStyle>
     <p:bodyStyle>
-      <a:lvl1pPr marL="228600" indent="-228600" algn="l" defTabSz="914400" rtl="0" eaLnBrk="1" latinLnBrk="0" hangingPunct="1">
+      <a:lvl1pPr marL="91440" indent="-91440" algn="l" defTabSz="914400" rtl="0" eaLnBrk="1" latinLnBrk="0" hangingPunct="1">
         <a:lnSpc>
           <a:spcPct val="90000"/>
         </a:lnSpc>
         <a:spcBef>
-          <a:spcPts val="1000"/>
+          <a:spcPts val="1200"/>
         </a:spcBef>
-        <a:buFont typeface="Arial" panose="020B0604020202020204" pitchFamily="34" charset="0"/>
-        <a:buChar char="•"/>
-        <a:defRPr kumimoji="1" sz="2800" kern="1200">
+        <a:spcAft>
+          <a:spcPts val="200"/>
+        </a:spcAft>
+        <a:buClr>
+          <a:schemeClr val="accent1"/>
+        </a:buClr>
+        <a:buSzPct val="100000"/>
+        <a:buFont typeface="Calibri" panose="020F0502020204030204" pitchFamily="34" charset="0"/>
+        <a:buChar char=" "/>
+        <a:defRPr kumimoji="1" sz="2000" kern="1200">
           <a:solidFill>
-            <a:schemeClr val="tx1"/>
+            <a:schemeClr val="tx1">
+              <a:lumMod val="75000"/>
+              <a:lumOff val="25000"/>
+            </a:schemeClr>
           </a:solidFill>
           <a:latin typeface="+mn-lt"/>
           <a:ea typeface="+mn-ea"/>
           <a:cs typeface="+mn-cs"/>
         </a:defRPr>
       </a:lvl1pPr>
-      <a:lvl2pPr marL="685800" indent="-228600" algn="l" defTabSz="914400" rtl="0" eaLnBrk="1" latinLnBrk="0" hangingPunct="1">
+      <a:lvl2pPr marL="384048" indent="-182880" algn="l" defTabSz="914400" rtl="0" eaLnBrk="1" latinLnBrk="0" hangingPunct="1">
         <a:lnSpc>
           <a:spcPct val="90000"/>
         </a:lnSpc>
         <a:spcBef>
-          <a:spcPts val="500"/>
+          <a:spcPts val="200"/>
         </a:spcBef>
-        <a:buFont typeface="Arial" panose="020B0604020202020204" pitchFamily="34" charset="0"/>
-        <a:buChar char="•"/>
-        <a:defRPr kumimoji="1" sz="2400" kern="1200">
+        <a:spcAft>
+          <a:spcPts val="400"/>
+        </a:spcAft>
+        <a:buClr>
+          <a:schemeClr val="accent1"/>
+        </a:buClr>
+        <a:buFont typeface="Calibri" pitchFamily="34" charset="0"/>
+        <a:buChar char="◦"/>
+        <a:defRPr kumimoji="1" sz="1800" kern="1200">
           <a:solidFill>
-            <a:schemeClr val="tx1"/>
+            <a:schemeClr val="tx1">
+              <a:lumMod val="75000"/>
+              <a:lumOff val="25000"/>
+            </a:schemeClr>
           </a:solidFill>
           <a:latin typeface="+mn-lt"/>
           <a:ea typeface="+mn-ea"/>
           <a:cs typeface="+mn-cs"/>
         </a:defRPr>
       </a:lvl2pPr>
-      <a:lvl3pPr marL="1143000" indent="-228600" algn="l" defTabSz="914400" rtl="0" eaLnBrk="1" latinLnBrk="0" hangingPunct="1">
+      <a:lvl3pPr marL="566928" indent="-182880" algn="l" defTabSz="914400" rtl="0" eaLnBrk="1" latinLnBrk="0" hangingPunct="1">
         <a:lnSpc>
           <a:spcPct val="90000"/>
         </a:lnSpc>
         <a:spcBef>
-          <a:spcPts val="500"/>
+          <a:spcPts val="200"/>
         </a:spcBef>
-        <a:buFont typeface="Arial" panose="020B0604020202020204" pitchFamily="34" charset="0"/>
-        <a:buChar char="•"/>
-        <a:defRPr kumimoji="1" sz="2000" kern="1200">
+        <a:spcAft>
+          <a:spcPts val="400"/>
+        </a:spcAft>
+        <a:buClr>
+          <a:schemeClr val="accent1"/>
+        </a:buClr>
+        <a:buFont typeface="Calibri" pitchFamily="34" charset="0"/>
+        <a:buChar char="◦"/>
+        <a:defRPr kumimoji="1" sz="1400" kern="1200">
           <a:solidFill>
-            <a:schemeClr val="tx1"/>
+            <a:schemeClr val="tx1">
+              <a:lumMod val="75000"/>
+              <a:lumOff val="25000"/>
+            </a:schemeClr>
           </a:solidFill>
           <a:latin typeface="+mn-lt"/>
           <a:ea typeface="+mn-ea"/>
           <a:cs typeface="+mn-cs"/>
         </a:defRPr>
       </a:lvl3pPr>
-      <a:lvl4pPr marL="1600200" indent="-228600" algn="l" defTabSz="914400" rtl="0" eaLnBrk="1" latinLnBrk="0" hangingPunct="1">
+      <a:lvl4pPr marL="749808" indent="-182880" algn="l" defTabSz="914400" rtl="0" eaLnBrk="1" latinLnBrk="0" hangingPunct="1">
         <a:lnSpc>
           <a:spcPct val="90000"/>
         </a:lnSpc>
         <a:spcBef>
-          <a:spcPts val="500"/>
+          <a:spcPts val="200"/>
         </a:spcBef>
-        <a:buFont typeface="Arial" panose="020B0604020202020204" pitchFamily="34" charset="0"/>
-        <a:buChar char="•"/>
-        <a:defRPr kumimoji="1" sz="1800" kern="1200">
+        <a:spcAft>
+          <a:spcPts val="400"/>
+        </a:spcAft>
+        <a:buClr>
+          <a:schemeClr val="accent1"/>
+        </a:buClr>
+        <a:buFont typeface="Calibri" pitchFamily="34" charset="0"/>
+        <a:buChar char="◦"/>
+        <a:defRPr kumimoji="1" sz="1400" kern="1200">
           <a:solidFill>
-            <a:schemeClr val="tx1"/>
+            <a:schemeClr val="tx1">
+              <a:lumMod val="75000"/>
+              <a:lumOff val="25000"/>
+            </a:schemeClr>
           </a:solidFill>
           <a:latin typeface="+mn-lt"/>
           <a:ea typeface="+mn-ea"/>
           <a:cs typeface="+mn-cs"/>
         </a:defRPr>
       </a:lvl4pPr>
-      <a:lvl5pPr marL="2057400" indent="-228600" algn="l" defTabSz="914400" rtl="0" eaLnBrk="1" latinLnBrk="0" hangingPunct="1">
+      <a:lvl5pPr marL="932688" indent="-182880" algn="l" defTabSz="914400" rtl="0" eaLnBrk="1" latinLnBrk="0" hangingPunct="1">
         <a:lnSpc>
           <a:spcPct val="90000"/>
         </a:lnSpc>
         <a:spcBef>
-          <a:spcPts val="500"/>
+          <a:spcPts val="200"/>
         </a:spcBef>
-        <a:buFont typeface="Arial" panose="020B0604020202020204" pitchFamily="34" charset="0"/>
-        <a:buChar char="•"/>
-        <a:defRPr kumimoji="1" sz="1800" kern="1200">
+        <a:spcAft>
+          <a:spcPts val="400"/>
+        </a:spcAft>
+        <a:buClr>
+          <a:schemeClr val="accent1"/>
+        </a:buClr>
+        <a:buFont typeface="Calibri" pitchFamily="34" charset="0"/>
+        <a:buChar char="◦"/>
+        <a:defRPr kumimoji="1" sz="1400" kern="1200">
           <a:solidFill>
-            <a:schemeClr val="tx1"/>
+            <a:schemeClr val="tx1">
+              <a:lumMod val="75000"/>
+              <a:lumOff val="25000"/>
+            </a:schemeClr>
           </a:solidFill>
           <a:latin typeface="+mn-lt"/>
           <a:ea typeface="+mn-ea"/>
           <a:cs typeface="+mn-cs"/>
         </a:defRPr>
       </a:lvl5pPr>
-      <a:lvl6pPr marL="2514600" indent="-228600" algn="l" defTabSz="914400" rtl="0" eaLnBrk="1" latinLnBrk="0" hangingPunct="1">
+      <a:lvl6pPr marL="1100000" indent="-228600" algn="l" defTabSz="914400" rtl="0" eaLnBrk="1" latinLnBrk="0" hangingPunct="1">
         <a:lnSpc>
           <a:spcPct val="90000"/>
         </a:lnSpc>
         <a:spcBef>
-          <a:spcPts val="500"/>
+          <a:spcPts val="200"/>
         </a:spcBef>
-        <a:buFont typeface="Arial" panose="020B0604020202020204" pitchFamily="34" charset="0"/>
-        <a:buChar char="•"/>
-        <a:defRPr kumimoji="1" sz="1800" kern="1200">
+        <a:spcAft>
+          <a:spcPts val="400"/>
+        </a:spcAft>
+        <a:buClr>
+          <a:schemeClr val="accent1"/>
+        </a:buClr>
+        <a:buFont typeface="Calibri" pitchFamily="34" charset="0"/>
+        <a:buChar char="◦"/>
+        <a:defRPr kumimoji="1" sz="1400" kern="1200">
           <a:solidFill>
-            <a:schemeClr val="tx1"/>
+            <a:schemeClr val="tx1">
+              <a:lumMod val="75000"/>
+              <a:lumOff val="25000"/>
+            </a:schemeClr>
           </a:solidFill>
           <a:latin typeface="+mn-lt"/>
           <a:ea typeface="+mn-ea"/>
           <a:cs typeface="+mn-cs"/>
         </a:defRPr>
       </a:lvl6pPr>
-      <a:lvl7pPr marL="2971800" indent="-228600" algn="l" defTabSz="914400" rtl="0" eaLnBrk="1" latinLnBrk="0" hangingPunct="1">
+      <a:lvl7pPr marL="1300000" indent="-228600" algn="l" defTabSz="914400" rtl="0" eaLnBrk="1" latinLnBrk="0" hangingPunct="1">
         <a:lnSpc>
           <a:spcPct val="90000"/>
         </a:lnSpc>
         <a:spcBef>
-          <a:spcPts val="500"/>
+          <a:spcPts val="200"/>
         </a:spcBef>
-        <a:buFont typeface="Arial" panose="020B0604020202020204" pitchFamily="34" charset="0"/>
-        <a:buChar char="•"/>
-        <a:defRPr kumimoji="1" sz="1800" kern="1200">
+        <a:spcAft>
+          <a:spcPts val="400"/>
+        </a:spcAft>
+        <a:buClr>
+          <a:schemeClr val="accent1"/>
+        </a:buClr>
+        <a:buFont typeface="Calibri" pitchFamily="34" charset="0"/>
+        <a:buChar char="◦"/>
+        <a:defRPr kumimoji="1" sz="1400" kern="1200">
           <a:solidFill>
-            <a:schemeClr val="tx1"/>
+            <a:schemeClr val="tx1">
+              <a:lumMod val="75000"/>
+              <a:lumOff val="25000"/>
+            </a:schemeClr>
           </a:solidFill>
           <a:latin typeface="+mn-lt"/>
           <a:ea typeface="+mn-ea"/>
           <a:cs typeface="+mn-cs"/>
         </a:defRPr>
       </a:lvl7pPr>
-      <a:lvl8pPr marL="3429000" indent="-228600" algn="l" defTabSz="914400" rtl="0" eaLnBrk="1" latinLnBrk="0" hangingPunct="1">
+      <a:lvl8pPr marL="1500000" indent="-228600" algn="l" defTabSz="914400" rtl="0" eaLnBrk="1" latinLnBrk="0" hangingPunct="1">
         <a:lnSpc>
           <a:spcPct val="90000"/>
         </a:lnSpc>
         <a:spcBef>
-          <a:spcPts val="500"/>
+          <a:spcPts val="200"/>
         </a:spcBef>
-        <a:buFont typeface="Arial" panose="020B0604020202020204" pitchFamily="34" charset="0"/>
-        <a:buChar char="•"/>
-        <a:defRPr kumimoji="1" sz="1800" kern="1200">
+        <a:spcAft>
+          <a:spcPts val="400"/>
+        </a:spcAft>
+        <a:buClr>
+          <a:schemeClr val="accent1"/>
+        </a:buClr>
+        <a:buFont typeface="Calibri" pitchFamily="34" charset="0"/>
+        <a:buChar char="◦"/>
+        <a:defRPr kumimoji="1" sz="1400" kern="1200">
           <a:solidFill>
-            <a:schemeClr val="tx1"/>
+            <a:schemeClr val="tx1">
+              <a:lumMod val="75000"/>
+              <a:lumOff val="25000"/>
+            </a:schemeClr>
           </a:solidFill>
           <a:latin typeface="+mn-lt"/>
           <a:ea typeface="+mn-ea"/>
           <a:cs typeface="+mn-cs"/>
         </a:defRPr>
       </a:lvl8pPr>
-      <a:lvl9pPr marL="3886200" indent="-228600" algn="l" defTabSz="914400" rtl="0" eaLnBrk="1" latinLnBrk="0" hangingPunct="1">
+      <a:lvl9pPr marL="1700000" indent="-228600" algn="l" defTabSz="914400" rtl="0" eaLnBrk="1" latinLnBrk="0" hangingPunct="1">
         <a:lnSpc>
           <a:spcPct val="90000"/>
         </a:lnSpc>
         <a:spcBef>
-          <a:spcPts val="500"/>
+          <a:spcPts val="200"/>
         </a:spcBef>
-        <a:buFont typeface="Arial" panose="020B0604020202020204" pitchFamily="34" charset="0"/>
-        <a:buChar char="•"/>
-        <a:defRPr kumimoji="1" sz="1800" kern="1200">
+        <a:spcAft>
+          <a:spcPts val="400"/>
+        </a:spcAft>
+        <a:buClr>
+          <a:schemeClr val="accent1"/>
+        </a:buClr>
+        <a:buFont typeface="Calibri" pitchFamily="34" charset="0"/>
+        <a:buChar char="◦"/>
+        <a:defRPr kumimoji="1" sz="1400" kern="1200">
           <a:solidFill>
-            <a:schemeClr val="tx1"/>
+            <a:schemeClr val="tx1">
+              <a:lumMod val="75000"/>
+              <a:lumOff val="25000"/>
+            </a:schemeClr>
           </a:solidFill>
           <a:latin typeface="+mn-lt"/>
           <a:ea typeface="+mn-ea"/>
@@ -3503,7 +4462,7 @@
     </p:bodyStyle>
     <p:otherStyle>
       <a:defPPr>
-        <a:defRPr lang="ja-JP"/>
+        <a:defRPr lang="en-US"/>
       </a:defPPr>
       <a:lvl1pPr marL="0" algn="l" defTabSz="914400" rtl="0" eaLnBrk="1" latinLnBrk="0" hangingPunct="1">
         <a:defRPr kumimoji="1" sz="1800" kern="1200">
@@ -3638,6 +4597,10 @@
           <a:bodyPr/>
           <a:lstStyle/>
           <a:p>
+            <a:r>
+              <a:rPr lang="ja-JP" altLang="en-US" dirty="0"/>
+              <a:t>脱出ゲーム</a:t>
+            </a:r>
             <a:endParaRPr kumimoji="1" lang="ja-JP" altLang="en-US" dirty="0"/>
           </a:p>
         </p:txBody>
@@ -3667,6 +4630,9 @@
               <a:rPr kumimoji="1" lang="en-US" altLang="ja-JP" dirty="0"/>
               <a:t>Team-7</a:t>
             </a:r>
+          </a:p>
+          <a:p>
+            <a:endParaRPr kumimoji="1" lang="en-US" altLang="ja-JP" dirty="0"/>
           </a:p>
         </p:txBody>
       </p:sp>
@@ -3723,7 +4689,7 @@
           <a:p>
             <a:r>
               <a:rPr kumimoji="1" lang="ja-JP" altLang="en-US" dirty="0"/>
-              <a:t>脱出ゲームの作成</a:t>
+              <a:t>システムの概要</a:t>
             </a:r>
           </a:p>
         </p:txBody>
@@ -3746,14 +4712,60 @@
         </p:nvSpPr>
         <p:spPr/>
         <p:txBody>
-          <a:bodyPr/>
-          <a:lstStyle/>
-          <a:p>
-            <a:r>
-              <a:rPr kumimoji="1" lang="ja-JP" altLang="en-US" dirty="0"/>
-              <a:t>舞台：学校</a:t>
-            </a:r>
-            <a:endParaRPr kumimoji="1" lang="en-US" altLang="ja-JP" dirty="0"/>
+          <a:bodyPr>
+            <a:normAutofit/>
+          </a:bodyPr>
+          <a:lstStyle/>
+          <a:p>
+            <a:pPr>
+              <a:buFont typeface="Wingdings" panose="05000000000000000000" pitchFamily="2" charset="2"/>
+              <a:buChar char="l"/>
+            </a:pPr>
+            <a:r>
+              <a:rPr lang="ja-JP" altLang="ja-JP" dirty="0"/>
+              <a:t>4ステージ構成で、プレイヤーは1ステージずつ攻略していく</a:t>
+            </a:r>
+          </a:p>
+          <a:p>
+            <a:pPr>
+              <a:buFont typeface="Wingdings" panose="05000000000000000000" pitchFamily="2" charset="2"/>
+              <a:buChar char="l"/>
+            </a:pPr>
+            <a:r>
+              <a:rPr lang="ja-JP" altLang="en-US" dirty="0"/>
+              <a:t>廊下の場面でステージを選択し</a:t>
+            </a:r>
+            <a:r>
+              <a:rPr lang="ja-JP" altLang="ja-JP" dirty="0"/>
+              <a:t>、ステージを</a:t>
+            </a:r>
+            <a:r>
+              <a:rPr lang="ja-JP" altLang="en-US" dirty="0"/>
+              <a:t>２つ</a:t>
+            </a:r>
+            <a:r>
+              <a:rPr lang="ja-JP" altLang="ja-JP" dirty="0"/>
+              <a:t>クリアすると「ステージクリア」の演出とともに</a:t>
+            </a:r>
+            <a:r>
+              <a:rPr lang="ja-JP" altLang="en-US" dirty="0"/>
+              <a:t>廊下</a:t>
+            </a:r>
+            <a:r>
+              <a:rPr lang="ja-JP" altLang="ja-JP" dirty="0"/>
+              <a:t>へ進む。最終ステージをクリアすると、全体クリア画面を表示する。</a:t>
+            </a:r>
+          </a:p>
+          <a:p>
+            <a:pPr>
+              <a:buFont typeface="Wingdings" panose="05000000000000000000" pitchFamily="2" charset="2"/>
+              <a:buChar char="l"/>
+            </a:pPr>
+            <a:r>
+              <a:rPr lang="ja-JP" altLang="ja-JP" dirty="0"/>
+              <a:t>一度クリアしたステージには戻れない。</a:t>
+            </a:r>
+            <a:endParaRPr lang="en-US" altLang="ja-JP" dirty="0"/>
           </a:p>
           <a:p>
             <a:r>
@@ -3770,19 +4782,6 @@
               <a:rPr lang="ja-JP" altLang="ja-JP" dirty="0"/>
               <a:t>放課後、忘れ物を取りに校舎へ戻った主人公。校舎に入った瞬間、突然すべての扉に鍵がかかる。校内放送から謎のメッセージが流れる——「校内に隠された4つの鍵を集めれば出口は開く。」プレイヤーは学校内を探索し、謎を解きながら脱出を目指す。</a:t>
             </a:r>
-          </a:p>
-          <a:p>
-            <a:pPr marL="0" indent="0">
-              <a:buNone/>
-            </a:pPr>
-            <a:endParaRPr kumimoji="1" lang="en-US" altLang="ja-JP" dirty="0"/>
-          </a:p>
-          <a:p>
-            <a:r>
-              <a:rPr lang="ja-JP" altLang="en-US" dirty="0"/>
-              <a:t>あ</a:t>
-            </a:r>
-            <a:endParaRPr kumimoji="1" lang="ja-JP" altLang="en-US" dirty="0"/>
           </a:p>
         </p:txBody>
       </p:sp>
@@ -3821,7 +4820,7 @@
           <p:cNvPr id="2" name="タイトル 1">
             <a:extLst>
               <a:ext uri="{FF2B5EF4-FFF2-40B4-BE49-F238E27FC236}">
-                <a16:creationId xmlns:a16="http://schemas.microsoft.com/office/drawing/2014/main" id="{C1B23293-D3CB-FF64-1C67-0B4F5E500672}"/>
+                <a16:creationId xmlns:a16="http://schemas.microsoft.com/office/drawing/2014/main" id="{08663BEB-7975-9DCC-9331-272C07EA40BC}"/>
               </a:ext>
             </a:extLst>
           </p:cNvPr>
@@ -3838,71 +4837,837 @@
           <a:lstStyle/>
           <a:p>
             <a:r>
-              <a:rPr kumimoji="1" lang="ja-JP" altLang="en-US" dirty="0"/>
-              <a:t>仕様</a:t>
-            </a:r>
-          </a:p>
-        </p:txBody>
-      </p:sp>
-      <p:sp>
-        <p:nvSpPr>
-          <p:cNvPr id="3" name="コンテンツ プレースホルダー 2">
+              <a:rPr lang="ja-JP" altLang="en-US" dirty="0"/>
+              <a:t>ゲーム全体の流れ</a:t>
+            </a:r>
+            <a:endParaRPr kumimoji="1" lang="ja-JP" altLang="en-US" dirty="0"/>
+          </a:p>
+        </p:txBody>
+      </p:sp>
+      <p:sp>
+        <p:nvSpPr>
+          <p:cNvPr id="4" name="正方形/長方形 3">
             <a:extLst>
               <a:ext uri="{FF2B5EF4-FFF2-40B4-BE49-F238E27FC236}">
-                <a16:creationId xmlns:a16="http://schemas.microsoft.com/office/drawing/2014/main" id="{B2FCB8AA-187B-30AD-4A7D-3B69A75B19B5}"/>
+                <a16:creationId xmlns:a16="http://schemas.microsoft.com/office/drawing/2014/main" id="{1A367C56-8664-9B69-1A76-2AE7F6C88435}"/>
               </a:ext>
             </a:extLst>
           </p:cNvPr>
-          <p:cNvSpPr>
-            <a:spLocks noGrp="1"/>
-          </p:cNvSpPr>
-          <p:nvPr>
-            <p:ph idx="1"/>
-          </p:nvPr>
-        </p:nvSpPr>
-        <p:spPr/>
-        <p:txBody>
-          <a:bodyPr/>
-          <a:lstStyle/>
-          <a:p>
-            <a:r>
-              <a:rPr lang="ja-JP" altLang="ja-JP" dirty="0"/>
-              <a:t>- 4ステージ構成で、プレイヤーは1ステージずつ攻略していく</a:t>
-            </a:r>
-          </a:p>
-          <a:p>
-            <a:r>
-              <a:rPr lang="ja-JP" altLang="ja-JP" dirty="0"/>
-              <a:t>- 画面には1ステージのみを表示し、ステージをクリアすると「ステージクリア」の演出とともに、次のステージへ進む。</a:t>
-            </a:r>
-          </a:p>
-          <a:p>
-            <a:r>
-              <a:rPr lang="ja-JP" altLang="ja-JP" dirty="0"/>
-              <a:t>- ステージが進むごとに謎の難易度を上げる</a:t>
-            </a:r>
-          </a:p>
-          <a:p>
-            <a:r>
-              <a:rPr lang="ja-JP" altLang="ja-JP" dirty="0"/>
-              <a:t>- 最終ステージをクリアすると、全体クリア画面を表示する。</a:t>
-            </a:r>
-          </a:p>
-          <a:p>
-            <a:r>
-              <a:rPr lang="ja-JP" altLang="ja-JP" dirty="0"/>
-              <a:t>- 一度クリアしたステージには戻れない。</a:t>
-            </a:r>
-          </a:p>
-          <a:p>
+          <p:cNvSpPr/>
+          <p:nvPr/>
+        </p:nvSpPr>
+        <p:spPr>
+          <a:xfrm>
+            <a:off x="160161" y="3395132"/>
+            <a:ext cx="1620000" cy="720000"/>
+          </a:xfrm>
+          <a:prstGeom prst="rect">
+            <a:avLst/>
+          </a:prstGeom>
+        </p:spPr>
+        <p:style>
+          <a:lnRef idx="2">
+            <a:schemeClr val="accent1">
+              <a:shade val="15000"/>
+            </a:schemeClr>
+          </a:lnRef>
+          <a:fillRef idx="1">
+            <a:schemeClr val="accent1"/>
+          </a:fillRef>
+          <a:effectRef idx="0">
+            <a:schemeClr val="accent1"/>
+          </a:effectRef>
+          <a:fontRef idx="minor">
+            <a:schemeClr val="lt1"/>
+          </a:fontRef>
+        </p:style>
+        <p:txBody>
+          <a:bodyPr rtlCol="0" anchor="ctr"/>
+          <a:lstStyle/>
+          <a:p>
+            <a:pPr algn="ctr"/>
+            <a:r>
+              <a:rPr kumimoji="1" lang="ja-JP" altLang="en-US" dirty="0"/>
+              <a:t>タイトル画面</a:t>
+            </a:r>
+          </a:p>
+        </p:txBody>
+      </p:sp>
+      <p:sp>
+        <p:nvSpPr>
+          <p:cNvPr id="5" name="正方形/長方形 4">
+            <a:extLst>
+              <a:ext uri="{FF2B5EF4-FFF2-40B4-BE49-F238E27FC236}">
+                <a16:creationId xmlns:a16="http://schemas.microsoft.com/office/drawing/2014/main" id="{C5F99982-2C54-1C2E-E11C-7795B070FC66}"/>
+              </a:ext>
+            </a:extLst>
+          </p:cNvPr>
+          <p:cNvSpPr/>
+          <p:nvPr/>
+        </p:nvSpPr>
+        <p:spPr>
+          <a:xfrm>
+            <a:off x="2481067" y="3395132"/>
+            <a:ext cx="900000" cy="720000"/>
+          </a:xfrm>
+          <a:prstGeom prst="rect">
+            <a:avLst/>
+          </a:prstGeom>
+        </p:spPr>
+        <p:style>
+          <a:lnRef idx="2">
+            <a:schemeClr val="accent1">
+              <a:shade val="15000"/>
+            </a:schemeClr>
+          </a:lnRef>
+          <a:fillRef idx="1">
+            <a:schemeClr val="accent1"/>
+          </a:fillRef>
+          <a:effectRef idx="0">
+            <a:schemeClr val="accent1"/>
+          </a:effectRef>
+          <a:fontRef idx="minor">
+            <a:schemeClr val="lt1"/>
+          </a:fontRef>
+        </p:style>
+        <p:txBody>
+          <a:bodyPr rtlCol="0" anchor="ctr"/>
+          <a:lstStyle/>
+          <a:p>
+            <a:pPr algn="ctr"/>
+            <a:r>
+              <a:rPr kumimoji="1" lang="ja-JP" altLang="en-US" dirty="0"/>
+              <a:t>廊下</a:t>
+            </a:r>
+          </a:p>
+        </p:txBody>
+      </p:sp>
+      <p:sp>
+        <p:nvSpPr>
+          <p:cNvPr id="6" name="正方形/長方形 5">
+            <a:extLst>
+              <a:ext uri="{FF2B5EF4-FFF2-40B4-BE49-F238E27FC236}">
+                <a16:creationId xmlns:a16="http://schemas.microsoft.com/office/drawing/2014/main" id="{7D5117B3-0900-6F20-AA48-5314BFEB1B99}"/>
+              </a:ext>
+            </a:extLst>
+          </p:cNvPr>
+          <p:cNvSpPr/>
+          <p:nvPr/>
+        </p:nvSpPr>
+        <p:spPr>
+          <a:xfrm>
+            <a:off x="4809067" y="4400641"/>
+            <a:ext cx="1620000" cy="720000"/>
+          </a:xfrm>
+          <a:prstGeom prst="rect">
+            <a:avLst/>
+          </a:prstGeom>
+        </p:spPr>
+        <p:style>
+          <a:lnRef idx="2">
+            <a:schemeClr val="accent1">
+              <a:shade val="15000"/>
+            </a:schemeClr>
+          </a:lnRef>
+          <a:fillRef idx="1">
+            <a:schemeClr val="accent1"/>
+          </a:fillRef>
+          <a:effectRef idx="0">
+            <a:schemeClr val="accent1"/>
+          </a:effectRef>
+          <a:fontRef idx="minor">
+            <a:schemeClr val="lt1"/>
+          </a:fontRef>
+        </p:style>
+        <p:txBody>
+          <a:bodyPr rtlCol="0" anchor="ctr"/>
+          <a:lstStyle/>
+          <a:p>
+            <a:pPr algn="ctr"/>
+            <a:r>
+              <a:rPr kumimoji="1" lang="en-US" altLang="ja-JP" dirty="0"/>
+              <a:t>StageRoom2</a:t>
+            </a:r>
             <a:endParaRPr kumimoji="1" lang="ja-JP" altLang="en-US" dirty="0"/>
+          </a:p>
+        </p:txBody>
+      </p:sp>
+      <p:sp>
+        <p:nvSpPr>
+          <p:cNvPr id="8" name="正方形/長方形 7">
+            <a:extLst>
+              <a:ext uri="{FF2B5EF4-FFF2-40B4-BE49-F238E27FC236}">
+                <a16:creationId xmlns:a16="http://schemas.microsoft.com/office/drawing/2014/main" id="{16023779-4E1D-A0D0-D01C-1C4030FE9A6C}"/>
+              </a:ext>
+            </a:extLst>
+          </p:cNvPr>
+          <p:cNvSpPr/>
+          <p:nvPr/>
+        </p:nvSpPr>
+        <p:spPr>
+          <a:xfrm>
+            <a:off x="4809067" y="2382869"/>
+            <a:ext cx="1620000" cy="720000"/>
+          </a:xfrm>
+          <a:prstGeom prst="rect">
+            <a:avLst/>
+          </a:prstGeom>
+        </p:spPr>
+        <p:style>
+          <a:lnRef idx="2">
+            <a:schemeClr val="accent1">
+              <a:shade val="15000"/>
+            </a:schemeClr>
+          </a:lnRef>
+          <a:fillRef idx="1">
+            <a:schemeClr val="accent1"/>
+          </a:fillRef>
+          <a:effectRef idx="0">
+            <a:schemeClr val="accent1"/>
+          </a:effectRef>
+          <a:fontRef idx="minor">
+            <a:schemeClr val="lt1"/>
+          </a:fontRef>
+        </p:style>
+        <p:txBody>
+          <a:bodyPr rtlCol="0" anchor="ctr"/>
+          <a:lstStyle/>
+          <a:p>
+            <a:pPr algn="ctr"/>
+            <a:r>
+              <a:rPr kumimoji="1" lang="en-US" altLang="ja-JP" dirty="0"/>
+              <a:t>StageRoom1</a:t>
+            </a:r>
+            <a:endParaRPr kumimoji="1" lang="ja-JP" altLang="en-US" dirty="0"/>
+          </a:p>
+        </p:txBody>
+      </p:sp>
+      <p:sp>
+        <p:nvSpPr>
+          <p:cNvPr id="10" name="正方形/長方形 9">
+            <a:extLst>
+              <a:ext uri="{FF2B5EF4-FFF2-40B4-BE49-F238E27FC236}">
+                <a16:creationId xmlns:a16="http://schemas.microsoft.com/office/drawing/2014/main" id="{F95E93CB-2A0E-CC72-300F-DEE5E4EF900E}"/>
+              </a:ext>
+            </a:extLst>
+          </p:cNvPr>
+          <p:cNvSpPr/>
+          <p:nvPr/>
+        </p:nvSpPr>
+        <p:spPr>
+          <a:xfrm>
+            <a:off x="10345680" y="3395132"/>
+            <a:ext cx="1620000" cy="720000"/>
+          </a:xfrm>
+          <a:prstGeom prst="rect">
+            <a:avLst/>
+          </a:prstGeom>
+        </p:spPr>
+        <p:style>
+          <a:lnRef idx="2">
+            <a:schemeClr val="accent1">
+              <a:shade val="15000"/>
+            </a:schemeClr>
+          </a:lnRef>
+          <a:fillRef idx="1">
+            <a:schemeClr val="accent1"/>
+          </a:fillRef>
+          <a:effectRef idx="0">
+            <a:schemeClr val="accent1"/>
+          </a:effectRef>
+          <a:fontRef idx="minor">
+            <a:schemeClr val="lt1"/>
+          </a:fontRef>
+        </p:style>
+        <p:txBody>
+          <a:bodyPr rtlCol="0" anchor="ctr"/>
+          <a:lstStyle/>
+          <a:p>
+            <a:pPr algn="ctr"/>
+            <a:r>
+              <a:rPr kumimoji="1" lang="ja-JP" altLang="en-US" dirty="0"/>
+              <a:t>非常口</a:t>
+            </a:r>
+          </a:p>
+        </p:txBody>
+      </p:sp>
+      <p:sp>
+        <p:nvSpPr>
+          <p:cNvPr id="12" name="正方形/長方形 11">
+            <a:extLst>
+              <a:ext uri="{FF2B5EF4-FFF2-40B4-BE49-F238E27FC236}">
+                <a16:creationId xmlns:a16="http://schemas.microsoft.com/office/drawing/2014/main" id="{0925E36A-FA8D-75A5-6FC6-E8FDE309E535}"/>
+              </a:ext>
+            </a:extLst>
+          </p:cNvPr>
+          <p:cNvSpPr/>
+          <p:nvPr/>
+        </p:nvSpPr>
+        <p:spPr>
+          <a:xfrm>
+            <a:off x="10345680" y="5412904"/>
+            <a:ext cx="1620000" cy="720000"/>
+          </a:xfrm>
+          <a:prstGeom prst="rect">
+            <a:avLst/>
+          </a:prstGeom>
+        </p:spPr>
+        <p:style>
+          <a:lnRef idx="2">
+            <a:schemeClr val="accent1">
+              <a:shade val="15000"/>
+            </a:schemeClr>
+          </a:lnRef>
+          <a:fillRef idx="1">
+            <a:schemeClr val="accent1"/>
+          </a:fillRef>
+          <a:effectRef idx="0">
+            <a:schemeClr val="accent1"/>
+          </a:effectRef>
+          <a:fontRef idx="minor">
+            <a:schemeClr val="lt1"/>
+          </a:fontRef>
+        </p:style>
+        <p:txBody>
+          <a:bodyPr rtlCol="0" anchor="ctr"/>
+          <a:lstStyle/>
+          <a:p>
+            <a:pPr algn="ctr"/>
+            <a:r>
+              <a:rPr kumimoji="1" lang="ja-JP" altLang="en-US" dirty="0"/>
+              <a:t>ゲームクリア</a:t>
+            </a:r>
+            <a:endParaRPr kumimoji="1" lang="en-US" altLang="ja-JP" dirty="0"/>
+          </a:p>
+        </p:txBody>
+      </p:sp>
+      <p:sp>
+        <p:nvSpPr>
+          <p:cNvPr id="16" name="正方形/長方形 15">
+            <a:extLst>
+              <a:ext uri="{FF2B5EF4-FFF2-40B4-BE49-F238E27FC236}">
+                <a16:creationId xmlns:a16="http://schemas.microsoft.com/office/drawing/2014/main" id="{BE903EF2-D3EC-140C-5FF9-A561066C2C17}"/>
+              </a:ext>
+            </a:extLst>
+          </p:cNvPr>
+          <p:cNvSpPr/>
+          <p:nvPr/>
+        </p:nvSpPr>
+        <p:spPr>
+          <a:xfrm>
+            <a:off x="7857067" y="3395132"/>
+            <a:ext cx="900000" cy="720000"/>
+          </a:xfrm>
+          <a:prstGeom prst="rect">
+            <a:avLst/>
+          </a:prstGeom>
+        </p:spPr>
+        <p:style>
+          <a:lnRef idx="2">
+            <a:schemeClr val="accent1">
+              <a:shade val="15000"/>
+            </a:schemeClr>
+          </a:lnRef>
+          <a:fillRef idx="1">
+            <a:schemeClr val="accent1"/>
+          </a:fillRef>
+          <a:effectRef idx="0">
+            <a:schemeClr val="accent1"/>
+          </a:effectRef>
+          <a:fontRef idx="minor">
+            <a:schemeClr val="lt1"/>
+          </a:fontRef>
+        </p:style>
+        <p:txBody>
+          <a:bodyPr rtlCol="0" anchor="ctr"/>
+          <a:lstStyle/>
+          <a:p>
+            <a:pPr algn="ctr"/>
+            <a:r>
+              <a:rPr kumimoji="1" lang="ja-JP" altLang="en-US" dirty="0"/>
+              <a:t>廊下</a:t>
+            </a:r>
+          </a:p>
+        </p:txBody>
+      </p:sp>
+      <p:cxnSp>
+        <p:nvCxnSpPr>
+          <p:cNvPr id="18" name="直線矢印コネクタ 17">
+            <a:extLst>
+              <a:ext uri="{FF2B5EF4-FFF2-40B4-BE49-F238E27FC236}">
+                <a16:creationId xmlns:a16="http://schemas.microsoft.com/office/drawing/2014/main" id="{AF98D16C-A642-A5BB-37A4-1BE4D7471FF7}"/>
+              </a:ext>
+            </a:extLst>
+          </p:cNvPr>
+          <p:cNvCxnSpPr>
+            <a:cxnSpLocks/>
+            <a:stCxn id="4" idx="3"/>
+            <a:endCxn id="5" idx="1"/>
+          </p:cNvCxnSpPr>
+          <p:nvPr/>
+        </p:nvCxnSpPr>
+        <p:spPr>
+          <a:xfrm>
+            <a:off x="1780161" y="3755132"/>
+            <a:ext cx="720000" cy="0"/>
+          </a:xfrm>
+          <a:prstGeom prst="straightConnector1">
+            <a:avLst/>
+          </a:prstGeom>
+          <a:ln w="57150">
+            <a:tailEnd type="triangle"/>
+          </a:ln>
+        </p:spPr>
+        <p:style>
+          <a:lnRef idx="1">
+            <a:schemeClr val="accent1"/>
+          </a:lnRef>
+          <a:fillRef idx="0">
+            <a:schemeClr val="accent1"/>
+          </a:fillRef>
+          <a:effectRef idx="0">
+            <a:schemeClr val="accent1"/>
+          </a:effectRef>
+          <a:fontRef idx="minor">
+            <a:schemeClr val="tx1"/>
+          </a:fontRef>
+        </p:style>
+      </p:cxnSp>
+      <p:cxnSp>
+        <p:nvCxnSpPr>
+          <p:cNvPr id="20" name="直線矢印コネクタ 19">
+            <a:extLst>
+              <a:ext uri="{FF2B5EF4-FFF2-40B4-BE49-F238E27FC236}">
+                <a16:creationId xmlns:a16="http://schemas.microsoft.com/office/drawing/2014/main" id="{C98040CA-6675-2791-876A-F1EB29AE1D04}"/>
+              </a:ext>
+            </a:extLst>
+          </p:cNvPr>
+          <p:cNvCxnSpPr>
+            <a:cxnSpLocks/>
+            <a:stCxn id="5" idx="3"/>
+            <a:endCxn id="6" idx="1"/>
+          </p:cNvCxnSpPr>
+          <p:nvPr/>
+        </p:nvCxnSpPr>
+        <p:spPr>
+          <a:xfrm>
+            <a:off x="3381067" y="3755132"/>
+            <a:ext cx="1428000" cy="1005509"/>
+          </a:xfrm>
+          <a:prstGeom prst="straightConnector1">
+            <a:avLst/>
+          </a:prstGeom>
+          <a:ln w="57150">
+            <a:tailEnd type="triangle"/>
+          </a:ln>
+        </p:spPr>
+        <p:style>
+          <a:lnRef idx="1">
+            <a:schemeClr val="accent1"/>
+          </a:lnRef>
+          <a:fillRef idx="0">
+            <a:schemeClr val="accent1"/>
+          </a:fillRef>
+          <a:effectRef idx="0">
+            <a:schemeClr val="accent1"/>
+          </a:effectRef>
+          <a:fontRef idx="minor">
+            <a:schemeClr val="tx1"/>
+          </a:fontRef>
+        </p:style>
+      </p:cxnSp>
+      <p:cxnSp>
+        <p:nvCxnSpPr>
+          <p:cNvPr id="21" name="直線矢印コネクタ 20">
+            <a:extLst>
+              <a:ext uri="{FF2B5EF4-FFF2-40B4-BE49-F238E27FC236}">
+                <a16:creationId xmlns:a16="http://schemas.microsoft.com/office/drawing/2014/main" id="{C9885232-1B06-0ED2-1510-3BE7D982AE4E}"/>
+              </a:ext>
+            </a:extLst>
+          </p:cNvPr>
+          <p:cNvCxnSpPr>
+            <a:cxnSpLocks/>
+            <a:stCxn id="5" idx="3"/>
+            <a:endCxn id="8" idx="1"/>
+          </p:cNvCxnSpPr>
+          <p:nvPr/>
+        </p:nvCxnSpPr>
+        <p:spPr>
+          <a:xfrm flipV="1">
+            <a:off x="3381067" y="2742869"/>
+            <a:ext cx="1428000" cy="1012263"/>
+          </a:xfrm>
+          <a:prstGeom prst="straightConnector1">
+            <a:avLst/>
+          </a:prstGeom>
+          <a:ln w="57150">
+            <a:tailEnd type="triangle"/>
+          </a:ln>
+        </p:spPr>
+        <p:style>
+          <a:lnRef idx="1">
+            <a:schemeClr val="accent1"/>
+          </a:lnRef>
+          <a:fillRef idx="0">
+            <a:schemeClr val="accent1"/>
+          </a:fillRef>
+          <a:effectRef idx="0">
+            <a:schemeClr val="accent1"/>
+          </a:effectRef>
+          <a:fontRef idx="minor">
+            <a:schemeClr val="tx1"/>
+          </a:fontRef>
+        </p:style>
+      </p:cxnSp>
+      <p:cxnSp>
+        <p:nvCxnSpPr>
+          <p:cNvPr id="22" name="直線矢印コネクタ 21">
+            <a:extLst>
+              <a:ext uri="{FF2B5EF4-FFF2-40B4-BE49-F238E27FC236}">
+                <a16:creationId xmlns:a16="http://schemas.microsoft.com/office/drawing/2014/main" id="{B7E04D55-5E13-F797-A2DA-3067888F83E5}"/>
+              </a:ext>
+            </a:extLst>
+          </p:cNvPr>
+          <p:cNvCxnSpPr>
+            <a:cxnSpLocks/>
+            <a:stCxn id="8" idx="3"/>
+          </p:cNvCxnSpPr>
+          <p:nvPr/>
+        </p:nvCxnSpPr>
+        <p:spPr>
+          <a:xfrm>
+            <a:off x="6429067" y="2742869"/>
+            <a:ext cx="1241733" cy="864575"/>
+          </a:xfrm>
+          <a:prstGeom prst="straightConnector1">
+            <a:avLst/>
+          </a:prstGeom>
+          <a:ln w="57150">
+            <a:tailEnd type="triangle"/>
+          </a:ln>
+        </p:spPr>
+        <p:style>
+          <a:lnRef idx="1">
+            <a:schemeClr val="accent1"/>
+          </a:lnRef>
+          <a:fillRef idx="0">
+            <a:schemeClr val="accent1"/>
+          </a:fillRef>
+          <a:effectRef idx="0">
+            <a:schemeClr val="accent1"/>
+          </a:effectRef>
+          <a:fontRef idx="minor">
+            <a:schemeClr val="tx1"/>
+          </a:fontRef>
+        </p:style>
+      </p:cxnSp>
+      <p:cxnSp>
+        <p:nvCxnSpPr>
+          <p:cNvPr id="23" name="直線矢印コネクタ 22">
+            <a:extLst>
+              <a:ext uri="{FF2B5EF4-FFF2-40B4-BE49-F238E27FC236}">
+                <a16:creationId xmlns:a16="http://schemas.microsoft.com/office/drawing/2014/main" id="{10FE337C-E145-EDFA-698F-336D60C64192}"/>
+              </a:ext>
+            </a:extLst>
+          </p:cNvPr>
+          <p:cNvCxnSpPr>
+            <a:cxnSpLocks/>
+            <a:stCxn id="6" idx="3"/>
+          </p:cNvCxnSpPr>
+          <p:nvPr/>
+        </p:nvCxnSpPr>
+        <p:spPr>
+          <a:xfrm flipV="1">
+            <a:off x="6429067" y="3826509"/>
+            <a:ext cx="1241733" cy="934132"/>
+          </a:xfrm>
+          <a:prstGeom prst="straightConnector1">
+            <a:avLst/>
+          </a:prstGeom>
+          <a:ln w="57150">
+            <a:tailEnd type="triangle"/>
+          </a:ln>
+        </p:spPr>
+        <p:style>
+          <a:lnRef idx="1">
+            <a:schemeClr val="accent1"/>
+          </a:lnRef>
+          <a:fillRef idx="0">
+            <a:schemeClr val="accent1"/>
+          </a:fillRef>
+          <a:effectRef idx="0">
+            <a:schemeClr val="accent1"/>
+          </a:effectRef>
+          <a:fontRef idx="minor">
+            <a:schemeClr val="tx1"/>
+          </a:fontRef>
+        </p:style>
+      </p:cxnSp>
+      <p:cxnSp>
+        <p:nvCxnSpPr>
+          <p:cNvPr id="24" name="直線矢印コネクタ 23">
+            <a:extLst>
+              <a:ext uri="{FF2B5EF4-FFF2-40B4-BE49-F238E27FC236}">
+                <a16:creationId xmlns:a16="http://schemas.microsoft.com/office/drawing/2014/main" id="{0EF3B452-F112-C8A4-FCFD-342802AAE807}"/>
+              </a:ext>
+            </a:extLst>
+          </p:cNvPr>
+          <p:cNvCxnSpPr>
+            <a:cxnSpLocks/>
+            <a:stCxn id="16" idx="3"/>
+            <a:endCxn id="10" idx="1"/>
+          </p:cNvCxnSpPr>
+          <p:nvPr/>
+        </p:nvCxnSpPr>
+        <p:spPr>
+          <a:xfrm>
+            <a:off x="8757067" y="3755132"/>
+            <a:ext cx="1588613" cy="0"/>
+          </a:xfrm>
+          <a:prstGeom prst="straightConnector1">
+            <a:avLst/>
+          </a:prstGeom>
+          <a:ln w="57150">
+            <a:tailEnd type="triangle"/>
+          </a:ln>
+        </p:spPr>
+        <p:style>
+          <a:lnRef idx="1">
+            <a:schemeClr val="accent1"/>
+          </a:lnRef>
+          <a:fillRef idx="0">
+            <a:schemeClr val="accent1"/>
+          </a:fillRef>
+          <a:effectRef idx="0">
+            <a:schemeClr val="accent1"/>
+          </a:effectRef>
+          <a:fontRef idx="minor">
+            <a:schemeClr val="tx1"/>
+          </a:fontRef>
+        </p:style>
+      </p:cxnSp>
+      <p:cxnSp>
+        <p:nvCxnSpPr>
+          <p:cNvPr id="25" name="直線矢印コネクタ 24">
+            <a:extLst>
+              <a:ext uri="{FF2B5EF4-FFF2-40B4-BE49-F238E27FC236}">
+                <a16:creationId xmlns:a16="http://schemas.microsoft.com/office/drawing/2014/main" id="{0F2D2F5A-1292-C7C9-A2D6-15C988015F74}"/>
+              </a:ext>
+            </a:extLst>
+          </p:cNvPr>
+          <p:cNvCxnSpPr>
+            <a:cxnSpLocks/>
+            <a:stCxn id="10" idx="2"/>
+            <a:endCxn id="12" idx="0"/>
+          </p:cNvCxnSpPr>
+          <p:nvPr/>
+        </p:nvCxnSpPr>
+        <p:spPr>
+          <a:xfrm>
+            <a:off x="11155680" y="4115132"/>
+            <a:ext cx="0" cy="1297772"/>
+          </a:xfrm>
+          <a:prstGeom prst="straightConnector1">
+            <a:avLst/>
+          </a:prstGeom>
+          <a:ln w="57150">
+            <a:tailEnd type="triangle"/>
+          </a:ln>
+        </p:spPr>
+        <p:style>
+          <a:lnRef idx="1">
+            <a:schemeClr val="accent1"/>
+          </a:lnRef>
+          <a:fillRef idx="0">
+            <a:schemeClr val="accent1"/>
+          </a:fillRef>
+          <a:effectRef idx="0">
+            <a:schemeClr val="accent1"/>
+          </a:effectRef>
+          <a:fontRef idx="minor">
+            <a:schemeClr val="tx1"/>
+          </a:fontRef>
+        </p:style>
+      </p:cxnSp>
+      <p:sp>
+        <p:nvSpPr>
+          <p:cNvPr id="45" name="テキスト ボックス 44">
+            <a:extLst>
+              <a:ext uri="{FF2B5EF4-FFF2-40B4-BE49-F238E27FC236}">
+                <a16:creationId xmlns:a16="http://schemas.microsoft.com/office/drawing/2014/main" id="{5C208425-C15F-ED34-0AC6-C6C7D815F15A}"/>
+              </a:ext>
+            </a:extLst>
+          </p:cNvPr>
+          <p:cNvSpPr txBox="1"/>
+          <p:nvPr/>
+        </p:nvSpPr>
+        <p:spPr>
+          <a:xfrm>
+            <a:off x="3586456" y="4571309"/>
+            <a:ext cx="877163" cy="369332"/>
+          </a:xfrm>
+          <a:prstGeom prst="rect">
+            <a:avLst/>
+          </a:prstGeom>
+          <a:noFill/>
+        </p:spPr>
+        <p:txBody>
+          <a:bodyPr wrap="none" rtlCol="0">
+            <a:spAutoFit/>
+          </a:bodyPr>
+          <a:lstStyle/>
+          <a:p>
+            <a:r>
+              <a:rPr kumimoji="1" lang="ja-JP" altLang="en-US" dirty="0"/>
+              <a:t>図書室</a:t>
+            </a:r>
+          </a:p>
+        </p:txBody>
+      </p:sp>
+      <p:sp>
+        <p:nvSpPr>
+          <p:cNvPr id="47" name="テキスト ボックス 46">
+            <a:extLst>
+              <a:ext uri="{FF2B5EF4-FFF2-40B4-BE49-F238E27FC236}">
+                <a16:creationId xmlns:a16="http://schemas.microsoft.com/office/drawing/2014/main" id="{31A50FA0-4B58-697A-9EDD-F6C887222244}"/>
+              </a:ext>
+            </a:extLst>
+          </p:cNvPr>
+          <p:cNvSpPr txBox="1"/>
+          <p:nvPr/>
+        </p:nvSpPr>
+        <p:spPr>
+          <a:xfrm>
+            <a:off x="3655305" y="2634044"/>
+            <a:ext cx="877163" cy="369332"/>
+          </a:xfrm>
+          <a:prstGeom prst="rect">
+            <a:avLst/>
+          </a:prstGeom>
+          <a:noFill/>
+        </p:spPr>
+        <p:txBody>
+          <a:bodyPr wrap="none" rtlCol="0">
+            <a:spAutoFit/>
+          </a:bodyPr>
+          <a:lstStyle/>
+          <a:p>
+            <a:r>
+              <a:rPr kumimoji="1" lang="ja-JP" altLang="en-US" dirty="0"/>
+              <a:t>理科室</a:t>
+            </a:r>
+          </a:p>
+        </p:txBody>
+      </p:sp>
+      <p:sp>
+        <p:nvSpPr>
+          <p:cNvPr id="49" name="テキスト ボックス 48">
+            <a:extLst>
+              <a:ext uri="{FF2B5EF4-FFF2-40B4-BE49-F238E27FC236}">
+                <a16:creationId xmlns:a16="http://schemas.microsoft.com/office/drawing/2014/main" id="{1CE14CB9-4332-9EAF-331E-52BDF2BD18BF}"/>
+              </a:ext>
+            </a:extLst>
+          </p:cNvPr>
+          <p:cNvSpPr txBox="1"/>
+          <p:nvPr/>
+        </p:nvSpPr>
+        <p:spPr>
+          <a:xfrm>
+            <a:off x="6979904" y="2647238"/>
+            <a:ext cx="1034257" cy="369332"/>
+          </a:xfrm>
+          <a:prstGeom prst="rect">
+            <a:avLst/>
+          </a:prstGeom>
+          <a:noFill/>
+        </p:spPr>
+        <p:txBody>
+          <a:bodyPr wrap="none" rtlCol="0">
+            <a:spAutoFit/>
+          </a:bodyPr>
+          <a:lstStyle/>
+          <a:p>
+            <a:r>
+              <a:rPr kumimoji="1" lang="ja-JP" altLang="en-US" dirty="0"/>
+              <a:t>鍵１入手</a:t>
+            </a:r>
+          </a:p>
+        </p:txBody>
+      </p:sp>
+      <p:sp>
+        <p:nvSpPr>
+          <p:cNvPr id="51" name="テキスト ボックス 50">
+            <a:extLst>
+              <a:ext uri="{FF2B5EF4-FFF2-40B4-BE49-F238E27FC236}">
+                <a16:creationId xmlns:a16="http://schemas.microsoft.com/office/drawing/2014/main" id="{5AD0A243-03AA-04B5-15D3-20B818022963}"/>
+              </a:ext>
+            </a:extLst>
+          </p:cNvPr>
+          <p:cNvSpPr txBox="1"/>
+          <p:nvPr/>
+        </p:nvSpPr>
+        <p:spPr>
+          <a:xfrm>
+            <a:off x="6982689" y="4489676"/>
+            <a:ext cx="1034257" cy="369332"/>
+          </a:xfrm>
+          <a:prstGeom prst="rect">
+            <a:avLst/>
+          </a:prstGeom>
+          <a:noFill/>
+        </p:spPr>
+        <p:txBody>
+          <a:bodyPr wrap="none" rtlCol="0">
+            <a:spAutoFit/>
+          </a:bodyPr>
+          <a:lstStyle/>
+          <a:p>
+            <a:r>
+              <a:rPr kumimoji="1" lang="ja-JP" altLang="en-US" dirty="0"/>
+              <a:t>鍵２入手</a:t>
+            </a:r>
+          </a:p>
+        </p:txBody>
+      </p:sp>
+      <p:sp>
+        <p:nvSpPr>
+          <p:cNvPr id="53" name="テキスト ボックス 52">
+            <a:extLst>
+              <a:ext uri="{FF2B5EF4-FFF2-40B4-BE49-F238E27FC236}">
+                <a16:creationId xmlns:a16="http://schemas.microsoft.com/office/drawing/2014/main" id="{9AA0FE0A-CA09-890E-39CE-A718D737D4D4}"/>
+              </a:ext>
+            </a:extLst>
+          </p:cNvPr>
+          <p:cNvSpPr txBox="1"/>
+          <p:nvPr/>
+        </p:nvSpPr>
+        <p:spPr>
+          <a:xfrm>
+            <a:off x="9630831" y="4618877"/>
+            <a:ext cx="2419252" cy="369332"/>
+          </a:xfrm>
+          <a:prstGeom prst="rect">
+            <a:avLst/>
+          </a:prstGeom>
+          <a:noFill/>
+        </p:spPr>
+        <p:txBody>
+          <a:bodyPr wrap="none" rtlCol="0">
+            <a:spAutoFit/>
+          </a:bodyPr>
+          <a:lstStyle/>
+          <a:p>
+            <a:r>
+              <a:rPr kumimoji="1" lang="ja-JP" altLang="en-US" dirty="0"/>
+              <a:t>鍵２本取得済みの場合</a:t>
+            </a:r>
           </a:p>
         </p:txBody>
       </p:sp>
     </p:spTree>
     <p:extLst>
       <p:ext uri="{BB962C8B-B14F-4D97-AF65-F5344CB8AC3E}">
-        <p14:creationId xmlns:p14="http://schemas.microsoft.com/office/powerpoint/2010/main" val="2042450181"/>
+        <p14:creationId xmlns:p14="http://schemas.microsoft.com/office/powerpoint/2010/main" val="441263296"/>
       </p:ext>
     </p:extLst>
   </p:cSld>
@@ -3913,6 +5678,467 @@
 </file>
 
 <file path=ppt/slides/slide4.xml><?xml version="1.0" encoding="utf-8"?>
+<p:sld xmlns:a="http://schemas.openxmlformats.org/drawingml/2006/main" xmlns:r="http://schemas.openxmlformats.org/officeDocument/2006/relationships" xmlns:p="http://schemas.openxmlformats.org/presentationml/2006/main">
+  <p:cSld>
+    <p:bg>
+      <p:bgPr>
+        <a:solidFill>
+          <a:schemeClr val="bg1"/>
+        </a:solidFill>
+        <a:effectLst/>
+      </p:bgPr>
+    </p:bg>
+    <p:spTree>
+      <p:nvGrpSpPr>
+        <p:cNvPr id="1" name=""/>
+        <p:cNvGrpSpPr/>
+        <p:nvPr/>
+      </p:nvGrpSpPr>
+      <p:grpSpPr>
+        <a:xfrm>
+          <a:off x="0" y="0"/>
+          <a:ext cx="0" cy="0"/>
+          <a:chOff x="0" y="0"/>
+          <a:chExt cx="0" cy="0"/>
+        </a:xfrm>
+      </p:grpSpPr>
+      <p:pic>
+        <p:nvPicPr>
+          <p:cNvPr id="13" name="図 12">
+            <a:extLst>
+              <a:ext uri="{FF2B5EF4-FFF2-40B4-BE49-F238E27FC236}">
+                <a16:creationId xmlns:a16="http://schemas.microsoft.com/office/drawing/2014/main" id="{92714EA3-57BC-BA80-946A-C07E786B1497}"/>
+              </a:ext>
+            </a:extLst>
+          </p:cNvPr>
+          <p:cNvPicPr>
+            <a:picLocks noChangeAspect="1"/>
+          </p:cNvPicPr>
+          <p:nvPr/>
+        </p:nvPicPr>
+        <p:blipFill>
+          <a:blip r:embed="rId2"/>
+          <a:stretch>
+            <a:fillRect/>
+          </a:stretch>
+        </p:blipFill>
+        <p:spPr>
+          <a:xfrm>
+            <a:off x="4231713" y="4098800"/>
+            <a:ext cx="3728574" cy="2088000"/>
+          </a:xfrm>
+          <a:prstGeom prst="rect">
+            <a:avLst/>
+          </a:prstGeom>
+        </p:spPr>
+      </p:pic>
+      <p:pic>
+        <p:nvPicPr>
+          <p:cNvPr id="5" name="図 4">
+            <a:extLst>
+              <a:ext uri="{FF2B5EF4-FFF2-40B4-BE49-F238E27FC236}">
+                <a16:creationId xmlns:a16="http://schemas.microsoft.com/office/drawing/2014/main" id="{9FA4128D-66CB-B28C-B2C8-9106333192E2}"/>
+              </a:ext>
+            </a:extLst>
+          </p:cNvPr>
+          <p:cNvPicPr>
+            <a:picLocks noChangeAspect="1"/>
+          </p:cNvPicPr>
+          <p:nvPr/>
+        </p:nvPicPr>
+        <p:blipFill rotWithShape="1">
+          <a:blip r:embed="rId3"/>
+          <a:srcRect l="1" t="959" r="49" b="-958"/>
+          <a:stretch>
+            <a:fillRect/>
+          </a:stretch>
+        </p:blipFill>
+        <p:spPr>
+          <a:xfrm>
+            <a:off x="14962" y="1446168"/>
+            <a:ext cx="3743537" cy="2088000"/>
+          </a:xfrm>
+          <a:prstGeom prst="rect">
+            <a:avLst/>
+          </a:prstGeom>
+        </p:spPr>
+      </p:pic>
+      <p:pic>
+        <p:nvPicPr>
+          <p:cNvPr id="9" name="図 8">
+            <a:extLst>
+              <a:ext uri="{FF2B5EF4-FFF2-40B4-BE49-F238E27FC236}">
+                <a16:creationId xmlns:a16="http://schemas.microsoft.com/office/drawing/2014/main" id="{9305565D-C7CD-88AD-AD18-68810B4149A8}"/>
+              </a:ext>
+            </a:extLst>
+          </p:cNvPr>
+          <p:cNvPicPr>
+            <a:picLocks noChangeAspect="1"/>
+          </p:cNvPicPr>
+          <p:nvPr/>
+        </p:nvPicPr>
+        <p:blipFill rotWithShape="1">
+          <a:blip r:embed="rId4"/>
+          <a:srcRect r="-849"/>
+          <a:stretch>
+            <a:fillRect/>
+          </a:stretch>
+        </p:blipFill>
+        <p:spPr>
+          <a:xfrm>
+            <a:off x="8448464" y="1446168"/>
+            <a:ext cx="3743536" cy="2088000"/>
+          </a:xfrm>
+          <a:prstGeom prst="rect">
+            <a:avLst/>
+          </a:prstGeom>
+        </p:spPr>
+      </p:pic>
+      <p:pic>
+        <p:nvPicPr>
+          <p:cNvPr id="15" name="図 14">
+            <a:extLst>
+              <a:ext uri="{FF2B5EF4-FFF2-40B4-BE49-F238E27FC236}">
+                <a16:creationId xmlns:a16="http://schemas.microsoft.com/office/drawing/2014/main" id="{DC030B9B-D595-609B-3171-4870FAD65C17}"/>
+              </a:ext>
+            </a:extLst>
+          </p:cNvPr>
+          <p:cNvPicPr>
+            <a:picLocks noChangeAspect="1"/>
+          </p:cNvPicPr>
+          <p:nvPr/>
+        </p:nvPicPr>
+        <p:blipFill>
+          <a:blip r:embed="rId5"/>
+          <a:stretch>
+            <a:fillRect/>
+          </a:stretch>
+        </p:blipFill>
+        <p:spPr>
+          <a:xfrm>
+            <a:off x="0" y="4098800"/>
+            <a:ext cx="3728574" cy="2088000"/>
+          </a:xfrm>
+          <a:prstGeom prst="rect">
+            <a:avLst/>
+          </a:prstGeom>
+        </p:spPr>
+      </p:pic>
+      <p:pic>
+        <p:nvPicPr>
+          <p:cNvPr id="11" name="図 10">
+            <a:extLst>
+              <a:ext uri="{FF2B5EF4-FFF2-40B4-BE49-F238E27FC236}">
+                <a16:creationId xmlns:a16="http://schemas.microsoft.com/office/drawing/2014/main" id="{A974C221-AB42-E929-8734-C24902CE8A4C}"/>
+              </a:ext>
+            </a:extLst>
+          </p:cNvPr>
+          <p:cNvPicPr>
+            <a:picLocks noChangeAspect="1"/>
+          </p:cNvPicPr>
+          <p:nvPr/>
+        </p:nvPicPr>
+        <p:blipFill rotWithShape="1">
+          <a:blip r:embed="rId6"/>
+          <a:srcRect l="223" t="-1" r="13" b="412"/>
+          <a:stretch>
+            <a:fillRect/>
+          </a:stretch>
+        </p:blipFill>
+        <p:spPr>
+          <a:xfrm>
+            <a:off x="8463426" y="4098800"/>
+            <a:ext cx="3735209" cy="2088000"/>
+          </a:xfrm>
+          <a:prstGeom prst="rect">
+            <a:avLst/>
+          </a:prstGeom>
+        </p:spPr>
+      </p:pic>
+      <p:pic>
+        <p:nvPicPr>
+          <p:cNvPr id="7" name="図 6">
+            <a:extLst>
+              <a:ext uri="{FF2B5EF4-FFF2-40B4-BE49-F238E27FC236}">
+                <a16:creationId xmlns:a16="http://schemas.microsoft.com/office/drawing/2014/main" id="{8DFB856C-9EC5-3CCF-3B42-AE97D6C185D6}"/>
+              </a:ext>
+            </a:extLst>
+          </p:cNvPr>
+          <p:cNvPicPr>
+            <a:picLocks noChangeAspect="1"/>
+          </p:cNvPicPr>
+          <p:nvPr/>
+        </p:nvPicPr>
+        <p:blipFill rotWithShape="1">
+          <a:blip r:embed="rId7"/>
+          <a:srcRect l="-1040" t="-593" r="-256" b="593"/>
+          <a:stretch>
+            <a:fillRect/>
+          </a:stretch>
+        </p:blipFill>
+        <p:spPr>
+          <a:xfrm>
+            <a:off x="4231713" y="1446168"/>
+            <a:ext cx="3743537" cy="2088000"/>
+          </a:xfrm>
+          <a:prstGeom prst="rect">
+            <a:avLst/>
+          </a:prstGeom>
+        </p:spPr>
+      </p:pic>
+      <p:sp>
+        <p:nvSpPr>
+          <p:cNvPr id="18" name="タイトル 17">
+            <a:extLst>
+              <a:ext uri="{FF2B5EF4-FFF2-40B4-BE49-F238E27FC236}">
+                <a16:creationId xmlns:a16="http://schemas.microsoft.com/office/drawing/2014/main" id="{03F05D30-438A-6786-9A64-82D40E58DF35}"/>
+              </a:ext>
+            </a:extLst>
+          </p:cNvPr>
+          <p:cNvSpPr>
+            <a:spLocks noGrp="1"/>
+          </p:cNvSpPr>
+          <p:nvPr>
+            <p:ph type="title"/>
+          </p:nvPr>
+        </p:nvSpPr>
+        <p:spPr/>
+        <p:txBody>
+          <a:bodyPr/>
+          <a:lstStyle/>
+          <a:p>
+            <a:endParaRPr lang="ja-JP" altLang="en-US" dirty="0"/>
+          </a:p>
+        </p:txBody>
+      </p:sp>
+      <p:sp>
+        <p:nvSpPr>
+          <p:cNvPr id="20" name="矢印: 右 19">
+            <a:extLst>
+              <a:ext uri="{FF2B5EF4-FFF2-40B4-BE49-F238E27FC236}">
+                <a16:creationId xmlns:a16="http://schemas.microsoft.com/office/drawing/2014/main" id="{C329841F-E19D-37B6-10BE-6A9FA0C7686A}"/>
+              </a:ext>
+            </a:extLst>
+          </p:cNvPr>
+          <p:cNvSpPr/>
+          <p:nvPr/>
+        </p:nvSpPr>
+        <p:spPr>
+          <a:xfrm>
+            <a:off x="3548351" y="2184279"/>
+            <a:ext cx="893511" cy="902970"/>
+          </a:xfrm>
+          <a:prstGeom prst="rightArrow">
+            <a:avLst/>
+          </a:prstGeom>
+        </p:spPr>
+        <p:style>
+          <a:lnRef idx="2">
+            <a:schemeClr val="accent1">
+              <a:shade val="15000"/>
+            </a:schemeClr>
+          </a:lnRef>
+          <a:fillRef idx="1">
+            <a:schemeClr val="accent1"/>
+          </a:fillRef>
+          <a:effectRef idx="0">
+            <a:schemeClr val="accent1"/>
+          </a:effectRef>
+          <a:fontRef idx="minor">
+            <a:schemeClr val="lt1"/>
+          </a:fontRef>
+        </p:style>
+        <p:txBody>
+          <a:bodyPr rtlCol="0" anchor="ctr"/>
+          <a:lstStyle/>
+          <a:p>
+            <a:pPr algn="ctr"/>
+            <a:endParaRPr kumimoji="1" lang="ja-JP" altLang="en-US"/>
+          </a:p>
+        </p:txBody>
+      </p:sp>
+      <p:sp>
+        <p:nvSpPr>
+          <p:cNvPr id="22" name="矢印: 右 21">
+            <a:extLst>
+              <a:ext uri="{FF2B5EF4-FFF2-40B4-BE49-F238E27FC236}">
+                <a16:creationId xmlns:a16="http://schemas.microsoft.com/office/drawing/2014/main" id="{E13A97BF-341D-0EC6-2642-37756112487B}"/>
+              </a:ext>
+            </a:extLst>
+          </p:cNvPr>
+          <p:cNvSpPr/>
+          <p:nvPr/>
+        </p:nvSpPr>
+        <p:spPr>
+          <a:xfrm>
+            <a:off x="7802005" y="2184279"/>
+            <a:ext cx="893511" cy="902970"/>
+          </a:xfrm>
+          <a:prstGeom prst="rightArrow">
+            <a:avLst/>
+          </a:prstGeom>
+        </p:spPr>
+        <p:style>
+          <a:lnRef idx="2">
+            <a:schemeClr val="accent1">
+              <a:shade val="15000"/>
+            </a:schemeClr>
+          </a:lnRef>
+          <a:fillRef idx="1">
+            <a:schemeClr val="accent1"/>
+          </a:fillRef>
+          <a:effectRef idx="0">
+            <a:schemeClr val="accent1"/>
+          </a:effectRef>
+          <a:fontRef idx="minor">
+            <a:schemeClr val="lt1"/>
+          </a:fontRef>
+        </p:style>
+        <p:txBody>
+          <a:bodyPr rtlCol="0" anchor="ctr"/>
+          <a:lstStyle/>
+          <a:p>
+            <a:pPr algn="ctr"/>
+            <a:endParaRPr kumimoji="1" lang="ja-JP" altLang="en-US"/>
+          </a:p>
+        </p:txBody>
+      </p:sp>
+      <p:pic>
+        <p:nvPicPr>
+          <p:cNvPr id="24" name="図 23">
+            <a:extLst>
+              <a:ext uri="{FF2B5EF4-FFF2-40B4-BE49-F238E27FC236}">
+                <a16:creationId xmlns:a16="http://schemas.microsoft.com/office/drawing/2014/main" id="{AC1A414D-304A-BE74-E305-607DFF045314}"/>
+              </a:ext>
+            </a:extLst>
+          </p:cNvPr>
+          <p:cNvPicPr>
+            <a:picLocks noChangeAspect="1"/>
+          </p:cNvPicPr>
+          <p:nvPr/>
+        </p:nvPicPr>
+        <p:blipFill>
+          <a:blip r:embed="rId8"/>
+          <a:stretch>
+            <a:fillRect/>
+          </a:stretch>
+        </p:blipFill>
+        <p:spPr>
+          <a:xfrm rot="10800000">
+            <a:off x="3548351" y="4664222"/>
+            <a:ext cx="920576" cy="957155"/>
+          </a:xfrm>
+          <a:prstGeom prst="rect">
+            <a:avLst/>
+          </a:prstGeom>
+        </p:spPr>
+      </p:pic>
+      <p:sp>
+        <p:nvSpPr>
+          <p:cNvPr id="26" name="矢印: 右 25">
+            <a:extLst>
+              <a:ext uri="{FF2B5EF4-FFF2-40B4-BE49-F238E27FC236}">
+                <a16:creationId xmlns:a16="http://schemas.microsoft.com/office/drawing/2014/main" id="{EA292407-5F84-A656-7EA1-991113CCDD17}"/>
+              </a:ext>
+            </a:extLst>
+          </p:cNvPr>
+          <p:cNvSpPr/>
+          <p:nvPr/>
+        </p:nvSpPr>
+        <p:spPr>
+          <a:xfrm rot="10800000">
+            <a:off x="7802004" y="4664222"/>
+            <a:ext cx="893511" cy="902970"/>
+          </a:xfrm>
+          <a:prstGeom prst="rightArrow">
+            <a:avLst/>
+          </a:prstGeom>
+        </p:spPr>
+        <p:style>
+          <a:lnRef idx="2">
+            <a:schemeClr val="accent1">
+              <a:shade val="15000"/>
+            </a:schemeClr>
+          </a:lnRef>
+          <a:fillRef idx="1">
+            <a:schemeClr val="accent1"/>
+          </a:fillRef>
+          <a:effectRef idx="0">
+            <a:schemeClr val="accent1"/>
+          </a:effectRef>
+          <a:fontRef idx="minor">
+            <a:schemeClr val="lt1"/>
+          </a:fontRef>
+        </p:style>
+        <p:txBody>
+          <a:bodyPr rtlCol="0" anchor="ctr"/>
+          <a:lstStyle/>
+          <a:p>
+            <a:pPr algn="ctr"/>
+            <a:endParaRPr kumimoji="1" lang="ja-JP" altLang="en-US"/>
+          </a:p>
+        </p:txBody>
+      </p:sp>
+      <p:sp>
+        <p:nvSpPr>
+          <p:cNvPr id="32" name="矢印: 右 31">
+            <a:extLst>
+              <a:ext uri="{FF2B5EF4-FFF2-40B4-BE49-F238E27FC236}">
+                <a16:creationId xmlns:a16="http://schemas.microsoft.com/office/drawing/2014/main" id="{C70F2CF1-7766-A7A4-9504-6C82B751EA72}"/>
+              </a:ext>
+            </a:extLst>
+          </p:cNvPr>
+          <p:cNvSpPr/>
+          <p:nvPr/>
+        </p:nvSpPr>
+        <p:spPr>
+          <a:xfrm rot="5400000">
+            <a:off x="9884274" y="3424271"/>
+            <a:ext cx="893511" cy="902970"/>
+          </a:xfrm>
+          <a:prstGeom prst="rightArrow">
+            <a:avLst/>
+          </a:prstGeom>
+        </p:spPr>
+        <p:style>
+          <a:lnRef idx="2">
+            <a:schemeClr val="accent1">
+              <a:shade val="15000"/>
+            </a:schemeClr>
+          </a:lnRef>
+          <a:fillRef idx="1">
+            <a:schemeClr val="accent1"/>
+          </a:fillRef>
+          <a:effectRef idx="0">
+            <a:schemeClr val="accent1"/>
+          </a:effectRef>
+          <a:fontRef idx="minor">
+            <a:schemeClr val="lt1"/>
+          </a:fontRef>
+        </p:style>
+        <p:txBody>
+          <a:bodyPr rtlCol="0" anchor="ctr"/>
+          <a:lstStyle/>
+          <a:p>
+            <a:pPr algn="ctr"/>
+            <a:endParaRPr kumimoji="1" lang="ja-JP" altLang="en-US"/>
+          </a:p>
+        </p:txBody>
+      </p:sp>
+    </p:spTree>
+    <p:extLst>
+      <p:ext uri="{BB962C8B-B14F-4D97-AF65-F5344CB8AC3E}">
+        <p14:creationId xmlns:p14="http://schemas.microsoft.com/office/powerpoint/2010/main" val="529781839"/>
+      </p:ext>
+    </p:extLst>
+  </p:cSld>
+  <p:clrMapOvr>
+    <a:masterClrMapping/>
+  </p:clrMapOvr>
+</p:sld>
+</file>
+
+<file path=ppt/slides/slide5.xml><?xml version="1.0" encoding="utf-8"?>
 <p:sld xmlns:a="http://schemas.openxmlformats.org/drawingml/2006/main" xmlns:r="http://schemas.openxmlformats.org/officeDocument/2006/relationships" xmlns:p="http://schemas.openxmlformats.org/presentationml/2006/main">
   <p:cSld>
     <p:spTree>
@@ -3952,7 +6178,7 @@
           <a:p>
             <a:r>
               <a:rPr kumimoji="1" lang="ja-JP" altLang="en-US" dirty="0"/>
-              <a:t>ステージ構成</a:t>
+              <a:t>システム構成</a:t>
             </a:r>
           </a:p>
         </p:txBody>
@@ -3978,10 +6204,7 @@
           <a:bodyPr/>
           <a:lstStyle/>
           <a:p>
-            <a:r>
-              <a:rPr kumimoji="1" lang="ja-JP" altLang="en-US"/>
-              <a:t>タイトル画面→廊下→図書室→理科室→非常口→ゲームクリア</a:t>
-            </a:r>
+            <a:endParaRPr kumimoji="1" lang="ja-JP" altLang="en-US" dirty="0"/>
           </a:p>
         </p:txBody>
       </p:sp>
@@ -3998,7 +6221,771 @@
 </p:sld>
 </file>
 
+<file path=ppt/slides/slide6.xml><?xml version="1.0" encoding="utf-8"?>
+<p:sld xmlns:a="http://schemas.openxmlformats.org/drawingml/2006/main" xmlns:r="http://schemas.openxmlformats.org/officeDocument/2006/relationships" xmlns:p="http://schemas.openxmlformats.org/presentationml/2006/main">
+  <p:cSld>
+    <p:spTree>
+      <p:nvGrpSpPr>
+        <p:cNvPr id="1" name=""/>
+        <p:cNvGrpSpPr/>
+        <p:nvPr/>
+      </p:nvGrpSpPr>
+      <p:grpSpPr>
+        <a:xfrm>
+          <a:off x="0" y="0"/>
+          <a:ext cx="0" cy="0"/>
+          <a:chOff x="0" y="0"/>
+          <a:chExt cx="0" cy="0"/>
+        </a:xfrm>
+      </p:grpSpPr>
+      <p:sp>
+        <p:nvSpPr>
+          <p:cNvPr id="4" name="タイトル 3">
+            <a:extLst>
+              <a:ext uri="{FF2B5EF4-FFF2-40B4-BE49-F238E27FC236}">
+                <a16:creationId xmlns:a16="http://schemas.microsoft.com/office/drawing/2014/main" id="{9AED6B80-3750-D7DC-7825-780DE372604A}"/>
+              </a:ext>
+            </a:extLst>
+          </p:cNvPr>
+          <p:cNvSpPr>
+            <a:spLocks noGrp="1"/>
+          </p:cNvSpPr>
+          <p:nvPr>
+            <p:ph type="title"/>
+          </p:nvPr>
+        </p:nvSpPr>
+        <p:spPr/>
+        <p:txBody>
+          <a:bodyPr/>
+          <a:lstStyle/>
+          <a:p>
+            <a:r>
+              <a:rPr lang="ja-JP" altLang="en-US" dirty="0"/>
+              <a:t>デモ</a:t>
+            </a:r>
+          </a:p>
+        </p:txBody>
+      </p:sp>
+      <p:sp>
+        <p:nvSpPr>
+          <p:cNvPr id="5" name="テキスト プレースホルダー 4">
+            <a:extLst>
+              <a:ext uri="{FF2B5EF4-FFF2-40B4-BE49-F238E27FC236}">
+                <a16:creationId xmlns:a16="http://schemas.microsoft.com/office/drawing/2014/main" id="{D337F3EF-DEF6-2520-6983-BB896744CFCD}"/>
+              </a:ext>
+            </a:extLst>
+          </p:cNvPr>
+          <p:cNvSpPr>
+            <a:spLocks noGrp="1"/>
+          </p:cNvSpPr>
+          <p:nvPr>
+            <p:ph type="body" idx="1"/>
+          </p:nvPr>
+        </p:nvSpPr>
+        <p:spPr/>
+        <p:txBody>
+          <a:bodyPr/>
+          <a:lstStyle/>
+          <a:p>
+            <a:endParaRPr lang="ja-JP" altLang="en-US" dirty="0"/>
+          </a:p>
+        </p:txBody>
+      </p:sp>
+    </p:spTree>
+    <p:extLst>
+      <p:ext uri="{BB962C8B-B14F-4D97-AF65-F5344CB8AC3E}">
+        <p14:creationId xmlns:p14="http://schemas.microsoft.com/office/powerpoint/2010/main" val="716357131"/>
+      </p:ext>
+    </p:extLst>
+  </p:cSld>
+  <p:clrMapOvr>
+    <a:masterClrMapping/>
+  </p:clrMapOvr>
+</p:sld>
+</file>
+
+<file path=ppt/slides/slide7.xml><?xml version="1.0" encoding="utf-8"?>
+<p:sld xmlns:a="http://schemas.openxmlformats.org/drawingml/2006/main" xmlns:r="http://schemas.openxmlformats.org/officeDocument/2006/relationships" xmlns:p="http://schemas.openxmlformats.org/presentationml/2006/main">
+  <p:cSld>
+    <p:spTree>
+      <p:nvGrpSpPr>
+        <p:cNvPr id="1" name=""/>
+        <p:cNvGrpSpPr/>
+        <p:nvPr/>
+      </p:nvGrpSpPr>
+      <p:grpSpPr>
+        <a:xfrm>
+          <a:off x="0" y="0"/>
+          <a:ext cx="0" cy="0"/>
+          <a:chOff x="0" y="0"/>
+          <a:chExt cx="0" cy="0"/>
+        </a:xfrm>
+      </p:grpSpPr>
+      <p:sp>
+        <p:nvSpPr>
+          <p:cNvPr id="2" name="タイトル 1">
+            <a:extLst>
+              <a:ext uri="{FF2B5EF4-FFF2-40B4-BE49-F238E27FC236}">
+                <a16:creationId xmlns:a16="http://schemas.microsoft.com/office/drawing/2014/main" id="{2F34B269-FA90-4B19-CAEB-81E2AFF46F51}"/>
+              </a:ext>
+            </a:extLst>
+          </p:cNvPr>
+          <p:cNvSpPr>
+            <a:spLocks noGrp="1"/>
+          </p:cNvSpPr>
+          <p:nvPr>
+            <p:ph type="title"/>
+          </p:nvPr>
+        </p:nvSpPr>
+        <p:spPr/>
+        <p:txBody>
+          <a:bodyPr/>
+          <a:lstStyle/>
+          <a:p>
+            <a:r>
+              <a:rPr kumimoji="1" lang="ja-JP" altLang="en-US" dirty="0"/>
+              <a:t>工夫した点</a:t>
+            </a:r>
+          </a:p>
+        </p:txBody>
+      </p:sp>
+      <p:sp>
+        <p:nvSpPr>
+          <p:cNvPr id="3" name="コンテンツ プレースホルダー 2">
+            <a:extLst>
+              <a:ext uri="{FF2B5EF4-FFF2-40B4-BE49-F238E27FC236}">
+                <a16:creationId xmlns:a16="http://schemas.microsoft.com/office/drawing/2014/main" id="{0E6716FF-F928-5D8E-AC8A-F7EEF1B1520C}"/>
+              </a:ext>
+            </a:extLst>
+          </p:cNvPr>
+          <p:cNvSpPr>
+            <a:spLocks noGrp="1"/>
+          </p:cNvSpPr>
+          <p:nvPr>
+            <p:ph idx="1"/>
+          </p:nvPr>
+        </p:nvSpPr>
+        <p:spPr/>
+        <p:txBody>
+          <a:bodyPr/>
+          <a:lstStyle/>
+          <a:p>
+            <a:pPr>
+              <a:buFont typeface="Wingdings" panose="05000000000000000000" pitchFamily="2" charset="2"/>
+              <a:buChar char="l"/>
+            </a:pPr>
+            <a:r>
+              <a:rPr kumimoji="1" lang="ja-JP" altLang="en-US" dirty="0"/>
+              <a:t>持ち物欄を</a:t>
+            </a:r>
+            <a:r>
+              <a:rPr lang="ja-JP" altLang="ja-JP" dirty="0"/>
+              <a:t>Inventoryクラスとして独立</a:t>
+            </a:r>
+            <a:r>
+              <a:rPr lang="ja-JP" altLang="en-US" dirty="0"/>
+              <a:t>させた</a:t>
+            </a:r>
+            <a:endParaRPr lang="en-US" altLang="ja-JP" dirty="0"/>
+          </a:p>
+          <a:p>
+            <a:pPr lvl="1">
+              <a:buFont typeface="Wingdings" panose="05000000000000000000" pitchFamily="2" charset="2"/>
+              <a:buChar char="l"/>
+            </a:pPr>
+            <a:r>
+              <a:rPr kumimoji="1" lang="ja-JP" altLang="en-US" dirty="0"/>
+              <a:t>メリット</a:t>
+            </a:r>
+            <a:r>
+              <a:rPr lang="ja-JP" altLang="en-US" dirty="0"/>
+              <a:t>：他の部屋でも使えた。</a:t>
+            </a:r>
+            <a:endParaRPr lang="en-US" altLang="ja-JP" dirty="0"/>
+          </a:p>
+          <a:p>
+            <a:pPr marL="201168" lvl="1" indent="0">
+              <a:buNone/>
+            </a:pPr>
+            <a:r>
+              <a:rPr lang="en-US" altLang="ja-JP" dirty="0"/>
+              <a:t>	</a:t>
+            </a:r>
+            <a:r>
+              <a:rPr lang="ja-JP" altLang="en-US" dirty="0"/>
+              <a:t>　コードが整理できた。　</a:t>
+            </a:r>
+            <a:endParaRPr lang="en-US" altLang="ja-JP" dirty="0"/>
+          </a:p>
+          <a:p>
+            <a:pPr lvl="1">
+              <a:buFont typeface="Wingdings" panose="05000000000000000000" pitchFamily="2" charset="2"/>
+              <a:buChar char="l"/>
+            </a:pPr>
+            <a:endParaRPr lang="en-US" altLang="ja-JP" dirty="0"/>
+          </a:p>
+          <a:p>
+            <a:pPr marL="201168" lvl="1" indent="0">
+              <a:buNone/>
+            </a:pPr>
+            <a:endParaRPr lang="en-US" altLang="ja-JP" dirty="0"/>
+          </a:p>
+        </p:txBody>
+      </p:sp>
+    </p:spTree>
+    <p:extLst>
+      <p:ext uri="{BB962C8B-B14F-4D97-AF65-F5344CB8AC3E}">
+        <p14:creationId xmlns:p14="http://schemas.microsoft.com/office/powerpoint/2010/main" val="2750266689"/>
+      </p:ext>
+    </p:extLst>
+  </p:cSld>
+  <p:clrMapOvr>
+    <a:masterClrMapping/>
+  </p:clrMapOvr>
+</p:sld>
+</file>
+
+<file path=ppt/slides/slide8.xml><?xml version="1.0" encoding="utf-8"?>
+<p:sld xmlns:a="http://schemas.openxmlformats.org/drawingml/2006/main" xmlns:r="http://schemas.openxmlformats.org/officeDocument/2006/relationships" xmlns:p="http://schemas.openxmlformats.org/presentationml/2006/main">
+  <p:cSld>
+    <p:spTree>
+      <p:nvGrpSpPr>
+        <p:cNvPr id="1" name=""/>
+        <p:cNvGrpSpPr/>
+        <p:nvPr/>
+      </p:nvGrpSpPr>
+      <p:grpSpPr>
+        <a:xfrm>
+          <a:off x="0" y="0"/>
+          <a:ext cx="0" cy="0"/>
+          <a:chOff x="0" y="0"/>
+          <a:chExt cx="0" cy="0"/>
+        </a:xfrm>
+      </p:grpSpPr>
+      <p:sp>
+        <p:nvSpPr>
+          <p:cNvPr id="2" name="タイトル 1">
+            <a:extLst>
+              <a:ext uri="{FF2B5EF4-FFF2-40B4-BE49-F238E27FC236}">
+                <a16:creationId xmlns:a16="http://schemas.microsoft.com/office/drawing/2014/main" id="{6A5A5BCF-A6B6-C690-0EBD-8382B529F024}"/>
+              </a:ext>
+            </a:extLst>
+          </p:cNvPr>
+          <p:cNvSpPr>
+            <a:spLocks noGrp="1"/>
+          </p:cNvSpPr>
+          <p:nvPr>
+            <p:ph type="title"/>
+          </p:nvPr>
+        </p:nvSpPr>
+        <p:spPr/>
+        <p:txBody>
+          <a:bodyPr/>
+          <a:lstStyle/>
+          <a:p>
+            <a:r>
+              <a:rPr kumimoji="1" lang="ja-JP" altLang="en-US" dirty="0"/>
+              <a:t>工夫した点</a:t>
+            </a:r>
+          </a:p>
+        </p:txBody>
+      </p:sp>
+      <p:sp>
+        <p:nvSpPr>
+          <p:cNvPr id="3" name="コンテンツ プレースホルダー 2">
+            <a:extLst>
+              <a:ext uri="{FF2B5EF4-FFF2-40B4-BE49-F238E27FC236}">
+                <a16:creationId xmlns:a16="http://schemas.microsoft.com/office/drawing/2014/main" id="{9247C6CD-1AE8-2E65-F9C0-D96CA351604C}"/>
+              </a:ext>
+            </a:extLst>
+          </p:cNvPr>
+          <p:cNvSpPr>
+            <a:spLocks noGrp="1"/>
+          </p:cNvSpPr>
+          <p:nvPr>
+            <p:ph idx="1"/>
+          </p:nvPr>
+        </p:nvSpPr>
+        <p:spPr/>
+        <p:txBody>
+          <a:bodyPr/>
+          <a:lstStyle/>
+          <a:p>
+            <a:pPr>
+              <a:buFont typeface="Wingdings" panose="05000000000000000000" pitchFamily="2" charset="2"/>
+              <a:buChar char="l"/>
+            </a:pPr>
+            <a:r>
+              <a:rPr kumimoji="1" lang="en-US" altLang="ja-JP" dirty="0" err="1"/>
+              <a:t>TextBox</a:t>
+            </a:r>
+            <a:r>
+              <a:rPr lang="ja-JP" altLang="en-US" dirty="0"/>
+              <a:t>クラスでメッセージを管理した</a:t>
+            </a:r>
+            <a:endParaRPr kumimoji="1" lang="ja-JP" altLang="en-US" dirty="0"/>
+          </a:p>
+        </p:txBody>
+      </p:sp>
+      <p:pic>
+        <p:nvPicPr>
+          <p:cNvPr id="5" name="図 4">
+            <a:extLst>
+              <a:ext uri="{FF2B5EF4-FFF2-40B4-BE49-F238E27FC236}">
+                <a16:creationId xmlns:a16="http://schemas.microsoft.com/office/drawing/2014/main" id="{A52F7D17-AD2E-8381-2F7B-9E953D5ADA8E}"/>
+              </a:ext>
+            </a:extLst>
+          </p:cNvPr>
+          <p:cNvPicPr>
+            <a:picLocks noChangeAspect="1"/>
+          </p:cNvPicPr>
+          <p:nvPr/>
+        </p:nvPicPr>
+        <p:blipFill rotWithShape="1">
+          <a:blip r:embed="rId2"/>
+          <a:srcRect l="223" t="-1" r="13" b="412"/>
+          <a:stretch>
+            <a:fillRect/>
+          </a:stretch>
+        </p:blipFill>
+        <p:spPr>
+          <a:xfrm>
+            <a:off x="6983132" y="3429000"/>
+            <a:ext cx="4893770" cy="2735641"/>
+          </a:xfrm>
+          <a:prstGeom prst="rect">
+            <a:avLst/>
+          </a:prstGeom>
+        </p:spPr>
+      </p:pic>
+    </p:spTree>
+    <p:extLst>
+      <p:ext uri="{BB962C8B-B14F-4D97-AF65-F5344CB8AC3E}">
+        <p14:creationId xmlns:p14="http://schemas.microsoft.com/office/powerpoint/2010/main" val="264060397"/>
+      </p:ext>
+    </p:extLst>
+  </p:cSld>
+  <p:clrMapOvr>
+    <a:masterClrMapping/>
+  </p:clrMapOvr>
+</p:sld>
+</file>
+
+<file path=ppt/slides/slide9.xml><?xml version="1.0" encoding="utf-8"?>
+<p:sld xmlns:a="http://schemas.openxmlformats.org/drawingml/2006/main" xmlns:r="http://schemas.openxmlformats.org/officeDocument/2006/relationships" xmlns:p="http://schemas.openxmlformats.org/presentationml/2006/main">
+  <p:cSld>
+    <p:spTree>
+      <p:nvGrpSpPr>
+        <p:cNvPr id="1" name=""/>
+        <p:cNvGrpSpPr/>
+        <p:nvPr/>
+      </p:nvGrpSpPr>
+      <p:grpSpPr>
+        <a:xfrm>
+          <a:off x="0" y="0"/>
+          <a:ext cx="0" cy="0"/>
+          <a:chOff x="0" y="0"/>
+          <a:chExt cx="0" cy="0"/>
+        </a:xfrm>
+      </p:grpSpPr>
+      <p:sp>
+        <p:nvSpPr>
+          <p:cNvPr id="2" name="タイトル 1">
+            <a:extLst>
+              <a:ext uri="{FF2B5EF4-FFF2-40B4-BE49-F238E27FC236}">
+                <a16:creationId xmlns:a16="http://schemas.microsoft.com/office/drawing/2014/main" id="{9F5D4871-5C0A-1D0B-1A01-754FEEFD7D82}"/>
+              </a:ext>
+            </a:extLst>
+          </p:cNvPr>
+          <p:cNvSpPr>
+            <a:spLocks noGrp="1"/>
+          </p:cNvSpPr>
+          <p:nvPr>
+            <p:ph type="title"/>
+          </p:nvPr>
+        </p:nvSpPr>
+        <p:spPr/>
+        <p:txBody>
+          <a:bodyPr/>
+          <a:lstStyle/>
+          <a:p>
+            <a:r>
+              <a:rPr lang="ja-JP" altLang="en-US" dirty="0"/>
+              <a:t>苦労した点</a:t>
+            </a:r>
+            <a:endParaRPr kumimoji="1" lang="ja-JP" altLang="en-US" dirty="0"/>
+          </a:p>
+        </p:txBody>
+      </p:sp>
+      <p:sp>
+        <p:nvSpPr>
+          <p:cNvPr id="3" name="コンテンツ プレースホルダー 2">
+            <a:extLst>
+              <a:ext uri="{FF2B5EF4-FFF2-40B4-BE49-F238E27FC236}">
+                <a16:creationId xmlns:a16="http://schemas.microsoft.com/office/drawing/2014/main" id="{F3C99DD1-F051-2A8C-7869-1E752617C13A}"/>
+              </a:ext>
+            </a:extLst>
+          </p:cNvPr>
+          <p:cNvSpPr>
+            <a:spLocks noGrp="1"/>
+          </p:cNvSpPr>
+          <p:nvPr>
+            <p:ph idx="1"/>
+          </p:nvPr>
+        </p:nvSpPr>
+        <p:spPr/>
+        <p:txBody>
+          <a:bodyPr/>
+          <a:lstStyle/>
+          <a:p>
+            <a:pPr>
+              <a:buFont typeface="Wingdings" panose="05000000000000000000" pitchFamily="2" charset="2"/>
+              <a:buChar char="l"/>
+            </a:pPr>
+            <a:r>
+              <a:rPr kumimoji="1" lang="ja-JP" altLang="en-US" dirty="0"/>
+              <a:t>各部屋を作成した後に、</a:t>
+            </a:r>
+            <a:r>
+              <a:rPr kumimoji="1" lang="en-US" altLang="ja-JP" dirty="0"/>
+              <a:t>Inventory</a:t>
+            </a:r>
+            <a:r>
+              <a:rPr lang="ja-JP" altLang="en-US" dirty="0"/>
+              <a:t>、</a:t>
+            </a:r>
+            <a:r>
+              <a:rPr lang="en-US" altLang="ja-JP" dirty="0"/>
+              <a:t>Item</a:t>
+            </a:r>
+            <a:r>
+              <a:rPr lang="ja-JP" altLang="en-US" dirty="0"/>
+              <a:t>、</a:t>
+            </a:r>
+            <a:r>
+              <a:rPr lang="en-US" altLang="ja-JP" dirty="0" err="1"/>
+              <a:t>TextBox</a:t>
+            </a:r>
+            <a:r>
+              <a:rPr lang="ja-JP" altLang="en-US" dirty="0"/>
+              <a:t>へ分けたこと。</a:t>
+            </a:r>
+            <a:endParaRPr lang="en-US" altLang="ja-JP" dirty="0"/>
+          </a:p>
+          <a:p>
+            <a:pPr>
+              <a:buFont typeface="Wingdings" panose="05000000000000000000" pitchFamily="2" charset="2"/>
+              <a:buChar char="l"/>
+            </a:pPr>
+            <a:r>
+              <a:rPr lang="ja-JP" altLang="ja-JP" dirty="0"/>
+              <a:t>クラス間の受け渡し</a:t>
+            </a:r>
+            <a:r>
+              <a:rPr lang="ja-JP" altLang="en-US" dirty="0"/>
+              <a:t>　</a:t>
+            </a:r>
+            <a:endParaRPr kumimoji="1" lang="ja-JP" altLang="en-US" dirty="0"/>
+          </a:p>
+        </p:txBody>
+      </p:sp>
+    </p:spTree>
+    <p:extLst>
+      <p:ext uri="{BB962C8B-B14F-4D97-AF65-F5344CB8AC3E}">
+        <p14:creationId xmlns:p14="http://schemas.microsoft.com/office/powerpoint/2010/main" val="3085882710"/>
+      </p:ext>
+    </p:extLst>
+  </p:cSld>
+  <p:clrMapOvr>
+    <a:masterClrMapping/>
+  </p:clrMapOvr>
+</p:sld>
+</file>
+
 <file path=ppt/theme/theme1.xml><?xml version="1.0" encoding="utf-8"?>
+<a:theme xmlns:a="http://schemas.openxmlformats.org/drawingml/2006/main" name="レトロスペクト">
+  <a:themeElements>
+    <a:clrScheme name="レトロスペクト">
+      <a:dk1>
+        <a:srgbClr val="000000"/>
+      </a:dk1>
+      <a:lt1>
+        <a:sysClr val="window" lastClr="FFFFFF"/>
+      </a:lt1>
+      <a:dk2>
+        <a:srgbClr val="637052"/>
+      </a:dk2>
+      <a:lt2>
+        <a:srgbClr val="CCDDEA"/>
+      </a:lt2>
+      <a:accent1>
+        <a:srgbClr val="E48312"/>
+      </a:accent1>
+      <a:accent2>
+        <a:srgbClr val="BD582C"/>
+      </a:accent2>
+      <a:accent3>
+        <a:srgbClr val="865640"/>
+      </a:accent3>
+      <a:accent4>
+        <a:srgbClr val="9B8357"/>
+      </a:accent4>
+      <a:accent5>
+        <a:srgbClr val="C2BC80"/>
+      </a:accent5>
+      <a:accent6>
+        <a:srgbClr val="94A088"/>
+      </a:accent6>
+      <a:hlink>
+        <a:srgbClr val="2998E3"/>
+      </a:hlink>
+      <a:folHlink>
+        <a:srgbClr val="8C8C8C"/>
+      </a:folHlink>
+    </a:clrScheme>
+    <a:fontScheme name="レトロスペクト">
+      <a:majorFont>
+        <a:latin typeface="Calibri Light" panose="020F0302020204030204"/>
+        <a:ea typeface=""/>
+        <a:cs typeface=""/>
+        <a:font script="Jpan" typeface="ＭＳ Ｐゴシック"/>
+        <a:font script="Hang" typeface="맑은 고딕"/>
+        <a:font script="Hans" typeface="宋体"/>
+        <a:font script="Hant" typeface="新細明體"/>
+        <a:font script="Arab" typeface="Times New Roman"/>
+        <a:font script="Hebr" typeface="Times New Roman"/>
+        <a:font script="Thai" typeface="Angsana New"/>
+        <a:font script="Ethi" typeface="Nyala"/>
+        <a:font script="Beng" typeface="Vrinda"/>
+        <a:font script="Gujr" typeface="Shruti"/>
+        <a:font script="Khmr" typeface="MoolBoran"/>
+        <a:font script="Knda" typeface="Tunga"/>
+        <a:font script="Guru" typeface="Raavi"/>
+        <a:font script="Cans" typeface="Euphemia"/>
+        <a:font script="Cher" typeface="Plantagenet Cherokee"/>
+        <a:font script="Yiii" typeface="Microsoft Yi Baiti"/>
+        <a:font script="Tibt" typeface="Microsoft Himalaya"/>
+        <a:font script="Thaa" typeface="MV Boli"/>
+        <a:font script="Deva" typeface="Mangal"/>
+        <a:font script="Telu" typeface="Gautami"/>
+        <a:font script="Taml" typeface="Latha"/>
+        <a:font script="Syrc" typeface="Estrangelo Edessa"/>
+        <a:font script="Orya" typeface="Kalinga"/>
+        <a:font script="Mlym" typeface="Kartika"/>
+        <a:font script="Laoo" typeface="DokChampa"/>
+        <a:font script="Sinh" typeface="Iskoola Pota"/>
+        <a:font script="Mong" typeface="Mongolian Baiti"/>
+        <a:font script="Viet" typeface="Times New Roman"/>
+        <a:font script="Uigh" typeface="Microsoft Uighur"/>
+        <a:font script="Geor" typeface="Sylfaen"/>
+      </a:majorFont>
+      <a:minorFont>
+        <a:latin typeface="Calibri" panose="020F0502020204030204"/>
+        <a:ea typeface=""/>
+        <a:cs typeface=""/>
+        <a:font script="Jpan" typeface="ＭＳ Ｐゴシック"/>
+        <a:font script="Hang" typeface="맑은 고딕"/>
+        <a:font script="Hans" typeface="宋体"/>
+        <a:font script="Hant" typeface="新細明體"/>
+        <a:font script="Arab" typeface="Arial"/>
+        <a:font script="Hebr" typeface="Arial"/>
+        <a:font script="Thai" typeface="Cordia New"/>
+        <a:font script="Ethi" typeface="Nyala"/>
+        <a:font script="Beng" typeface="Vrinda"/>
+        <a:font script="Gujr" typeface="Shruti"/>
+        <a:font script="Khmr" typeface="DaunPenh"/>
+        <a:font script="Knda" typeface="Tunga"/>
+        <a:font script="Guru" typeface="Raavi"/>
+        <a:font script="Cans" typeface="Euphemia"/>
+        <a:font script="Cher" typeface="Plantagenet Cherokee"/>
+        <a:font script="Yiii" typeface="Microsoft Yi Baiti"/>
+        <a:font script="Tibt" typeface="Microsoft Himalaya"/>
+        <a:font script="Thaa" typeface="MV Boli"/>
+        <a:font script="Deva" typeface="Mangal"/>
+        <a:font script="Telu" typeface="Gautami"/>
+        <a:font script="Taml" typeface="Latha"/>
+        <a:font script="Syrc" typeface="Estrangelo Edessa"/>
+        <a:font script="Orya" typeface="Kalinga"/>
+        <a:font script="Mlym" typeface="Kartika"/>
+        <a:font script="Laoo" typeface="DokChampa"/>
+        <a:font script="Sinh" typeface="Iskoola Pota"/>
+        <a:font script="Mong" typeface="Mongolian Baiti"/>
+        <a:font script="Viet" typeface="Arial"/>
+        <a:font script="Uigh" typeface="Microsoft Uighur"/>
+        <a:font script="Geor" typeface="Sylfaen"/>
+      </a:minorFont>
+    </a:fontScheme>
+    <a:fmtScheme name="レトロスペクト">
+      <a:fillStyleLst>
+        <a:solidFill>
+          <a:schemeClr val="phClr"/>
+        </a:solidFill>
+        <a:gradFill rotWithShape="1">
+          <a:gsLst>
+            <a:gs pos="0">
+              <a:schemeClr val="phClr">
+                <a:tint val="65000"/>
+                <a:shade val="92000"/>
+                <a:satMod val="130000"/>
+              </a:schemeClr>
+            </a:gs>
+            <a:gs pos="45000">
+              <a:schemeClr val="phClr">
+                <a:tint val="60000"/>
+                <a:shade val="99000"/>
+                <a:satMod val="120000"/>
+              </a:schemeClr>
+            </a:gs>
+            <a:gs pos="100000">
+              <a:schemeClr val="phClr">
+                <a:tint val="55000"/>
+                <a:satMod val="140000"/>
+              </a:schemeClr>
+            </a:gs>
+          </a:gsLst>
+          <a:path path="circle">
+            <a:fillToRect l="100000" t="100000" r="100000" b="100000"/>
+          </a:path>
+        </a:gradFill>
+        <a:gradFill rotWithShape="1">
+          <a:gsLst>
+            <a:gs pos="0">
+              <a:schemeClr val="phClr">
+                <a:shade val="85000"/>
+                <a:satMod val="130000"/>
+              </a:schemeClr>
+            </a:gs>
+            <a:gs pos="34000">
+              <a:schemeClr val="phClr">
+                <a:shade val="87000"/>
+                <a:satMod val="125000"/>
+              </a:schemeClr>
+            </a:gs>
+            <a:gs pos="70000">
+              <a:schemeClr val="phClr">
+                <a:tint val="100000"/>
+                <a:shade val="90000"/>
+                <a:satMod val="130000"/>
+              </a:schemeClr>
+            </a:gs>
+            <a:gs pos="100000">
+              <a:schemeClr val="phClr">
+                <a:tint val="100000"/>
+                <a:shade val="100000"/>
+                <a:satMod val="110000"/>
+              </a:schemeClr>
+            </a:gs>
+          </a:gsLst>
+          <a:path path="circle">
+            <a:fillToRect l="100000" t="100000" r="100000" b="100000"/>
+          </a:path>
+        </a:gradFill>
+      </a:fillStyleLst>
+      <a:lnStyleLst>
+        <a:ln w="12700" cap="flat" cmpd="sng" algn="ctr">
+          <a:solidFill>
+            <a:schemeClr val="phClr"/>
+          </a:solidFill>
+          <a:prstDash val="solid"/>
+        </a:ln>
+        <a:ln w="15875" cap="flat" cmpd="sng" algn="ctr">
+          <a:solidFill>
+            <a:schemeClr val="phClr"/>
+          </a:solidFill>
+          <a:prstDash val="solid"/>
+        </a:ln>
+        <a:ln w="25400" cap="flat" cmpd="sng" algn="ctr">
+          <a:solidFill>
+            <a:schemeClr val="phClr"/>
+          </a:solidFill>
+          <a:prstDash val="solid"/>
+        </a:ln>
+      </a:lnStyleLst>
+      <a:effectStyleLst>
+        <a:effectStyle>
+          <a:effectLst/>
+        </a:effectStyle>
+        <a:effectStyle>
+          <a:effectLst>
+            <a:outerShdw blurRad="38100" dist="25400" dir="2700000" algn="br" rotWithShape="0">
+              <a:srgbClr val="000000">
+                <a:alpha val="60000"/>
+              </a:srgbClr>
+            </a:outerShdw>
+          </a:effectLst>
+        </a:effectStyle>
+        <a:effectStyle>
+          <a:effectLst>
+            <a:outerShdw blurRad="44450" dist="25400" dir="2700000" algn="br" rotWithShape="0">
+              <a:srgbClr val="000000">
+                <a:alpha val="60000"/>
+              </a:srgbClr>
+            </a:outerShdw>
+          </a:effectLst>
+          <a:scene3d>
+            <a:camera prst="orthographicFront">
+              <a:rot lat="0" lon="0" rev="0"/>
+            </a:camera>
+            <a:lightRig rig="threePt" dir="t">
+              <a:rot lat="0" lon="0" rev="19800000"/>
+            </a:lightRig>
+          </a:scene3d>
+          <a:sp3d prstMaterial="flat">
+            <a:bevelT w="25400" h="31750"/>
+          </a:sp3d>
+        </a:effectStyle>
+      </a:effectStyleLst>
+      <a:bgFillStyleLst>
+        <a:solidFill>
+          <a:schemeClr val="phClr"/>
+        </a:solidFill>
+        <a:solidFill>
+          <a:schemeClr val="phClr">
+            <a:tint val="90000"/>
+            <a:shade val="97000"/>
+            <a:satMod val="130000"/>
+          </a:schemeClr>
+        </a:solidFill>
+        <a:gradFill rotWithShape="1">
+          <a:gsLst>
+            <a:gs pos="0">
+              <a:schemeClr val="phClr">
+                <a:tint val="96000"/>
+                <a:shade val="99000"/>
+                <a:satMod val="140000"/>
+              </a:schemeClr>
+            </a:gs>
+            <a:gs pos="65000">
+              <a:schemeClr val="phClr">
+                <a:tint val="100000"/>
+                <a:shade val="80000"/>
+                <a:satMod val="130000"/>
+              </a:schemeClr>
+            </a:gs>
+            <a:gs pos="100000">
+              <a:schemeClr val="phClr">
+                <a:tint val="100000"/>
+                <a:shade val="48000"/>
+                <a:satMod val="120000"/>
+              </a:schemeClr>
+            </a:gs>
+          </a:gsLst>
+          <a:lin ang="16200000" scaled="0"/>
+        </a:gradFill>
+      </a:bgFillStyleLst>
+    </a:fmtScheme>
+  </a:themeElements>
+  <a:objectDefaults/>
+  <a:extraClrSchemeLst/>
+  <a:extLst>
+    <a:ext uri="{05A4C25C-085E-4340-85A3-A5531E510DB2}">
+      <thm15:themeFamily xmlns:thm15="http://schemas.microsoft.com/office/thememl/2012/main" name="Retrospect" id="{5F128B03-DCCA-4EEB-AB3B-CF2899314A46}" vid="{3F1AAB62-24C6-49D2-8E01-B56FAC9A3DCD}"/>
+    </a:ext>
+  </a:extLst>
+</a:theme>
+</file>
+
+<file path=ppt/theme/theme2.xml><?xml version="1.0" encoding="utf-8"?>
 <a:theme xmlns:a="http://schemas.openxmlformats.org/drawingml/2006/main" name="Office テーマ">
   <a:themeElements>
     <a:clrScheme name="Office">

--- a/presentation/presentation.pptx
+++ b/presentation/presentation.pptx
@@ -205,7 +205,7 @@
           <a:p>
             <a:fld id="{AD542C85-82DD-4FED-8412-385712308239}" type="datetimeFigureOut">
               <a:rPr kumimoji="1" lang="ja-JP" altLang="en-US" smtClean="0"/>
-              <a:t>2026/7/27</a:t>
+              <a:t>2026/7/28</a:t>
             </a:fld>
             <a:endParaRPr kumimoji="1" lang="ja-JP" altLang="en-US"/>
           </a:p>
@@ -645,6 +645,13 @@
             <a:schemeClr val="lt1"/>
           </a:fontRef>
         </p:style>
+        <p:txBody>
+          <a:bodyPr/>
+          <a:lstStyle/>
+          <a:p>
+            <a:endParaRPr lang="ja-JP" altLang="en-US"/>
+          </a:p>
+        </p:txBody>
       </p:sp>
       <p:sp>
         <p:nvSpPr>
@@ -683,6 +690,13 @@
             <a:schemeClr val="lt1"/>
           </a:fontRef>
         </p:style>
+        <p:txBody>
+          <a:bodyPr/>
+          <a:lstStyle/>
+          <a:p>
+            <a:endParaRPr lang="ja-JP" altLang="en-US"/>
+          </a:p>
+        </p:txBody>
       </p:sp>
       <p:sp>
         <p:nvSpPr>
@@ -817,7 +831,7 @@
           <a:p>
             <a:fld id="{18CA95F4-0FB2-4DCC-8987-71DF119592E9}" type="datetimeFigureOut">
               <a:rPr kumimoji="1" lang="ja-JP" altLang="en-US" smtClean="0"/>
-              <a:t>2026/7/27</a:t>
+              <a:t>2026/7/28</a:t>
             </a:fld>
             <a:endParaRPr kumimoji="1" lang="ja-JP" altLang="en-US"/>
           </a:p>
@@ -1057,7 +1071,7 @@
           <a:p>
             <a:fld id="{18CA95F4-0FB2-4DCC-8987-71DF119592E9}" type="datetimeFigureOut">
               <a:rPr kumimoji="1" lang="ja-JP" altLang="en-US" smtClean="0"/>
-              <a:t>2026/7/27</a:t>
+              <a:t>2026/7/28</a:t>
             </a:fld>
             <a:endParaRPr kumimoji="1" lang="ja-JP" altLang="en-US"/>
           </a:p>
@@ -1345,7 +1359,7 @@
           <a:p>
             <a:fld id="{18CA95F4-0FB2-4DCC-8987-71DF119592E9}" type="datetimeFigureOut">
               <a:rPr kumimoji="1" lang="ja-JP" altLang="en-US" smtClean="0"/>
-              <a:t>2026/7/27</a:t>
+              <a:t>2026/7/28</a:t>
             </a:fld>
             <a:endParaRPr kumimoji="1" lang="ja-JP" altLang="en-US"/>
           </a:p>
@@ -1551,7 +1565,7 @@
           <a:p>
             <a:fld id="{18CA95F4-0FB2-4DCC-8987-71DF119592E9}" type="datetimeFigureOut">
               <a:rPr kumimoji="1" lang="ja-JP" altLang="en-US" smtClean="0"/>
-              <a:t>2026/7/27</a:t>
+              <a:t>2026/7/28</a:t>
             </a:fld>
             <a:endParaRPr kumimoji="1" lang="ja-JP" altLang="en-US"/>
           </a:p>
@@ -1894,7 +1908,7 @@
           <a:p>
             <a:fld id="{18CA95F4-0FB2-4DCC-8987-71DF119592E9}" type="datetimeFigureOut">
               <a:rPr kumimoji="1" lang="ja-JP" altLang="en-US" smtClean="0"/>
-              <a:t>2026/7/27</a:t>
+              <a:t>2026/7/28</a:t>
             </a:fld>
             <a:endParaRPr kumimoji="1" lang="ja-JP" altLang="en-US"/>
           </a:p>
@@ -2233,7 +2247,7 @@
           <a:p>
             <a:fld id="{18CA95F4-0FB2-4DCC-8987-71DF119592E9}" type="datetimeFigureOut">
               <a:rPr kumimoji="1" lang="ja-JP" altLang="en-US" smtClean="0"/>
-              <a:t>2026/7/27</a:t>
+              <a:t>2026/7/28</a:t>
             </a:fld>
             <a:endParaRPr kumimoji="1" lang="ja-JP" altLang="en-US"/>
           </a:p>
@@ -2676,7 +2690,7 @@
           <a:p>
             <a:fld id="{18CA95F4-0FB2-4DCC-8987-71DF119592E9}" type="datetimeFigureOut">
               <a:rPr kumimoji="1" lang="ja-JP" altLang="en-US" smtClean="0"/>
-              <a:t>2026/7/27</a:t>
+              <a:t>2026/7/28</a:t>
             </a:fld>
             <a:endParaRPr kumimoji="1" lang="ja-JP" altLang="en-US"/>
           </a:p>
@@ -2794,7 +2808,7 @@
           <a:p>
             <a:fld id="{18CA95F4-0FB2-4DCC-8987-71DF119592E9}" type="datetimeFigureOut">
               <a:rPr kumimoji="1" lang="ja-JP" altLang="en-US" smtClean="0"/>
-              <a:t>2026/7/27</a:t>
+              <a:t>2026/7/28</a:t>
             </a:fld>
             <a:endParaRPr kumimoji="1" lang="ja-JP" altLang="en-US"/>
           </a:p>
@@ -2965,7 +2979,7 @@
           <a:p>
             <a:fld id="{18CA95F4-0FB2-4DCC-8987-71DF119592E9}" type="datetimeFigureOut">
               <a:rPr kumimoji="1" lang="ja-JP" altLang="en-US" smtClean="0"/>
-              <a:t>2026/7/27</a:t>
+              <a:t>2026/7/28</a:t>
             </a:fld>
             <a:endParaRPr kumimoji="1" lang="ja-JP" altLang="en-US"/>
           </a:p>
@@ -3351,7 +3365,7 @@
           <a:p>
             <a:fld id="{18CA95F4-0FB2-4DCC-8987-71DF119592E9}" type="datetimeFigureOut">
               <a:rPr kumimoji="1" lang="ja-JP" altLang="en-US" smtClean="0"/>
-              <a:t>2026/7/27</a:t>
+              <a:t>2026/7/28</a:t>
             </a:fld>
             <a:endParaRPr kumimoji="1" lang="ja-JP" altLang="en-US"/>
           </a:p>
@@ -3733,7 +3747,7 @@
           <a:p>
             <a:fld id="{18CA95F4-0FB2-4DCC-8987-71DF119592E9}" type="datetimeFigureOut">
               <a:rPr kumimoji="1" lang="ja-JP" altLang="en-US" smtClean="0"/>
-              <a:t>2026/7/27</a:t>
+              <a:t>2026/7/28</a:t>
             </a:fld>
             <a:endParaRPr kumimoji="1" lang="ja-JP" altLang="en-US"/>
           </a:p>
@@ -3853,6 +3867,13 @@
             <a:schemeClr val="lt1"/>
           </a:fontRef>
         </p:style>
+        <p:txBody>
+          <a:bodyPr/>
+          <a:lstStyle/>
+          <a:p>
+            <a:endParaRPr lang="ja-JP" altLang="en-US"/>
+          </a:p>
+        </p:txBody>
       </p:sp>
       <p:sp>
         <p:nvSpPr>
@@ -3891,6 +3912,13 @@
             <a:schemeClr val="lt1"/>
           </a:fontRef>
         </p:style>
+        <p:txBody>
+          <a:bodyPr/>
+          <a:lstStyle/>
+          <a:p>
+            <a:endParaRPr lang="ja-JP" altLang="en-US"/>
+          </a:p>
+        </p:txBody>
       </p:sp>
       <p:sp>
         <p:nvSpPr>
@@ -4052,7 +4080,7 @@
           <a:p>
             <a:fld id="{18CA95F4-0FB2-4DCC-8987-71DF119592E9}" type="datetimeFigureOut">
               <a:rPr kumimoji="1" lang="ja-JP" altLang="en-US" smtClean="0"/>
-              <a:t>2026/7/27</a:t>
+              <a:t>2026/7/28</a:t>
             </a:fld>
             <a:endParaRPr kumimoji="1" lang="ja-JP" altLang="en-US"/>
           </a:p>
@@ -4722,8 +4750,12 @@
               <a:buChar char="l"/>
             </a:pPr>
             <a:r>
+              <a:rPr lang="en-US" altLang="ja-JP" dirty="0"/>
+              <a:t>2</a:t>
+            </a:r>
+            <a:r>
               <a:rPr lang="ja-JP" altLang="ja-JP" dirty="0"/>
-              <a:t>4ステージ構成で、プレイヤーは1ステージずつ攻略していく</a:t>
+              <a:t>ステージ構成で、プレイヤーは1ステージずつ攻略していく</a:t>
             </a:r>
           </a:p>
           <a:p>
@@ -4780,7 +4812,23 @@
             </a:pPr>
             <a:r>
               <a:rPr lang="ja-JP" altLang="ja-JP" dirty="0"/>
-              <a:t>放課後、忘れ物を取りに校舎へ戻った主人公。校舎に入った瞬間、突然すべての扉に鍵がかかる。校内放送から謎のメッセージが流れる——「校内に隠された4つの鍵を集めれば出口は開く。」プレイヤーは学校内を探索し、謎を解きながら脱出を目指す。</a:t>
+              <a:t>放課後、忘れ物を取りに校舎へ戻った主人公。校舎に入った瞬間、突然すべての扉に鍵がかかる。校内放送から謎のメッセージが流れる——「校内に隠された</a:t>
+            </a:r>
+            <a:r>
+              <a:rPr lang="en-US" altLang="ja-JP" dirty="0"/>
+              <a:t>2</a:t>
+            </a:r>
+            <a:r>
+              <a:rPr lang="ja-JP" altLang="ja-JP" dirty="0"/>
+              <a:t>つの鍵を集めれば出口は開く。」プレイヤーは</a:t>
+            </a:r>
+            <a:r>
+              <a:rPr lang="ja-JP" altLang="en-US" dirty="0"/>
+              <a:t>図書館と理科室</a:t>
+            </a:r>
+            <a:r>
+              <a:rPr lang="ja-JP" altLang="ja-JP" dirty="0"/>
+              <a:t>を探索し、謎を解きながら脱出を目指す。</a:t>
             </a:r>
           </a:p>
         </p:txBody>

--- a/presentation/presentation.pptx
+++ b/presentation/presentation.pptx
@@ -6727,13 +6727,20 @@
             </a:pPr>
             <a:r>
               <a:rPr lang="ja-JP" altLang="ja-JP" dirty="0"/>
-              <a:t>クラス間の受け渡し</a:t>
-            </a:r>
-            <a:r>
-              <a:rPr lang="ja-JP" altLang="en-US" dirty="0"/>
-              <a:t>　</a:t>
-            </a:r>
-            <a:endParaRPr kumimoji="1" lang="ja-JP" altLang="en-US" dirty="0"/>
+              <a:t>クラス間でのデータ共有や画面遷移の管理</a:t>
+            </a:r>
+            <a:endParaRPr lang="en-US" altLang="ja-JP" dirty="0"/>
+          </a:p>
+          <a:p>
+            <a:pPr>
+              <a:buFont typeface="Wingdings" panose="05000000000000000000" pitchFamily="2" charset="2"/>
+              <a:buChar char="l"/>
+            </a:pPr>
+            <a:r>
+              <a:rPr kumimoji="1" lang="ja-JP" altLang="en-US" dirty="0"/>
+              <a:t>各ステージで実装方法が異ならないように、共通の仕様に合わせて調整した</a:t>
+            </a:r>
+            <a:endParaRPr kumimoji="1" lang="en-US" altLang="ja-JP" dirty="0"/>
           </a:p>
         </p:txBody>
       </p:sp>

--- a/presentation/presentation.pptx
+++ b/presentation/presentation.pptx
@@ -6558,6 +6558,56 @@
         <p:txBody>
           <a:bodyPr/>
           <a:lstStyle/>
+          <a:p>
+            <a:pPr>
+              <a:buFont typeface="Wingdings" panose="05000000000000000000" pitchFamily="2" charset="2"/>
+              <a:buChar char="l"/>
+            </a:pPr>
+            <a:r>
+              <a:rPr lang="ja-JP" altLang="en-US" dirty="0"/>
+              <a:t>持ち物欄を</a:t>
+            </a:r>
+            <a:r>
+              <a:rPr lang="ja-JP" altLang="ja-JP" dirty="0"/>
+              <a:t>Inventoryクラスとして独立</a:t>
+            </a:r>
+            <a:r>
+              <a:rPr lang="ja-JP" altLang="en-US" dirty="0"/>
+              <a:t>させた</a:t>
+            </a:r>
+            <a:endParaRPr lang="en-US" altLang="ja-JP" dirty="0"/>
+          </a:p>
+          <a:p>
+            <a:pPr lvl="1">
+              <a:buFont typeface="Wingdings" panose="05000000000000000000" pitchFamily="2" charset="2"/>
+              <a:buChar char="l"/>
+            </a:pPr>
+            <a:r>
+              <a:rPr lang="ja-JP" altLang="en-US" dirty="0"/>
+              <a:t>メリット：他の部屋でも使えた。</a:t>
+            </a:r>
+            <a:endParaRPr lang="en-US" altLang="ja-JP" dirty="0"/>
+          </a:p>
+          <a:p>
+            <a:pPr marL="201168" lvl="1" indent="0">
+              <a:buNone/>
+            </a:pPr>
+            <a:r>
+              <a:rPr lang="en-US" altLang="ja-JP" dirty="0"/>
+              <a:t>	</a:t>
+            </a:r>
+            <a:r>
+              <a:rPr lang="ja-JP" altLang="en-US" dirty="0"/>
+              <a:t>　コードが整理できた。　</a:t>
+            </a:r>
+            <a:endParaRPr lang="en-US" altLang="ja-JP" dirty="0"/>
+          </a:p>
+          <a:p>
+            <a:pPr marL="201168" lvl="1" indent="0">
+              <a:buNone/>
+            </a:pPr>
+            <a:endParaRPr kumimoji="1" lang="en-US" altLang="ja-JP" dirty="0"/>
+          </a:p>
           <a:p>
             <a:pPr>
               <a:buFont typeface="Wingdings" panose="05000000000000000000" pitchFamily="2" charset="2"/>

--- a/presentation/presentation.pptx
+++ b/presentation/presentation.pptx
@@ -205,7 +205,7 @@
           <a:p>
             <a:fld id="{AD542C85-82DD-4FED-8412-385712308239}" type="datetimeFigureOut">
               <a:rPr kumimoji="1" lang="ja-JP" altLang="en-US" smtClean="0"/>
-              <a:t>2026/7/28</a:t>
+              <a:t>2026/7/29</a:t>
             </a:fld>
             <a:endParaRPr kumimoji="1" lang="ja-JP" altLang="en-US"/>
           </a:p>
@@ -831,7 +831,7 @@
           <a:p>
             <a:fld id="{18CA95F4-0FB2-4DCC-8987-71DF119592E9}" type="datetimeFigureOut">
               <a:rPr kumimoji="1" lang="ja-JP" altLang="en-US" smtClean="0"/>
-              <a:t>2026/7/28</a:t>
+              <a:t>2026/7/29</a:t>
             </a:fld>
             <a:endParaRPr kumimoji="1" lang="ja-JP" altLang="en-US"/>
           </a:p>
@@ -1071,7 +1071,7 @@
           <a:p>
             <a:fld id="{18CA95F4-0FB2-4DCC-8987-71DF119592E9}" type="datetimeFigureOut">
               <a:rPr kumimoji="1" lang="ja-JP" altLang="en-US" smtClean="0"/>
-              <a:t>2026/7/28</a:t>
+              <a:t>2026/7/29</a:t>
             </a:fld>
             <a:endParaRPr kumimoji="1" lang="ja-JP" altLang="en-US"/>
           </a:p>
@@ -1359,7 +1359,7 @@
           <a:p>
             <a:fld id="{18CA95F4-0FB2-4DCC-8987-71DF119592E9}" type="datetimeFigureOut">
               <a:rPr kumimoji="1" lang="ja-JP" altLang="en-US" smtClean="0"/>
-              <a:t>2026/7/28</a:t>
+              <a:t>2026/7/29</a:t>
             </a:fld>
             <a:endParaRPr kumimoji="1" lang="ja-JP" altLang="en-US"/>
           </a:p>
@@ -1565,7 +1565,7 @@
           <a:p>
             <a:fld id="{18CA95F4-0FB2-4DCC-8987-71DF119592E9}" type="datetimeFigureOut">
               <a:rPr kumimoji="1" lang="ja-JP" altLang="en-US" smtClean="0"/>
-              <a:t>2026/7/28</a:t>
+              <a:t>2026/7/29</a:t>
             </a:fld>
             <a:endParaRPr kumimoji="1" lang="ja-JP" altLang="en-US"/>
           </a:p>
@@ -1908,7 +1908,7 @@
           <a:p>
             <a:fld id="{18CA95F4-0FB2-4DCC-8987-71DF119592E9}" type="datetimeFigureOut">
               <a:rPr kumimoji="1" lang="ja-JP" altLang="en-US" smtClean="0"/>
-              <a:t>2026/7/28</a:t>
+              <a:t>2026/7/29</a:t>
             </a:fld>
             <a:endParaRPr kumimoji="1" lang="ja-JP" altLang="en-US"/>
           </a:p>
@@ -2247,7 +2247,7 @@
           <a:p>
             <a:fld id="{18CA95F4-0FB2-4DCC-8987-71DF119592E9}" type="datetimeFigureOut">
               <a:rPr kumimoji="1" lang="ja-JP" altLang="en-US" smtClean="0"/>
-              <a:t>2026/7/28</a:t>
+              <a:t>2026/7/29</a:t>
             </a:fld>
             <a:endParaRPr kumimoji="1" lang="ja-JP" altLang="en-US"/>
           </a:p>
@@ -2690,7 +2690,7 @@
           <a:p>
             <a:fld id="{18CA95F4-0FB2-4DCC-8987-71DF119592E9}" type="datetimeFigureOut">
               <a:rPr kumimoji="1" lang="ja-JP" altLang="en-US" smtClean="0"/>
-              <a:t>2026/7/28</a:t>
+              <a:t>2026/7/29</a:t>
             </a:fld>
             <a:endParaRPr kumimoji="1" lang="ja-JP" altLang="en-US"/>
           </a:p>
@@ -2808,7 +2808,7 @@
           <a:p>
             <a:fld id="{18CA95F4-0FB2-4DCC-8987-71DF119592E9}" type="datetimeFigureOut">
               <a:rPr kumimoji="1" lang="ja-JP" altLang="en-US" smtClean="0"/>
-              <a:t>2026/7/28</a:t>
+              <a:t>2026/7/29</a:t>
             </a:fld>
             <a:endParaRPr kumimoji="1" lang="ja-JP" altLang="en-US"/>
           </a:p>
@@ -2979,7 +2979,7 @@
           <a:p>
             <a:fld id="{18CA95F4-0FB2-4DCC-8987-71DF119592E9}" type="datetimeFigureOut">
               <a:rPr kumimoji="1" lang="ja-JP" altLang="en-US" smtClean="0"/>
-              <a:t>2026/7/28</a:t>
+              <a:t>2026/7/29</a:t>
             </a:fld>
             <a:endParaRPr kumimoji="1" lang="ja-JP" altLang="en-US"/>
           </a:p>
@@ -3365,7 +3365,7 @@
           <a:p>
             <a:fld id="{18CA95F4-0FB2-4DCC-8987-71DF119592E9}" type="datetimeFigureOut">
               <a:rPr kumimoji="1" lang="ja-JP" altLang="en-US" smtClean="0"/>
-              <a:t>2026/7/28</a:t>
+              <a:t>2026/7/29</a:t>
             </a:fld>
             <a:endParaRPr kumimoji="1" lang="ja-JP" altLang="en-US"/>
           </a:p>
@@ -3747,7 +3747,7 @@
           <a:p>
             <a:fld id="{18CA95F4-0FB2-4DCC-8987-71DF119592E9}" type="datetimeFigureOut">
               <a:rPr kumimoji="1" lang="ja-JP" altLang="en-US" smtClean="0"/>
-              <a:t>2026/7/28</a:t>
+              <a:t>2026/7/29</a:t>
             </a:fld>
             <a:endParaRPr kumimoji="1" lang="ja-JP" altLang="en-US"/>
           </a:p>
@@ -4080,7 +4080,7 @@
           <a:p>
             <a:fld id="{18CA95F4-0FB2-4DCC-8987-71DF119592E9}" type="datetimeFigureOut">
               <a:rPr kumimoji="1" lang="ja-JP" altLang="en-US" smtClean="0"/>
-              <a:t>2026/7/28</a:t>
+              <a:t>2026/7/29</a:t>
             </a:fld>
             <a:endParaRPr kumimoji="1" lang="ja-JP" altLang="en-US"/>
           </a:p>
@@ -6231,31 +6231,69 @@
           </a:p>
         </p:txBody>
       </p:sp>
-      <p:sp>
-        <p:nvSpPr>
-          <p:cNvPr id="3" name="コンテンツ プレースホルダー 2">
+      <p:pic>
+        <p:nvPicPr>
+          <p:cNvPr id="7" name="コンテンツ プレースホルダー 6">
             <a:extLst>
               <a:ext uri="{FF2B5EF4-FFF2-40B4-BE49-F238E27FC236}">
-                <a16:creationId xmlns:a16="http://schemas.microsoft.com/office/drawing/2014/main" id="{9C2C860E-B2C7-BD40-D4CD-2AC2A015F380}"/>
+                <a16:creationId xmlns:a16="http://schemas.microsoft.com/office/drawing/2014/main" id="{C64F9523-1B5B-74A2-222E-A7EB38578CC5}"/>
               </a:ext>
             </a:extLst>
           </p:cNvPr>
-          <p:cNvSpPr>
-            <a:spLocks noGrp="1"/>
-          </p:cNvSpPr>
+          <p:cNvPicPr>
+            <a:picLocks noGrp="1" noChangeAspect="1"/>
+          </p:cNvPicPr>
           <p:nvPr>
             <p:ph idx="1"/>
           </p:nvPr>
-        </p:nvSpPr>
-        <p:spPr/>
-        <p:txBody>
-          <a:bodyPr/>
-          <a:lstStyle/>
-          <a:p>
-            <a:endParaRPr kumimoji="1" lang="ja-JP" altLang="en-US" dirty="0"/>
-          </a:p>
-        </p:txBody>
-      </p:sp>
+        </p:nvPicPr>
+        <p:blipFill>
+          <a:blip r:embed="rId2"/>
+          <a:srcRect b="1708"/>
+          <a:stretch>
+            <a:fillRect/>
+          </a:stretch>
+        </p:blipFill>
+        <p:spPr>
+          <a:xfrm>
+            <a:off x="1300293" y="1976891"/>
+            <a:ext cx="4126235" cy="4021999"/>
+          </a:xfrm>
+          <a:prstGeom prst="rect">
+            <a:avLst/>
+          </a:prstGeom>
+        </p:spPr>
+      </p:pic>
+      <p:pic>
+        <p:nvPicPr>
+          <p:cNvPr id="9" name="図 8">
+            <a:extLst>
+              <a:ext uri="{FF2B5EF4-FFF2-40B4-BE49-F238E27FC236}">
+                <a16:creationId xmlns:a16="http://schemas.microsoft.com/office/drawing/2014/main" id="{C7149274-4296-156F-8899-32F4AAB383C1}"/>
+              </a:ext>
+            </a:extLst>
+          </p:cNvPr>
+          <p:cNvPicPr>
+            <a:picLocks noChangeAspect="1"/>
+          </p:cNvPicPr>
+          <p:nvPr/>
+        </p:nvPicPr>
+        <p:blipFill>
+          <a:blip r:embed="rId3"/>
+          <a:stretch>
+            <a:fillRect/>
+          </a:stretch>
+        </p:blipFill>
+        <p:spPr>
+          <a:xfrm>
+            <a:off x="6202011" y="1976891"/>
+            <a:ext cx="4335359" cy="4016749"/>
+          </a:xfrm>
+          <a:prstGeom prst="rect">
+            <a:avLst/>
+          </a:prstGeom>
+        </p:spPr>
+      </p:pic>
     </p:spTree>
     <p:extLst>
       <p:ext uri="{BB962C8B-B14F-4D97-AF65-F5344CB8AC3E}">

--- a/presentation/presentation.pptx
+++ b/presentation/presentation.pptx
@@ -5,7 +5,7 @@
     <p:sldMasterId id="2147483701" r:id="rId1"/>
   </p:sldMasterIdLst>
   <p:notesMasterIdLst>
-    <p:notesMasterId r:id="rId11"/>
+    <p:notesMasterId r:id="rId10"/>
   </p:notesMasterIdLst>
   <p:sldIdLst>
     <p:sldId id="256" r:id="rId2"/>
@@ -14,9 +14,8 @@
     <p:sldId id="262" r:id="rId5"/>
     <p:sldId id="259" r:id="rId6"/>
     <p:sldId id="266" r:id="rId7"/>
-    <p:sldId id="263" r:id="rId8"/>
-    <p:sldId id="265" r:id="rId9"/>
-    <p:sldId id="264" r:id="rId10"/>
+    <p:sldId id="265" r:id="rId8"/>
+    <p:sldId id="264" r:id="rId9"/>
   </p:sldIdLst>
   <p:sldSz cx="12192000" cy="6858000"/>
   <p:notesSz cx="6858000" cy="9144000"/>
@@ -6412,147 +6411,6 @@
           <p:cNvPr id="2" name="タイトル 1">
             <a:extLst>
               <a:ext uri="{FF2B5EF4-FFF2-40B4-BE49-F238E27FC236}">
-                <a16:creationId xmlns:a16="http://schemas.microsoft.com/office/drawing/2014/main" id="{2F34B269-FA90-4B19-CAEB-81E2AFF46F51}"/>
-              </a:ext>
-            </a:extLst>
-          </p:cNvPr>
-          <p:cNvSpPr>
-            <a:spLocks noGrp="1"/>
-          </p:cNvSpPr>
-          <p:nvPr>
-            <p:ph type="title"/>
-          </p:nvPr>
-        </p:nvSpPr>
-        <p:spPr/>
-        <p:txBody>
-          <a:bodyPr/>
-          <a:lstStyle/>
-          <a:p>
-            <a:r>
-              <a:rPr kumimoji="1" lang="ja-JP" altLang="en-US" dirty="0"/>
-              <a:t>工夫した点</a:t>
-            </a:r>
-          </a:p>
-        </p:txBody>
-      </p:sp>
-      <p:sp>
-        <p:nvSpPr>
-          <p:cNvPr id="3" name="コンテンツ プレースホルダー 2">
-            <a:extLst>
-              <a:ext uri="{FF2B5EF4-FFF2-40B4-BE49-F238E27FC236}">
-                <a16:creationId xmlns:a16="http://schemas.microsoft.com/office/drawing/2014/main" id="{0E6716FF-F928-5D8E-AC8A-F7EEF1B1520C}"/>
-              </a:ext>
-            </a:extLst>
-          </p:cNvPr>
-          <p:cNvSpPr>
-            <a:spLocks noGrp="1"/>
-          </p:cNvSpPr>
-          <p:nvPr>
-            <p:ph idx="1"/>
-          </p:nvPr>
-        </p:nvSpPr>
-        <p:spPr/>
-        <p:txBody>
-          <a:bodyPr/>
-          <a:lstStyle/>
-          <a:p>
-            <a:pPr>
-              <a:buFont typeface="Wingdings" panose="05000000000000000000" pitchFamily="2" charset="2"/>
-              <a:buChar char="l"/>
-            </a:pPr>
-            <a:r>
-              <a:rPr kumimoji="1" lang="ja-JP" altLang="en-US" dirty="0"/>
-              <a:t>持ち物欄を</a:t>
-            </a:r>
-            <a:r>
-              <a:rPr lang="ja-JP" altLang="ja-JP" dirty="0"/>
-              <a:t>Inventoryクラスとして独立</a:t>
-            </a:r>
-            <a:r>
-              <a:rPr lang="ja-JP" altLang="en-US" dirty="0"/>
-              <a:t>させた</a:t>
-            </a:r>
-            <a:endParaRPr lang="en-US" altLang="ja-JP" dirty="0"/>
-          </a:p>
-          <a:p>
-            <a:pPr lvl="1">
-              <a:buFont typeface="Wingdings" panose="05000000000000000000" pitchFamily="2" charset="2"/>
-              <a:buChar char="l"/>
-            </a:pPr>
-            <a:r>
-              <a:rPr kumimoji="1" lang="ja-JP" altLang="en-US" dirty="0"/>
-              <a:t>メリット</a:t>
-            </a:r>
-            <a:r>
-              <a:rPr lang="ja-JP" altLang="en-US" dirty="0"/>
-              <a:t>：他の部屋でも使えた。</a:t>
-            </a:r>
-            <a:endParaRPr lang="en-US" altLang="ja-JP" dirty="0"/>
-          </a:p>
-          <a:p>
-            <a:pPr marL="201168" lvl="1" indent="0">
-              <a:buNone/>
-            </a:pPr>
-            <a:r>
-              <a:rPr lang="en-US" altLang="ja-JP" dirty="0"/>
-              <a:t>	</a:t>
-            </a:r>
-            <a:r>
-              <a:rPr lang="ja-JP" altLang="en-US" dirty="0"/>
-              <a:t>　コードが整理できた。　</a:t>
-            </a:r>
-            <a:endParaRPr lang="en-US" altLang="ja-JP" dirty="0"/>
-          </a:p>
-          <a:p>
-            <a:pPr lvl="1">
-              <a:buFont typeface="Wingdings" panose="05000000000000000000" pitchFamily="2" charset="2"/>
-              <a:buChar char="l"/>
-            </a:pPr>
-            <a:endParaRPr lang="en-US" altLang="ja-JP" dirty="0"/>
-          </a:p>
-          <a:p>
-            <a:pPr marL="201168" lvl="1" indent="0">
-              <a:buNone/>
-            </a:pPr>
-            <a:endParaRPr lang="en-US" altLang="ja-JP" dirty="0"/>
-          </a:p>
-        </p:txBody>
-      </p:sp>
-    </p:spTree>
-    <p:extLst>
-      <p:ext uri="{BB962C8B-B14F-4D97-AF65-F5344CB8AC3E}">
-        <p14:creationId xmlns:p14="http://schemas.microsoft.com/office/powerpoint/2010/main" val="2750266689"/>
-      </p:ext>
-    </p:extLst>
-  </p:cSld>
-  <p:clrMapOvr>
-    <a:masterClrMapping/>
-  </p:clrMapOvr>
-</p:sld>
-</file>
-
-<file path=ppt/slides/slide8.xml><?xml version="1.0" encoding="utf-8"?>
-<p:sld xmlns:a="http://schemas.openxmlformats.org/drawingml/2006/main" xmlns:r="http://schemas.openxmlformats.org/officeDocument/2006/relationships" xmlns:p="http://schemas.openxmlformats.org/presentationml/2006/main">
-  <p:cSld>
-    <p:spTree>
-      <p:nvGrpSpPr>
-        <p:cNvPr id="1" name=""/>
-        <p:cNvGrpSpPr/>
-        <p:nvPr/>
-      </p:nvGrpSpPr>
-      <p:grpSpPr>
-        <a:xfrm>
-          <a:off x="0" y="0"/>
-          <a:ext cx="0" cy="0"/>
-          <a:chOff x="0" y="0"/>
-          <a:chExt cx="0" cy="0"/>
-        </a:xfrm>
-      </p:grpSpPr>
-      <p:sp>
-        <p:nvSpPr>
-          <p:cNvPr id="2" name="タイトル 1">
-            <a:extLst>
-              <a:ext uri="{FF2B5EF4-FFF2-40B4-BE49-F238E27FC236}">
                 <a16:creationId xmlns:a16="http://schemas.microsoft.com/office/drawing/2014/main" id="{6A5A5BCF-A6B6-C690-0EBD-8382B529F024}"/>
               </a:ext>
             </a:extLst>
@@ -6638,12 +6496,6 @@
               <a:rPr lang="ja-JP" altLang="en-US" dirty="0"/>
               <a:t>　コードが整理できた。　</a:t>
             </a:r>
-            <a:endParaRPr lang="en-US" altLang="ja-JP" dirty="0"/>
-          </a:p>
-          <a:p>
-            <a:pPr marL="201168" lvl="1" indent="0">
-              <a:buNone/>
-            </a:pPr>
             <a:endParaRPr kumimoji="1" lang="en-US" altLang="ja-JP" dirty="0"/>
           </a:p>
           <a:p>
@@ -6659,6 +6511,46 @@
               <a:rPr lang="ja-JP" altLang="en-US" dirty="0"/>
               <a:t>クラスでメッセージを管理した</a:t>
             </a:r>
+            <a:endParaRPr kumimoji="1" lang="en-US" altLang="ja-JP" dirty="0"/>
+          </a:p>
+          <a:p>
+            <a:pPr>
+              <a:buFont typeface="Wingdings" panose="05000000000000000000" pitchFamily="2" charset="2"/>
+              <a:buChar char="l"/>
+            </a:pPr>
+            <a:r>
+              <a:rPr lang="ja-JP" altLang="en-US" dirty="0"/>
+              <a:t>各</a:t>
+            </a:r>
+            <a:r>
+              <a:rPr lang="en-US" altLang="ja-JP" dirty="0" err="1"/>
+              <a:t>StageRoom</a:t>
+            </a:r>
+            <a:r>
+              <a:rPr lang="ja-JP" altLang="en-US" dirty="0"/>
+              <a:t>では、</a:t>
+            </a:r>
+            <a:r>
+              <a:rPr lang="ja-JP" altLang="ja-JP" dirty="0"/>
+              <a:t>前のイベントが終わらないと</a:t>
+            </a:r>
+            <a:endParaRPr lang="en-US" altLang="ja-JP" dirty="0"/>
+          </a:p>
+          <a:p>
+            <a:pPr marL="0" indent="0">
+              <a:buNone/>
+            </a:pPr>
+            <a:r>
+              <a:rPr lang="ja-JP" altLang="ja-JP" dirty="0"/>
+              <a:t>次へ進めないようにした</a:t>
+            </a:r>
+            <a:endParaRPr lang="en-US" altLang="ja-JP" dirty="0"/>
+          </a:p>
+          <a:p>
+            <a:pPr>
+              <a:buFont typeface="Wingdings" panose="05000000000000000000" pitchFamily="2" charset="2"/>
+              <a:buChar char="l"/>
+            </a:pPr>
             <a:endParaRPr kumimoji="1" lang="ja-JP" altLang="en-US" dirty="0"/>
           </a:p>
         </p:txBody>
@@ -6707,7 +6599,7 @@
 </p:sld>
 </file>
 
-<file path=ppt/slides/slide9.xml><?xml version="1.0" encoding="utf-8"?>
+<file path=ppt/slides/slide8.xml><?xml version="1.0" encoding="utf-8"?>
 <p:sld xmlns:a="http://schemas.openxmlformats.org/drawingml/2006/main" xmlns:r="http://schemas.openxmlformats.org/officeDocument/2006/relationships" xmlns:p="http://schemas.openxmlformats.org/presentationml/2006/main">
   <p:cSld>
     <p:spTree>

--- a/presentation/presentation.pptx
+++ b/presentation/presentation.pptx
@@ -6265,10 +6265,10 @@
       </p:pic>
       <p:pic>
         <p:nvPicPr>
-          <p:cNvPr id="9" name="図 8">
+          <p:cNvPr id="4" name="図 3">
             <a:extLst>
               <a:ext uri="{FF2B5EF4-FFF2-40B4-BE49-F238E27FC236}">
-                <a16:creationId xmlns:a16="http://schemas.microsoft.com/office/drawing/2014/main" id="{C7149274-4296-156F-8899-32F4AAB383C1}"/>
+                <a16:creationId xmlns:a16="http://schemas.microsoft.com/office/drawing/2014/main" id="{A31FBBF3-1874-0CE1-A809-23258FD76133}"/>
               </a:ext>
             </a:extLst>
           </p:cNvPr>
@@ -6285,8 +6285,8 @@
         </p:blipFill>
         <p:spPr>
           <a:xfrm>
-            <a:off x="6202011" y="1976891"/>
-            <a:ext cx="4335359" cy="4016749"/>
+            <a:off x="6126480" y="1976891"/>
+            <a:ext cx="4301305" cy="4021999"/>
           </a:xfrm>
           <a:prstGeom prst="rect">
             <a:avLst/>
